--- a/slide/L3_sql_injection.pptx
+++ b/slide/L3_sql_injection.pptx
@@ -3116,7 +3116,7 @@
             <a:avLst/>
           </a:prstGeom>
           <a:solidFill>
-            <a:srgbClr val="0F2D52"/>
+            <a:srgbClr val="081B33"/>
           </a:solidFill>
           <a:ln>
             <a:noFill/>
@@ -3152,8 +3152,8 @@
         </p:nvSpPr>
         <p:spPr>
           <a:xfrm>
-            <a:off x="0" y="914400"/>
-            <a:ext cx="365760" cy="2286000"/>
+            <a:off x="0" y="0"/>
+            <a:ext cx="12191695" cy="137160"/>
           </a:xfrm>
           <a:prstGeom prst="rect">
             <a:avLst/>
@@ -3189,14 +3189,186 @@
       </p:sp>
       <p:sp>
         <p:nvSpPr>
-          <p:cNvPr id="4" name="TextBox 3"/>
+          <p:cNvPr id="4" name="Oval 3"/>
+          <p:cNvSpPr/>
+          <p:nvPr/>
+        </p:nvSpPr>
+        <p:spPr>
+          <a:xfrm>
+            <a:off x="8686800" y="-914400"/>
+            <a:ext cx="2743200" cy="2743200"/>
+          </a:xfrm>
+          <a:prstGeom prst="ellipse">
+            <a:avLst/>
+          </a:prstGeom>
+          <a:noFill/>
+          <a:ln w="25400">
+            <a:solidFill>
+              <a:srgbClr val="00A0B0"/>
+            </a:solidFill>
+          </a:ln>
+        </p:spPr>
+        <p:style>
+          <a:lnRef idx="1">
+            <a:schemeClr val="accent1"/>
+          </a:lnRef>
+          <a:fillRef idx="3">
+            <a:schemeClr val="accent1"/>
+          </a:fillRef>
+          <a:effectRef idx="2">
+            <a:schemeClr val="accent1"/>
+          </a:effectRef>
+          <a:fontRef idx="minor">
+            <a:schemeClr val="lt1"/>
+          </a:fontRef>
+        </p:style>
+        <p:txBody>
+          <a:bodyPr rtlCol="0" anchor="ctr"/>
+          <a:lstStyle/>
+          <a:p>
+            <a:pPr algn="ctr"/>
+          </a:p>
+        </p:txBody>
+      </p:sp>
+      <p:sp>
+        <p:nvSpPr>
+          <p:cNvPr id="5" name="Oval 4"/>
+          <p:cNvSpPr/>
+          <p:nvPr/>
+        </p:nvSpPr>
+        <p:spPr>
+          <a:xfrm>
+            <a:off x="10515600" y="1371600"/>
+            <a:ext cx="1828800" cy="1828800"/>
+          </a:xfrm>
+          <a:prstGeom prst="ellipse">
+            <a:avLst/>
+          </a:prstGeom>
+          <a:noFill/>
+          <a:ln w="25400">
+            <a:solidFill>
+              <a:srgbClr val="00A0B0"/>
+            </a:solidFill>
+          </a:ln>
+        </p:spPr>
+        <p:style>
+          <a:lnRef idx="1">
+            <a:schemeClr val="accent1"/>
+          </a:lnRef>
+          <a:fillRef idx="3">
+            <a:schemeClr val="accent1"/>
+          </a:fillRef>
+          <a:effectRef idx="2">
+            <a:schemeClr val="accent1"/>
+          </a:effectRef>
+          <a:fontRef idx="minor">
+            <a:schemeClr val="lt1"/>
+          </a:fontRef>
+        </p:style>
+        <p:txBody>
+          <a:bodyPr rtlCol="0" anchor="ctr"/>
+          <a:lstStyle/>
+          <a:p>
+            <a:pPr algn="ctr"/>
+          </a:p>
+        </p:txBody>
+      </p:sp>
+      <p:sp>
+        <p:nvSpPr>
+          <p:cNvPr id="6" name="Oval 5"/>
+          <p:cNvSpPr/>
+          <p:nvPr/>
+        </p:nvSpPr>
+        <p:spPr>
+          <a:xfrm>
+            <a:off x="8458200" y="3429000"/>
+            <a:ext cx="2286000" cy="2286000"/>
+          </a:xfrm>
+          <a:prstGeom prst="ellipse">
+            <a:avLst/>
+          </a:prstGeom>
+          <a:noFill/>
+          <a:ln w="25400">
+            <a:solidFill>
+              <a:srgbClr val="00A0B0"/>
+            </a:solidFill>
+          </a:ln>
+        </p:spPr>
+        <p:style>
+          <a:lnRef idx="1">
+            <a:schemeClr val="accent1"/>
+          </a:lnRef>
+          <a:fillRef idx="3">
+            <a:schemeClr val="accent1"/>
+          </a:fillRef>
+          <a:effectRef idx="2">
+            <a:schemeClr val="accent1"/>
+          </a:effectRef>
+          <a:fontRef idx="minor">
+            <a:schemeClr val="lt1"/>
+          </a:fontRef>
+        </p:style>
+        <p:txBody>
+          <a:bodyPr rtlCol="0" anchor="ctr"/>
+          <a:lstStyle/>
+          <a:p>
+            <a:pPr algn="ctr"/>
+          </a:p>
+        </p:txBody>
+      </p:sp>
+      <p:sp>
+        <p:nvSpPr>
+          <p:cNvPr id="7" name="Rectangle 6"/>
+          <p:cNvSpPr/>
+          <p:nvPr/>
+        </p:nvSpPr>
+        <p:spPr>
+          <a:xfrm>
+            <a:off x="0" y="2286000"/>
+            <a:ext cx="228600" cy="2743200"/>
+          </a:xfrm>
+          <a:prstGeom prst="rect">
+            <a:avLst/>
+          </a:prstGeom>
+          <a:solidFill>
+            <a:srgbClr val="00A0B0"/>
+          </a:solidFill>
+          <a:ln>
+            <a:noFill/>
+          </a:ln>
+        </p:spPr>
+        <p:style>
+          <a:lnRef idx="1">
+            <a:schemeClr val="accent1"/>
+          </a:lnRef>
+          <a:fillRef idx="3">
+            <a:schemeClr val="accent1"/>
+          </a:fillRef>
+          <a:effectRef idx="2">
+            <a:schemeClr val="accent1"/>
+          </a:effectRef>
+          <a:fontRef idx="minor">
+            <a:schemeClr val="lt1"/>
+          </a:fontRef>
+        </p:style>
+        <p:txBody>
+          <a:bodyPr rtlCol="0" anchor="ctr"/>
+          <a:lstStyle/>
+          <a:p>
+            <a:pPr algn="ctr"/>
+          </a:p>
+        </p:txBody>
+      </p:sp>
+      <p:sp>
+        <p:nvSpPr>
+          <p:cNvPr id="8" name="TextBox 7"/>
           <p:cNvSpPr txBox="1"/>
           <p:nvPr/>
         </p:nvSpPr>
         <p:spPr>
           <a:xfrm>
-            <a:off x="731520" y="914400"/>
-            <a:ext cx="10058400" cy="548640"/>
+            <a:off x="548640" y="2286000"/>
+            <a:ext cx="7315200" cy="457200"/>
           </a:xfrm>
           <a:prstGeom prst="rect">
             <a:avLst/>
@@ -3211,7 +3383,7 @@
           <a:p>
             <a:pPr algn="l"/>
             <a:r>
-              <a:rPr sz="1800" b="1" i="0">
+              <a:rPr sz="1600" b="1" i="0">
                 <a:solidFill>
                   <a:srgbClr val="00A0B0"/>
                 </a:solidFill>
@@ -3224,14 +3396,14 @@
       </p:sp>
       <p:sp>
         <p:nvSpPr>
-          <p:cNvPr id="5" name="TextBox 4"/>
+          <p:cNvPr id="9" name="TextBox 8"/>
           <p:cNvSpPr txBox="1"/>
           <p:nvPr/>
         </p:nvSpPr>
         <p:spPr>
           <a:xfrm>
-            <a:off x="731520" y="1554480"/>
-            <a:ext cx="10058400" cy="1828800"/>
+            <a:off x="548640" y="2743200"/>
+            <a:ext cx="10515600" cy="2011680"/>
           </a:xfrm>
           <a:prstGeom prst="rect">
             <a:avLst/>
@@ -3246,7 +3418,7 @@
           <a:p>
             <a:pPr algn="l"/>
             <a:r>
-              <a:rPr sz="5400" b="1" i="0">
+              <a:rPr sz="5600" b="1" i="0">
                 <a:solidFill>
                   <a:srgbClr val="FFFFFF"/>
                 </a:solidFill>
@@ -3259,14 +3431,14 @@
       </p:sp>
       <p:sp>
         <p:nvSpPr>
-          <p:cNvPr id="6" name="TextBox 5"/>
+          <p:cNvPr id="10" name="TextBox 9"/>
           <p:cNvSpPr txBox="1"/>
           <p:nvPr/>
         </p:nvSpPr>
         <p:spPr>
           <a:xfrm>
-            <a:off x="731520" y="3566160"/>
-            <a:ext cx="10058400" cy="1097280"/>
+            <a:off x="548640" y="4572000"/>
+            <a:ext cx="10058400" cy="914400"/>
           </a:xfrm>
           <a:prstGeom prst="rect">
             <a:avLst/>
@@ -3281,27 +3453,107 @@
           <a:p>
             <a:pPr algn="l"/>
             <a:r>
-              <a:rPr sz="2400" b="0" i="1">
+              <a:rPr sz="2200" b="0" i="1">
+                <a:solidFill>
+                  <a:srgbClr val="6FD8E0"/>
+                </a:solidFill>
+                <a:latin typeface="Calibri"/>
+              </a:rPr>
+              <a:t>La vulnerabilità #1 dal 2003. Capirla e correggerla.</a:t>
+            </a:r>
+          </a:p>
+        </p:txBody>
+      </p:sp>
+      <p:sp>
+        <p:nvSpPr>
+          <p:cNvPr id="11" name="Rounded Rectangle 10"/>
+          <p:cNvSpPr/>
+          <p:nvPr/>
+        </p:nvSpPr>
+        <p:spPr>
+          <a:xfrm>
+            <a:off x="548640" y="5669280"/>
+            <a:ext cx="2011680" cy="411480"/>
+          </a:xfrm>
+          <a:prstGeom prst="roundRect">
+            <a:avLst>
+              <a:gd name="adj" fmla="val 8000"/>
+            </a:avLst>
+          </a:prstGeom>
+          <a:solidFill>
+            <a:srgbClr val="00A0B0"/>
+          </a:solidFill>
+          <a:ln>
+            <a:noFill/>
+          </a:ln>
+        </p:spPr>
+        <p:style>
+          <a:lnRef idx="1">
+            <a:schemeClr val="accent1"/>
+          </a:lnRef>
+          <a:fillRef idx="3">
+            <a:schemeClr val="accent1"/>
+          </a:fillRef>
+          <a:effectRef idx="2">
+            <a:schemeClr val="accent1"/>
+          </a:effectRef>
+          <a:fontRef idx="minor">
+            <a:schemeClr val="lt1"/>
+          </a:fontRef>
+        </p:style>
+        <p:txBody>
+          <a:bodyPr rtlCol="0" anchor="ctr"/>
+          <a:lstStyle/>
+          <a:p>
+            <a:pPr algn="ctr"/>
+          </a:p>
+        </p:txBody>
+      </p:sp>
+      <p:sp>
+        <p:nvSpPr>
+          <p:cNvPr id="12" name="TextBox 11"/>
+          <p:cNvSpPr txBox="1"/>
+          <p:nvPr/>
+        </p:nvSpPr>
+        <p:spPr>
+          <a:xfrm>
+            <a:off x="548640" y="5669280"/>
+            <a:ext cx="2011680" cy="411480"/>
+          </a:xfrm>
+          <a:prstGeom prst="rect">
+            <a:avLst/>
+          </a:prstGeom>
+          <a:noFill/>
+        </p:spPr>
+        <p:txBody>
+          <a:bodyPr wrap="square" lIns="45720" rIns="45720" tIns="18288" bIns="18288" anchor="ctr">
+            <a:spAutoFit/>
+          </a:bodyPr>
+          <a:lstStyle/>
+          <a:p>
+            <a:pPr algn="ctr"/>
+            <a:r>
+              <a:rPr sz="1200" b="1" i="0">
                 <a:solidFill>
                   <a:srgbClr val="FFFFFF"/>
                 </a:solidFill>
                 <a:latin typeface="Calibri"/>
               </a:rPr>
-              <a:t>La vulnerabilità #1 dal 2003. Capirla e correggerla.</a:t>
-            </a:r>
-          </a:p>
-        </p:txBody>
-      </p:sp>
-      <p:sp>
-        <p:nvSpPr>
-          <p:cNvPr id="7" name="TextBox 6"/>
+              <a:t>⏱  Lezione 3 · 2 ore</a:t>
+            </a:r>
+          </a:p>
+        </p:txBody>
+      </p:sp>
+      <p:sp>
+        <p:nvSpPr>
+          <p:cNvPr id="13" name="TextBox 12"/>
           <p:cNvSpPr txBox="1"/>
           <p:nvPr/>
         </p:nvSpPr>
         <p:spPr>
           <a:xfrm>
-            <a:off x="731520" y="5029200"/>
-            <a:ext cx="10058400" cy="457200"/>
+            <a:off x="548640" y="6263640"/>
+            <a:ext cx="10972800" cy="365760"/>
           </a:xfrm>
           <a:prstGeom prst="rect">
             <a:avLst/>
@@ -3316,83 +3568,13 @@
           <a:p>
             <a:pPr algn="l"/>
             <a:r>
-              <a:rPr sz="1800" b="1" i="0">
-                <a:solidFill>
-                  <a:srgbClr val="00A0B0"/>
-                </a:solidFill>
-                <a:latin typeface="Calibri"/>
-              </a:rPr>
-              <a:t>⏱  Lezione 3 · 2 ore</a:t>
-            </a:r>
-          </a:p>
-        </p:txBody>
-      </p:sp>
-      <p:sp>
-        <p:nvSpPr>
-          <p:cNvPr id="8" name="TextBox 7"/>
-          <p:cNvSpPr txBox="1"/>
-          <p:nvPr/>
-        </p:nvSpPr>
-        <p:spPr>
-          <a:xfrm>
-            <a:off x="731520" y="5943600"/>
-            <a:ext cx="10058400" cy="457200"/>
-          </a:xfrm>
-          <a:prstGeom prst="rect">
-            <a:avLst/>
-          </a:prstGeom>
-          <a:noFill/>
-        </p:spPr>
-        <p:txBody>
-          <a:bodyPr wrap="square" lIns="45720" rIns="45720" tIns="18288" bIns="18288" anchor="t">
-            <a:spAutoFit/>
-          </a:bodyPr>
-          <a:lstStyle/>
-          <a:p>
-            <a:pPr algn="l"/>
-            <a:r>
-              <a:rPr sz="1200" b="0" i="0">
-                <a:solidFill>
-                  <a:srgbClr val="FFFFFF"/>
-                </a:solidFill>
-                <a:latin typeface="Calibri"/>
-              </a:rPr>
-              <a:t>Corso IFTS STEM · Specialista nelle Tecniche di Evoluzione e Manutenzione del Software</a:t>
-            </a:r>
-          </a:p>
-        </p:txBody>
-      </p:sp>
-      <p:sp>
-        <p:nvSpPr>
-          <p:cNvPr id="9" name="TextBox 8"/>
-          <p:cNvSpPr txBox="1"/>
-          <p:nvPr/>
-        </p:nvSpPr>
-        <p:spPr>
-          <a:xfrm>
-            <a:off x="731520" y="6263640"/>
-            <a:ext cx="10058400" cy="365760"/>
-          </a:xfrm>
-          <a:prstGeom prst="rect">
-            <a:avLst/>
-          </a:prstGeom>
-          <a:noFill/>
-        </p:spPr>
-        <p:txBody>
-          <a:bodyPr wrap="square" lIns="45720" rIns="45720" tIns="18288" bIns="18288" anchor="t">
-            <a:spAutoFit/>
-          </a:bodyPr>
-          <a:lstStyle/>
-          <a:p>
-            <a:pPr algn="l"/>
-            <a:r>
-              <a:rPr sz="1100" b="0" i="1">
-                <a:solidFill>
-                  <a:srgbClr val="FFFFFF"/>
-                </a:solidFill>
-                <a:latin typeface="Calibri"/>
-              </a:rPr>
-              <a:t>Ing. Alessandro Manneschi · Anno formativo 2024/2025</a:t>
+              <a:rPr sz="1000" b="0" i="0">
+                <a:solidFill>
+                  <a:srgbClr val="CBD0D8"/>
+                </a:solidFill>
+                <a:latin typeface="Calibri"/>
+              </a:rPr>
+              <a:t>Corso IFTS STEM · Ing. Alessandro Manneschi · 2024/2025</a:t>
             </a:r>
           </a:p>
         </p:txBody>
@@ -3488,1401 +3670,6 @@
                 </a:solidFill>
                 <a:latin typeface="Calibri"/>
               </a:rPr>
-              <a:t>Filtrare gli apici NON funziona</a:t>
-            </a:r>
-          </a:p>
-        </p:txBody>
-      </p:sp>
-      <p:sp>
-        <p:nvSpPr>
-          <p:cNvPr id="4" name="Rectangle 3"/>
-          <p:cNvSpPr/>
-          <p:nvPr/>
-        </p:nvSpPr>
-        <p:spPr>
-          <a:xfrm>
-            <a:off x="457200" y="1097280"/>
-            <a:ext cx="5486400" cy="640080"/>
-          </a:xfrm>
-          <a:prstGeom prst="rect">
-            <a:avLst/>
-          </a:prstGeom>
-          <a:solidFill>
-            <a:srgbClr val="E63946"/>
-          </a:solidFill>
-          <a:ln>
-            <a:noFill/>
-          </a:ln>
-        </p:spPr>
-        <p:style>
-          <a:lnRef idx="1">
-            <a:schemeClr val="accent1"/>
-          </a:lnRef>
-          <a:fillRef idx="3">
-            <a:schemeClr val="accent1"/>
-          </a:fillRef>
-          <a:effectRef idx="2">
-            <a:schemeClr val="accent1"/>
-          </a:effectRef>
-          <a:fontRef idx="minor">
-            <a:schemeClr val="lt1"/>
-          </a:fontRef>
-        </p:style>
-        <p:txBody>
-          <a:bodyPr rtlCol="0" anchor="ctr"/>
-          <a:lstStyle/>
-          <a:p>
-            <a:pPr algn="ctr"/>
-          </a:p>
-        </p:txBody>
-      </p:sp>
-      <p:sp>
-        <p:nvSpPr>
-          <p:cNvPr id="5" name="TextBox 4"/>
-          <p:cNvSpPr txBox="1"/>
-          <p:nvPr/>
-        </p:nvSpPr>
-        <p:spPr>
-          <a:xfrm>
-            <a:off x="457200" y="1097280"/>
-            <a:ext cx="5486400" cy="640080"/>
-          </a:xfrm>
-          <a:prstGeom prst="rect">
-            <a:avLst/>
-          </a:prstGeom>
-          <a:noFill/>
-        </p:spPr>
-        <p:txBody>
-          <a:bodyPr wrap="square" lIns="45720" rIns="45720" tIns="18288" bIns="18288" anchor="ctr">
-            <a:spAutoFit/>
-          </a:bodyPr>
-          <a:lstStyle/>
-          <a:p>
-            <a:pPr algn="ctr"/>
-            <a:r>
-              <a:rPr sz="1800" b="1" i="0">
-                <a:solidFill>
-                  <a:srgbClr val="FFFFFF"/>
-                </a:solidFill>
-                <a:latin typeface="Calibri"/>
-              </a:rPr>
-              <a:t>Tentativo ingenuo</a:t>
-            </a:r>
-          </a:p>
-        </p:txBody>
-      </p:sp>
-      <p:sp>
-        <p:nvSpPr>
-          <p:cNvPr id="6" name="Rectangle 5"/>
-          <p:cNvSpPr/>
-          <p:nvPr/>
-        </p:nvSpPr>
-        <p:spPr>
-          <a:xfrm>
-            <a:off x="457200" y="1737360"/>
-            <a:ext cx="5486400" cy="4937760"/>
-          </a:xfrm>
-          <a:prstGeom prst="rect">
-            <a:avLst/>
-          </a:prstGeom>
-          <a:solidFill>
-            <a:srgbClr val="F1F4F8"/>
-          </a:solidFill>
-          <a:ln>
-            <a:solidFill>
-              <a:srgbClr val="E63946"/>
-            </a:solidFill>
-          </a:ln>
-        </p:spPr>
-        <p:style>
-          <a:lnRef idx="1">
-            <a:schemeClr val="accent1"/>
-          </a:lnRef>
-          <a:fillRef idx="3">
-            <a:schemeClr val="accent1"/>
-          </a:fillRef>
-          <a:effectRef idx="2">
-            <a:schemeClr val="accent1"/>
-          </a:effectRef>
-          <a:fontRef idx="minor">
-            <a:schemeClr val="lt1"/>
-          </a:fontRef>
-        </p:style>
-        <p:txBody>
-          <a:bodyPr rtlCol="0" anchor="ctr"/>
-          <a:lstStyle/>
-          <a:p>
-            <a:pPr algn="ctr"/>
-          </a:p>
-        </p:txBody>
-      </p:sp>
-      <p:sp>
-        <p:nvSpPr>
-          <p:cNvPr id="7" name="TextBox 6"/>
-          <p:cNvSpPr txBox="1"/>
-          <p:nvPr/>
-        </p:nvSpPr>
-        <p:spPr>
-          <a:xfrm>
-            <a:off x="640080" y="1874519"/>
-            <a:ext cx="5120640" cy="4937760"/>
-          </a:xfrm>
-          <a:prstGeom prst="rect">
-            <a:avLst/>
-          </a:prstGeom>
-          <a:noFill/>
-        </p:spPr>
-        <p:txBody>
-          <a:bodyPr wrap="square">
-            <a:spAutoFit/>
-          </a:bodyPr>
-          <a:lstStyle/>
-          <a:p>
-            <a:pPr>
-              <a:lnSpc>
-                <a:spcPct val="140000"/>
-              </a:lnSpc>
-            </a:pPr>
-            <a:r>
-              <a:rPr sz="1500" b="1">
-                <a:solidFill>
-                  <a:srgbClr val="00A0B0"/>
-                </a:solidFill>
-                <a:latin typeface="Calibri"/>
-              </a:rPr>
-              <a:t>▸  </a:t>
-            </a:r>
-            <a:r>
-              <a:rPr sz="1500">
-                <a:solidFill>
-                  <a:srgbClr val="1A1A2E"/>
-                </a:solidFill>
-                <a:latin typeface="Calibri"/>
-              </a:rPr>
-              <a:t>s = s.replace("'", "")</a:t>
-            </a:r>
-          </a:p>
-          <a:p>
-            <a:pPr>
-              <a:lnSpc>
-                <a:spcPct val="140000"/>
-              </a:lnSpc>
-            </a:pPr>
-            <a:r>
-              <a:rPr sz="1500" b="1">
-                <a:solidFill>
-                  <a:srgbClr val="00A0B0"/>
-                </a:solidFill>
-                <a:latin typeface="Calibri"/>
-              </a:rPr>
-              <a:t>▸  </a:t>
-            </a:r>
-            <a:r>
-              <a:rPr sz="1500">
-                <a:solidFill>
-                  <a:srgbClr val="1A1A2E"/>
-                </a:solidFill>
-                <a:latin typeface="Calibri"/>
-              </a:rPr>
-              <a:t>Sembra di essere protetti...</a:t>
-            </a:r>
-          </a:p>
-          <a:p>
-            <a:pPr>
-              <a:lnSpc>
-                <a:spcPct val="140000"/>
-              </a:lnSpc>
-            </a:pPr>
-            <a:r>
-              <a:rPr sz="1500" b="1">
-                <a:solidFill>
-                  <a:srgbClr val="00A0B0"/>
-                </a:solidFill>
-                <a:latin typeface="Calibri"/>
-              </a:rPr>
-              <a:t>▸  </a:t>
-            </a:r>
-            <a:r>
-              <a:rPr sz="1500">
-                <a:solidFill>
-                  <a:srgbClr val="1A1A2E"/>
-                </a:solidFill>
-                <a:latin typeface="Calibri"/>
-              </a:rPr>
-              <a:t>...ma:</a:t>
-            </a:r>
-          </a:p>
-          <a:p>
-            <a:pPr>
-              <a:lnSpc>
-                <a:spcPct val="140000"/>
-              </a:lnSpc>
-            </a:pPr>
-            <a:r>
-              <a:rPr sz="1500" b="1">
-                <a:solidFill>
-                  <a:srgbClr val="00A0B0"/>
-                </a:solidFill>
-                <a:latin typeface="Calibri"/>
-              </a:rPr>
-              <a:t>▸  </a:t>
-            </a:r>
-            <a:r>
-              <a:rPr sz="1500">
-                <a:solidFill>
-                  <a:srgbClr val="1A1A2E"/>
-                </a:solidFill>
-                <a:latin typeface="Calibri"/>
-              </a:rPr>
-              <a:t>%27 (URL encoded)</a:t>
-            </a:r>
-          </a:p>
-          <a:p>
-            <a:pPr>
-              <a:lnSpc>
-                <a:spcPct val="140000"/>
-              </a:lnSpc>
-            </a:pPr>
-            <a:r>
-              <a:rPr sz="1500" b="1">
-                <a:solidFill>
-                  <a:srgbClr val="00A0B0"/>
-                </a:solidFill>
-                <a:latin typeface="Calibri"/>
-              </a:rPr>
-              <a:t>▸  </a:t>
-            </a:r>
-            <a:r>
-              <a:rPr sz="1500">
-                <a:solidFill>
-                  <a:srgbClr val="1A1A2E"/>
-                </a:solidFill>
-                <a:latin typeface="Calibri"/>
-              </a:rPr>
-              <a:t>\' (escape)</a:t>
-            </a:r>
-          </a:p>
-          <a:p>
-            <a:pPr>
-              <a:lnSpc>
-                <a:spcPct val="140000"/>
-              </a:lnSpc>
-            </a:pPr>
-            <a:r>
-              <a:rPr sz="1500" b="1">
-                <a:solidFill>
-                  <a:srgbClr val="00A0B0"/>
-                </a:solidFill>
-                <a:latin typeface="Calibri"/>
-              </a:rPr>
-              <a:t>▸  </a:t>
-            </a:r>
-            <a:r>
-              <a:rPr sz="1500">
-                <a:solidFill>
-                  <a:srgbClr val="1A1A2E"/>
-                </a:solidFill>
-                <a:latin typeface="Calibri"/>
-              </a:rPr>
-              <a:t>Doppi apici</a:t>
-            </a:r>
-          </a:p>
-          <a:p>
-            <a:pPr>
-              <a:lnSpc>
-                <a:spcPct val="140000"/>
-              </a:lnSpc>
-            </a:pPr>
-            <a:r>
-              <a:rPr sz="1500" b="1">
-                <a:solidFill>
-                  <a:srgbClr val="00A0B0"/>
-                </a:solidFill>
-                <a:latin typeface="Calibri"/>
-              </a:rPr>
-              <a:t>▸  </a:t>
-            </a:r>
-            <a:r>
-              <a:rPr sz="1500">
-                <a:solidFill>
-                  <a:srgbClr val="1A1A2E"/>
-                </a:solidFill>
-                <a:latin typeface="Calibri"/>
-              </a:rPr>
-              <a:t>Unicode lookalike (ʼ)</a:t>
-            </a:r>
-          </a:p>
-          <a:p>
-            <a:pPr>
-              <a:lnSpc>
-                <a:spcPct val="140000"/>
-              </a:lnSpc>
-            </a:pPr>
-            <a:r>
-              <a:rPr sz="1500" b="1">
-                <a:solidFill>
-                  <a:srgbClr val="00A0B0"/>
-                </a:solidFill>
-                <a:latin typeface="Calibri"/>
-              </a:rPr>
-              <a:t>▸  </a:t>
-            </a:r>
-            <a:r>
-              <a:rPr sz="1500">
-                <a:solidFill>
-                  <a:srgbClr val="1A1A2E"/>
-                </a:solidFill>
-                <a:latin typeface="Calibri"/>
-              </a:rPr>
-              <a:t>Injection numerica (1 OR 1=1)</a:t>
-            </a:r>
-          </a:p>
-        </p:txBody>
-      </p:sp>
-      <p:sp>
-        <p:nvSpPr>
-          <p:cNvPr id="8" name="Rectangle 7"/>
-          <p:cNvSpPr/>
-          <p:nvPr/>
-        </p:nvSpPr>
-        <p:spPr>
-          <a:xfrm>
-            <a:off x="6217920" y="1097280"/>
-            <a:ext cx="5486400" cy="640080"/>
-          </a:xfrm>
-          <a:prstGeom prst="rect">
-            <a:avLst/>
-          </a:prstGeom>
-          <a:solidFill>
-            <a:srgbClr val="06A77D"/>
-          </a:solidFill>
-          <a:ln>
-            <a:noFill/>
-          </a:ln>
-        </p:spPr>
-        <p:style>
-          <a:lnRef idx="1">
-            <a:schemeClr val="accent1"/>
-          </a:lnRef>
-          <a:fillRef idx="3">
-            <a:schemeClr val="accent1"/>
-          </a:fillRef>
-          <a:effectRef idx="2">
-            <a:schemeClr val="accent1"/>
-          </a:effectRef>
-          <a:fontRef idx="minor">
-            <a:schemeClr val="lt1"/>
-          </a:fontRef>
-        </p:style>
-        <p:txBody>
-          <a:bodyPr rtlCol="0" anchor="ctr"/>
-          <a:lstStyle/>
-          <a:p>
-            <a:pPr algn="ctr"/>
-          </a:p>
-        </p:txBody>
-      </p:sp>
-      <p:sp>
-        <p:nvSpPr>
-          <p:cNvPr id="9" name="TextBox 8"/>
-          <p:cNvSpPr txBox="1"/>
-          <p:nvPr/>
-        </p:nvSpPr>
-        <p:spPr>
-          <a:xfrm>
-            <a:off x="6217920" y="1097280"/>
-            <a:ext cx="5486400" cy="640080"/>
-          </a:xfrm>
-          <a:prstGeom prst="rect">
-            <a:avLst/>
-          </a:prstGeom>
-          <a:noFill/>
-        </p:spPr>
-        <p:txBody>
-          <a:bodyPr wrap="square" lIns="45720" rIns="45720" tIns="18288" bIns="18288" anchor="ctr">
-            <a:spAutoFit/>
-          </a:bodyPr>
-          <a:lstStyle/>
-          <a:p>
-            <a:pPr algn="ctr"/>
-            <a:r>
-              <a:rPr sz="1800" b="1" i="0">
-                <a:solidFill>
-                  <a:srgbClr val="FFFFFF"/>
-                </a:solidFill>
-                <a:latin typeface="Calibri"/>
-              </a:rPr>
-              <a:t>Soluzione corretta</a:t>
-            </a:r>
-          </a:p>
-        </p:txBody>
-      </p:sp>
-      <p:sp>
-        <p:nvSpPr>
-          <p:cNvPr id="10" name="Rectangle 9"/>
-          <p:cNvSpPr/>
-          <p:nvPr/>
-        </p:nvSpPr>
-        <p:spPr>
-          <a:xfrm>
-            <a:off x="6217920" y="1737360"/>
-            <a:ext cx="5486400" cy="4937760"/>
-          </a:xfrm>
-          <a:prstGeom prst="rect">
-            <a:avLst/>
-          </a:prstGeom>
-          <a:solidFill>
-            <a:srgbClr val="F1F4F8"/>
-          </a:solidFill>
-          <a:ln>
-            <a:solidFill>
-              <a:srgbClr val="06A77D"/>
-            </a:solidFill>
-          </a:ln>
-        </p:spPr>
-        <p:style>
-          <a:lnRef idx="1">
-            <a:schemeClr val="accent1"/>
-          </a:lnRef>
-          <a:fillRef idx="3">
-            <a:schemeClr val="accent1"/>
-          </a:fillRef>
-          <a:effectRef idx="2">
-            <a:schemeClr val="accent1"/>
-          </a:effectRef>
-          <a:fontRef idx="minor">
-            <a:schemeClr val="lt1"/>
-          </a:fontRef>
-        </p:style>
-        <p:txBody>
-          <a:bodyPr rtlCol="0" anchor="ctr"/>
-          <a:lstStyle/>
-          <a:p>
-            <a:pPr algn="ctr"/>
-          </a:p>
-        </p:txBody>
-      </p:sp>
-      <p:sp>
-        <p:nvSpPr>
-          <p:cNvPr id="11" name="TextBox 10"/>
-          <p:cNvSpPr txBox="1"/>
-          <p:nvPr/>
-        </p:nvSpPr>
-        <p:spPr>
-          <a:xfrm>
-            <a:off x="6400800" y="1874519"/>
-            <a:ext cx="5120640" cy="4937760"/>
-          </a:xfrm>
-          <a:prstGeom prst="rect">
-            <a:avLst/>
-          </a:prstGeom>
-          <a:noFill/>
-        </p:spPr>
-        <p:txBody>
-          <a:bodyPr wrap="square">
-            <a:spAutoFit/>
-          </a:bodyPr>
-          <a:lstStyle/>
-          <a:p>
-            <a:pPr>
-              <a:lnSpc>
-                <a:spcPct val="140000"/>
-              </a:lnSpc>
-            </a:pPr>
-            <a:r>
-              <a:rPr sz="1500" b="1">
-                <a:solidFill>
-                  <a:srgbClr val="00A0B0"/>
-                </a:solidFill>
-                <a:latin typeface="Calibri"/>
-              </a:rPr>
-              <a:t>▸  </a:t>
-            </a:r>
-            <a:r>
-              <a:rPr sz="1500">
-                <a:solidFill>
-                  <a:srgbClr val="1A1A2E"/>
-                </a:solidFill>
-                <a:latin typeface="Calibri"/>
-              </a:rPr>
-              <a:t>Query parametrizzate</a:t>
-            </a:r>
-          </a:p>
-          <a:p>
-            <a:pPr>
-              <a:lnSpc>
-                <a:spcPct val="140000"/>
-              </a:lnSpc>
-            </a:pPr>
-            <a:r>
-              <a:rPr sz="1500" b="1">
-                <a:solidFill>
-                  <a:srgbClr val="00A0B0"/>
-                </a:solidFill>
-                <a:latin typeface="Calibri"/>
-              </a:rPr>
-              <a:t>▸  </a:t>
-            </a:r>
-            <a:r>
-              <a:rPr sz="1500">
-                <a:solidFill>
-                  <a:srgbClr val="1A1A2E"/>
-                </a:solidFill>
-                <a:latin typeface="Calibri"/>
-              </a:rPr>
-              <a:t>Separi STRUTTURA da DATI</a:t>
-            </a:r>
-          </a:p>
-          <a:p>
-            <a:pPr>
-              <a:lnSpc>
-                <a:spcPct val="140000"/>
-              </a:lnSpc>
-            </a:pPr>
-            <a:r>
-              <a:rPr sz="1500" b="1">
-                <a:solidFill>
-                  <a:srgbClr val="00A0B0"/>
-                </a:solidFill>
-                <a:latin typeface="Calibri"/>
-              </a:rPr>
-              <a:t>▸  </a:t>
-            </a:r>
-            <a:r>
-              <a:rPr sz="1500">
-                <a:solidFill>
-                  <a:srgbClr val="1A1A2E"/>
-                </a:solidFill>
-                <a:latin typeface="Calibri"/>
-              </a:rPr>
-              <a:t>Il driver tratta i dati come VALORI</a:t>
-            </a:r>
-          </a:p>
-          <a:p>
-            <a:pPr>
-              <a:lnSpc>
-                <a:spcPct val="140000"/>
-              </a:lnSpc>
-            </a:pPr>
-            <a:r>
-              <a:rPr sz="1500" b="1">
-                <a:solidFill>
-                  <a:srgbClr val="00A0B0"/>
-                </a:solidFill>
-                <a:latin typeface="Calibri"/>
-              </a:rPr>
-              <a:t>▸  </a:t>
-            </a:r>
-            <a:r>
-              <a:rPr sz="1500">
-                <a:solidFill>
-                  <a:srgbClr val="1A1A2E"/>
-                </a:solidFill>
-                <a:latin typeface="Calibri"/>
-              </a:rPr>
-              <a:t>Anche con qualunque input,</a:t>
-            </a:r>
-          </a:p>
-          <a:p>
-            <a:pPr>
-              <a:lnSpc>
-                <a:spcPct val="140000"/>
-              </a:lnSpc>
-            </a:pPr>
-            <a:r>
-              <a:rPr sz="1500" b="1">
-                <a:solidFill>
-                  <a:srgbClr val="00A0B0"/>
-                </a:solidFill>
-                <a:latin typeface="Calibri"/>
-              </a:rPr>
-              <a:t>▸  </a:t>
-            </a:r>
-            <a:r>
-              <a:rPr sz="1500">
-                <a:solidFill>
-                  <a:srgbClr val="1A1A2E"/>
-                </a:solidFill>
-                <a:latin typeface="Calibri"/>
-              </a:rPr>
-              <a:t>non viene mai interpretato come SQL</a:t>
-            </a:r>
-          </a:p>
-          <a:p>
-            <a:pPr>
-              <a:lnSpc>
-                <a:spcPct val="140000"/>
-              </a:lnSpc>
-            </a:pPr>
-            <a:r>
-              <a:rPr sz="1500" b="1">
-                <a:solidFill>
-                  <a:srgbClr val="00A0B0"/>
-                </a:solidFill>
-                <a:latin typeface="Calibri"/>
-              </a:rPr>
-              <a:t>▸  </a:t>
-            </a:r>
-            <a:r>
-              <a:rPr sz="1500">
-                <a:solidFill>
-                  <a:srgbClr val="1A1A2E"/>
-                </a:solidFill>
-                <a:latin typeface="Calibri"/>
-              </a:rPr>
-              <a:t/>
-            </a:r>
-          </a:p>
-          <a:p>
-            <a:pPr>
-              <a:lnSpc>
-                <a:spcPct val="140000"/>
-              </a:lnSpc>
-            </a:pPr>
-            <a:r>
-              <a:rPr sz="1500" b="1">
-                <a:solidFill>
-                  <a:srgbClr val="00A0B0"/>
-                </a:solidFill>
-                <a:latin typeface="Calibri"/>
-              </a:rPr>
-              <a:t>▸  </a:t>
-            </a:r>
-            <a:r>
-              <a:rPr sz="1500">
-                <a:solidFill>
-                  <a:srgbClr val="1A1A2E"/>
-                </a:solidFill>
-                <a:latin typeface="Calibri"/>
-              </a:rPr>
-              <a:t>Whitelist &gt; Blacklist</a:t>
-            </a:r>
-          </a:p>
-          <a:p>
-            <a:pPr>
-              <a:lnSpc>
-                <a:spcPct val="140000"/>
-              </a:lnSpc>
-            </a:pPr>
-            <a:r>
-              <a:rPr sz="1500" b="1">
-                <a:solidFill>
-                  <a:srgbClr val="00A0B0"/>
-                </a:solidFill>
-                <a:latin typeface="Calibri"/>
-              </a:rPr>
-              <a:t>▸  </a:t>
-            </a:r>
-            <a:r>
-              <a:rPr sz="1500">
-                <a:solidFill>
-                  <a:srgbClr val="1A1A2E"/>
-                </a:solidFill>
-                <a:latin typeface="Calibri"/>
-              </a:rPr>
-              <a:t>(sempre)</a:t>
-            </a:r>
-          </a:p>
-        </p:txBody>
-      </p:sp>
-      <p:cxnSp>
-        <p:nvCxnSpPr>
-          <p:cNvPr id="12" name="Connector 11"/>
-          <p:cNvCxnSpPr/>
-          <p:nvPr/>
-        </p:nvCxnSpPr>
-        <p:spPr>
-          <a:xfrm>
-            <a:off x="457200" y="6446520"/>
-            <a:ext cx="11274552" cy="0"/>
-          </a:xfrm>
-          <a:prstGeom prst="line">
-            <a:avLst/>
-          </a:prstGeom>
-          <a:ln w="19050">
-            <a:solidFill>
-              <a:srgbClr val="00A0B0"/>
-            </a:solidFill>
-          </a:ln>
-        </p:spPr>
-        <p:style>
-          <a:lnRef idx="2">
-            <a:schemeClr val="accent1"/>
-          </a:lnRef>
-          <a:fillRef idx="0">
-            <a:schemeClr val="accent1"/>
-          </a:fillRef>
-          <a:effectRef idx="1">
-            <a:schemeClr val="accent1"/>
-          </a:effectRef>
-          <a:fontRef idx="minor">
-            <a:schemeClr val="tx1"/>
-          </a:fontRef>
-        </p:style>
-      </p:cxnSp>
-      <p:sp>
-        <p:nvSpPr>
-          <p:cNvPr id="13" name="TextBox 12"/>
-          <p:cNvSpPr txBox="1"/>
-          <p:nvPr/>
-        </p:nvSpPr>
-        <p:spPr>
-          <a:xfrm>
-            <a:off x="457200" y="6473952"/>
-            <a:ext cx="7315200" cy="320040"/>
-          </a:xfrm>
-          <a:prstGeom prst="rect">
-            <a:avLst/>
-          </a:prstGeom>
-          <a:noFill/>
-        </p:spPr>
-        <p:txBody>
-          <a:bodyPr wrap="square" lIns="45720" rIns="45720" tIns="18288" bIns="18288" anchor="t">
-            <a:spAutoFit/>
-          </a:bodyPr>
-          <a:lstStyle/>
-          <a:p>
-            <a:pPr algn="l"/>
-            <a:r>
-              <a:rPr sz="1000" b="0" i="0">
-                <a:solidFill>
-                  <a:srgbClr val="6B7280"/>
-                </a:solidFill>
-                <a:latin typeface="Calibri"/>
-              </a:rPr>
-              <a:t>Secure Coding · Corso IFTS STEM · A. Manneschi</a:t>
-            </a:r>
-          </a:p>
-        </p:txBody>
-      </p:sp>
-      <p:sp>
-        <p:nvSpPr>
-          <p:cNvPr id="14" name="TextBox 13"/>
-          <p:cNvSpPr txBox="1"/>
-          <p:nvPr/>
-        </p:nvSpPr>
-        <p:spPr>
-          <a:xfrm>
-            <a:off x="10515600" y="6473952"/>
-            <a:ext cx="1188720" cy="320040"/>
-          </a:xfrm>
-          <a:prstGeom prst="rect">
-            <a:avLst/>
-          </a:prstGeom>
-          <a:noFill/>
-        </p:spPr>
-        <p:txBody>
-          <a:bodyPr wrap="square" lIns="45720" rIns="45720" tIns="18288" bIns="18288" anchor="t">
-            <a:spAutoFit/>
-          </a:bodyPr>
-          <a:lstStyle/>
-          <a:p>
-            <a:pPr algn="r"/>
-            <a:r>
-              <a:rPr sz="1000" b="1" i="0">
-                <a:solidFill>
-                  <a:srgbClr val="6B7280"/>
-                </a:solidFill>
-                <a:latin typeface="Calibri"/>
-              </a:rPr>
-              <a:t>L3  ·  10/14</a:t>
-            </a:r>
-          </a:p>
-        </p:txBody>
-      </p:sp>
-    </p:spTree>
-  </p:cSld>
-  <p:clrMapOvr>
-    <a:masterClrMapping/>
-  </p:clrMapOvr>
-</p:sld>
-</file>
-
-<file path=ppt/slides/slide11.xml><?xml version="1.0" encoding="utf-8"?>
-<p:sld xmlns:a="http://schemas.openxmlformats.org/drawingml/2006/main" xmlns:p="http://schemas.openxmlformats.org/presentationml/2006/main" xmlns:r="http://schemas.openxmlformats.org/officeDocument/2006/relationships">
-  <p:cSld>
-    <p:spTree>
-      <p:nvGrpSpPr>
-        <p:cNvPr id="1" name=""/>
-        <p:cNvGrpSpPr/>
-        <p:nvPr/>
-      </p:nvGrpSpPr>
-      <p:grpSpPr/>
-      <p:sp>
-        <p:nvSpPr>
-          <p:cNvPr id="2" name="Rectangle 1"/>
-          <p:cNvSpPr/>
-          <p:nvPr/>
-        </p:nvSpPr>
-        <p:spPr>
-          <a:xfrm>
-            <a:off x="0" y="0"/>
-            <a:ext cx="12191695" cy="777240"/>
-          </a:xfrm>
-          <a:prstGeom prst="rect">
-            <a:avLst/>
-          </a:prstGeom>
-          <a:solidFill>
-            <a:srgbClr val="0F2D52"/>
-          </a:solidFill>
-          <a:ln>
-            <a:noFill/>
-          </a:ln>
-        </p:spPr>
-        <p:style>
-          <a:lnRef idx="1">
-            <a:schemeClr val="accent1"/>
-          </a:lnRef>
-          <a:fillRef idx="3">
-            <a:schemeClr val="accent1"/>
-          </a:fillRef>
-          <a:effectRef idx="2">
-            <a:schemeClr val="accent1"/>
-          </a:effectRef>
-          <a:fontRef idx="minor">
-            <a:schemeClr val="lt1"/>
-          </a:fontRef>
-        </p:style>
-        <p:txBody>
-          <a:bodyPr rtlCol="0" anchor="ctr"/>
-          <a:lstStyle/>
-          <a:p>
-            <a:pPr algn="ctr"/>
-          </a:p>
-        </p:txBody>
-      </p:sp>
-      <p:sp>
-        <p:nvSpPr>
-          <p:cNvPr id="3" name="TextBox 2"/>
-          <p:cNvSpPr txBox="1"/>
-          <p:nvPr/>
-        </p:nvSpPr>
-        <p:spPr>
-          <a:xfrm>
-            <a:off x="457200" y="164592"/>
-            <a:ext cx="10058400" cy="502920"/>
-          </a:xfrm>
-          <a:prstGeom prst="rect">
-            <a:avLst/>
-          </a:prstGeom>
-          <a:noFill/>
-        </p:spPr>
-        <p:txBody>
-          <a:bodyPr wrap="square" lIns="45720" rIns="45720" tIns="18288" bIns="18288" anchor="ctr">
-            <a:spAutoFit/>
-          </a:bodyPr>
-          <a:lstStyle/>
-          <a:p>
-            <a:pPr algn="l"/>
-            <a:r>
-              <a:rPr sz="2400" b="1" i="0">
-                <a:solidFill>
-                  <a:srgbClr val="FFFFFF"/>
-                </a:solidFill>
-                <a:latin typeface="Calibri"/>
-              </a:rPr>
-              <a:t>La correzione: query parametrizzate (Python)</a:t>
-            </a:r>
-          </a:p>
-        </p:txBody>
-      </p:sp>
-      <p:sp>
-        <p:nvSpPr>
-          <p:cNvPr id="4" name="Rectangle 3"/>
-          <p:cNvSpPr/>
-          <p:nvPr/>
-        </p:nvSpPr>
-        <p:spPr>
-          <a:xfrm>
-            <a:off x="9875520" y="164592"/>
-            <a:ext cx="2103120" cy="457200"/>
-          </a:xfrm>
-          <a:prstGeom prst="rect">
-            <a:avLst/>
-          </a:prstGeom>
-          <a:solidFill>
-            <a:srgbClr val="06A77D"/>
-          </a:solidFill>
-          <a:ln>
-            <a:noFill/>
-          </a:ln>
-        </p:spPr>
-        <p:style>
-          <a:lnRef idx="1">
-            <a:schemeClr val="accent1"/>
-          </a:lnRef>
-          <a:fillRef idx="3">
-            <a:schemeClr val="accent1"/>
-          </a:fillRef>
-          <a:effectRef idx="2">
-            <a:schemeClr val="accent1"/>
-          </a:effectRef>
-          <a:fontRef idx="minor">
-            <a:schemeClr val="lt1"/>
-          </a:fontRef>
-        </p:style>
-        <p:txBody>
-          <a:bodyPr rtlCol="0" anchor="ctr"/>
-          <a:lstStyle/>
-          <a:p>
-            <a:pPr algn="ctr"/>
-          </a:p>
-        </p:txBody>
-      </p:sp>
-      <p:sp>
-        <p:nvSpPr>
-          <p:cNvPr id="5" name="TextBox 4"/>
-          <p:cNvSpPr txBox="1"/>
-          <p:nvPr/>
-        </p:nvSpPr>
-        <p:spPr>
-          <a:xfrm>
-            <a:off x="9875520" y="182880"/>
-            <a:ext cx="2103120" cy="457200"/>
-          </a:xfrm>
-          <a:prstGeom prst="rect">
-            <a:avLst/>
-          </a:prstGeom>
-          <a:noFill/>
-        </p:spPr>
-        <p:txBody>
-          <a:bodyPr wrap="square" lIns="45720" rIns="45720" tIns="18288" bIns="18288" anchor="ctr">
-            <a:spAutoFit/>
-          </a:bodyPr>
-          <a:lstStyle/>
-          <a:p>
-            <a:pPr algn="ctr"/>
-            <a:r>
-              <a:rPr sz="1200" b="1" i="0">
-                <a:solidFill>
-                  <a:srgbClr val="FFFFFF"/>
-                </a:solidFill>
-                <a:latin typeface="Calibri"/>
-              </a:rPr>
-              <a:t>✅ PYTHON</a:t>
-            </a:r>
-          </a:p>
-        </p:txBody>
-      </p:sp>
-      <p:sp>
-        <p:nvSpPr>
-          <p:cNvPr id="6" name="Rectangle 5"/>
-          <p:cNvSpPr/>
-          <p:nvPr/>
-        </p:nvSpPr>
-        <p:spPr>
-          <a:xfrm>
-            <a:off x="457200" y="1097280"/>
-            <a:ext cx="11247120" cy="4572000"/>
-          </a:xfrm>
-          <a:prstGeom prst="rect">
-            <a:avLst/>
-          </a:prstGeom>
-          <a:solidFill>
-            <a:srgbClr val="F1F4F8"/>
-          </a:solidFill>
-          <a:ln>
-            <a:solidFill>
-              <a:srgbClr val="06A77D"/>
-            </a:solidFill>
-          </a:ln>
-        </p:spPr>
-        <p:style>
-          <a:lnRef idx="1">
-            <a:schemeClr val="accent1"/>
-          </a:lnRef>
-          <a:fillRef idx="3">
-            <a:schemeClr val="accent1"/>
-          </a:fillRef>
-          <a:effectRef idx="2">
-            <a:schemeClr val="accent1"/>
-          </a:effectRef>
-          <a:fontRef idx="minor">
-            <a:schemeClr val="lt1"/>
-          </a:fontRef>
-        </p:style>
-        <p:txBody>
-          <a:bodyPr rtlCol="0" anchor="ctr"/>
-          <a:lstStyle/>
-          <a:p>
-            <a:pPr algn="ctr"/>
-          </a:p>
-        </p:txBody>
-      </p:sp>
-      <p:sp>
-        <p:nvSpPr>
-          <p:cNvPr id="7" name="TextBox 6"/>
-          <p:cNvSpPr txBox="1"/>
-          <p:nvPr/>
-        </p:nvSpPr>
-        <p:spPr>
-          <a:xfrm>
-            <a:off x="640080" y="1280160"/>
-            <a:ext cx="10972800" cy="4206240"/>
-          </a:xfrm>
-          <a:prstGeom prst="rect">
-            <a:avLst/>
-          </a:prstGeom>
-          <a:noFill/>
-        </p:spPr>
-        <p:txBody>
-          <a:bodyPr wrap="square" lIns="45720" rIns="45720" tIns="18288" bIns="18288" anchor="t">
-            <a:spAutoFit/>
-          </a:bodyPr>
-          <a:lstStyle/>
-          <a:p>
-            <a:pPr algn="l"/>
-            <a:r>
-              <a:rPr sz="1400" b="0" i="0">
-                <a:solidFill>
-                  <a:srgbClr val="1A1A2E"/>
-                </a:solidFill>
-                <a:latin typeface="Consolas"/>
-              </a:rPr>
-              <a:t>sql = "SELECT id FROM users WHERE email = ? AND password = ?"</a:t>
-            </a:r>
-          </a:p>
-          <a:p>
-            <a:pPr algn="l"/>
-            <a:r>
-              <a:rPr sz="1400" b="0" i="0">
-                <a:solidFill>
-                  <a:srgbClr val="1A1A2E"/>
-                </a:solidFill>
-                <a:latin typeface="Consolas"/>
-              </a:rPr>
-              <a:t>row = db.execute(sql, (email, pwd)).fetchone()</a:t>
-            </a:r>
-          </a:p>
-          <a:p>
-            <a:pPr algn="l"/>
-            <a:r>
-              <a:rPr sz="1400" b="0" i="0">
-                <a:solidFill>
-                  <a:srgbClr val="1A1A2E"/>
-                </a:solidFill>
-                <a:latin typeface="Consolas"/>
-              </a:rPr>
-              <a:t/>
-            </a:r>
-          </a:p>
-          <a:p>
-            <a:pPr algn="l"/>
-            <a:r>
-              <a:rPr sz="1400" b="0" i="0">
-                <a:solidFill>
-                  <a:srgbClr val="1A1A2E"/>
-                </a:solidFill>
-                <a:latin typeface="Consolas"/>
-              </a:rPr>
-              <a:t># I ? sono PLACEHOLDER</a:t>
-            </a:r>
-          </a:p>
-          <a:p>
-            <a:pPr algn="l"/>
-            <a:r>
-              <a:rPr sz="1400" b="0" i="0">
-                <a:solidFill>
-                  <a:srgbClr val="1A1A2E"/>
-                </a:solidFill>
-                <a:latin typeface="Consolas"/>
-              </a:rPr>
-              <a:t># I dati sono passati SEPARATAMENTE come tupla</a:t>
-            </a:r>
-          </a:p>
-          <a:p>
-            <a:pPr algn="l"/>
-            <a:r>
-              <a:rPr sz="1400" b="0" i="0">
-                <a:solidFill>
-                  <a:srgbClr val="1A1A2E"/>
-                </a:solidFill>
-                <a:latin typeface="Consolas"/>
-              </a:rPr>
-              <a:t># Il driver si occupa di trattarli come VALORI, non come SQL</a:t>
-            </a:r>
-          </a:p>
-          <a:p>
-            <a:pPr algn="l"/>
-            <a:r>
-              <a:rPr sz="1400" b="0" i="0">
-                <a:solidFill>
-                  <a:srgbClr val="1A1A2E"/>
-                </a:solidFill>
-                <a:latin typeface="Consolas"/>
-              </a:rPr>
-              <a:t/>
-            </a:r>
-          </a:p>
-          <a:p>
-            <a:pPr algn="l"/>
-            <a:r>
-              <a:rPr sz="1400" b="0" i="0">
-                <a:solidFill>
-                  <a:srgbClr val="1A1A2E"/>
-                </a:solidFill>
-                <a:latin typeface="Consolas"/>
-              </a:rPr>
-              <a:t># Anche se l'utente scrive: ' OR '1'='1' --</a:t>
-            </a:r>
-          </a:p>
-          <a:p>
-            <a:pPr algn="l"/>
-            <a:r>
-              <a:rPr sz="1400" b="0" i="0">
-                <a:solidFill>
-                  <a:srgbClr val="1A1A2E"/>
-                </a:solidFill>
-                <a:latin typeface="Consolas"/>
-              </a:rPr>
-              <a:t># il driver cerca LETTERALMENTE quella stringa</a:t>
-            </a:r>
-          </a:p>
-          <a:p>
-            <a:pPr algn="l"/>
-            <a:r>
-              <a:rPr sz="1400" b="0" i="0">
-                <a:solidFill>
-                  <a:srgbClr val="1A1A2E"/>
-                </a:solidFill>
-                <a:latin typeface="Consolas"/>
-              </a:rPr>
-              <a:t># → non la trova → login fallito ✓</a:t>
-            </a:r>
-          </a:p>
-        </p:txBody>
-      </p:sp>
-      <p:sp>
-        <p:nvSpPr>
-          <p:cNvPr id="8" name="TextBox 7"/>
-          <p:cNvSpPr txBox="1"/>
-          <p:nvPr/>
-        </p:nvSpPr>
-        <p:spPr>
-          <a:xfrm>
-            <a:off x="457200" y="5852160"/>
-            <a:ext cx="11247120" cy="457200"/>
-          </a:xfrm>
-          <a:prstGeom prst="rect">
-            <a:avLst/>
-          </a:prstGeom>
-          <a:noFill/>
-        </p:spPr>
-        <p:txBody>
-          <a:bodyPr wrap="square" lIns="45720" rIns="45720" tIns="18288" bIns="18288" anchor="t">
-            <a:spAutoFit/>
-          </a:bodyPr>
-          <a:lstStyle/>
-          <a:p>
-            <a:pPr algn="l"/>
-            <a:r>
-              <a:rPr sz="1400" b="1" i="1">
-                <a:solidFill>
-                  <a:srgbClr val="06A77D"/>
-                </a:solidFill>
-                <a:latin typeface="Calibri"/>
-              </a:rPr>
-              <a:t>✓  Una riga, una virgola, una tupla. SQLi impossibile per design</a:t>
-            </a:r>
-          </a:p>
-        </p:txBody>
-      </p:sp>
-      <p:cxnSp>
-        <p:nvCxnSpPr>
-          <p:cNvPr id="9" name="Connector 8"/>
-          <p:cNvCxnSpPr/>
-          <p:nvPr/>
-        </p:nvCxnSpPr>
-        <p:spPr>
-          <a:xfrm>
-            <a:off x="457200" y="6446520"/>
-            <a:ext cx="11274552" cy="0"/>
-          </a:xfrm>
-          <a:prstGeom prst="line">
-            <a:avLst/>
-          </a:prstGeom>
-          <a:ln w="19050">
-            <a:solidFill>
-              <a:srgbClr val="00A0B0"/>
-            </a:solidFill>
-          </a:ln>
-        </p:spPr>
-        <p:style>
-          <a:lnRef idx="2">
-            <a:schemeClr val="accent1"/>
-          </a:lnRef>
-          <a:fillRef idx="0">
-            <a:schemeClr val="accent1"/>
-          </a:fillRef>
-          <a:effectRef idx="1">
-            <a:schemeClr val="accent1"/>
-          </a:effectRef>
-          <a:fontRef idx="minor">
-            <a:schemeClr val="tx1"/>
-          </a:fontRef>
-        </p:style>
-      </p:cxnSp>
-      <p:sp>
-        <p:nvSpPr>
-          <p:cNvPr id="10" name="TextBox 9"/>
-          <p:cNvSpPr txBox="1"/>
-          <p:nvPr/>
-        </p:nvSpPr>
-        <p:spPr>
-          <a:xfrm>
-            <a:off x="457200" y="6473952"/>
-            <a:ext cx="7315200" cy="320040"/>
-          </a:xfrm>
-          <a:prstGeom prst="rect">
-            <a:avLst/>
-          </a:prstGeom>
-          <a:noFill/>
-        </p:spPr>
-        <p:txBody>
-          <a:bodyPr wrap="square" lIns="45720" rIns="45720" tIns="18288" bIns="18288" anchor="t">
-            <a:spAutoFit/>
-          </a:bodyPr>
-          <a:lstStyle/>
-          <a:p>
-            <a:pPr algn="l"/>
-            <a:r>
-              <a:rPr sz="1000" b="0" i="0">
-                <a:solidFill>
-                  <a:srgbClr val="6B7280"/>
-                </a:solidFill>
-                <a:latin typeface="Calibri"/>
-              </a:rPr>
-              <a:t>Secure Coding · Corso IFTS STEM · A. Manneschi</a:t>
-            </a:r>
-          </a:p>
-        </p:txBody>
-      </p:sp>
-      <p:sp>
-        <p:nvSpPr>
-          <p:cNvPr id="11" name="TextBox 10"/>
-          <p:cNvSpPr txBox="1"/>
-          <p:nvPr/>
-        </p:nvSpPr>
-        <p:spPr>
-          <a:xfrm>
-            <a:off x="10515600" y="6473952"/>
-            <a:ext cx="1188720" cy="320040"/>
-          </a:xfrm>
-          <a:prstGeom prst="rect">
-            <a:avLst/>
-          </a:prstGeom>
-          <a:noFill/>
-        </p:spPr>
-        <p:txBody>
-          <a:bodyPr wrap="square" lIns="45720" rIns="45720" tIns="18288" bIns="18288" anchor="t">
-            <a:spAutoFit/>
-          </a:bodyPr>
-          <a:lstStyle/>
-          <a:p>
-            <a:pPr algn="r"/>
-            <a:r>
-              <a:rPr sz="1000" b="1" i="0">
-                <a:solidFill>
-                  <a:srgbClr val="6B7280"/>
-                </a:solidFill>
-                <a:latin typeface="Calibri"/>
-              </a:rPr>
-              <a:t>L3  ·  11/14</a:t>
-            </a:r>
-          </a:p>
-        </p:txBody>
-      </p:sp>
-    </p:spTree>
-  </p:cSld>
-  <p:clrMapOvr>
-    <a:masterClrMapping/>
-  </p:clrMapOvr>
-</p:sld>
-</file>
-
-<file path=ppt/slides/slide12.xml><?xml version="1.0" encoding="utf-8"?>
-<p:sld xmlns:a="http://schemas.openxmlformats.org/drawingml/2006/main" xmlns:p="http://schemas.openxmlformats.org/presentationml/2006/main" xmlns:r="http://schemas.openxmlformats.org/officeDocument/2006/relationships">
-  <p:cSld>
-    <p:spTree>
-      <p:nvGrpSpPr>
-        <p:cNvPr id="1" name=""/>
-        <p:cNvGrpSpPr/>
-        <p:nvPr/>
-      </p:nvGrpSpPr>
-      <p:grpSpPr/>
-      <p:sp>
-        <p:nvSpPr>
-          <p:cNvPr id="2" name="Rectangle 1"/>
-          <p:cNvSpPr/>
-          <p:nvPr/>
-        </p:nvSpPr>
-        <p:spPr>
-          <a:xfrm>
-            <a:off x="0" y="0"/>
-            <a:ext cx="12191695" cy="777240"/>
-          </a:xfrm>
-          <a:prstGeom prst="rect">
-            <a:avLst/>
-          </a:prstGeom>
-          <a:solidFill>
-            <a:srgbClr val="0F2D52"/>
-          </a:solidFill>
-          <a:ln>
-            <a:noFill/>
-          </a:ln>
-        </p:spPr>
-        <p:style>
-          <a:lnRef idx="1">
-            <a:schemeClr val="accent1"/>
-          </a:lnRef>
-          <a:fillRef idx="3">
-            <a:schemeClr val="accent1"/>
-          </a:fillRef>
-          <a:effectRef idx="2">
-            <a:schemeClr val="accent1"/>
-          </a:effectRef>
-          <a:fontRef idx="minor">
-            <a:schemeClr val="lt1"/>
-          </a:fontRef>
-        </p:style>
-        <p:txBody>
-          <a:bodyPr rtlCol="0" anchor="ctr"/>
-          <a:lstStyle/>
-          <a:p>
-            <a:pPr algn="ctr"/>
-          </a:p>
-        </p:txBody>
-      </p:sp>
-      <p:sp>
-        <p:nvSpPr>
-          <p:cNvPr id="3" name="TextBox 2"/>
-          <p:cNvSpPr txBox="1"/>
-          <p:nvPr/>
-        </p:nvSpPr>
-        <p:spPr>
-          <a:xfrm>
-            <a:off x="457200" y="164592"/>
-            <a:ext cx="10972800" cy="502920"/>
-          </a:xfrm>
-          <a:prstGeom prst="rect">
-            <a:avLst/>
-          </a:prstGeom>
-          <a:noFill/>
-        </p:spPr>
-        <p:txBody>
-          <a:bodyPr wrap="square" lIns="45720" rIns="45720" tIns="18288" bIns="18288" anchor="ctr">
-            <a:spAutoFit/>
-          </a:bodyPr>
-          <a:lstStyle/>
-          <a:p>
-            <a:pPr algn="l"/>
-            <a:r>
-              <a:rPr sz="2400" b="1" i="0">
-                <a:solidFill>
-                  <a:srgbClr val="FFFFFF"/>
-                </a:solidFill>
-                <a:latin typeface="Calibri"/>
-              </a:rPr>
               <a:t>Cross-linguaggio: la stessa idea</a:t>
             </a:r>
           </a:p>
@@ -4898,7 +3685,7 @@
         </p:nvGraphicFramePr>
         <p:xfrm>
           <a:off x="457200" y="1188720"/>
-          <a:ext cx="11247120" cy="5029200"/>
+          <a:ext cx="11247120" cy="4937760"/>
         </p:xfrm>
         <a:graphic>
           <a:graphicData uri="http://schemas.openxmlformats.org/drawingml/2006/table">
@@ -4910,7 +3697,7 @@
                 <a:gridCol w="5623560"/>
                 <a:gridCol w="5623560"/>
               </a:tblGrid>
-              <a:tr h="838200">
+              <a:tr h="705394">
                 <a:tc>
                   <a:txBody>
                     <a:bodyPr/>
@@ -4918,7 +3705,7 @@
                     <a:p>
                       <a:pPr algn="ctr"/>
                       <a:r>
-                        <a:rPr sz="1400" b="1">
+                        <a:rPr sz="1300" b="1">
                           <a:solidFill>
                             <a:srgbClr val="FFFFFF"/>
                           </a:solidFill>
@@ -4941,7 +3728,7 @@
                     <a:p>
                       <a:pPr algn="ctr"/>
                       <a:r>
-                        <a:rPr sz="1400" b="1">
+                        <a:rPr sz="1300" b="1">
                           <a:solidFill>
                             <a:srgbClr val="FFFFFF"/>
                           </a:solidFill>
@@ -4958,21 +3745,20 @@
                   </a:tcPr>
                 </a:tc>
               </a:tr>
-              <a:tr h="838200">
+              <a:tr h="705394">
                 <a:tc>
                   <a:txBody>
                     <a:bodyPr/>
                     <a:lstStyle/>
                     <a:p>
-                      <a:pPr algn="l"/>
                       <a:r>
-                        <a:rPr sz="1200">
+                        <a:rPr sz="1100">
                           <a:solidFill>
                             <a:srgbClr val="1A1A2E"/>
                           </a:solidFill>
                           <a:latin typeface="Calibri"/>
                         </a:rPr>
-                        <a:t>Python (sqlite3/psycopg2)</a:t>
+                        <a:t>Python sqlite3</a:t>
                       </a:r>
                     </a:p>
                   </a:txBody>
@@ -4987,9 +3773,8 @@
                     <a:bodyPr/>
                     <a:lstStyle/>
                     <a:p>
-                      <a:pPr algn="l"/>
                       <a:r>
-                        <a:rPr sz="1200">
+                        <a:rPr sz="1100">
                           <a:solidFill>
                             <a:srgbClr val="1A1A2E"/>
                           </a:solidFill>
@@ -5006,21 +3791,20 @@
                   </a:tcPr>
                 </a:tc>
               </a:tr>
-              <a:tr h="838200">
+              <a:tr h="705394">
                 <a:tc>
                   <a:txBody>
                     <a:bodyPr/>
                     <a:lstStyle/>
                     <a:p>
-                      <a:pPr algn="l"/>
                       <a:r>
-                        <a:rPr sz="1200">
+                        <a:rPr sz="1100">
                           <a:solidFill>
                             <a:srgbClr val="1A1A2E"/>
                           </a:solidFill>
                           <a:latin typeface="Calibri"/>
                         </a:rPr>
-                        <a:t>Java (JDBC)</a:t>
+                        <a:t>Python psycopg2</a:t>
                       </a:r>
                     </a:p>
                   </a:txBody>
@@ -5035,15 +3819,14 @@
                     <a:bodyPr/>
                     <a:lstStyle/>
                     <a:p>
-                      <a:pPr algn="l"/>
                       <a:r>
-                        <a:rPr sz="1200">
+                        <a:rPr sz="1100">
                           <a:solidFill>
                             <a:srgbClr val="1A1A2E"/>
                           </a:solidFill>
                           <a:latin typeface="Calibri"/>
                         </a:rPr>
-                        <a:t>PreparedStatement ps = conn.prepareStatement("... = ?")</a:t>
+                        <a:t>cursor.execute("... = %s", (val,))</a:t>
                       </a:r>
                     </a:p>
                   </a:txBody>
@@ -5054,21 +3837,20 @@
                   </a:tcPr>
                 </a:tc>
               </a:tr>
-              <a:tr h="838200">
+              <a:tr h="705394">
                 <a:tc>
                   <a:txBody>
                     <a:bodyPr/>
                     <a:lstStyle/>
                     <a:p>
-                      <a:pPr algn="l"/>
                       <a:r>
-                        <a:rPr sz="1200">
+                        <a:rPr sz="1100">
                           <a:solidFill>
                             <a:srgbClr val="1A1A2E"/>
                           </a:solidFill>
                           <a:latin typeface="Calibri"/>
                         </a:rPr>
-                        <a:t>PHP (PDO)</a:t>
+                        <a:t>Java JDBC</a:t>
                       </a:r>
                     </a:p>
                   </a:txBody>
@@ -5083,15 +3865,14 @@
                     <a:bodyPr/>
                     <a:lstStyle/>
                     <a:p>
-                      <a:pPr algn="l"/>
                       <a:r>
-                        <a:rPr sz="1200">
+                        <a:rPr sz="1100">
                           <a:solidFill>
                             <a:srgbClr val="1A1A2E"/>
                           </a:solidFill>
                           <a:latin typeface="Calibri"/>
                         </a:rPr>
-                        <a:t>$stmt = $pdo-&gt;prepare("... = ?")</a:t>
+                        <a:t>ps = conn.prepareStatement("... = ?")</a:t>
                       </a:r>
                     </a:p>
                   </a:txBody>
@@ -5102,21 +3883,20 @@
                   </a:tcPr>
                 </a:tc>
               </a:tr>
-              <a:tr h="838200">
+              <a:tr h="705394">
                 <a:tc>
                   <a:txBody>
                     <a:bodyPr/>
                     <a:lstStyle/>
                     <a:p>
-                      <a:pPr algn="l"/>
                       <a:r>
-                        <a:rPr sz="1200">
+                        <a:rPr sz="1100">
                           <a:solidFill>
                             <a:srgbClr val="1A1A2E"/>
                           </a:solidFill>
                           <a:latin typeface="Calibri"/>
                         </a:rPr>
-                        <a:t>JavaScript (better-sqlite3)</a:t>
+                        <a:t>PHP PDO</a:t>
                       </a:r>
                     </a:p>
                   </a:txBody>
@@ -5131,15 +3911,14 @@
                     <a:bodyPr/>
                     <a:lstStyle/>
                     <a:p>
-                      <a:pPr algn="l"/>
                       <a:r>
-                        <a:rPr sz="1200">
+                        <a:rPr sz="1100">
                           <a:solidFill>
                             <a:srgbClr val="1A1A2E"/>
                           </a:solidFill>
                           <a:latin typeface="Calibri"/>
                         </a:rPr>
-                        <a:t>db.prepare("... = ?").get(val)</a:t>
+                        <a:t>$stmt = $pdo-&gt;prepare("... = ?")</a:t>
                       </a:r>
                     </a:p>
                   </a:txBody>
@@ -5150,21 +3929,20 @@
                   </a:tcPr>
                 </a:tc>
               </a:tr>
-              <a:tr h="838200">
+              <a:tr h="705394">
                 <a:tc>
                   <a:txBody>
                     <a:bodyPr/>
                     <a:lstStyle/>
                     <a:p>
-                      <a:pPr algn="l"/>
                       <a:r>
-                        <a:rPr sz="1200">
+                        <a:rPr sz="1100">
                           <a:solidFill>
                             <a:srgbClr val="1A1A2E"/>
                           </a:solidFill>
                           <a:latin typeface="Calibri"/>
                         </a:rPr>
-                        <a:t>ORM (SQLAlchemy, Hibernate, ...)</a:t>
+                        <a:t>JS better-sqlite3</a:t>
                       </a:r>
                     </a:p>
                   </a:txBody>
@@ -5179,9 +3957,54 @@
                     <a:bodyPr/>
                     <a:lstStyle/>
                     <a:p>
-                      <a:pPr algn="l"/>
                       <a:r>
-                        <a:rPr sz="1200">
+                        <a:rPr sz="1100">
+                          <a:solidFill>
+                            <a:srgbClr val="1A1A2E"/>
+                          </a:solidFill>
+                          <a:latin typeface="Calibri"/>
+                        </a:rPr>
+                        <a:t>db.prepare("... = ?").get(val)</a:t>
+                      </a:r>
+                    </a:p>
+                  </a:txBody>
+                  <a:tcPr>
+                    <a:solidFill>
+                      <a:srgbClr val="F1F4F8"/>
+                    </a:solidFill>
+                  </a:tcPr>
+                </a:tc>
+              </a:tr>
+              <a:tr h="705396">
+                <a:tc>
+                  <a:txBody>
+                    <a:bodyPr/>
+                    <a:lstStyle/>
+                    <a:p>
+                      <a:r>
+                        <a:rPr sz="1100">
+                          <a:solidFill>
+                            <a:srgbClr val="1A1A2E"/>
+                          </a:solidFill>
+                          <a:latin typeface="Calibri"/>
+                        </a:rPr>
+                        <a:t>ORM (SQLAlchemy, ...)</a:t>
+                      </a:r>
+                    </a:p>
+                  </a:txBody>
+                  <a:tcPr>
+                    <a:solidFill>
+                      <a:srgbClr val="FFFFFF"/>
+                    </a:solidFill>
+                  </a:tcPr>
+                </a:tc>
+                <a:tc>
+                  <a:txBody>
+                    <a:bodyPr/>
+                    <a:lstStyle/>
+                    <a:p>
+                      <a:r>
+                        <a:rPr sz="1100">
                           <a:solidFill>
                             <a:srgbClr val="1A1A2E"/>
                           </a:solidFill>
@@ -5193,7 +4016,7 @@
                   </a:txBody>
                   <a:tcPr>
                     <a:solidFill>
-                      <a:srgbClr val="F1F4F8"/>
+                      <a:srgbClr val="FFFFFF"/>
                     </a:solidFill>
                   </a:tcPr>
                 </a:tc>
@@ -5246,7 +4069,7 @@
         <p:spPr>
           <a:xfrm>
             <a:off x="457200" y="6473952"/>
-            <a:ext cx="7315200" cy="320040"/>
+            <a:ext cx="7315200" cy="292608"/>
           </a:xfrm>
           <a:prstGeom prst="rect">
             <a:avLst/>
@@ -5267,7 +4090,7 @@
                 </a:solidFill>
                 <a:latin typeface="Calibri"/>
               </a:rPr>
-              <a:t>Secure Coding · Corso IFTS STEM · A. Manneschi</a:t>
+              <a:t>Secure Coding · Corso IFTS STEM · A. Manneschi · 2024/2025</a:t>
             </a:r>
           </a:p>
         </p:txBody>
@@ -5281,7 +4104,1428 @@
         <p:spPr>
           <a:xfrm>
             <a:off x="10515600" y="6473952"/>
-            <a:ext cx="1188720" cy="320040"/>
+            <a:ext cx="1188720" cy="292608"/>
+          </a:xfrm>
+          <a:prstGeom prst="rect">
+            <a:avLst/>
+          </a:prstGeom>
+          <a:noFill/>
+        </p:spPr>
+        <p:txBody>
+          <a:bodyPr wrap="square" lIns="45720" rIns="45720" tIns="18288" bIns="18288" anchor="t">
+            <a:spAutoFit/>
+          </a:bodyPr>
+          <a:lstStyle/>
+          <a:p>
+            <a:pPr algn="r"/>
+            <a:r>
+              <a:rPr sz="1000" b="1" i="0">
+                <a:solidFill>
+                  <a:srgbClr val="6B7280"/>
+                </a:solidFill>
+                <a:latin typeface="Calibri"/>
+              </a:rPr>
+              <a:t>L3  ·  10/14</a:t>
+            </a:r>
+          </a:p>
+        </p:txBody>
+      </p:sp>
+    </p:spTree>
+  </p:cSld>
+  <p:clrMapOvr>
+    <a:masterClrMapping/>
+  </p:clrMapOvr>
+</p:sld>
+</file>
+
+<file path=ppt/slides/slide11.xml><?xml version="1.0" encoding="utf-8"?>
+<p:sld xmlns:a="http://schemas.openxmlformats.org/drawingml/2006/main" xmlns:p="http://schemas.openxmlformats.org/presentationml/2006/main" xmlns:r="http://schemas.openxmlformats.org/officeDocument/2006/relationships">
+  <p:cSld>
+    <p:spTree>
+      <p:nvGrpSpPr>
+        <p:cNvPr id="1" name=""/>
+        <p:cNvGrpSpPr/>
+        <p:nvPr/>
+      </p:nvGrpSpPr>
+      <p:grpSpPr/>
+      <p:sp>
+        <p:nvSpPr>
+          <p:cNvPr id="2" name="Rectangle 1"/>
+          <p:cNvSpPr/>
+          <p:nvPr/>
+        </p:nvSpPr>
+        <p:spPr>
+          <a:xfrm>
+            <a:off x="0" y="0"/>
+            <a:ext cx="12191695" cy="777240"/>
+          </a:xfrm>
+          <a:prstGeom prst="rect">
+            <a:avLst/>
+          </a:prstGeom>
+          <a:solidFill>
+            <a:srgbClr val="0F2D52"/>
+          </a:solidFill>
+          <a:ln>
+            <a:noFill/>
+          </a:ln>
+        </p:spPr>
+        <p:style>
+          <a:lnRef idx="1">
+            <a:schemeClr val="accent1"/>
+          </a:lnRef>
+          <a:fillRef idx="3">
+            <a:schemeClr val="accent1"/>
+          </a:fillRef>
+          <a:effectRef idx="2">
+            <a:schemeClr val="accent1"/>
+          </a:effectRef>
+          <a:fontRef idx="minor">
+            <a:schemeClr val="lt1"/>
+          </a:fontRef>
+        </p:style>
+        <p:txBody>
+          <a:bodyPr rtlCol="0" anchor="ctr"/>
+          <a:lstStyle/>
+          <a:p>
+            <a:pPr algn="ctr"/>
+          </a:p>
+        </p:txBody>
+      </p:sp>
+      <p:sp>
+        <p:nvSpPr>
+          <p:cNvPr id="3" name="TextBox 2"/>
+          <p:cNvSpPr txBox="1"/>
+          <p:nvPr/>
+        </p:nvSpPr>
+        <p:spPr>
+          <a:xfrm>
+            <a:off x="457200" y="164592"/>
+            <a:ext cx="10972800" cy="502920"/>
+          </a:xfrm>
+          <a:prstGeom prst="rect">
+            <a:avLst/>
+          </a:prstGeom>
+          <a:noFill/>
+        </p:spPr>
+        <p:txBody>
+          <a:bodyPr wrap="square" lIns="45720" rIns="45720" tIns="18288" bIns="18288" anchor="ctr">
+            <a:spAutoFit/>
+          </a:bodyPr>
+          <a:lstStyle/>
+          <a:p>
+            <a:pPr algn="l"/>
+            <a:r>
+              <a:rPr sz="2400" b="1" i="0">
+                <a:solidFill>
+                  <a:srgbClr val="FFFFFF"/>
+                </a:solidFill>
+                <a:latin typeface="Calibri"/>
+              </a:rPr>
+              <a:t>🛡  Difese in profondità</a:t>
+            </a:r>
+          </a:p>
+        </p:txBody>
+      </p:sp>
+      <p:sp>
+        <p:nvSpPr>
+          <p:cNvPr id="4" name="TextBox 3"/>
+          <p:cNvSpPr txBox="1"/>
+          <p:nvPr/>
+        </p:nvSpPr>
+        <p:spPr>
+          <a:xfrm>
+            <a:off x="640080" y="1097280"/>
+            <a:ext cx="10972800" cy="5029200"/>
+          </a:xfrm>
+          <a:prstGeom prst="rect">
+            <a:avLst/>
+          </a:prstGeom>
+          <a:noFill/>
+        </p:spPr>
+        <p:txBody>
+          <a:bodyPr wrap="square">
+            <a:spAutoFit/>
+          </a:bodyPr>
+          <a:lstStyle/>
+          <a:p>
+            <a:pPr>
+              <a:lnSpc>
+                <a:spcPct val="150000"/>
+              </a:lnSpc>
+              <a:spcAft>
+                <a:spcPts val="400"/>
+              </a:spcAft>
+            </a:pPr>
+            <a:r>
+              <a:rPr sz="2000" b="1">
+                <a:solidFill>
+                  <a:srgbClr val="00A0B0"/>
+                </a:solidFill>
+                <a:latin typeface="Calibri"/>
+              </a:rPr>
+              <a:t>▸  </a:t>
+            </a:r>
+            <a:r>
+              <a:rPr sz="2000">
+                <a:solidFill>
+                  <a:srgbClr val="1A1A2E"/>
+                </a:solidFill>
+                <a:latin typeface="Calibri"/>
+              </a:rPr>
+              <a:t>1. Query parametrizzate (difesa PRIMARIA, non sostituibile)</a:t>
+            </a:r>
+          </a:p>
+          <a:p>
+            <a:pPr>
+              <a:lnSpc>
+                <a:spcPct val="150000"/>
+              </a:lnSpc>
+              <a:spcAft>
+                <a:spcPts val="400"/>
+              </a:spcAft>
+            </a:pPr>
+            <a:r>
+              <a:rPr sz="2000" b="1">
+                <a:solidFill>
+                  <a:srgbClr val="00A0B0"/>
+                </a:solidFill>
+                <a:latin typeface="Calibri"/>
+              </a:rPr>
+              <a:t>▸  </a:t>
+            </a:r>
+            <a:r>
+              <a:rPr sz="2000">
+                <a:solidFill>
+                  <a:srgbClr val="1A1A2E"/>
+                </a:solidFill>
+                <a:latin typeface="Calibri"/>
+              </a:rPr>
+              <a:t>2. ORM (forza il pattern corretto)</a:t>
+            </a:r>
+          </a:p>
+          <a:p>
+            <a:pPr>
+              <a:lnSpc>
+                <a:spcPct val="150000"/>
+              </a:lnSpc>
+              <a:spcAft>
+                <a:spcPts val="400"/>
+              </a:spcAft>
+            </a:pPr>
+            <a:r>
+              <a:rPr sz="2000" b="1">
+                <a:solidFill>
+                  <a:srgbClr val="00A0B0"/>
+                </a:solidFill>
+                <a:latin typeface="Calibri"/>
+              </a:rPr>
+              <a:t>▸  </a:t>
+            </a:r>
+            <a:r>
+              <a:rPr sz="2000">
+                <a:solidFill>
+                  <a:srgbClr val="1A1A2E"/>
+                </a:solidFill>
+                <a:latin typeface="Calibri"/>
+              </a:rPr>
+              <a:t>3. Least privilege per l'utente DB (no DROP/CREATE/GRANT)</a:t>
+            </a:r>
+          </a:p>
+          <a:p>
+            <a:pPr>
+              <a:lnSpc>
+                <a:spcPct val="150000"/>
+              </a:lnSpc>
+              <a:spcAft>
+                <a:spcPts val="400"/>
+              </a:spcAft>
+            </a:pPr>
+            <a:r>
+              <a:rPr sz="2000" b="1">
+                <a:solidFill>
+                  <a:srgbClr val="00A0B0"/>
+                </a:solidFill>
+                <a:latin typeface="Calibri"/>
+              </a:rPr>
+              <a:t>▸  </a:t>
+            </a:r>
+            <a:r>
+              <a:rPr sz="2000">
+                <a:solidFill>
+                  <a:srgbClr val="1A1A2E"/>
+                </a:solidFill>
+                <a:latin typeface="Calibri"/>
+              </a:rPr>
+              <a:t>4. Errori generici al client, dettagli nei log interni</a:t>
+            </a:r>
+          </a:p>
+          <a:p>
+            <a:pPr>
+              <a:lnSpc>
+                <a:spcPct val="150000"/>
+              </a:lnSpc>
+              <a:spcAft>
+                <a:spcPts val="400"/>
+              </a:spcAft>
+            </a:pPr>
+            <a:r>
+              <a:rPr sz="2000" b="1">
+                <a:solidFill>
+                  <a:srgbClr val="00A0B0"/>
+                </a:solidFill>
+                <a:latin typeface="Calibri"/>
+              </a:rPr>
+              <a:t>▸  </a:t>
+            </a:r>
+            <a:r>
+              <a:rPr sz="2000">
+                <a:solidFill>
+                  <a:srgbClr val="1A1A2E"/>
+                </a:solidFill>
+                <a:latin typeface="Calibri"/>
+              </a:rPr>
+              <a:t>5. WAF (Web Application Firewall) come strato aggiuntivo</a:t>
+            </a:r>
+          </a:p>
+          <a:p>
+            <a:pPr>
+              <a:lnSpc>
+                <a:spcPct val="150000"/>
+              </a:lnSpc>
+              <a:spcAft>
+                <a:spcPts val="400"/>
+              </a:spcAft>
+            </a:pPr>
+            <a:r>
+              <a:rPr sz="2000" b="1">
+                <a:solidFill>
+                  <a:srgbClr val="00A0B0"/>
+                </a:solidFill>
+                <a:latin typeface="Calibri"/>
+              </a:rPr>
+              <a:t>▸  </a:t>
+            </a:r>
+            <a:r>
+              <a:rPr sz="2000">
+                <a:solidFill>
+                  <a:srgbClr val="1A1A2E"/>
+                </a:solidFill>
+                <a:latin typeface="Calibri"/>
+              </a:rPr>
+              <a:t>6. Rate limiting sul login (anti brute force)</a:t>
+            </a:r>
+          </a:p>
+          <a:p>
+            <a:pPr>
+              <a:lnSpc>
+                <a:spcPct val="150000"/>
+              </a:lnSpc>
+              <a:spcAft>
+                <a:spcPts val="400"/>
+              </a:spcAft>
+            </a:pPr>
+            <a:r>
+              <a:rPr sz="2000" b="1">
+                <a:solidFill>
+                  <a:srgbClr val="00A0B0"/>
+                </a:solidFill>
+                <a:latin typeface="Calibri"/>
+              </a:rPr>
+              <a:t>▸  </a:t>
+            </a:r>
+            <a:r>
+              <a:rPr sz="2000">
+                <a:solidFill>
+                  <a:srgbClr val="1A1A2E"/>
+                </a:solidFill>
+                <a:latin typeface="Calibri"/>
+              </a:rPr>
+              <a:t>7. Audit log dei tentativi sospetti</a:t>
+            </a:r>
+          </a:p>
+        </p:txBody>
+      </p:sp>
+      <p:cxnSp>
+        <p:nvCxnSpPr>
+          <p:cNvPr id="5" name="Connector 4"/>
+          <p:cNvCxnSpPr/>
+          <p:nvPr/>
+        </p:nvCxnSpPr>
+        <p:spPr>
+          <a:xfrm>
+            <a:off x="457200" y="6446520"/>
+            <a:ext cx="11274552" cy="0"/>
+          </a:xfrm>
+          <a:prstGeom prst="line">
+            <a:avLst/>
+          </a:prstGeom>
+          <a:ln w="19050">
+            <a:solidFill>
+              <a:srgbClr val="00A0B0"/>
+            </a:solidFill>
+          </a:ln>
+        </p:spPr>
+        <p:style>
+          <a:lnRef idx="2">
+            <a:schemeClr val="accent1"/>
+          </a:lnRef>
+          <a:fillRef idx="0">
+            <a:schemeClr val="accent1"/>
+          </a:fillRef>
+          <a:effectRef idx="1">
+            <a:schemeClr val="accent1"/>
+          </a:effectRef>
+          <a:fontRef idx="minor">
+            <a:schemeClr val="tx1"/>
+          </a:fontRef>
+        </p:style>
+      </p:cxnSp>
+      <p:sp>
+        <p:nvSpPr>
+          <p:cNvPr id="6" name="TextBox 5"/>
+          <p:cNvSpPr txBox="1"/>
+          <p:nvPr/>
+        </p:nvSpPr>
+        <p:spPr>
+          <a:xfrm>
+            <a:off x="457200" y="6473952"/>
+            <a:ext cx="7315200" cy="292608"/>
+          </a:xfrm>
+          <a:prstGeom prst="rect">
+            <a:avLst/>
+          </a:prstGeom>
+          <a:noFill/>
+        </p:spPr>
+        <p:txBody>
+          <a:bodyPr wrap="square" lIns="45720" rIns="45720" tIns="18288" bIns="18288" anchor="t">
+            <a:spAutoFit/>
+          </a:bodyPr>
+          <a:lstStyle/>
+          <a:p>
+            <a:pPr algn="l"/>
+            <a:r>
+              <a:rPr sz="1000" b="0" i="0">
+                <a:solidFill>
+                  <a:srgbClr val="6B7280"/>
+                </a:solidFill>
+                <a:latin typeface="Calibri"/>
+              </a:rPr>
+              <a:t>Secure Coding · Corso IFTS STEM · A. Manneschi · 2024/2025</a:t>
+            </a:r>
+          </a:p>
+        </p:txBody>
+      </p:sp>
+      <p:sp>
+        <p:nvSpPr>
+          <p:cNvPr id="7" name="TextBox 6"/>
+          <p:cNvSpPr txBox="1"/>
+          <p:nvPr/>
+        </p:nvSpPr>
+        <p:spPr>
+          <a:xfrm>
+            <a:off x="10515600" y="6473952"/>
+            <a:ext cx="1188720" cy="292608"/>
+          </a:xfrm>
+          <a:prstGeom prst="rect">
+            <a:avLst/>
+          </a:prstGeom>
+          <a:noFill/>
+        </p:spPr>
+        <p:txBody>
+          <a:bodyPr wrap="square" lIns="45720" rIns="45720" tIns="18288" bIns="18288" anchor="t">
+            <a:spAutoFit/>
+          </a:bodyPr>
+          <a:lstStyle/>
+          <a:p>
+            <a:pPr algn="r"/>
+            <a:r>
+              <a:rPr sz="1000" b="1" i="0">
+                <a:solidFill>
+                  <a:srgbClr val="6B7280"/>
+                </a:solidFill>
+                <a:latin typeface="Calibri"/>
+              </a:rPr>
+              <a:t>L3  ·  11/14</a:t>
+            </a:r>
+          </a:p>
+        </p:txBody>
+      </p:sp>
+    </p:spTree>
+  </p:cSld>
+  <p:clrMapOvr>
+    <a:masterClrMapping/>
+  </p:clrMapOvr>
+</p:sld>
+</file>
+
+<file path=ppt/slides/slide12.xml><?xml version="1.0" encoding="utf-8"?>
+<p:sld xmlns:a="http://schemas.openxmlformats.org/drawingml/2006/main" xmlns:p="http://schemas.openxmlformats.org/presentationml/2006/main" xmlns:r="http://schemas.openxmlformats.org/officeDocument/2006/relationships">
+  <p:cSld>
+    <p:spTree>
+      <p:nvGrpSpPr>
+        <p:cNvPr id="1" name=""/>
+        <p:cNvGrpSpPr/>
+        <p:nvPr/>
+      </p:nvGrpSpPr>
+      <p:grpSpPr/>
+      <p:sp>
+        <p:nvSpPr>
+          <p:cNvPr id="2" name="Rectangle 1"/>
+          <p:cNvSpPr/>
+          <p:nvPr/>
+        </p:nvSpPr>
+        <p:spPr>
+          <a:xfrm>
+            <a:off x="0" y="0"/>
+            <a:ext cx="12191695" cy="777240"/>
+          </a:xfrm>
+          <a:prstGeom prst="rect">
+            <a:avLst/>
+          </a:prstGeom>
+          <a:solidFill>
+            <a:srgbClr val="0F2D52"/>
+          </a:solidFill>
+          <a:ln>
+            <a:noFill/>
+          </a:ln>
+        </p:spPr>
+        <p:style>
+          <a:lnRef idx="1">
+            <a:schemeClr val="accent1"/>
+          </a:lnRef>
+          <a:fillRef idx="3">
+            <a:schemeClr val="accent1"/>
+          </a:fillRef>
+          <a:effectRef idx="2">
+            <a:schemeClr val="accent1"/>
+          </a:effectRef>
+          <a:fontRef idx="minor">
+            <a:schemeClr val="lt1"/>
+          </a:fontRef>
+        </p:style>
+        <p:txBody>
+          <a:bodyPr rtlCol="0" anchor="ctr"/>
+          <a:lstStyle/>
+          <a:p>
+            <a:pPr algn="ctr"/>
+          </a:p>
+        </p:txBody>
+      </p:sp>
+      <p:sp>
+        <p:nvSpPr>
+          <p:cNvPr id="3" name="TextBox 2"/>
+          <p:cNvSpPr txBox="1"/>
+          <p:nvPr/>
+        </p:nvSpPr>
+        <p:spPr>
+          <a:xfrm>
+            <a:off x="457200" y="164592"/>
+            <a:ext cx="10972800" cy="502920"/>
+          </a:xfrm>
+          <a:prstGeom prst="rect">
+            <a:avLst/>
+          </a:prstGeom>
+          <a:noFill/>
+        </p:spPr>
+        <p:txBody>
+          <a:bodyPr wrap="square" lIns="45720" rIns="45720" tIns="18288" bIns="18288" anchor="ctr">
+            <a:spAutoFit/>
+          </a:bodyPr>
+          <a:lstStyle/>
+          <a:p>
+            <a:pPr algn="l"/>
+            <a:r>
+              <a:rPr sz="2400" b="1" i="0">
+                <a:solidFill>
+                  <a:srgbClr val="FFFFFF"/>
+                </a:solidFill>
+                <a:latin typeface="Calibri"/>
+              </a:rPr>
+              <a:t>📌  Cosa portare a casa</a:t>
+            </a:r>
+          </a:p>
+        </p:txBody>
+      </p:sp>
+      <p:sp>
+        <p:nvSpPr>
+          <p:cNvPr id="4" name="Oval 3"/>
+          <p:cNvSpPr/>
+          <p:nvPr/>
+        </p:nvSpPr>
+        <p:spPr>
+          <a:xfrm>
+            <a:off x="914400" y="1440180"/>
+            <a:ext cx="777240" cy="777240"/>
+          </a:xfrm>
+          <a:prstGeom prst="ellipse">
+            <a:avLst/>
+          </a:prstGeom>
+          <a:solidFill>
+            <a:srgbClr val="00A0B0"/>
+          </a:solidFill>
+          <a:ln>
+            <a:noFill/>
+          </a:ln>
+        </p:spPr>
+        <p:style>
+          <a:lnRef idx="1">
+            <a:schemeClr val="accent1"/>
+          </a:lnRef>
+          <a:fillRef idx="3">
+            <a:schemeClr val="accent1"/>
+          </a:fillRef>
+          <a:effectRef idx="2">
+            <a:schemeClr val="accent1"/>
+          </a:effectRef>
+          <a:fontRef idx="minor">
+            <a:schemeClr val="lt1"/>
+          </a:fontRef>
+        </p:style>
+        <p:txBody>
+          <a:bodyPr rtlCol="0" anchor="ctr"/>
+          <a:lstStyle/>
+          <a:p>
+            <a:pPr algn="ctr"/>
+          </a:p>
+        </p:txBody>
+      </p:sp>
+      <p:sp>
+        <p:nvSpPr>
+          <p:cNvPr id="5" name="TextBox 4"/>
+          <p:cNvSpPr txBox="1"/>
+          <p:nvPr/>
+        </p:nvSpPr>
+        <p:spPr>
+          <a:xfrm>
+            <a:off x="914400" y="1440180"/>
+            <a:ext cx="777240" cy="777240"/>
+          </a:xfrm>
+          <a:prstGeom prst="rect">
+            <a:avLst/>
+          </a:prstGeom>
+          <a:noFill/>
+        </p:spPr>
+        <p:txBody>
+          <a:bodyPr wrap="square" lIns="45720" rIns="45720" tIns="18288" bIns="18288" anchor="ctr">
+            <a:spAutoFit/>
+          </a:bodyPr>
+          <a:lstStyle/>
+          <a:p>
+            <a:pPr algn="ctr"/>
+            <a:r>
+              <a:rPr sz="2800" b="1" i="0">
+                <a:solidFill>
+                  <a:srgbClr val="FFFFFF"/>
+                </a:solidFill>
+                <a:latin typeface="Calibri"/>
+              </a:rPr>
+              <a:t>1</a:t>
+            </a:r>
+          </a:p>
+        </p:txBody>
+      </p:sp>
+      <p:sp>
+        <p:nvSpPr>
+          <p:cNvPr id="6" name="Rounded Rectangle 5"/>
+          <p:cNvSpPr/>
+          <p:nvPr/>
+        </p:nvSpPr>
+        <p:spPr>
+          <a:xfrm>
+            <a:off x="2011680" y="1440180"/>
+            <a:ext cx="9144000" cy="777240"/>
+          </a:xfrm>
+          <a:prstGeom prst="roundRect">
+            <a:avLst>
+              <a:gd name="adj" fmla="val 8000"/>
+            </a:avLst>
+          </a:prstGeom>
+          <a:solidFill>
+            <a:srgbClr val="FBFBFD"/>
+          </a:solidFill>
+          <a:ln w="19050">
+            <a:solidFill>
+              <a:srgbClr val="00A0B0"/>
+            </a:solidFill>
+          </a:ln>
+        </p:spPr>
+        <p:style>
+          <a:lnRef idx="1">
+            <a:schemeClr val="accent1"/>
+          </a:lnRef>
+          <a:fillRef idx="3">
+            <a:schemeClr val="accent1"/>
+          </a:fillRef>
+          <a:effectRef idx="2">
+            <a:schemeClr val="accent1"/>
+          </a:effectRef>
+          <a:fontRef idx="minor">
+            <a:schemeClr val="lt1"/>
+          </a:fontRef>
+        </p:style>
+        <p:txBody>
+          <a:bodyPr rtlCol="0" anchor="ctr"/>
+          <a:lstStyle/>
+          <a:p>
+            <a:pPr algn="ctr"/>
+          </a:p>
+        </p:txBody>
+      </p:sp>
+      <p:sp>
+        <p:nvSpPr>
+          <p:cNvPr id="7" name="TextBox 6"/>
+          <p:cNvSpPr txBox="1"/>
+          <p:nvPr/>
+        </p:nvSpPr>
+        <p:spPr>
+          <a:xfrm>
+            <a:off x="2286000" y="1440180"/>
+            <a:ext cx="8686800" cy="777240"/>
+          </a:xfrm>
+          <a:prstGeom prst="rect">
+            <a:avLst/>
+          </a:prstGeom>
+          <a:noFill/>
+        </p:spPr>
+        <p:txBody>
+          <a:bodyPr wrap="square" lIns="45720" rIns="45720" tIns="18288" bIns="18288" anchor="ctr">
+            <a:spAutoFit/>
+          </a:bodyPr>
+          <a:lstStyle/>
+          <a:p>
+            <a:pPr algn="l"/>
+            <a:r>
+              <a:rPr sz="1800" b="0" i="0">
+                <a:solidFill>
+                  <a:srgbClr val="1A1A2E"/>
+                </a:solidFill>
+                <a:latin typeface="Calibri"/>
+              </a:rPr>
+              <a:t>SQLi è la #1 dal 2003: Equifax, Heartland, TalkTalk</a:t>
+            </a:r>
+          </a:p>
+        </p:txBody>
+      </p:sp>
+      <p:sp>
+        <p:nvSpPr>
+          <p:cNvPr id="8" name="Oval 7"/>
+          <p:cNvSpPr/>
+          <p:nvPr/>
+        </p:nvSpPr>
+        <p:spPr>
+          <a:xfrm>
+            <a:off x="914400" y="2354580"/>
+            <a:ext cx="777240" cy="777240"/>
+          </a:xfrm>
+          <a:prstGeom prst="ellipse">
+            <a:avLst/>
+          </a:prstGeom>
+          <a:solidFill>
+            <a:srgbClr val="00A0B0"/>
+          </a:solidFill>
+          <a:ln>
+            <a:noFill/>
+          </a:ln>
+        </p:spPr>
+        <p:style>
+          <a:lnRef idx="1">
+            <a:schemeClr val="accent1"/>
+          </a:lnRef>
+          <a:fillRef idx="3">
+            <a:schemeClr val="accent1"/>
+          </a:fillRef>
+          <a:effectRef idx="2">
+            <a:schemeClr val="accent1"/>
+          </a:effectRef>
+          <a:fontRef idx="minor">
+            <a:schemeClr val="lt1"/>
+          </a:fontRef>
+        </p:style>
+        <p:txBody>
+          <a:bodyPr rtlCol="0" anchor="ctr"/>
+          <a:lstStyle/>
+          <a:p>
+            <a:pPr algn="ctr"/>
+          </a:p>
+        </p:txBody>
+      </p:sp>
+      <p:sp>
+        <p:nvSpPr>
+          <p:cNvPr id="9" name="TextBox 8"/>
+          <p:cNvSpPr txBox="1"/>
+          <p:nvPr/>
+        </p:nvSpPr>
+        <p:spPr>
+          <a:xfrm>
+            <a:off x="914400" y="2354580"/>
+            <a:ext cx="777240" cy="777240"/>
+          </a:xfrm>
+          <a:prstGeom prst="rect">
+            <a:avLst/>
+          </a:prstGeom>
+          <a:noFill/>
+        </p:spPr>
+        <p:txBody>
+          <a:bodyPr wrap="square" lIns="45720" rIns="45720" tIns="18288" bIns="18288" anchor="ctr">
+            <a:spAutoFit/>
+          </a:bodyPr>
+          <a:lstStyle/>
+          <a:p>
+            <a:pPr algn="ctr"/>
+            <a:r>
+              <a:rPr sz="2800" b="1" i="0">
+                <a:solidFill>
+                  <a:srgbClr val="FFFFFF"/>
+                </a:solidFill>
+                <a:latin typeface="Calibri"/>
+              </a:rPr>
+              <a:t>2</a:t>
+            </a:r>
+          </a:p>
+        </p:txBody>
+      </p:sp>
+      <p:sp>
+        <p:nvSpPr>
+          <p:cNvPr id="10" name="Rounded Rectangle 9"/>
+          <p:cNvSpPr/>
+          <p:nvPr/>
+        </p:nvSpPr>
+        <p:spPr>
+          <a:xfrm>
+            <a:off x="2011680" y="2354580"/>
+            <a:ext cx="9144000" cy="777240"/>
+          </a:xfrm>
+          <a:prstGeom prst="roundRect">
+            <a:avLst>
+              <a:gd name="adj" fmla="val 8000"/>
+            </a:avLst>
+          </a:prstGeom>
+          <a:solidFill>
+            <a:srgbClr val="FBFBFD"/>
+          </a:solidFill>
+          <a:ln w="19050">
+            <a:solidFill>
+              <a:srgbClr val="00A0B0"/>
+            </a:solidFill>
+          </a:ln>
+        </p:spPr>
+        <p:style>
+          <a:lnRef idx="1">
+            <a:schemeClr val="accent1"/>
+          </a:lnRef>
+          <a:fillRef idx="3">
+            <a:schemeClr val="accent1"/>
+          </a:fillRef>
+          <a:effectRef idx="2">
+            <a:schemeClr val="accent1"/>
+          </a:effectRef>
+          <a:fontRef idx="minor">
+            <a:schemeClr val="lt1"/>
+          </a:fontRef>
+        </p:style>
+        <p:txBody>
+          <a:bodyPr rtlCol="0" anchor="ctr"/>
+          <a:lstStyle/>
+          <a:p>
+            <a:pPr algn="ctr"/>
+          </a:p>
+        </p:txBody>
+      </p:sp>
+      <p:sp>
+        <p:nvSpPr>
+          <p:cNvPr id="11" name="TextBox 10"/>
+          <p:cNvSpPr txBox="1"/>
+          <p:nvPr/>
+        </p:nvSpPr>
+        <p:spPr>
+          <a:xfrm>
+            <a:off x="2286000" y="2354580"/>
+            <a:ext cx="8686800" cy="777240"/>
+          </a:xfrm>
+          <a:prstGeom prst="rect">
+            <a:avLst/>
+          </a:prstGeom>
+          <a:noFill/>
+        </p:spPr>
+        <p:txBody>
+          <a:bodyPr wrap="square" lIns="45720" rIns="45720" tIns="18288" bIns="18288" anchor="ctr">
+            <a:spAutoFit/>
+          </a:bodyPr>
+          <a:lstStyle/>
+          <a:p>
+            <a:pPr algn="l"/>
+            <a:r>
+              <a:rPr sz="1800" b="0" i="0">
+                <a:solidFill>
+                  <a:srgbClr val="1A1A2E"/>
+                </a:solidFill>
+                <a:latin typeface="Calibri"/>
+              </a:rPr>
+              <a:t>Mai f-string in SQL. Mai concatenazione. Sempre placeholder ?</a:t>
+            </a:r>
+          </a:p>
+        </p:txBody>
+      </p:sp>
+      <p:sp>
+        <p:nvSpPr>
+          <p:cNvPr id="12" name="Oval 11"/>
+          <p:cNvSpPr/>
+          <p:nvPr/>
+        </p:nvSpPr>
+        <p:spPr>
+          <a:xfrm>
+            <a:off x="914400" y="3268980"/>
+            <a:ext cx="777240" cy="777240"/>
+          </a:xfrm>
+          <a:prstGeom prst="ellipse">
+            <a:avLst/>
+          </a:prstGeom>
+          <a:solidFill>
+            <a:srgbClr val="00A0B0"/>
+          </a:solidFill>
+          <a:ln>
+            <a:noFill/>
+          </a:ln>
+        </p:spPr>
+        <p:style>
+          <a:lnRef idx="1">
+            <a:schemeClr val="accent1"/>
+          </a:lnRef>
+          <a:fillRef idx="3">
+            <a:schemeClr val="accent1"/>
+          </a:fillRef>
+          <a:effectRef idx="2">
+            <a:schemeClr val="accent1"/>
+          </a:effectRef>
+          <a:fontRef idx="minor">
+            <a:schemeClr val="lt1"/>
+          </a:fontRef>
+        </p:style>
+        <p:txBody>
+          <a:bodyPr rtlCol="0" anchor="ctr"/>
+          <a:lstStyle/>
+          <a:p>
+            <a:pPr algn="ctr"/>
+          </a:p>
+        </p:txBody>
+      </p:sp>
+      <p:sp>
+        <p:nvSpPr>
+          <p:cNvPr id="13" name="TextBox 12"/>
+          <p:cNvSpPr txBox="1"/>
+          <p:nvPr/>
+        </p:nvSpPr>
+        <p:spPr>
+          <a:xfrm>
+            <a:off x="914400" y="3268980"/>
+            <a:ext cx="777240" cy="777240"/>
+          </a:xfrm>
+          <a:prstGeom prst="rect">
+            <a:avLst/>
+          </a:prstGeom>
+          <a:noFill/>
+        </p:spPr>
+        <p:txBody>
+          <a:bodyPr wrap="square" lIns="45720" rIns="45720" tIns="18288" bIns="18288" anchor="ctr">
+            <a:spAutoFit/>
+          </a:bodyPr>
+          <a:lstStyle/>
+          <a:p>
+            <a:pPr algn="ctr"/>
+            <a:r>
+              <a:rPr sz="2800" b="1" i="0">
+                <a:solidFill>
+                  <a:srgbClr val="FFFFFF"/>
+                </a:solidFill>
+                <a:latin typeface="Calibri"/>
+              </a:rPr>
+              <a:t>3</a:t>
+            </a:r>
+          </a:p>
+        </p:txBody>
+      </p:sp>
+      <p:sp>
+        <p:nvSpPr>
+          <p:cNvPr id="14" name="Rounded Rectangle 13"/>
+          <p:cNvSpPr/>
+          <p:nvPr/>
+        </p:nvSpPr>
+        <p:spPr>
+          <a:xfrm>
+            <a:off x="2011680" y="3268980"/>
+            <a:ext cx="9144000" cy="777240"/>
+          </a:xfrm>
+          <a:prstGeom prst="roundRect">
+            <a:avLst>
+              <a:gd name="adj" fmla="val 8000"/>
+            </a:avLst>
+          </a:prstGeom>
+          <a:solidFill>
+            <a:srgbClr val="FBFBFD"/>
+          </a:solidFill>
+          <a:ln w="19050">
+            <a:solidFill>
+              <a:srgbClr val="00A0B0"/>
+            </a:solidFill>
+          </a:ln>
+        </p:spPr>
+        <p:style>
+          <a:lnRef idx="1">
+            <a:schemeClr val="accent1"/>
+          </a:lnRef>
+          <a:fillRef idx="3">
+            <a:schemeClr val="accent1"/>
+          </a:fillRef>
+          <a:effectRef idx="2">
+            <a:schemeClr val="accent1"/>
+          </a:effectRef>
+          <a:fontRef idx="minor">
+            <a:schemeClr val="lt1"/>
+          </a:fontRef>
+        </p:style>
+        <p:txBody>
+          <a:bodyPr rtlCol="0" anchor="ctr"/>
+          <a:lstStyle/>
+          <a:p>
+            <a:pPr algn="ctr"/>
+          </a:p>
+        </p:txBody>
+      </p:sp>
+      <p:sp>
+        <p:nvSpPr>
+          <p:cNvPr id="15" name="TextBox 14"/>
+          <p:cNvSpPr txBox="1"/>
+          <p:nvPr/>
+        </p:nvSpPr>
+        <p:spPr>
+          <a:xfrm>
+            <a:off x="2286000" y="3268980"/>
+            <a:ext cx="8686800" cy="777240"/>
+          </a:xfrm>
+          <a:prstGeom prst="rect">
+            <a:avLst/>
+          </a:prstGeom>
+          <a:noFill/>
+        </p:spPr>
+        <p:txBody>
+          <a:bodyPr wrap="square" lIns="45720" rIns="45720" tIns="18288" bIns="18288" anchor="ctr">
+            <a:spAutoFit/>
+          </a:bodyPr>
+          <a:lstStyle/>
+          <a:p>
+            <a:pPr algn="l"/>
+            <a:r>
+              <a:rPr sz="1800" b="0" i="0">
+                <a:solidFill>
+                  <a:srgbClr val="1A1A2E"/>
+                </a:solidFill>
+                <a:latin typeface="Calibri"/>
+              </a:rPr>
+              <a:t>Filtrare gli apici è una strategia perdente</a:t>
+            </a:r>
+          </a:p>
+        </p:txBody>
+      </p:sp>
+      <p:sp>
+        <p:nvSpPr>
+          <p:cNvPr id="16" name="Oval 15"/>
+          <p:cNvSpPr/>
+          <p:nvPr/>
+        </p:nvSpPr>
+        <p:spPr>
+          <a:xfrm>
+            <a:off x="914400" y="4183380"/>
+            <a:ext cx="777240" cy="777240"/>
+          </a:xfrm>
+          <a:prstGeom prst="ellipse">
+            <a:avLst/>
+          </a:prstGeom>
+          <a:solidFill>
+            <a:srgbClr val="00A0B0"/>
+          </a:solidFill>
+          <a:ln>
+            <a:noFill/>
+          </a:ln>
+        </p:spPr>
+        <p:style>
+          <a:lnRef idx="1">
+            <a:schemeClr val="accent1"/>
+          </a:lnRef>
+          <a:fillRef idx="3">
+            <a:schemeClr val="accent1"/>
+          </a:fillRef>
+          <a:effectRef idx="2">
+            <a:schemeClr val="accent1"/>
+          </a:effectRef>
+          <a:fontRef idx="minor">
+            <a:schemeClr val="lt1"/>
+          </a:fontRef>
+        </p:style>
+        <p:txBody>
+          <a:bodyPr rtlCol="0" anchor="ctr"/>
+          <a:lstStyle/>
+          <a:p>
+            <a:pPr algn="ctr"/>
+          </a:p>
+        </p:txBody>
+      </p:sp>
+      <p:sp>
+        <p:nvSpPr>
+          <p:cNvPr id="17" name="TextBox 16"/>
+          <p:cNvSpPr txBox="1"/>
+          <p:nvPr/>
+        </p:nvSpPr>
+        <p:spPr>
+          <a:xfrm>
+            <a:off x="914400" y="4183380"/>
+            <a:ext cx="777240" cy="777240"/>
+          </a:xfrm>
+          <a:prstGeom prst="rect">
+            <a:avLst/>
+          </a:prstGeom>
+          <a:noFill/>
+        </p:spPr>
+        <p:txBody>
+          <a:bodyPr wrap="square" lIns="45720" rIns="45720" tIns="18288" bIns="18288" anchor="ctr">
+            <a:spAutoFit/>
+          </a:bodyPr>
+          <a:lstStyle/>
+          <a:p>
+            <a:pPr algn="ctr"/>
+            <a:r>
+              <a:rPr sz="2800" b="1" i="0">
+                <a:solidFill>
+                  <a:srgbClr val="FFFFFF"/>
+                </a:solidFill>
+                <a:latin typeface="Calibri"/>
+              </a:rPr>
+              <a:t>4</a:t>
+            </a:r>
+          </a:p>
+        </p:txBody>
+      </p:sp>
+      <p:sp>
+        <p:nvSpPr>
+          <p:cNvPr id="18" name="Rounded Rectangle 17"/>
+          <p:cNvSpPr/>
+          <p:nvPr/>
+        </p:nvSpPr>
+        <p:spPr>
+          <a:xfrm>
+            <a:off x="2011680" y="4183380"/>
+            <a:ext cx="9144000" cy="777240"/>
+          </a:xfrm>
+          <a:prstGeom prst="roundRect">
+            <a:avLst>
+              <a:gd name="adj" fmla="val 8000"/>
+            </a:avLst>
+          </a:prstGeom>
+          <a:solidFill>
+            <a:srgbClr val="FBFBFD"/>
+          </a:solidFill>
+          <a:ln w="19050">
+            <a:solidFill>
+              <a:srgbClr val="00A0B0"/>
+            </a:solidFill>
+          </a:ln>
+        </p:spPr>
+        <p:style>
+          <a:lnRef idx="1">
+            <a:schemeClr val="accent1"/>
+          </a:lnRef>
+          <a:fillRef idx="3">
+            <a:schemeClr val="accent1"/>
+          </a:fillRef>
+          <a:effectRef idx="2">
+            <a:schemeClr val="accent1"/>
+          </a:effectRef>
+          <a:fontRef idx="minor">
+            <a:schemeClr val="lt1"/>
+          </a:fontRef>
+        </p:style>
+        <p:txBody>
+          <a:bodyPr rtlCol="0" anchor="ctr"/>
+          <a:lstStyle/>
+          <a:p>
+            <a:pPr algn="ctr"/>
+          </a:p>
+        </p:txBody>
+      </p:sp>
+      <p:sp>
+        <p:nvSpPr>
+          <p:cNvPr id="19" name="TextBox 18"/>
+          <p:cNvSpPr txBox="1"/>
+          <p:nvPr/>
+        </p:nvSpPr>
+        <p:spPr>
+          <a:xfrm>
+            <a:off x="2286000" y="4183380"/>
+            <a:ext cx="8686800" cy="777240"/>
+          </a:xfrm>
+          <a:prstGeom prst="rect">
+            <a:avLst/>
+          </a:prstGeom>
+          <a:noFill/>
+        </p:spPr>
+        <p:txBody>
+          <a:bodyPr wrap="square" lIns="45720" rIns="45720" tIns="18288" bIns="18288" anchor="ctr">
+            <a:spAutoFit/>
+          </a:bodyPr>
+          <a:lstStyle/>
+          <a:p>
+            <a:pPr algn="l"/>
+            <a:r>
+              <a:rPr sz="1800" b="0" i="0">
+                <a:solidFill>
+                  <a:srgbClr val="1A1A2E"/>
+                </a:solidFill>
+                <a:latin typeface="Calibri"/>
+              </a:rPr>
+              <a:t>ORM è più sicuro per default</a:t>
+            </a:r>
+          </a:p>
+        </p:txBody>
+      </p:sp>
+      <p:sp>
+        <p:nvSpPr>
+          <p:cNvPr id="20" name="Oval 19"/>
+          <p:cNvSpPr/>
+          <p:nvPr/>
+        </p:nvSpPr>
+        <p:spPr>
+          <a:xfrm>
+            <a:off x="914400" y="5097780"/>
+            <a:ext cx="777240" cy="777240"/>
+          </a:xfrm>
+          <a:prstGeom prst="ellipse">
+            <a:avLst/>
+          </a:prstGeom>
+          <a:solidFill>
+            <a:srgbClr val="00A0B0"/>
+          </a:solidFill>
+          <a:ln>
+            <a:noFill/>
+          </a:ln>
+        </p:spPr>
+        <p:style>
+          <a:lnRef idx="1">
+            <a:schemeClr val="accent1"/>
+          </a:lnRef>
+          <a:fillRef idx="3">
+            <a:schemeClr val="accent1"/>
+          </a:fillRef>
+          <a:effectRef idx="2">
+            <a:schemeClr val="accent1"/>
+          </a:effectRef>
+          <a:fontRef idx="minor">
+            <a:schemeClr val="lt1"/>
+          </a:fontRef>
+        </p:style>
+        <p:txBody>
+          <a:bodyPr rtlCol="0" anchor="ctr"/>
+          <a:lstStyle/>
+          <a:p>
+            <a:pPr algn="ctr"/>
+          </a:p>
+        </p:txBody>
+      </p:sp>
+      <p:sp>
+        <p:nvSpPr>
+          <p:cNvPr id="21" name="TextBox 20"/>
+          <p:cNvSpPr txBox="1"/>
+          <p:nvPr/>
+        </p:nvSpPr>
+        <p:spPr>
+          <a:xfrm>
+            <a:off x="914400" y="5097780"/>
+            <a:ext cx="777240" cy="777240"/>
+          </a:xfrm>
+          <a:prstGeom prst="rect">
+            <a:avLst/>
+          </a:prstGeom>
+          <a:noFill/>
+        </p:spPr>
+        <p:txBody>
+          <a:bodyPr wrap="square" lIns="45720" rIns="45720" tIns="18288" bIns="18288" anchor="ctr">
+            <a:spAutoFit/>
+          </a:bodyPr>
+          <a:lstStyle/>
+          <a:p>
+            <a:pPr algn="ctr"/>
+            <a:r>
+              <a:rPr sz="2800" b="1" i="0">
+                <a:solidFill>
+                  <a:srgbClr val="FFFFFF"/>
+                </a:solidFill>
+                <a:latin typeface="Calibri"/>
+              </a:rPr>
+              <a:t>5</a:t>
+            </a:r>
+          </a:p>
+        </p:txBody>
+      </p:sp>
+      <p:sp>
+        <p:nvSpPr>
+          <p:cNvPr id="22" name="Rounded Rectangle 21"/>
+          <p:cNvSpPr/>
+          <p:nvPr/>
+        </p:nvSpPr>
+        <p:spPr>
+          <a:xfrm>
+            <a:off x="2011680" y="5097780"/>
+            <a:ext cx="9144000" cy="777240"/>
+          </a:xfrm>
+          <a:prstGeom prst="roundRect">
+            <a:avLst>
+              <a:gd name="adj" fmla="val 8000"/>
+            </a:avLst>
+          </a:prstGeom>
+          <a:solidFill>
+            <a:srgbClr val="FBFBFD"/>
+          </a:solidFill>
+          <a:ln w="19050">
+            <a:solidFill>
+              <a:srgbClr val="00A0B0"/>
+            </a:solidFill>
+          </a:ln>
+        </p:spPr>
+        <p:style>
+          <a:lnRef idx="1">
+            <a:schemeClr val="accent1"/>
+          </a:lnRef>
+          <a:fillRef idx="3">
+            <a:schemeClr val="accent1"/>
+          </a:fillRef>
+          <a:effectRef idx="2">
+            <a:schemeClr val="accent1"/>
+          </a:effectRef>
+          <a:fontRef idx="minor">
+            <a:schemeClr val="lt1"/>
+          </a:fontRef>
+        </p:style>
+        <p:txBody>
+          <a:bodyPr rtlCol="0" anchor="ctr"/>
+          <a:lstStyle/>
+          <a:p>
+            <a:pPr algn="ctr"/>
+          </a:p>
+        </p:txBody>
+      </p:sp>
+      <p:sp>
+        <p:nvSpPr>
+          <p:cNvPr id="23" name="TextBox 22"/>
+          <p:cNvSpPr txBox="1"/>
+          <p:nvPr/>
+        </p:nvSpPr>
+        <p:spPr>
+          <a:xfrm>
+            <a:off x="2286000" y="5097780"/>
+            <a:ext cx="8686800" cy="777240"/>
+          </a:xfrm>
+          <a:prstGeom prst="rect">
+            <a:avLst/>
+          </a:prstGeom>
+          <a:noFill/>
+        </p:spPr>
+        <p:txBody>
+          <a:bodyPr wrap="square" lIns="45720" rIns="45720" tIns="18288" bIns="18288" anchor="ctr">
+            <a:spAutoFit/>
+          </a:bodyPr>
+          <a:lstStyle/>
+          <a:p>
+            <a:pPr algn="l"/>
+            <a:r>
+              <a:rPr sz="1800" b="0" i="0">
+                <a:solidFill>
+                  <a:srgbClr val="1A1A2E"/>
+                </a:solidFill>
+                <a:latin typeface="Calibri"/>
+              </a:rPr>
+              <a:t>Difese stratificate: 7 livelli di protezione</a:t>
+            </a:r>
+          </a:p>
+        </p:txBody>
+      </p:sp>
+      <p:cxnSp>
+        <p:nvCxnSpPr>
+          <p:cNvPr id="24" name="Connector 23"/>
+          <p:cNvCxnSpPr/>
+          <p:nvPr/>
+        </p:nvCxnSpPr>
+        <p:spPr>
+          <a:xfrm>
+            <a:off x="457200" y="6446520"/>
+            <a:ext cx="11274552" cy="0"/>
+          </a:xfrm>
+          <a:prstGeom prst="line">
+            <a:avLst/>
+          </a:prstGeom>
+          <a:ln w="19050">
+            <a:solidFill>
+              <a:srgbClr val="00A0B0"/>
+            </a:solidFill>
+          </a:ln>
+        </p:spPr>
+        <p:style>
+          <a:lnRef idx="2">
+            <a:schemeClr val="accent1"/>
+          </a:lnRef>
+          <a:fillRef idx="0">
+            <a:schemeClr val="accent1"/>
+          </a:fillRef>
+          <a:effectRef idx="1">
+            <a:schemeClr val="accent1"/>
+          </a:effectRef>
+          <a:fontRef idx="minor">
+            <a:schemeClr val="tx1"/>
+          </a:fontRef>
+        </p:style>
+      </p:cxnSp>
+      <p:sp>
+        <p:nvSpPr>
+          <p:cNvPr id="25" name="TextBox 24"/>
+          <p:cNvSpPr txBox="1"/>
+          <p:nvPr/>
+        </p:nvSpPr>
+        <p:spPr>
+          <a:xfrm>
+            <a:off x="457200" y="6473952"/>
+            <a:ext cx="7315200" cy="292608"/>
+          </a:xfrm>
+          <a:prstGeom prst="rect">
+            <a:avLst/>
+          </a:prstGeom>
+          <a:noFill/>
+        </p:spPr>
+        <p:txBody>
+          <a:bodyPr wrap="square" lIns="45720" rIns="45720" tIns="18288" bIns="18288" anchor="t">
+            <a:spAutoFit/>
+          </a:bodyPr>
+          <a:lstStyle/>
+          <a:p>
+            <a:pPr algn="l"/>
+            <a:r>
+              <a:rPr sz="1000" b="0" i="0">
+                <a:solidFill>
+                  <a:srgbClr val="6B7280"/>
+                </a:solidFill>
+                <a:latin typeface="Calibri"/>
+              </a:rPr>
+              <a:t>Secure Coding · Corso IFTS STEM · A. Manneschi · 2024/2025</a:t>
+            </a:r>
+          </a:p>
+        </p:txBody>
+      </p:sp>
+      <p:sp>
+        <p:nvSpPr>
+          <p:cNvPr id="26" name="TextBox 25"/>
+          <p:cNvSpPr txBox="1"/>
+          <p:nvPr/>
+        </p:nvSpPr>
+        <p:spPr>
+          <a:xfrm>
+            <a:off x="10515600" y="6473952"/>
+            <a:ext cx="1188720" cy="292608"/>
           </a:xfrm>
           <a:prstGeom prst="rect">
             <a:avLst/>
@@ -5334,13 +5578,13 @@
         <p:spPr>
           <a:xfrm>
             <a:off x="0" y="0"/>
-            <a:ext cx="12191695" cy="777240"/>
+            <a:ext cx="4114800" cy="6858000"/>
           </a:xfrm>
           <a:prstGeom prst="rect">
             <a:avLst/>
           </a:prstGeom>
           <a:solidFill>
-            <a:srgbClr val="0F2D52"/>
+            <a:srgbClr val="081B33"/>
           </a:solidFill>
           <a:ln>
             <a:noFill/>
@@ -5370,14 +5614,100 @@
       </p:sp>
       <p:sp>
         <p:nvSpPr>
-          <p:cNvPr id="3" name="TextBox 2"/>
+          <p:cNvPr id="3" name="Rectangle 2"/>
+          <p:cNvSpPr/>
+          <p:nvPr/>
+        </p:nvSpPr>
+        <p:spPr>
+          <a:xfrm>
+            <a:off x="4114800" y="0"/>
+            <a:ext cx="8046720" cy="6858000"/>
+          </a:xfrm>
+          <a:prstGeom prst="rect">
+            <a:avLst/>
+          </a:prstGeom>
+          <a:solidFill>
+            <a:srgbClr val="F1F4F8"/>
+          </a:solidFill>
+          <a:ln>
+            <a:noFill/>
+          </a:ln>
+        </p:spPr>
+        <p:style>
+          <a:lnRef idx="1">
+            <a:schemeClr val="accent1"/>
+          </a:lnRef>
+          <a:fillRef idx="3">
+            <a:schemeClr val="accent1"/>
+          </a:fillRef>
+          <a:effectRef idx="2">
+            <a:schemeClr val="accent1"/>
+          </a:effectRef>
+          <a:fontRef idx="minor">
+            <a:schemeClr val="lt1"/>
+          </a:fontRef>
+        </p:style>
+        <p:txBody>
+          <a:bodyPr rtlCol="0" anchor="ctr"/>
+          <a:lstStyle/>
+          <a:p>
+            <a:pPr algn="ctr"/>
+          </a:p>
+        </p:txBody>
+      </p:sp>
+      <p:sp>
+        <p:nvSpPr>
+          <p:cNvPr id="4" name="Rectangle 3"/>
+          <p:cNvSpPr/>
+          <p:nvPr/>
+        </p:nvSpPr>
+        <p:spPr>
+          <a:xfrm>
+            <a:off x="4114800" y="0"/>
+            <a:ext cx="137160" cy="6858000"/>
+          </a:xfrm>
+          <a:prstGeom prst="rect">
+            <a:avLst/>
+          </a:prstGeom>
+          <a:solidFill>
+            <a:srgbClr val="00A0B0"/>
+          </a:solidFill>
+          <a:ln>
+            <a:noFill/>
+          </a:ln>
+        </p:spPr>
+        <p:style>
+          <a:lnRef idx="1">
+            <a:schemeClr val="accent1"/>
+          </a:lnRef>
+          <a:fillRef idx="3">
+            <a:schemeClr val="accent1"/>
+          </a:fillRef>
+          <a:effectRef idx="2">
+            <a:schemeClr val="accent1"/>
+          </a:effectRef>
+          <a:fontRef idx="minor">
+            <a:schemeClr val="lt1"/>
+          </a:fontRef>
+        </p:style>
+        <p:txBody>
+          <a:bodyPr rtlCol="0" anchor="ctr"/>
+          <a:lstStyle/>
+          <a:p>
+            <a:pPr algn="ctr"/>
+          </a:p>
+        </p:txBody>
+      </p:sp>
+      <p:sp>
+        <p:nvSpPr>
+          <p:cNvPr id="5" name="TextBox 4"/>
           <p:cNvSpPr txBox="1"/>
           <p:nvPr/>
         </p:nvSpPr>
         <p:spPr>
           <a:xfrm>
-            <a:off x="457200" y="164592"/>
-            <a:ext cx="10972800" cy="502920"/>
+            <a:off x="274320" y="2103120"/>
+            <a:ext cx="3657600" cy="2286000"/>
           </a:xfrm>
           <a:prstGeom prst="rect">
             <a:avLst/>
@@ -5385,34 +5715,34 @@
           <a:noFill/>
         </p:spPr>
         <p:txBody>
-          <a:bodyPr wrap="square" lIns="45720" rIns="45720" tIns="18288" bIns="18288" anchor="ctr">
+          <a:bodyPr wrap="square" lIns="45720" rIns="45720" tIns="18288" bIns="18288" anchor="t">
             <a:spAutoFit/>
           </a:bodyPr>
           <a:lstStyle/>
           <a:p>
-            <a:pPr algn="l"/>
-            <a:r>
-              <a:rPr sz="2400" b="1" i="0">
-                <a:solidFill>
-                  <a:srgbClr val="FFFFFF"/>
-                </a:solidFill>
-                <a:latin typeface="Calibri"/>
-              </a:rPr>
-              <a:t>Difese in profondità</a:t>
-            </a:r>
-          </a:p>
-        </p:txBody>
-      </p:sp>
-      <p:sp>
-        <p:nvSpPr>
-          <p:cNvPr id="4" name="TextBox 3"/>
+            <a:pPr algn="ctr"/>
+            <a:r>
+              <a:rPr sz="17000" b="1" i="0">
+                <a:solidFill>
+                  <a:srgbClr val="00A0B0"/>
+                </a:solidFill>
+                <a:latin typeface="Calibri"/>
+              </a:rPr>
+              <a:t>03</a:t>
+            </a:r>
+          </a:p>
+        </p:txBody>
+      </p:sp>
+      <p:sp>
+        <p:nvSpPr>
+          <p:cNvPr id="6" name="TextBox 5"/>
           <p:cNvSpPr txBox="1"/>
           <p:nvPr/>
         </p:nvSpPr>
         <p:spPr>
           <a:xfrm>
-            <a:off x="640080" y="1005840"/>
-            <a:ext cx="10972800" cy="5029200"/>
+            <a:off x="274320" y="4572000"/>
+            <a:ext cx="3657600" cy="457200"/>
           </a:xfrm>
           <a:prstGeom prst="rect">
             <a:avLst/>
@@ -5420,190 +5750,97 @@
           <a:noFill/>
         </p:spPr>
         <p:txBody>
-          <a:bodyPr wrap="square">
+          <a:bodyPr wrap="square" lIns="45720" rIns="45720" tIns="18288" bIns="18288" anchor="t">
             <a:spAutoFit/>
           </a:bodyPr>
           <a:lstStyle/>
           <a:p>
-            <a:pPr>
-              <a:lnSpc>
-                <a:spcPct val="150000"/>
-              </a:lnSpc>
-            </a:pPr>
-            <a:r>
-              <a:rPr sz="2000" b="1">
-                <a:solidFill>
-                  <a:srgbClr val="00A0B0"/>
-                </a:solidFill>
-                <a:latin typeface="Calibri"/>
-              </a:rPr>
-              <a:t>▸  </a:t>
-            </a:r>
-            <a:r>
-              <a:rPr sz="2000">
-                <a:solidFill>
-                  <a:srgbClr val="1A1A2E"/>
-                </a:solidFill>
-                <a:latin typeface="Calibri"/>
-              </a:rPr>
-              <a:t>1. Query parametrizzate (difesa primaria, NON sostituibile)</a:t>
-            </a:r>
-          </a:p>
-          <a:p>
-            <a:pPr>
-              <a:lnSpc>
-                <a:spcPct val="150000"/>
-              </a:lnSpc>
-            </a:pPr>
-            <a:r>
-              <a:rPr sz="2000" b="1">
-                <a:solidFill>
-                  <a:srgbClr val="00A0B0"/>
-                </a:solidFill>
-                <a:latin typeface="Calibri"/>
-              </a:rPr>
-              <a:t>▸  </a:t>
-            </a:r>
-            <a:r>
-              <a:rPr sz="2000">
-                <a:solidFill>
-                  <a:srgbClr val="1A1A2E"/>
-                </a:solidFill>
-                <a:latin typeface="Calibri"/>
-              </a:rPr>
-              <a:t>2. ORM (forza il pattern corretto)</a:t>
-            </a:r>
-          </a:p>
-          <a:p>
-            <a:pPr>
-              <a:lnSpc>
-                <a:spcPct val="150000"/>
-              </a:lnSpc>
-            </a:pPr>
-            <a:r>
-              <a:rPr sz="2000" b="1">
-                <a:solidFill>
-                  <a:srgbClr val="00A0B0"/>
-                </a:solidFill>
-                <a:latin typeface="Calibri"/>
-              </a:rPr>
-              <a:t>▸  </a:t>
-            </a:r>
-            <a:r>
-              <a:rPr sz="2000">
-                <a:solidFill>
-                  <a:srgbClr val="1A1A2E"/>
-                </a:solidFill>
-                <a:latin typeface="Calibri"/>
-              </a:rPr>
-              <a:t>3. Least privilege per l'utente DB (no DROP/CREATE/GRANT)</a:t>
-            </a:r>
-          </a:p>
-          <a:p>
-            <a:pPr>
-              <a:lnSpc>
-                <a:spcPct val="150000"/>
-              </a:lnSpc>
-            </a:pPr>
-            <a:r>
-              <a:rPr sz="2000" b="1">
-                <a:solidFill>
-                  <a:srgbClr val="00A0B0"/>
-                </a:solidFill>
-                <a:latin typeface="Calibri"/>
-              </a:rPr>
-              <a:t>▸  </a:t>
-            </a:r>
-            <a:r>
-              <a:rPr sz="2000">
-                <a:solidFill>
-                  <a:srgbClr val="1A1A2E"/>
-                </a:solidFill>
-                <a:latin typeface="Calibri"/>
-              </a:rPr>
-              <a:t>4. Errori generici al client, dettagli nei log interni</a:t>
-            </a:r>
-          </a:p>
-          <a:p>
-            <a:pPr>
-              <a:lnSpc>
-                <a:spcPct val="150000"/>
-              </a:lnSpc>
-            </a:pPr>
-            <a:r>
-              <a:rPr sz="2000" b="1">
-                <a:solidFill>
-                  <a:srgbClr val="00A0B0"/>
-                </a:solidFill>
-                <a:latin typeface="Calibri"/>
-              </a:rPr>
-              <a:t>▸  </a:t>
-            </a:r>
-            <a:r>
-              <a:rPr sz="2000">
-                <a:solidFill>
-                  <a:srgbClr val="1A1A2E"/>
-                </a:solidFill>
-                <a:latin typeface="Calibri"/>
-              </a:rPr>
-              <a:t>5. WAF (Web Application Firewall) come strato aggiuntivo</a:t>
-            </a:r>
-          </a:p>
-          <a:p>
-            <a:pPr>
-              <a:lnSpc>
-                <a:spcPct val="150000"/>
-              </a:lnSpc>
-            </a:pPr>
-            <a:r>
-              <a:rPr sz="2000" b="1">
-                <a:solidFill>
-                  <a:srgbClr val="00A0B0"/>
-                </a:solidFill>
-                <a:latin typeface="Calibri"/>
-              </a:rPr>
-              <a:t>▸  </a:t>
-            </a:r>
-            <a:r>
-              <a:rPr sz="2000">
-                <a:solidFill>
-                  <a:srgbClr val="1A1A2E"/>
-                </a:solidFill>
-                <a:latin typeface="Calibri"/>
-              </a:rPr>
-              <a:t>6. Rate limiting sul login (anti brute force)</a:t>
-            </a:r>
-          </a:p>
-          <a:p>
-            <a:pPr>
-              <a:lnSpc>
-                <a:spcPct val="150000"/>
-              </a:lnSpc>
-            </a:pPr>
-            <a:r>
-              <a:rPr sz="2000" b="1">
-                <a:solidFill>
-                  <a:srgbClr val="00A0B0"/>
-                </a:solidFill>
-                <a:latin typeface="Calibri"/>
-              </a:rPr>
-              <a:t>▸  </a:t>
-            </a:r>
-            <a:r>
-              <a:rPr sz="2000">
-                <a:solidFill>
-                  <a:srgbClr val="1A1A2E"/>
-                </a:solidFill>
-                <a:latin typeface="Calibri"/>
-              </a:rPr>
-              <a:t>7. Audit log dei tentativi sospetti</a:t>
+            <a:pPr algn="ctr"/>
+            <a:r>
+              <a:rPr sz="2000" b="1" i="0">
+                <a:solidFill>
+                  <a:srgbClr val="6FD8E0"/>
+                </a:solidFill>
+                <a:latin typeface="Calibri"/>
+              </a:rPr>
+              <a:t>PARTE</a:t>
+            </a:r>
+          </a:p>
+        </p:txBody>
+      </p:sp>
+      <p:sp>
+        <p:nvSpPr>
+          <p:cNvPr id="7" name="TextBox 6"/>
+          <p:cNvSpPr txBox="1"/>
+          <p:nvPr/>
+        </p:nvSpPr>
+        <p:spPr>
+          <a:xfrm>
+            <a:off x="4572000" y="2286000"/>
+            <a:ext cx="7315200" cy="1645920"/>
+          </a:xfrm>
+          <a:prstGeom prst="rect">
+            <a:avLst/>
+          </a:prstGeom>
+          <a:noFill/>
+        </p:spPr>
+        <p:txBody>
+          <a:bodyPr wrap="square" lIns="45720" rIns="45720" tIns="18288" bIns="18288" anchor="t">
+            <a:spAutoFit/>
+          </a:bodyPr>
+          <a:lstStyle/>
+          <a:p>
+            <a:pPr algn="l"/>
+            <a:r>
+              <a:rPr sz="4400" b="1" i="0">
+                <a:solidFill>
+                  <a:srgbClr val="0F2D52"/>
+                </a:solidFill>
+                <a:latin typeface="Calibri"/>
+              </a:rPr>
+              <a:t>Laboratorio</a:t>
+            </a:r>
+          </a:p>
+        </p:txBody>
+      </p:sp>
+      <p:sp>
+        <p:nvSpPr>
+          <p:cNvPr id="8" name="TextBox 7"/>
+          <p:cNvSpPr txBox="1"/>
+          <p:nvPr/>
+        </p:nvSpPr>
+        <p:spPr>
+          <a:xfrm>
+            <a:off x="4572000" y="3931920"/>
+            <a:ext cx="7315200" cy="1828800"/>
+          </a:xfrm>
+          <a:prstGeom prst="rect">
+            <a:avLst/>
+          </a:prstGeom>
+          <a:noFill/>
+        </p:spPr>
+        <p:txBody>
+          <a:bodyPr wrap="square" lIns="45720" rIns="45720" tIns="18288" bIns="18288" anchor="t">
+            <a:spAutoFit/>
+          </a:bodyPr>
+          <a:lstStyle/>
+          <a:p>
+            <a:pPr algn="l"/>
+            <a:r>
+              <a:rPr sz="1800" b="0" i="1">
+                <a:solidFill>
+                  <a:srgbClr val="6B7280"/>
+                </a:solidFill>
+                <a:latin typeface="Calibri"/>
+              </a:rPr>
+              <a:t>Mini-banca: app vulnerabile → la sfrutti → la correggi</a:t>
             </a:r>
           </a:p>
         </p:txBody>
       </p:sp>
       <p:cxnSp>
         <p:nvCxnSpPr>
-          <p:cNvPr id="5" name="Connector 4"/>
+          <p:cNvPr id="9" name="Connector 8"/>
           <p:cNvCxnSpPr/>
           <p:nvPr/>
         </p:nvCxnSpPr>
@@ -5638,14 +5875,14 @@
       </p:cxnSp>
       <p:sp>
         <p:nvSpPr>
-          <p:cNvPr id="6" name="TextBox 5"/>
+          <p:cNvPr id="10" name="TextBox 9"/>
           <p:cNvSpPr txBox="1"/>
           <p:nvPr/>
         </p:nvSpPr>
         <p:spPr>
           <a:xfrm>
             <a:off x="457200" y="6473952"/>
-            <a:ext cx="7315200" cy="320040"/>
+            <a:ext cx="7315200" cy="292608"/>
           </a:xfrm>
           <a:prstGeom prst="rect">
             <a:avLst/>
@@ -5666,21 +5903,21 @@
                 </a:solidFill>
                 <a:latin typeface="Calibri"/>
               </a:rPr>
-              <a:t>Secure Coding · Corso IFTS STEM · A. Manneschi</a:t>
-            </a:r>
-          </a:p>
-        </p:txBody>
-      </p:sp>
-      <p:sp>
-        <p:nvSpPr>
-          <p:cNvPr id="7" name="TextBox 6"/>
+              <a:t>Secure Coding · Corso IFTS STEM · A. Manneschi · 2024/2025</a:t>
+            </a:r>
+          </a:p>
+        </p:txBody>
+      </p:sp>
+      <p:sp>
+        <p:nvSpPr>
+          <p:cNvPr id="11" name="TextBox 10"/>
           <p:cNvSpPr txBox="1"/>
           <p:nvPr/>
         </p:nvSpPr>
         <p:spPr>
           <a:xfrm>
             <a:off x="10515600" y="6473952"/>
-            <a:ext cx="1188720" cy="320040"/>
+            <a:ext cx="1188720" cy="292608"/>
           </a:xfrm>
           <a:prstGeom prst="rect">
             <a:avLst/>
@@ -5739,7 +5976,7 @@
             <a:avLst/>
           </a:prstGeom>
           <a:solidFill>
-            <a:srgbClr val="0F2D52"/>
+            <a:srgbClr val="081B33"/>
           </a:solidFill>
           <a:ln>
             <a:noFill/>
@@ -5775,11 +6012,247 @@
         </p:nvSpPr>
         <p:spPr>
           <a:xfrm>
-            <a:off x="8686800" y="457200"/>
-            <a:ext cx="3200400" cy="3200400"/>
+            <a:off x="8915400" y="228600"/>
+            <a:ext cx="2286000" cy="2286000"/>
           </a:xfrm>
           <a:prstGeom prst="ellipse">
             <a:avLst/>
+          </a:prstGeom>
+          <a:noFill/>
+          <a:ln w="25400">
+            <a:solidFill>
+              <a:srgbClr val="00A0B0"/>
+            </a:solidFill>
+          </a:ln>
+        </p:spPr>
+        <p:style>
+          <a:lnRef idx="1">
+            <a:schemeClr val="accent1"/>
+          </a:lnRef>
+          <a:fillRef idx="3">
+            <a:schemeClr val="accent1"/>
+          </a:fillRef>
+          <a:effectRef idx="2">
+            <a:schemeClr val="accent1"/>
+          </a:effectRef>
+          <a:fontRef idx="minor">
+            <a:schemeClr val="lt1"/>
+          </a:fontRef>
+        </p:style>
+        <p:txBody>
+          <a:bodyPr rtlCol="0" anchor="ctr"/>
+          <a:lstStyle/>
+          <a:p>
+            <a:pPr algn="ctr"/>
+          </a:p>
+        </p:txBody>
+      </p:sp>
+      <p:sp>
+        <p:nvSpPr>
+          <p:cNvPr id="4" name="Oval 3"/>
+          <p:cNvSpPr/>
+          <p:nvPr/>
+        </p:nvSpPr>
+        <p:spPr>
+          <a:xfrm>
+            <a:off x="10149840" y="3749040"/>
+            <a:ext cx="1645920" cy="1645920"/>
+          </a:xfrm>
+          <a:prstGeom prst="ellipse">
+            <a:avLst/>
+          </a:prstGeom>
+          <a:noFill/>
+          <a:ln w="25400">
+            <a:solidFill>
+              <a:srgbClr val="00A0B0"/>
+            </a:solidFill>
+          </a:ln>
+        </p:spPr>
+        <p:style>
+          <a:lnRef idx="1">
+            <a:schemeClr val="accent1"/>
+          </a:lnRef>
+          <a:fillRef idx="3">
+            <a:schemeClr val="accent1"/>
+          </a:fillRef>
+          <a:effectRef idx="2">
+            <a:schemeClr val="accent1"/>
+          </a:effectRef>
+          <a:fontRef idx="minor">
+            <a:schemeClr val="lt1"/>
+          </a:fontRef>
+        </p:style>
+        <p:txBody>
+          <a:bodyPr rtlCol="0" anchor="ctr"/>
+          <a:lstStyle/>
+          <a:p>
+            <a:pPr algn="ctr"/>
+          </a:p>
+        </p:txBody>
+      </p:sp>
+      <p:sp>
+        <p:nvSpPr>
+          <p:cNvPr id="5" name="Oval 4"/>
+          <p:cNvSpPr/>
+          <p:nvPr/>
+        </p:nvSpPr>
+        <p:spPr>
+          <a:xfrm>
+            <a:off x="685800" y="4800600"/>
+            <a:ext cx="1371600" cy="1371600"/>
+          </a:xfrm>
+          <a:prstGeom prst="ellipse">
+            <a:avLst/>
+          </a:prstGeom>
+          <a:noFill/>
+          <a:ln w="25400">
+            <a:solidFill>
+              <a:srgbClr val="00A0B0"/>
+            </a:solidFill>
+          </a:ln>
+        </p:spPr>
+        <p:style>
+          <a:lnRef idx="1">
+            <a:schemeClr val="accent1"/>
+          </a:lnRef>
+          <a:fillRef idx="3">
+            <a:schemeClr val="accent1"/>
+          </a:fillRef>
+          <a:effectRef idx="2">
+            <a:schemeClr val="accent1"/>
+          </a:effectRef>
+          <a:fontRef idx="minor">
+            <a:schemeClr val="lt1"/>
+          </a:fontRef>
+        </p:style>
+        <p:txBody>
+          <a:bodyPr rtlCol="0" anchor="ctr"/>
+          <a:lstStyle/>
+          <a:p>
+            <a:pPr algn="ctr"/>
+          </a:p>
+        </p:txBody>
+      </p:sp>
+      <p:sp>
+        <p:nvSpPr>
+          <p:cNvPr id="6" name="TextBox 5"/>
+          <p:cNvSpPr txBox="1"/>
+          <p:nvPr/>
+        </p:nvSpPr>
+        <p:spPr>
+          <a:xfrm>
+            <a:off x="731520" y="1371600"/>
+            <a:ext cx="10058400" cy="2286000"/>
+          </a:xfrm>
+          <a:prstGeom prst="rect">
+            <a:avLst/>
+          </a:prstGeom>
+          <a:noFill/>
+        </p:spPr>
+        <p:txBody>
+          <a:bodyPr wrap="square" lIns="45720" rIns="45720" tIns="18288" bIns="18288" anchor="t">
+            <a:spAutoFit/>
+          </a:bodyPr>
+          <a:lstStyle/>
+          <a:p>
+            <a:pPr algn="l"/>
+            <a:r>
+              <a:rPr sz="11000" b="1" i="0">
+                <a:solidFill>
+                  <a:srgbClr val="FFFFFF"/>
+                </a:solidFill>
+                <a:latin typeface="Calibri"/>
+              </a:rPr>
+              <a:t>Domande?</a:t>
+            </a:r>
+          </a:p>
+        </p:txBody>
+      </p:sp>
+      <p:cxnSp>
+        <p:nvCxnSpPr>
+          <p:cNvPr id="7" name="Connector 6"/>
+          <p:cNvCxnSpPr/>
+          <p:nvPr/>
+        </p:nvCxnSpPr>
+        <p:spPr>
+          <a:xfrm>
+            <a:off x="731520" y="3840480"/>
+            <a:ext cx="2926080" cy="0"/>
+          </a:xfrm>
+          <a:prstGeom prst="line">
+            <a:avLst/>
+          </a:prstGeom>
+          <a:ln w="50800">
+            <a:solidFill>
+              <a:srgbClr val="00A0B0"/>
+            </a:solidFill>
+          </a:ln>
+        </p:spPr>
+        <p:style>
+          <a:lnRef idx="2">
+            <a:schemeClr val="accent1"/>
+          </a:lnRef>
+          <a:fillRef idx="0">
+            <a:schemeClr val="accent1"/>
+          </a:fillRef>
+          <a:effectRef idx="1">
+            <a:schemeClr val="accent1"/>
+          </a:effectRef>
+          <a:fontRef idx="minor">
+            <a:schemeClr val="tx1"/>
+          </a:fontRef>
+        </p:style>
+      </p:cxnSp>
+      <p:sp>
+        <p:nvSpPr>
+          <p:cNvPr id="8" name="TextBox 7"/>
+          <p:cNvSpPr txBox="1"/>
+          <p:nvPr/>
+        </p:nvSpPr>
+        <p:spPr>
+          <a:xfrm>
+            <a:off x="731520" y="4114800"/>
+            <a:ext cx="10058400" cy="457200"/>
+          </a:xfrm>
+          <a:prstGeom prst="rect">
+            <a:avLst/>
+          </a:prstGeom>
+          <a:noFill/>
+        </p:spPr>
+        <p:txBody>
+          <a:bodyPr wrap="square" lIns="45720" rIns="45720" tIns="18288" bIns="18288" anchor="t">
+            <a:spAutoFit/>
+          </a:bodyPr>
+          <a:lstStyle/>
+          <a:p>
+            <a:pPr algn="l"/>
+            <a:r>
+              <a:rPr sz="2000" b="1" i="0">
+                <a:solidFill>
+                  <a:srgbClr val="00A0B0"/>
+                </a:solidFill>
+                <a:latin typeface="Calibri"/>
+              </a:rPr>
+              <a:t>Riepilogo · Q&amp;A · Discussione</a:t>
+            </a:r>
+          </a:p>
+        </p:txBody>
+      </p:sp>
+      <p:sp>
+        <p:nvSpPr>
+          <p:cNvPr id="9" name="Rounded Rectangle 8"/>
+          <p:cNvSpPr/>
+          <p:nvPr/>
+        </p:nvSpPr>
+        <p:spPr>
+          <a:xfrm>
+            <a:off x="731520" y="5029200"/>
+            <a:ext cx="10058400" cy="914400"/>
+          </a:xfrm>
+          <a:prstGeom prst="roundRect">
+            <a:avLst>
+              <a:gd name="adj" fmla="val 8000"/>
+            </a:avLst>
           </a:prstGeom>
           <a:solidFill>
             <a:srgbClr val="00A0B0"/>
@@ -5812,49 +6285,14 @@
       </p:sp>
       <p:sp>
         <p:nvSpPr>
-          <p:cNvPr id="4" name="TextBox 3"/>
+          <p:cNvPr id="10" name="TextBox 9"/>
           <p:cNvSpPr txBox="1"/>
           <p:nvPr/>
         </p:nvSpPr>
         <p:spPr>
           <a:xfrm>
-            <a:off x="731520" y="1645920"/>
-            <a:ext cx="7315200" cy="2286000"/>
-          </a:xfrm>
-          <a:prstGeom prst="rect">
-            <a:avLst/>
-          </a:prstGeom>
-          <a:noFill/>
-        </p:spPr>
-        <p:txBody>
-          <a:bodyPr wrap="square" lIns="45720" rIns="45720" tIns="18288" bIns="18288" anchor="t">
-            <a:spAutoFit/>
-          </a:bodyPr>
-          <a:lstStyle/>
-          <a:p>
-            <a:pPr algn="l"/>
-            <a:r>
-              <a:rPr sz="8800" b="1" i="0">
-                <a:solidFill>
-                  <a:srgbClr val="FFFFFF"/>
-                </a:solidFill>
-                <a:latin typeface="Calibri"/>
-              </a:rPr>
-              <a:t>Domande?</a:t>
-            </a:r>
-          </a:p>
-        </p:txBody>
-      </p:sp>
-      <p:sp>
-        <p:nvSpPr>
-          <p:cNvPr id="5" name="TextBox 4"/>
-          <p:cNvSpPr txBox="1"/>
-          <p:nvPr/>
-        </p:nvSpPr>
-        <p:spPr>
-          <a:xfrm>
-            <a:off x="8686800" y="457200"/>
-            <a:ext cx="3200400" cy="3200400"/>
+            <a:off x="1005840" y="5029200"/>
+            <a:ext cx="9784080" cy="914400"/>
           </a:xfrm>
           <a:prstGeom prst="rect">
             <a:avLst/>
@@ -5867,79 +6305,9 @@
           </a:bodyPr>
           <a:lstStyle/>
           <a:p>
-            <a:pPr algn="ctr"/>
-            <a:r>
-              <a:rPr sz="18000" b="1" i="0">
-                <a:solidFill>
-                  <a:srgbClr val="FFFFFF"/>
-                </a:solidFill>
-                <a:latin typeface="Calibri"/>
-              </a:rPr>
-              <a:t>?</a:t>
-            </a:r>
-          </a:p>
-        </p:txBody>
-      </p:sp>
-      <p:sp>
-        <p:nvSpPr>
-          <p:cNvPr id="6" name="TextBox 5"/>
-          <p:cNvSpPr txBox="1"/>
-          <p:nvPr/>
-        </p:nvSpPr>
-        <p:spPr>
-          <a:xfrm>
-            <a:off x="731520" y="4114800"/>
-            <a:ext cx="10058400" cy="457200"/>
-          </a:xfrm>
-          <a:prstGeom prst="rect">
-            <a:avLst/>
-          </a:prstGeom>
-          <a:noFill/>
-        </p:spPr>
-        <p:txBody>
-          <a:bodyPr wrap="square" lIns="45720" rIns="45720" tIns="18288" bIns="18288" anchor="t">
-            <a:spAutoFit/>
-          </a:bodyPr>
-          <a:lstStyle/>
-          <a:p>
             <a:pPr algn="l"/>
             <a:r>
-              <a:rPr sz="2200" b="1" i="0">
-                <a:solidFill>
-                  <a:srgbClr val="00A0B0"/>
-                </a:solidFill>
-                <a:latin typeface="Calibri"/>
-              </a:rPr>
-              <a:t>Cosa portarti via:</a:t>
-            </a:r>
-          </a:p>
-        </p:txBody>
-      </p:sp>
-      <p:sp>
-        <p:nvSpPr>
-          <p:cNvPr id="7" name="TextBox 6"/>
-          <p:cNvSpPr txBox="1"/>
-          <p:nvPr/>
-        </p:nvSpPr>
-        <p:spPr>
-          <a:xfrm>
-            <a:off x="731520" y="5303520"/>
-            <a:ext cx="10058400" cy="548640"/>
-          </a:xfrm>
-          <a:prstGeom prst="rect">
-            <a:avLst/>
-          </a:prstGeom>
-          <a:noFill/>
-        </p:spPr>
-        <p:txBody>
-          <a:bodyPr wrap="square" lIns="45720" rIns="45720" tIns="18288" bIns="18288" anchor="t">
-            <a:spAutoFit/>
-          </a:bodyPr>
-          <a:lstStyle/>
-          <a:p>
-            <a:pPr algn="l"/>
-            <a:r>
-              <a:rPr sz="1800" b="0" i="1">
+              <a:rPr sz="1800" b="1" i="1">
                 <a:solidFill>
                   <a:srgbClr val="FFFFFF"/>
                 </a:solidFill>
@@ -5952,7 +6320,7 @@
       </p:sp>
       <p:cxnSp>
         <p:nvCxnSpPr>
-          <p:cNvPr id="8" name="Connector 7"/>
+          <p:cNvPr id="11" name="Connector 10"/>
           <p:cNvCxnSpPr/>
           <p:nvPr/>
         </p:nvCxnSpPr>
@@ -5987,14 +6355,14 @@
       </p:cxnSp>
       <p:sp>
         <p:nvSpPr>
-          <p:cNvPr id="9" name="TextBox 8"/>
+          <p:cNvPr id="12" name="TextBox 11"/>
           <p:cNvSpPr txBox="1"/>
           <p:nvPr/>
         </p:nvSpPr>
         <p:spPr>
           <a:xfrm>
             <a:off x="457200" y="6473952"/>
-            <a:ext cx="7315200" cy="320040"/>
+            <a:ext cx="7315200" cy="292608"/>
           </a:xfrm>
           <a:prstGeom prst="rect">
             <a:avLst/>
@@ -6015,21 +6383,21 @@
                 </a:solidFill>
                 <a:latin typeface="Calibri"/>
               </a:rPr>
-              <a:t>Secure Coding · Corso IFTS STEM · A. Manneschi</a:t>
-            </a:r>
-          </a:p>
-        </p:txBody>
-      </p:sp>
-      <p:sp>
-        <p:nvSpPr>
-          <p:cNvPr id="10" name="TextBox 9"/>
+              <a:t>Secure Coding · Corso IFTS STEM · A. Manneschi · 2024/2025</a:t>
+            </a:r>
+          </a:p>
+        </p:txBody>
+      </p:sp>
+      <p:sp>
+        <p:nvSpPr>
+          <p:cNvPr id="13" name="TextBox 12"/>
           <p:cNvSpPr txBox="1"/>
           <p:nvPr/>
         </p:nvSpPr>
         <p:spPr>
           <a:xfrm>
             <a:off x="10515600" y="6473952"/>
-            <a:ext cx="1188720" cy="320040"/>
+            <a:ext cx="1188720" cy="292608"/>
           </a:xfrm>
           <a:prstGeom prst="rect">
             <a:avLst/>
@@ -6146,7 +6514,7 @@
                 </a:solidFill>
                 <a:latin typeface="Calibri"/>
               </a:rPr>
-              <a:t>Obiettivi</a:t>
+              <a:t>🎯  Obiettivi della lezione</a:t>
             </a:r>
           </a:p>
         </p:txBody>
@@ -6159,8 +6527,8 @@
         </p:nvSpPr>
         <p:spPr>
           <a:xfrm>
-            <a:off x="640080" y="1005840"/>
-            <a:ext cx="10972800" cy="5029200"/>
+            <a:off x="457200" y="914400"/>
+            <a:ext cx="2286000" cy="2286000"/>
           </a:xfrm>
           <a:prstGeom prst="rect">
             <a:avLst/>
@@ -6168,27 +6536,162 @@
           <a:noFill/>
         </p:spPr>
         <p:txBody>
-          <a:bodyPr wrap="square">
+          <a:bodyPr wrap="square" lIns="45720" rIns="45720" tIns="18288" bIns="18288" anchor="t">
             <a:spAutoFit/>
           </a:bodyPr>
           <a:lstStyle/>
           <a:p>
-            <a:pPr>
-              <a:lnSpc>
-                <a:spcPct val="150000"/>
-              </a:lnSpc>
-            </a:pPr>
-            <a:r>
-              <a:rPr sz="2000" b="1">
+            <a:pPr algn="l"/>
+            <a:r>
+              <a:rPr sz="18000" b="1" i="0">
+                <a:solidFill>
+                  <a:srgbClr val="F1F4F8"/>
+                </a:solidFill>
+                <a:latin typeface="Calibri"/>
+              </a:rPr>
+              <a:t>05</a:t>
+            </a:r>
+          </a:p>
+        </p:txBody>
+      </p:sp>
+      <p:sp>
+        <p:nvSpPr>
+          <p:cNvPr id="5" name="TextBox 4"/>
+          <p:cNvSpPr txBox="1"/>
+          <p:nvPr/>
+        </p:nvSpPr>
+        <p:spPr>
+          <a:xfrm>
+            <a:off x="457200" y="3200400"/>
+            <a:ext cx="2286000" cy="457200"/>
+          </a:xfrm>
+          <a:prstGeom prst="rect">
+            <a:avLst/>
+          </a:prstGeom>
+          <a:noFill/>
+        </p:spPr>
+        <p:txBody>
+          <a:bodyPr wrap="square" lIns="45720" rIns="45720" tIns="18288" bIns="18288" anchor="t">
+            <a:spAutoFit/>
+          </a:bodyPr>
+          <a:lstStyle/>
+          <a:p>
+            <a:pPr algn="l"/>
+            <a:r>
+              <a:rPr sz="1800" b="1" i="1">
                 <a:solidFill>
                   <a:srgbClr val="00A0B0"/>
                 </a:solidFill>
                 <a:latin typeface="Calibri"/>
               </a:rPr>
-              <a:t>▸  </a:t>
-            </a:r>
-            <a:r>
-              <a:rPr sz="2000">
+              <a:t>obiettivi</a:t>
+            </a:r>
+          </a:p>
+        </p:txBody>
+      </p:sp>
+      <p:sp>
+        <p:nvSpPr>
+          <p:cNvPr id="6" name="Oval 5"/>
+          <p:cNvSpPr/>
+          <p:nvPr/>
+        </p:nvSpPr>
+        <p:spPr>
+          <a:xfrm>
+            <a:off x="3200400" y="1188720"/>
+            <a:ext cx="548640" cy="548640"/>
+          </a:xfrm>
+          <a:prstGeom prst="ellipse">
+            <a:avLst/>
+          </a:prstGeom>
+          <a:solidFill>
+            <a:srgbClr val="00A0B0"/>
+          </a:solidFill>
+          <a:ln>
+            <a:noFill/>
+          </a:ln>
+        </p:spPr>
+        <p:style>
+          <a:lnRef idx="1">
+            <a:schemeClr val="accent1"/>
+          </a:lnRef>
+          <a:fillRef idx="3">
+            <a:schemeClr val="accent1"/>
+          </a:fillRef>
+          <a:effectRef idx="2">
+            <a:schemeClr val="accent1"/>
+          </a:effectRef>
+          <a:fontRef idx="minor">
+            <a:schemeClr val="lt1"/>
+          </a:fontRef>
+        </p:style>
+        <p:txBody>
+          <a:bodyPr rtlCol="0" anchor="ctr"/>
+          <a:lstStyle/>
+          <a:p>
+            <a:pPr algn="ctr"/>
+          </a:p>
+        </p:txBody>
+      </p:sp>
+      <p:sp>
+        <p:nvSpPr>
+          <p:cNvPr id="7" name="TextBox 6"/>
+          <p:cNvSpPr txBox="1"/>
+          <p:nvPr/>
+        </p:nvSpPr>
+        <p:spPr>
+          <a:xfrm>
+            <a:off x="3200400" y="1188720"/>
+            <a:ext cx="548640" cy="548640"/>
+          </a:xfrm>
+          <a:prstGeom prst="rect">
+            <a:avLst/>
+          </a:prstGeom>
+          <a:noFill/>
+        </p:spPr>
+        <p:txBody>
+          <a:bodyPr wrap="square" lIns="45720" rIns="45720" tIns="18288" bIns="18288" anchor="ctr">
+            <a:spAutoFit/>
+          </a:bodyPr>
+          <a:lstStyle/>
+          <a:p>
+            <a:pPr algn="ctr"/>
+            <a:r>
+              <a:rPr sz="1600" b="1" i="0">
+                <a:solidFill>
+                  <a:srgbClr val="FFFFFF"/>
+                </a:solidFill>
+                <a:latin typeface="Calibri"/>
+              </a:rPr>
+              <a:t>1</a:t>
+            </a:r>
+          </a:p>
+        </p:txBody>
+      </p:sp>
+      <p:sp>
+        <p:nvSpPr>
+          <p:cNvPr id="8" name="TextBox 7"/>
+          <p:cNvSpPr txBox="1"/>
+          <p:nvPr/>
+        </p:nvSpPr>
+        <p:spPr>
+          <a:xfrm>
+            <a:off x="4023360" y="1261872"/>
+            <a:ext cx="7772400" cy="548640"/>
+          </a:xfrm>
+          <a:prstGeom prst="rect">
+            <a:avLst/>
+          </a:prstGeom>
+          <a:noFill/>
+        </p:spPr>
+        <p:txBody>
+          <a:bodyPr wrap="square" lIns="45720" rIns="45720" tIns="18288" bIns="18288" anchor="ctr">
+            <a:spAutoFit/>
+          </a:bodyPr>
+          <a:lstStyle/>
+          <a:p>
+            <a:pPr algn="l"/>
+            <a:r>
+              <a:rPr sz="1600" b="0" i="0">
                 <a:solidFill>
                   <a:srgbClr val="1A1A2E"/>
                 </a:solidFill>
@@ -6197,23 +6700,111 @@
               <a:t>Riconoscere a vista una SQL Injection nel codice</a:t>
             </a:r>
           </a:p>
-          <a:p>
-            <a:pPr>
-              <a:lnSpc>
-                <a:spcPct val="150000"/>
-              </a:lnSpc>
-            </a:pPr>
-            <a:r>
-              <a:rPr sz="2000" b="1">
-                <a:solidFill>
-                  <a:srgbClr val="00A0B0"/>
-                </a:solidFill>
-                <a:latin typeface="Calibri"/>
-              </a:rPr>
-              <a:t>▸  </a:t>
-            </a:r>
-            <a:r>
-              <a:rPr sz="2000">
+        </p:txBody>
+      </p:sp>
+      <p:sp>
+        <p:nvSpPr>
+          <p:cNvPr id="9" name="Oval 8"/>
+          <p:cNvSpPr/>
+          <p:nvPr/>
+        </p:nvSpPr>
+        <p:spPr>
+          <a:xfrm>
+            <a:off x="3200400" y="1965960"/>
+            <a:ext cx="548640" cy="548640"/>
+          </a:xfrm>
+          <a:prstGeom prst="ellipse">
+            <a:avLst/>
+          </a:prstGeom>
+          <a:solidFill>
+            <a:srgbClr val="00A0B0"/>
+          </a:solidFill>
+          <a:ln>
+            <a:noFill/>
+          </a:ln>
+        </p:spPr>
+        <p:style>
+          <a:lnRef idx="1">
+            <a:schemeClr val="accent1"/>
+          </a:lnRef>
+          <a:fillRef idx="3">
+            <a:schemeClr val="accent1"/>
+          </a:fillRef>
+          <a:effectRef idx="2">
+            <a:schemeClr val="accent1"/>
+          </a:effectRef>
+          <a:fontRef idx="minor">
+            <a:schemeClr val="lt1"/>
+          </a:fontRef>
+        </p:style>
+        <p:txBody>
+          <a:bodyPr rtlCol="0" anchor="ctr"/>
+          <a:lstStyle/>
+          <a:p>
+            <a:pPr algn="ctr"/>
+          </a:p>
+        </p:txBody>
+      </p:sp>
+      <p:sp>
+        <p:nvSpPr>
+          <p:cNvPr id="10" name="TextBox 9"/>
+          <p:cNvSpPr txBox="1"/>
+          <p:nvPr/>
+        </p:nvSpPr>
+        <p:spPr>
+          <a:xfrm>
+            <a:off x="3200400" y="1965960"/>
+            <a:ext cx="548640" cy="548640"/>
+          </a:xfrm>
+          <a:prstGeom prst="rect">
+            <a:avLst/>
+          </a:prstGeom>
+          <a:noFill/>
+        </p:spPr>
+        <p:txBody>
+          <a:bodyPr wrap="square" lIns="45720" rIns="45720" tIns="18288" bIns="18288" anchor="ctr">
+            <a:spAutoFit/>
+          </a:bodyPr>
+          <a:lstStyle/>
+          <a:p>
+            <a:pPr algn="ctr"/>
+            <a:r>
+              <a:rPr sz="1600" b="1" i="0">
+                <a:solidFill>
+                  <a:srgbClr val="FFFFFF"/>
+                </a:solidFill>
+                <a:latin typeface="Calibri"/>
+              </a:rPr>
+              <a:t>2</a:t>
+            </a:r>
+          </a:p>
+        </p:txBody>
+      </p:sp>
+      <p:sp>
+        <p:nvSpPr>
+          <p:cNvPr id="11" name="TextBox 10"/>
+          <p:cNvSpPr txBox="1"/>
+          <p:nvPr/>
+        </p:nvSpPr>
+        <p:spPr>
+          <a:xfrm>
+            <a:off x="4023360" y="2039112"/>
+            <a:ext cx="7772400" cy="548640"/>
+          </a:xfrm>
+          <a:prstGeom prst="rect">
+            <a:avLst/>
+          </a:prstGeom>
+          <a:noFill/>
+        </p:spPr>
+        <p:txBody>
+          <a:bodyPr wrap="square" lIns="45720" rIns="45720" tIns="18288" bIns="18288" anchor="ctr">
+            <a:spAutoFit/>
+          </a:bodyPr>
+          <a:lstStyle/>
+          <a:p>
+            <a:pPr algn="l"/>
+            <a:r>
+              <a:rPr sz="1600" b="0" i="0">
                 <a:solidFill>
                   <a:srgbClr val="1A1A2E"/>
                 </a:solidFill>
@@ -6222,23 +6813,111 @@
               <a:t>Eseguire login bypass con ' OR '1'='1' --</a:t>
             </a:r>
           </a:p>
-          <a:p>
-            <a:pPr>
-              <a:lnSpc>
-                <a:spcPct val="150000"/>
-              </a:lnSpc>
-            </a:pPr>
-            <a:r>
-              <a:rPr sz="2000" b="1">
-                <a:solidFill>
-                  <a:srgbClr val="00A0B0"/>
-                </a:solidFill>
-                <a:latin typeface="Calibri"/>
-              </a:rPr>
-              <a:t>▸  </a:t>
-            </a:r>
-            <a:r>
-              <a:rPr sz="2000">
+        </p:txBody>
+      </p:sp>
+      <p:sp>
+        <p:nvSpPr>
+          <p:cNvPr id="12" name="Oval 11"/>
+          <p:cNvSpPr/>
+          <p:nvPr/>
+        </p:nvSpPr>
+        <p:spPr>
+          <a:xfrm>
+            <a:off x="3200400" y="2743200"/>
+            <a:ext cx="548640" cy="548640"/>
+          </a:xfrm>
+          <a:prstGeom prst="ellipse">
+            <a:avLst/>
+          </a:prstGeom>
+          <a:solidFill>
+            <a:srgbClr val="00A0B0"/>
+          </a:solidFill>
+          <a:ln>
+            <a:noFill/>
+          </a:ln>
+        </p:spPr>
+        <p:style>
+          <a:lnRef idx="1">
+            <a:schemeClr val="accent1"/>
+          </a:lnRef>
+          <a:fillRef idx="3">
+            <a:schemeClr val="accent1"/>
+          </a:fillRef>
+          <a:effectRef idx="2">
+            <a:schemeClr val="accent1"/>
+          </a:effectRef>
+          <a:fontRef idx="minor">
+            <a:schemeClr val="lt1"/>
+          </a:fontRef>
+        </p:style>
+        <p:txBody>
+          <a:bodyPr rtlCol="0" anchor="ctr"/>
+          <a:lstStyle/>
+          <a:p>
+            <a:pPr algn="ctr"/>
+          </a:p>
+        </p:txBody>
+      </p:sp>
+      <p:sp>
+        <p:nvSpPr>
+          <p:cNvPr id="13" name="TextBox 12"/>
+          <p:cNvSpPr txBox="1"/>
+          <p:nvPr/>
+        </p:nvSpPr>
+        <p:spPr>
+          <a:xfrm>
+            <a:off x="3200400" y="2743200"/>
+            <a:ext cx="548640" cy="548640"/>
+          </a:xfrm>
+          <a:prstGeom prst="rect">
+            <a:avLst/>
+          </a:prstGeom>
+          <a:noFill/>
+        </p:spPr>
+        <p:txBody>
+          <a:bodyPr wrap="square" lIns="45720" rIns="45720" tIns="18288" bIns="18288" anchor="ctr">
+            <a:spAutoFit/>
+          </a:bodyPr>
+          <a:lstStyle/>
+          <a:p>
+            <a:pPr algn="ctr"/>
+            <a:r>
+              <a:rPr sz="1600" b="1" i="0">
+                <a:solidFill>
+                  <a:srgbClr val="FFFFFF"/>
+                </a:solidFill>
+                <a:latin typeface="Calibri"/>
+              </a:rPr>
+              <a:t>3</a:t>
+            </a:r>
+          </a:p>
+        </p:txBody>
+      </p:sp>
+      <p:sp>
+        <p:nvSpPr>
+          <p:cNvPr id="14" name="TextBox 13"/>
+          <p:cNvSpPr txBox="1"/>
+          <p:nvPr/>
+        </p:nvSpPr>
+        <p:spPr>
+          <a:xfrm>
+            <a:off x="4023360" y="2816352"/>
+            <a:ext cx="7772400" cy="548640"/>
+          </a:xfrm>
+          <a:prstGeom prst="rect">
+            <a:avLst/>
+          </a:prstGeom>
+          <a:noFill/>
+        </p:spPr>
+        <p:txBody>
+          <a:bodyPr wrap="square" lIns="45720" rIns="45720" tIns="18288" bIns="18288" anchor="ctr">
+            <a:spAutoFit/>
+          </a:bodyPr>
+          <a:lstStyle/>
+          <a:p>
+            <a:pPr algn="l"/>
+            <a:r>
+              <a:rPr sz="1600" b="0" i="0">
                 <a:solidFill>
                   <a:srgbClr val="1A1A2E"/>
                 </a:solidFill>
@@ -6247,23 +6926,111 @@
               <a:t>Estrarre dati arbitrari con UNION SELECT</a:t>
             </a:r>
           </a:p>
-          <a:p>
-            <a:pPr>
-              <a:lnSpc>
-                <a:spcPct val="150000"/>
-              </a:lnSpc>
-            </a:pPr>
-            <a:r>
-              <a:rPr sz="2000" b="1">
-                <a:solidFill>
-                  <a:srgbClr val="00A0B0"/>
-                </a:solidFill>
-                <a:latin typeface="Calibri"/>
-              </a:rPr>
-              <a:t>▸  </a:t>
-            </a:r>
-            <a:r>
-              <a:rPr sz="2000">
+        </p:txBody>
+      </p:sp>
+      <p:sp>
+        <p:nvSpPr>
+          <p:cNvPr id="15" name="Oval 14"/>
+          <p:cNvSpPr/>
+          <p:nvPr/>
+        </p:nvSpPr>
+        <p:spPr>
+          <a:xfrm>
+            <a:off x="3200400" y="3520440"/>
+            <a:ext cx="548640" cy="548640"/>
+          </a:xfrm>
+          <a:prstGeom prst="ellipse">
+            <a:avLst/>
+          </a:prstGeom>
+          <a:solidFill>
+            <a:srgbClr val="00A0B0"/>
+          </a:solidFill>
+          <a:ln>
+            <a:noFill/>
+          </a:ln>
+        </p:spPr>
+        <p:style>
+          <a:lnRef idx="1">
+            <a:schemeClr val="accent1"/>
+          </a:lnRef>
+          <a:fillRef idx="3">
+            <a:schemeClr val="accent1"/>
+          </a:fillRef>
+          <a:effectRef idx="2">
+            <a:schemeClr val="accent1"/>
+          </a:effectRef>
+          <a:fontRef idx="minor">
+            <a:schemeClr val="lt1"/>
+          </a:fontRef>
+        </p:style>
+        <p:txBody>
+          <a:bodyPr rtlCol="0" anchor="ctr"/>
+          <a:lstStyle/>
+          <a:p>
+            <a:pPr algn="ctr"/>
+          </a:p>
+        </p:txBody>
+      </p:sp>
+      <p:sp>
+        <p:nvSpPr>
+          <p:cNvPr id="16" name="TextBox 15"/>
+          <p:cNvSpPr txBox="1"/>
+          <p:nvPr/>
+        </p:nvSpPr>
+        <p:spPr>
+          <a:xfrm>
+            <a:off x="3200400" y="3520440"/>
+            <a:ext cx="548640" cy="548640"/>
+          </a:xfrm>
+          <a:prstGeom prst="rect">
+            <a:avLst/>
+          </a:prstGeom>
+          <a:noFill/>
+        </p:spPr>
+        <p:txBody>
+          <a:bodyPr wrap="square" lIns="45720" rIns="45720" tIns="18288" bIns="18288" anchor="ctr">
+            <a:spAutoFit/>
+          </a:bodyPr>
+          <a:lstStyle/>
+          <a:p>
+            <a:pPr algn="ctr"/>
+            <a:r>
+              <a:rPr sz="1600" b="1" i="0">
+                <a:solidFill>
+                  <a:srgbClr val="FFFFFF"/>
+                </a:solidFill>
+                <a:latin typeface="Calibri"/>
+              </a:rPr>
+              <a:t>4</a:t>
+            </a:r>
+          </a:p>
+        </p:txBody>
+      </p:sp>
+      <p:sp>
+        <p:nvSpPr>
+          <p:cNvPr id="17" name="TextBox 16"/>
+          <p:cNvSpPr txBox="1"/>
+          <p:nvPr/>
+        </p:nvSpPr>
+        <p:spPr>
+          <a:xfrm>
+            <a:off x="4023360" y="3593592"/>
+            <a:ext cx="7772400" cy="548640"/>
+          </a:xfrm>
+          <a:prstGeom prst="rect">
+            <a:avLst/>
+          </a:prstGeom>
+          <a:noFill/>
+        </p:spPr>
+        <p:txBody>
+          <a:bodyPr wrap="square" lIns="45720" rIns="45720" tIns="18288" bIns="18288" anchor="ctr">
+            <a:spAutoFit/>
+          </a:bodyPr>
+          <a:lstStyle/>
+          <a:p>
+            <a:pPr algn="l"/>
+            <a:r>
+              <a:rPr sz="1600" b="0" i="0">
                 <a:solidFill>
                   <a:srgbClr val="1A1A2E"/>
                 </a:solidFill>
@@ -6272,23 +7039,111 @@
               <a:t>Capire perché filtrare gli apici NON funziona</a:t>
             </a:r>
           </a:p>
-          <a:p>
-            <a:pPr>
-              <a:lnSpc>
-                <a:spcPct val="150000"/>
-              </a:lnSpc>
-            </a:pPr>
-            <a:r>
-              <a:rPr sz="2000" b="1">
-                <a:solidFill>
-                  <a:srgbClr val="00A0B0"/>
-                </a:solidFill>
-                <a:latin typeface="Calibri"/>
-              </a:rPr>
-              <a:t>▸  </a:t>
-            </a:r>
-            <a:r>
-              <a:rPr sz="2000">
+        </p:txBody>
+      </p:sp>
+      <p:sp>
+        <p:nvSpPr>
+          <p:cNvPr id="18" name="Oval 17"/>
+          <p:cNvSpPr/>
+          <p:nvPr/>
+        </p:nvSpPr>
+        <p:spPr>
+          <a:xfrm>
+            <a:off x="3200400" y="4297680"/>
+            <a:ext cx="548640" cy="548640"/>
+          </a:xfrm>
+          <a:prstGeom prst="ellipse">
+            <a:avLst/>
+          </a:prstGeom>
+          <a:solidFill>
+            <a:srgbClr val="00A0B0"/>
+          </a:solidFill>
+          <a:ln>
+            <a:noFill/>
+          </a:ln>
+        </p:spPr>
+        <p:style>
+          <a:lnRef idx="1">
+            <a:schemeClr val="accent1"/>
+          </a:lnRef>
+          <a:fillRef idx="3">
+            <a:schemeClr val="accent1"/>
+          </a:fillRef>
+          <a:effectRef idx="2">
+            <a:schemeClr val="accent1"/>
+          </a:effectRef>
+          <a:fontRef idx="minor">
+            <a:schemeClr val="lt1"/>
+          </a:fontRef>
+        </p:style>
+        <p:txBody>
+          <a:bodyPr rtlCol="0" anchor="ctr"/>
+          <a:lstStyle/>
+          <a:p>
+            <a:pPr algn="ctr"/>
+          </a:p>
+        </p:txBody>
+      </p:sp>
+      <p:sp>
+        <p:nvSpPr>
+          <p:cNvPr id="19" name="TextBox 18"/>
+          <p:cNvSpPr txBox="1"/>
+          <p:nvPr/>
+        </p:nvSpPr>
+        <p:spPr>
+          <a:xfrm>
+            <a:off x="3200400" y="4297680"/>
+            <a:ext cx="548640" cy="548640"/>
+          </a:xfrm>
+          <a:prstGeom prst="rect">
+            <a:avLst/>
+          </a:prstGeom>
+          <a:noFill/>
+        </p:spPr>
+        <p:txBody>
+          <a:bodyPr wrap="square" lIns="45720" rIns="45720" tIns="18288" bIns="18288" anchor="ctr">
+            <a:spAutoFit/>
+          </a:bodyPr>
+          <a:lstStyle/>
+          <a:p>
+            <a:pPr algn="ctr"/>
+            <a:r>
+              <a:rPr sz="1600" b="1" i="0">
+                <a:solidFill>
+                  <a:srgbClr val="FFFFFF"/>
+                </a:solidFill>
+                <a:latin typeface="Calibri"/>
+              </a:rPr>
+              <a:t>5</a:t>
+            </a:r>
+          </a:p>
+        </p:txBody>
+      </p:sp>
+      <p:sp>
+        <p:nvSpPr>
+          <p:cNvPr id="20" name="TextBox 19"/>
+          <p:cNvSpPr txBox="1"/>
+          <p:nvPr/>
+        </p:nvSpPr>
+        <p:spPr>
+          <a:xfrm>
+            <a:off x="4023360" y="4370832"/>
+            <a:ext cx="7772400" cy="548640"/>
+          </a:xfrm>
+          <a:prstGeom prst="rect">
+            <a:avLst/>
+          </a:prstGeom>
+          <a:noFill/>
+        </p:spPr>
+        <p:txBody>
+          <a:bodyPr wrap="square" lIns="45720" rIns="45720" tIns="18288" bIns="18288" anchor="ctr">
+            <a:spAutoFit/>
+          </a:bodyPr>
+          <a:lstStyle/>
+          <a:p>
+            <a:pPr algn="l"/>
+            <a:r>
+              <a:rPr sz="1600" b="0" i="0">
                 <a:solidFill>
                   <a:srgbClr val="1A1A2E"/>
                 </a:solidFill>
@@ -6301,7 +7156,7 @@
       </p:sp>
       <p:cxnSp>
         <p:nvCxnSpPr>
-          <p:cNvPr id="5" name="Connector 4"/>
+          <p:cNvPr id="21" name="Connector 20"/>
           <p:cNvCxnSpPr/>
           <p:nvPr/>
         </p:nvCxnSpPr>
@@ -6336,14 +7191,14 @@
       </p:cxnSp>
       <p:sp>
         <p:nvSpPr>
-          <p:cNvPr id="6" name="TextBox 5"/>
+          <p:cNvPr id="22" name="TextBox 21"/>
           <p:cNvSpPr txBox="1"/>
           <p:nvPr/>
         </p:nvSpPr>
         <p:spPr>
           <a:xfrm>
             <a:off x="457200" y="6473952"/>
-            <a:ext cx="7315200" cy="320040"/>
+            <a:ext cx="7315200" cy="292608"/>
           </a:xfrm>
           <a:prstGeom prst="rect">
             <a:avLst/>
@@ -6364,21 +7219,21 @@
                 </a:solidFill>
                 <a:latin typeface="Calibri"/>
               </a:rPr>
-              <a:t>Secure Coding · Corso IFTS STEM · A. Manneschi</a:t>
-            </a:r>
-          </a:p>
-        </p:txBody>
-      </p:sp>
-      <p:sp>
-        <p:nvSpPr>
-          <p:cNvPr id="7" name="TextBox 6"/>
+              <a:t>Secure Coding · Corso IFTS STEM · A. Manneschi · 2024/2025</a:t>
+            </a:r>
+          </a:p>
+        </p:txBody>
+      </p:sp>
+      <p:sp>
+        <p:nvSpPr>
+          <p:cNvPr id="23" name="TextBox 22"/>
           <p:cNvSpPr txBox="1"/>
           <p:nvPr/>
         </p:nvSpPr>
         <p:spPr>
           <a:xfrm>
             <a:off x="10515600" y="6473952"/>
-            <a:ext cx="1188720" cy="320040"/>
+            <a:ext cx="1188720" cy="292608"/>
           </a:xfrm>
           <a:prstGeom prst="rect">
             <a:avLst/>
@@ -6467,14 +7322,57 @@
       </p:sp>
       <p:sp>
         <p:nvSpPr>
-          <p:cNvPr id="3" name="TextBox 2"/>
+          <p:cNvPr id="3" name="Rectangle 2"/>
+          <p:cNvSpPr/>
+          <p:nvPr/>
+        </p:nvSpPr>
+        <p:spPr>
+          <a:xfrm>
+            <a:off x="0" y="0"/>
+            <a:ext cx="365760" cy="6858000"/>
+          </a:xfrm>
+          <a:prstGeom prst="rect">
+            <a:avLst/>
+          </a:prstGeom>
+          <a:solidFill>
+            <a:srgbClr val="00A0B0"/>
+          </a:solidFill>
+          <a:ln>
+            <a:noFill/>
+          </a:ln>
+        </p:spPr>
+        <p:style>
+          <a:lnRef idx="1">
+            <a:schemeClr val="accent1"/>
+          </a:lnRef>
+          <a:fillRef idx="3">
+            <a:schemeClr val="accent1"/>
+          </a:fillRef>
+          <a:effectRef idx="2">
+            <a:schemeClr val="accent1"/>
+          </a:effectRef>
+          <a:fontRef idx="minor">
+            <a:schemeClr val="lt1"/>
+          </a:fontRef>
+        </p:style>
+        <p:txBody>
+          <a:bodyPr rtlCol="0" anchor="ctr"/>
+          <a:lstStyle/>
+          <a:p>
+            <a:pPr algn="ctr"/>
+          </a:p>
+        </p:txBody>
+      </p:sp>
+      <p:sp>
+        <p:nvSpPr>
+          <p:cNvPr id="4" name="TextBox 3"/>
           <p:cNvSpPr txBox="1"/>
           <p:nvPr/>
         </p:nvSpPr>
         <p:spPr>
           <a:xfrm>
-            <a:off x="457200" y="731520"/>
-            <a:ext cx="1828800" cy="1828800"/>
+            <a:off x="914400" y="914400"/>
+            <a:ext cx="2286000" cy="2286000"/>
           </a:xfrm>
           <a:prstGeom prst="rect">
             <a:avLst/>
@@ -6489,7 +7387,7 @@
           <a:p>
             <a:pPr algn="l"/>
             <a:r>
-              <a:rPr sz="20000" b="1" i="0">
+              <a:rPr sz="25000" b="1" i="0">
                 <a:solidFill>
                   <a:srgbClr val="00A0B0"/>
                 </a:solidFill>
@@ -6502,13 +7400,13 @@
       </p:sp>
       <p:sp>
         <p:nvSpPr>
-          <p:cNvPr id="4" name="TextBox 3"/>
+          <p:cNvPr id="5" name="TextBox 4"/>
           <p:cNvSpPr txBox="1"/>
           <p:nvPr/>
         </p:nvSpPr>
         <p:spPr>
           <a:xfrm>
-            <a:off x="2286000" y="1828800"/>
+            <a:off x="2286000" y="2286000"/>
             <a:ext cx="9144000" cy="3200400"/>
           </a:xfrm>
           <a:prstGeom prst="rect">
@@ -6528,7 +7426,7 @@
                 <a:solidFill>
                   <a:srgbClr val="0F2D52"/>
                 </a:solidFill>
-                <a:latin typeface="Calibri"/>
+                <a:latin typeface="Georgia"/>
               </a:rPr>
               <a:t>Il database deve distinguere tra DATI e ISTRUZIONI. Se non lo fa, sei nei guai.</a:t>
             </a:r>
@@ -6537,19 +7435,19 @@
       </p:sp>
       <p:cxnSp>
         <p:nvCxnSpPr>
-          <p:cNvPr id="5" name="Connector 4"/>
+          <p:cNvPr id="6" name="Connector 5"/>
           <p:cNvCxnSpPr/>
           <p:nvPr/>
         </p:nvCxnSpPr>
         <p:spPr>
           <a:xfrm>
-            <a:off x="457200" y="6446520"/>
-            <a:ext cx="11274552" cy="0"/>
+            <a:off x="2286000" y="5029200"/>
+            <a:ext cx="1828800" cy="0"/>
           </a:xfrm>
           <a:prstGeom prst="line">
             <a:avLst/>
           </a:prstGeom>
-          <a:ln w="19050">
+          <a:ln w="38100">
             <a:solidFill>
               <a:srgbClr val="00A0B0"/>
             </a:solidFill>
@@ -6570,16 +7468,51 @@
           </a:fontRef>
         </p:style>
       </p:cxnSp>
-      <p:sp>
-        <p:nvSpPr>
-          <p:cNvPr id="6" name="TextBox 5"/>
+      <p:cxnSp>
+        <p:nvCxnSpPr>
+          <p:cNvPr id="7" name="Connector 6"/>
+          <p:cNvCxnSpPr/>
+          <p:nvPr/>
+        </p:nvCxnSpPr>
+        <p:spPr>
+          <a:xfrm>
+            <a:off x="457200" y="6446520"/>
+            <a:ext cx="11274552" cy="0"/>
+          </a:xfrm>
+          <a:prstGeom prst="line">
+            <a:avLst/>
+          </a:prstGeom>
+          <a:ln w="19050">
+            <a:solidFill>
+              <a:srgbClr val="00A0B0"/>
+            </a:solidFill>
+          </a:ln>
+        </p:spPr>
+        <p:style>
+          <a:lnRef idx="2">
+            <a:schemeClr val="accent1"/>
+          </a:lnRef>
+          <a:fillRef idx="0">
+            <a:schemeClr val="accent1"/>
+          </a:fillRef>
+          <a:effectRef idx="1">
+            <a:schemeClr val="accent1"/>
+          </a:effectRef>
+          <a:fontRef idx="minor">
+            <a:schemeClr val="tx1"/>
+          </a:fontRef>
+        </p:style>
+      </p:cxnSp>
+      <p:sp>
+        <p:nvSpPr>
+          <p:cNvPr id="8" name="TextBox 7"/>
           <p:cNvSpPr txBox="1"/>
           <p:nvPr/>
         </p:nvSpPr>
         <p:spPr>
           <a:xfrm>
             <a:off x="457200" y="6473952"/>
-            <a:ext cx="7315200" cy="320040"/>
+            <a:ext cx="7315200" cy="292608"/>
           </a:xfrm>
           <a:prstGeom prst="rect">
             <a:avLst/>
@@ -6600,21 +7533,21 @@
                 </a:solidFill>
                 <a:latin typeface="Calibri"/>
               </a:rPr>
-              <a:t>Secure Coding · Corso IFTS STEM · A. Manneschi</a:t>
-            </a:r>
-          </a:p>
-        </p:txBody>
-      </p:sp>
-      <p:sp>
-        <p:nvSpPr>
-          <p:cNvPr id="7" name="TextBox 6"/>
+              <a:t>Secure Coding · Corso IFTS STEM · A. Manneschi · 2024/2025</a:t>
+            </a:r>
+          </a:p>
+        </p:txBody>
+      </p:sp>
+      <p:sp>
+        <p:nvSpPr>
+          <p:cNvPr id="9" name="TextBox 8"/>
           <p:cNvSpPr txBox="1"/>
           <p:nvPr/>
         </p:nvSpPr>
         <p:spPr>
           <a:xfrm>
             <a:off x="10515600" y="6473952"/>
-            <a:ext cx="1188720" cy="320040"/>
+            <a:ext cx="1188720" cy="292608"/>
           </a:xfrm>
           <a:prstGeom prst="rect">
             <a:avLst/>
@@ -6731,21 +7664,45 @@
                 </a:solidFill>
                 <a:latin typeface="Calibri"/>
               </a:rPr>
-              <a:t>Analogia: il modulo cartaceo</a:t>
-            </a:r>
-          </a:p>
-        </p:txBody>
-      </p:sp>
-      <p:sp>
-        <p:nvSpPr>
-          <p:cNvPr id="4" name="TextBox 3"/>
+              <a:t>Codice vulnerabile</a:t>
+            </a:r>
+          </a:p>
+        </p:txBody>
+      </p:sp>
+      <p:pic>
+        <p:nvPicPr>
+          <p:cNvPr id="4" name="Picture 3" descr="cap3_sqli_vulnerable.png"/>
+          <p:cNvPicPr>
+            <a:picLocks noChangeAspect="1"/>
+          </p:cNvPicPr>
+          <p:nvPr/>
+        </p:nvPicPr>
+        <p:blipFill>
+          <a:blip r:embed="rId2"/>
+          <a:stretch>
+            <a:fillRect/>
+          </a:stretch>
+        </p:blipFill>
+        <p:spPr>
+          <a:xfrm>
+            <a:off x="640080" y="1097280"/>
+            <a:ext cx="10881360" cy="4572000"/>
+          </a:xfrm>
+          <a:prstGeom prst="rect">
+            <a:avLst/>
+          </a:prstGeom>
+        </p:spPr>
+      </p:pic>
+      <p:sp>
+        <p:nvSpPr>
+          <p:cNvPr id="5" name="TextBox 4"/>
           <p:cNvSpPr txBox="1"/>
           <p:nvPr/>
         </p:nvSpPr>
         <p:spPr>
           <a:xfrm>
-            <a:off x="640080" y="1005840"/>
-            <a:ext cx="10972800" cy="5029200"/>
+            <a:off x="457200" y="5852160"/>
+            <a:ext cx="11247120" cy="365760"/>
           </a:xfrm>
           <a:prstGeom prst="rect">
             <a:avLst/>
@@ -6753,215 +7710,27 @@
           <a:noFill/>
         </p:spPr>
         <p:txBody>
-          <a:bodyPr wrap="square">
+          <a:bodyPr wrap="square" lIns="45720" rIns="45720" tIns="18288" bIns="18288" anchor="t">
             <a:spAutoFit/>
           </a:bodyPr>
           <a:lstStyle/>
           <a:p>
-            <a:pPr>
-              <a:lnSpc>
-                <a:spcPct val="150000"/>
-              </a:lnSpc>
-            </a:pPr>
-            <a:r>
-              <a:rPr sz="2000" b="1">
-                <a:solidFill>
-                  <a:srgbClr val="00A0B0"/>
-                </a:solidFill>
-                <a:latin typeface="Calibri"/>
-              </a:rPr>
-              <a:t>▸  </a:t>
-            </a:r>
-            <a:r>
-              <a:rPr sz="2000">
-                <a:solidFill>
-                  <a:srgbClr val="1A1A2E"/>
-                </a:solidFill>
-                <a:latin typeface="Calibri"/>
-              </a:rPr>
-              <a:t>Immagina di lavorare all'anagrafe. Un cittadino scrive nel campo Nome:</a:t>
-            </a:r>
-          </a:p>
-          <a:p>
-            <a:pPr>
-              <a:lnSpc>
-                <a:spcPct val="150000"/>
-              </a:lnSpc>
-            </a:pPr>
-            <a:r>
-              <a:rPr sz="2000" b="1">
-                <a:solidFill>
-                  <a:srgbClr val="00A0B0"/>
-                </a:solidFill>
-                <a:latin typeface="Calibri"/>
-              </a:rPr>
-              <a:t>▸  </a:t>
-            </a:r>
-            <a:r>
-              <a:rPr sz="2000">
-                <a:solidFill>
-                  <a:srgbClr val="1A1A2E"/>
-                </a:solidFill>
-                <a:latin typeface="Calibri"/>
-              </a:rPr>
-              <a:t/>
-            </a:r>
-          </a:p>
-          <a:p>
-            <a:pPr>
-              <a:lnSpc>
-                <a:spcPct val="150000"/>
-              </a:lnSpc>
-            </a:pPr>
-            <a:r>
-              <a:rPr sz="2000" b="1">
-                <a:solidFill>
-                  <a:srgbClr val="00A0B0"/>
-                </a:solidFill>
-                <a:latin typeface="Calibri"/>
-              </a:rPr>
-              <a:t>▸  </a:t>
-            </a:r>
-            <a:r>
-              <a:rPr sz="2000">
-                <a:solidFill>
-                  <a:srgbClr val="1A1A2E"/>
-                </a:solidFill>
-                <a:latin typeface="Calibri"/>
-              </a:rPr>
-              <a:t>  Mario --- distruggi tutti i moduli precedenti ---</a:t>
-            </a:r>
-          </a:p>
-          <a:p>
-            <a:pPr>
-              <a:lnSpc>
-                <a:spcPct val="150000"/>
-              </a:lnSpc>
-            </a:pPr>
-            <a:r>
-              <a:rPr sz="2000" b="1">
-                <a:solidFill>
-                  <a:srgbClr val="00A0B0"/>
-                </a:solidFill>
-                <a:latin typeface="Calibri"/>
-              </a:rPr>
-              <a:t>▸  </a:t>
-            </a:r>
-            <a:r>
-              <a:rPr sz="2000">
-                <a:solidFill>
-                  <a:srgbClr val="1A1A2E"/>
-                </a:solidFill>
-                <a:latin typeface="Calibri"/>
-              </a:rPr>
-              <a:t/>
-            </a:r>
-          </a:p>
-          <a:p>
-            <a:pPr>
-              <a:lnSpc>
-                <a:spcPct val="150000"/>
-              </a:lnSpc>
-            </a:pPr>
-            <a:r>
-              <a:rPr sz="2000" b="1">
-                <a:solidFill>
-                  <a:srgbClr val="00A0B0"/>
-                </a:solidFill>
-                <a:latin typeface="Calibri"/>
-              </a:rPr>
-              <a:t>▸  </a:t>
-            </a:r>
-            <a:r>
-              <a:rPr sz="2000">
-                <a:solidFill>
-                  <a:srgbClr val="1A1A2E"/>
-                </a:solidFill>
-                <a:latin typeface="Calibri"/>
-              </a:rPr>
-              <a:t>Cosa fai? Ovviamente ignori la 'parte in basso': è un campo, sai dove</a:t>
-            </a:r>
-          </a:p>
-          <a:p>
-            <a:pPr>
-              <a:lnSpc>
-                <a:spcPct val="150000"/>
-              </a:lnSpc>
-            </a:pPr>
-            <a:r>
-              <a:rPr sz="2000" b="1">
-                <a:solidFill>
-                  <a:srgbClr val="00A0B0"/>
-                </a:solidFill>
-                <a:latin typeface="Calibri"/>
-              </a:rPr>
-              <a:t>▸  </a:t>
-            </a:r>
-            <a:r>
-              <a:rPr sz="2000">
-                <a:solidFill>
-                  <a:srgbClr val="1A1A2E"/>
-                </a:solidFill>
-                <a:latin typeface="Calibri"/>
-              </a:rPr>
-              <a:t>finiscono i dati che ti interessano. NON confondi DATI con ISTRUZIONI.</a:t>
-            </a:r>
-          </a:p>
-          <a:p>
-            <a:pPr>
-              <a:lnSpc>
-                <a:spcPct val="150000"/>
-              </a:lnSpc>
-            </a:pPr>
-            <a:r>
-              <a:rPr sz="2000" b="1">
-                <a:solidFill>
-                  <a:srgbClr val="00A0B0"/>
-                </a:solidFill>
-                <a:latin typeface="Calibri"/>
-              </a:rPr>
-              <a:t>▸  </a:t>
-            </a:r>
-            <a:r>
-              <a:rPr sz="2000">
-                <a:solidFill>
-                  <a:srgbClr val="1A1A2E"/>
-                </a:solidFill>
-                <a:latin typeface="Calibri"/>
-              </a:rPr>
-              <a:t/>
-            </a:r>
-          </a:p>
-          <a:p>
-            <a:pPr>
-              <a:lnSpc>
-                <a:spcPct val="150000"/>
-              </a:lnSpc>
-            </a:pPr>
-            <a:r>
-              <a:rPr sz="2000" b="1">
-                <a:solidFill>
-                  <a:srgbClr val="00A0B0"/>
-                </a:solidFill>
-                <a:latin typeface="Calibri"/>
-              </a:rPr>
-              <a:t>▸  </a:t>
-            </a:r>
-            <a:r>
-              <a:rPr sz="2000">
-                <a:solidFill>
-                  <a:srgbClr val="1A1A2E"/>
-                </a:solidFill>
-                <a:latin typeface="Calibri"/>
-              </a:rPr>
-              <a:t>I database meno fortunati, invece, le confondono.</a:t>
+            <a:pPr algn="ctr"/>
+            <a:r>
+              <a:rPr sz="1300" b="0" i="1">
+                <a:solidFill>
+                  <a:srgbClr val="6B7280"/>
+                </a:solidFill>
+                <a:latin typeface="Calibri"/>
+              </a:rPr>
+              <a:t>f-string che mescola struttura SQL e input utente = SQLi garantita</a:t>
             </a:r>
           </a:p>
         </p:txBody>
       </p:sp>
       <p:cxnSp>
         <p:nvCxnSpPr>
-          <p:cNvPr id="5" name="Connector 4"/>
+          <p:cNvPr id="6" name="Connector 5"/>
           <p:cNvCxnSpPr/>
           <p:nvPr/>
         </p:nvCxnSpPr>
@@ -6996,14 +7765,14 @@
       </p:cxnSp>
       <p:sp>
         <p:nvSpPr>
-          <p:cNvPr id="6" name="TextBox 5"/>
+          <p:cNvPr id="7" name="TextBox 6"/>
           <p:cNvSpPr txBox="1"/>
           <p:nvPr/>
         </p:nvSpPr>
         <p:spPr>
           <a:xfrm>
             <a:off x="457200" y="6473952"/>
-            <a:ext cx="7315200" cy="320040"/>
+            <a:ext cx="7315200" cy="292608"/>
           </a:xfrm>
           <a:prstGeom prst="rect">
             <a:avLst/>
@@ -7024,21 +7793,21 @@
                 </a:solidFill>
                 <a:latin typeface="Calibri"/>
               </a:rPr>
-              <a:t>Secure Coding · Corso IFTS STEM · A. Manneschi</a:t>
-            </a:r>
-          </a:p>
-        </p:txBody>
-      </p:sp>
-      <p:sp>
-        <p:nvSpPr>
-          <p:cNvPr id="7" name="TextBox 6"/>
+              <a:t>Secure Coding · Corso IFTS STEM · A. Manneschi · 2024/2025</a:t>
+            </a:r>
+          </a:p>
+        </p:txBody>
+      </p:sp>
+      <p:sp>
+        <p:nvSpPr>
+          <p:cNvPr id="8" name="TextBox 7"/>
           <p:cNvSpPr txBox="1"/>
           <p:nvPr/>
         </p:nvSpPr>
         <p:spPr>
           <a:xfrm>
             <a:off x="10515600" y="6473952"/>
-            <a:ext cx="1188720" cy="320040"/>
+            <a:ext cx="1188720" cy="292608"/>
           </a:xfrm>
           <a:prstGeom prst="rect">
             <a:avLst/>
@@ -7134,7 +7903,7 @@
         <p:spPr>
           <a:xfrm>
             <a:off x="457200" y="164592"/>
-            <a:ext cx="10058400" cy="502920"/>
+            <a:ext cx="10972800" cy="502920"/>
           </a:xfrm>
           <a:prstGeom prst="rect">
             <a:avLst/>
@@ -7155,54 +7924,35 @@
                 </a:solidFill>
                 <a:latin typeface="Calibri"/>
               </a:rPr>
-              <a:t>Il codice vulnerabile</a:t>
-            </a:r>
-          </a:p>
-        </p:txBody>
-      </p:sp>
-      <p:sp>
-        <p:nvSpPr>
-          <p:cNvPr id="4" name="Rectangle 3"/>
-          <p:cNvSpPr/>
-          <p:nvPr/>
-        </p:nvSpPr>
-        <p:spPr>
-          <a:xfrm>
-            <a:off x="9875520" y="164592"/>
-            <a:ext cx="2103120" cy="457200"/>
-          </a:xfrm>
-          <a:prstGeom prst="rect">
-            <a:avLst/>
-          </a:prstGeom>
-          <a:solidFill>
-            <a:srgbClr val="E63946"/>
-          </a:solidFill>
-          <a:ln>
-            <a:noFill/>
-          </a:ln>
-        </p:spPr>
-        <p:style>
-          <a:lnRef idx="1">
-            <a:schemeClr val="accent1"/>
-          </a:lnRef>
-          <a:fillRef idx="3">
-            <a:schemeClr val="accent1"/>
-          </a:fillRef>
-          <a:effectRef idx="2">
-            <a:schemeClr val="accent1"/>
-          </a:effectRef>
-          <a:fontRef idx="minor">
-            <a:schemeClr val="lt1"/>
-          </a:fontRef>
-        </p:style>
-        <p:txBody>
-          <a:bodyPr rtlCol="0" anchor="ctr"/>
-          <a:lstStyle/>
-          <a:p>
-            <a:pPr algn="ctr"/>
-          </a:p>
-        </p:txBody>
-      </p:sp>
+              <a:t>Anatomia di un attacco</a:t>
+            </a:r>
+          </a:p>
+        </p:txBody>
+      </p:sp>
+      <p:pic>
+        <p:nvPicPr>
+          <p:cNvPr id="4" name="Picture 3" descr="cap3_sqli_anatomia.png"/>
+          <p:cNvPicPr>
+            <a:picLocks noChangeAspect="1"/>
+          </p:cNvPicPr>
+          <p:nvPr/>
+        </p:nvPicPr>
+        <p:blipFill>
+          <a:blip r:embed="rId2"/>
+          <a:stretch>
+            <a:fillRect/>
+          </a:stretch>
+        </p:blipFill>
+        <p:spPr>
+          <a:xfrm>
+            <a:off x="640080" y="1097280"/>
+            <a:ext cx="10881360" cy="4572000"/>
+          </a:xfrm>
+          <a:prstGeom prst="rect">
+            <a:avLst/>
+          </a:prstGeom>
+        </p:spPr>
+      </p:pic>
       <p:sp>
         <p:nvSpPr>
           <p:cNvPr id="5" name="TextBox 4"/>
@@ -7211,88 +7961,8 @@
         </p:nvSpPr>
         <p:spPr>
           <a:xfrm>
-            <a:off x="9875520" y="182880"/>
-            <a:ext cx="2103120" cy="457200"/>
-          </a:xfrm>
-          <a:prstGeom prst="rect">
-            <a:avLst/>
-          </a:prstGeom>
-          <a:noFill/>
-        </p:spPr>
-        <p:txBody>
-          <a:bodyPr wrap="square" lIns="45720" rIns="45720" tIns="18288" bIns="18288" anchor="ctr">
-            <a:spAutoFit/>
-          </a:bodyPr>
-          <a:lstStyle/>
-          <a:p>
-            <a:pPr algn="ctr"/>
-            <a:r>
-              <a:rPr sz="1200" b="1" i="0">
-                <a:solidFill>
-                  <a:srgbClr val="FFFFFF"/>
-                </a:solidFill>
-                <a:latin typeface="Calibri"/>
-              </a:rPr>
-              <a:t>🚩 ANTI-PATTERN</a:t>
-            </a:r>
-          </a:p>
-        </p:txBody>
-      </p:sp>
-      <p:sp>
-        <p:nvSpPr>
-          <p:cNvPr id="6" name="Rectangle 5"/>
-          <p:cNvSpPr/>
-          <p:nvPr/>
-        </p:nvSpPr>
-        <p:spPr>
-          <a:xfrm>
-            <a:off x="457200" y="1097280"/>
-            <a:ext cx="11247120" cy="4572000"/>
-          </a:xfrm>
-          <a:prstGeom prst="rect">
-            <a:avLst/>
-          </a:prstGeom>
-          <a:solidFill>
-            <a:srgbClr val="F1F4F8"/>
-          </a:solidFill>
-          <a:ln>
-            <a:solidFill>
-              <a:srgbClr val="E63946"/>
-            </a:solidFill>
-          </a:ln>
-        </p:spPr>
-        <p:style>
-          <a:lnRef idx="1">
-            <a:schemeClr val="accent1"/>
-          </a:lnRef>
-          <a:fillRef idx="3">
-            <a:schemeClr val="accent1"/>
-          </a:fillRef>
-          <a:effectRef idx="2">
-            <a:schemeClr val="accent1"/>
-          </a:effectRef>
-          <a:fontRef idx="minor">
-            <a:schemeClr val="lt1"/>
-          </a:fontRef>
-        </p:style>
-        <p:txBody>
-          <a:bodyPr rtlCol="0" anchor="ctr"/>
-          <a:lstStyle/>
-          <a:p>
-            <a:pPr algn="ctr"/>
-          </a:p>
-        </p:txBody>
-      </p:sp>
-      <p:sp>
-        <p:nvSpPr>
-          <p:cNvPr id="7" name="TextBox 6"/>
-          <p:cNvSpPr txBox="1"/>
-          <p:nvPr/>
-        </p:nvSpPr>
-        <p:spPr>
-          <a:xfrm>
-            <a:off x="640080" y="1280160"/>
-            <a:ext cx="10972800" cy="4206240"/>
+            <a:off x="457200" y="5852160"/>
+            <a:ext cx="11247120" cy="365760"/>
           </a:xfrm>
           <a:prstGeom prst="rect">
             <a:avLst/>
@@ -7305,165 +7975,22 @@
           </a:bodyPr>
           <a:lstStyle/>
           <a:p>
-            <a:pPr algn="l"/>
-            <a:r>
-              <a:rPr sz="1400" b="0" i="0">
-                <a:solidFill>
-                  <a:srgbClr val="1A1A2E"/>
-                </a:solidFill>
-                <a:latin typeface="Consolas"/>
-              </a:rPr>
-              <a:t>@app.route("/login", methods=["POST"])</a:t>
-            </a:r>
-          </a:p>
-          <a:p>
-            <a:pPr algn="l"/>
-            <a:r>
-              <a:rPr sz="1400" b="0" i="0">
-                <a:solidFill>
-                  <a:srgbClr val="1A1A2E"/>
-                </a:solidFill>
-                <a:latin typeface="Consolas"/>
-              </a:rPr>
-              <a:t>def login():</a:t>
-            </a:r>
-          </a:p>
-          <a:p>
-            <a:pPr algn="l"/>
-            <a:r>
-              <a:rPr sz="1400" b="0" i="0">
-                <a:solidFill>
-                  <a:srgbClr val="1A1A2E"/>
-                </a:solidFill>
-                <a:latin typeface="Consolas"/>
-              </a:rPr>
-              <a:t>    email = request.form["email"]</a:t>
-            </a:r>
-          </a:p>
-          <a:p>
-            <a:pPr algn="l"/>
-            <a:r>
-              <a:rPr sz="1400" b="0" i="0">
-                <a:solidFill>
-                  <a:srgbClr val="1A1A2E"/>
-                </a:solidFill>
-                <a:latin typeface="Consolas"/>
-              </a:rPr>
-              <a:t>    pwd = request.form["password"]</a:t>
-            </a:r>
-          </a:p>
-          <a:p>
-            <a:pPr algn="l"/>
-            <a:r>
-              <a:rPr sz="1400" b="0" i="0">
-                <a:solidFill>
-                  <a:srgbClr val="1A1A2E"/>
-                </a:solidFill>
-                <a:latin typeface="Consolas"/>
-              </a:rPr>
-              <a:t>    sql = f"SELECT id FROM users WHERE email = '{email}' AND password = '{pwd}'"</a:t>
-            </a:r>
-          </a:p>
-          <a:p>
-            <a:pPr algn="l"/>
-            <a:r>
-              <a:rPr sz="1400" b="0" i="0">
-                <a:solidFill>
-                  <a:srgbClr val="1A1A2E"/>
-                </a:solidFill>
-                <a:latin typeface="Consolas"/>
-              </a:rPr>
-              <a:t>    row = db.execute(sql).fetchone()</a:t>
-            </a:r>
-          </a:p>
-          <a:p>
-            <a:pPr algn="l"/>
-            <a:r>
-              <a:rPr sz="1400" b="0" i="0">
-                <a:solidFill>
-                  <a:srgbClr val="1A1A2E"/>
-                </a:solidFill>
-                <a:latin typeface="Consolas"/>
-              </a:rPr>
-              <a:t>    if row:</a:t>
-            </a:r>
-          </a:p>
-          <a:p>
-            <a:pPr algn="l"/>
-            <a:r>
-              <a:rPr sz="1400" b="0" i="0">
-                <a:solidFill>
-                  <a:srgbClr val="1A1A2E"/>
-                </a:solidFill>
-                <a:latin typeface="Consolas"/>
-              </a:rPr>
-              <a:t>        session["user_id"] = row["id"]</a:t>
-            </a:r>
-          </a:p>
-          <a:p>
-            <a:pPr algn="l"/>
-            <a:r>
-              <a:rPr sz="1400" b="0" i="0">
-                <a:solidFill>
-                  <a:srgbClr val="1A1A2E"/>
-                </a:solidFill>
-                <a:latin typeface="Consolas"/>
-              </a:rPr>
-              <a:t>        return redirect("/dashboard")</a:t>
-            </a:r>
-          </a:p>
-          <a:p>
-            <a:pPr algn="l"/>
-            <a:r>
-              <a:rPr sz="1400" b="0" i="0">
-                <a:solidFill>
-                  <a:srgbClr val="1A1A2E"/>
-                </a:solidFill>
-                <a:latin typeface="Consolas"/>
-              </a:rPr>
-              <a:t>    return "Login fallito", 401</a:t>
-            </a:r>
-          </a:p>
-        </p:txBody>
-      </p:sp>
-      <p:sp>
-        <p:nvSpPr>
-          <p:cNvPr id="8" name="TextBox 7"/>
-          <p:cNvSpPr txBox="1"/>
-          <p:nvPr/>
-        </p:nvSpPr>
-        <p:spPr>
-          <a:xfrm>
-            <a:off x="457200" y="5852160"/>
-            <a:ext cx="11247120" cy="457200"/>
-          </a:xfrm>
-          <a:prstGeom prst="rect">
-            <a:avLst/>
-          </a:prstGeom>
-          <a:noFill/>
-        </p:spPr>
-        <p:txBody>
-          <a:bodyPr wrap="square" lIns="45720" rIns="45720" tIns="18288" bIns="18288" anchor="t">
-            <a:spAutoFit/>
-          </a:bodyPr>
-          <a:lstStyle/>
-          <a:p>
-            <a:pPr algn="l"/>
-            <a:r>
-              <a:rPr sz="1400" b="1" i="1">
-                <a:solidFill>
-                  <a:srgbClr val="E63946"/>
-                </a:solidFill>
-                <a:latin typeface="Calibri"/>
-              </a:rPr>
-              <a:t>⚠  f-string che mescola struttura SQL e dati utente = SQLi garantita</a:t>
+            <a:pPr algn="ctr"/>
+            <a:r>
+              <a:rPr sz="1300" b="0" i="1">
+                <a:solidFill>
+                  <a:srgbClr val="6B7280"/>
+                </a:solidFill>
+                <a:latin typeface="Calibri"/>
+              </a:rPr>
+              <a:t>Login bypass in tre passi: l'attaccante non conosce la password</a:t>
             </a:r>
           </a:p>
         </p:txBody>
       </p:sp>
       <p:cxnSp>
         <p:nvCxnSpPr>
-          <p:cNvPr id="9" name="Connector 8"/>
+          <p:cNvPr id="6" name="Connector 5"/>
           <p:cNvCxnSpPr/>
           <p:nvPr/>
         </p:nvCxnSpPr>
@@ -7498,14 +8025,14 @@
       </p:cxnSp>
       <p:sp>
         <p:nvSpPr>
-          <p:cNvPr id="10" name="TextBox 9"/>
+          <p:cNvPr id="7" name="TextBox 6"/>
           <p:cNvSpPr txBox="1"/>
           <p:nvPr/>
         </p:nvSpPr>
         <p:spPr>
           <a:xfrm>
             <a:off x="457200" y="6473952"/>
-            <a:ext cx="7315200" cy="320040"/>
+            <a:ext cx="7315200" cy="292608"/>
           </a:xfrm>
           <a:prstGeom prst="rect">
             <a:avLst/>
@@ -7526,21 +8053,21 @@
                 </a:solidFill>
                 <a:latin typeface="Calibri"/>
               </a:rPr>
-              <a:t>Secure Coding · Corso IFTS STEM · A. Manneschi</a:t>
-            </a:r>
-          </a:p>
-        </p:txBody>
-      </p:sp>
-      <p:sp>
-        <p:nvSpPr>
-          <p:cNvPr id="11" name="TextBox 10"/>
+              <a:t>Secure Coding · Corso IFTS STEM · A. Manneschi · 2024/2025</a:t>
+            </a:r>
+          </a:p>
+        </p:txBody>
+      </p:sp>
+      <p:sp>
+        <p:nvSpPr>
+          <p:cNvPr id="8" name="TextBox 7"/>
           <p:cNvSpPr txBox="1"/>
           <p:nvPr/>
         </p:nvSpPr>
         <p:spPr>
           <a:xfrm>
             <a:off x="10515600" y="6473952"/>
-            <a:ext cx="1188720" cy="320040"/>
+            <a:ext cx="1188720" cy="292608"/>
           </a:xfrm>
           <a:prstGeom prst="rect">
             <a:avLst/>
@@ -7593,7 +8120,7 @@
         <p:spPr>
           <a:xfrm>
             <a:off x="0" y="0"/>
-            <a:ext cx="2286000" cy="6858000"/>
+            <a:ext cx="12191695" cy="777240"/>
           </a:xfrm>
           <a:prstGeom prst="rect">
             <a:avLst/>
@@ -7635,8 +8162,67 @@
         </p:nvSpPr>
         <p:spPr>
           <a:xfrm>
-            <a:off x="274320" y="2286000"/>
-            <a:ext cx="1828800" cy="1828800"/>
+            <a:off x="457200" y="164592"/>
+            <a:ext cx="10972800" cy="502920"/>
+          </a:xfrm>
+          <a:prstGeom prst="rect">
+            <a:avLst/>
+          </a:prstGeom>
+          <a:noFill/>
+        </p:spPr>
+        <p:txBody>
+          <a:bodyPr wrap="square" lIns="45720" rIns="45720" tIns="18288" bIns="18288" anchor="ctr">
+            <a:spAutoFit/>
+          </a:bodyPr>
+          <a:lstStyle/>
+          <a:p>
+            <a:pPr algn="l"/>
+            <a:r>
+              <a:rPr sz="2400" b="1" i="0">
+                <a:solidFill>
+                  <a:srgbClr val="FFFFFF"/>
+                </a:solidFill>
+                <a:latin typeface="Calibri"/>
+              </a:rPr>
+              <a:t>L'attacco in pratica (curl)</a:t>
+            </a:r>
+          </a:p>
+        </p:txBody>
+      </p:sp>
+      <p:pic>
+        <p:nvPicPr>
+          <p:cNvPr id="4" name="Picture 3" descr="cap3_sqli_attack.png"/>
+          <p:cNvPicPr>
+            <a:picLocks noChangeAspect="1"/>
+          </p:cNvPicPr>
+          <p:nvPr/>
+        </p:nvPicPr>
+        <p:blipFill>
+          <a:blip r:embed="rId2"/>
+          <a:stretch>
+            <a:fillRect/>
+          </a:stretch>
+        </p:blipFill>
+        <p:spPr>
+          <a:xfrm>
+            <a:off x="640080" y="1097280"/>
+            <a:ext cx="10881360" cy="4572000"/>
+          </a:xfrm>
+          <a:prstGeom prst="rect">
+            <a:avLst/>
+          </a:prstGeom>
+        </p:spPr>
+      </p:pic>
+      <p:sp>
+        <p:nvSpPr>
+          <p:cNvPr id="5" name="TextBox 4"/>
+          <p:cNvSpPr txBox="1"/>
+          <p:nvPr/>
+        </p:nvSpPr>
+        <p:spPr>
+          <a:xfrm>
+            <a:off x="457200" y="5852160"/>
+            <a:ext cx="11247120" cy="365760"/>
           </a:xfrm>
           <a:prstGeom prst="rect">
             <a:avLst/>
@@ -7651,83 +8237,13 @@
           <a:p>
             <a:pPr algn="ctr"/>
             <a:r>
-              <a:rPr sz="12000" b="1" i="0">
-                <a:solidFill>
-                  <a:srgbClr val="00A0B0"/>
-                </a:solidFill>
-                <a:latin typeface="Calibri"/>
-              </a:rPr>
-              <a:t>01</a:t>
-            </a:r>
-          </a:p>
-        </p:txBody>
-      </p:sp>
-      <p:sp>
-        <p:nvSpPr>
-          <p:cNvPr id="4" name="TextBox 3"/>
-          <p:cNvSpPr txBox="1"/>
-          <p:nvPr/>
-        </p:nvSpPr>
-        <p:spPr>
-          <a:xfrm>
-            <a:off x="2743200" y="2560320"/>
-            <a:ext cx="8961120" cy="1371600"/>
-          </a:xfrm>
-          <a:prstGeom prst="rect">
-            <a:avLst/>
-          </a:prstGeom>
-          <a:noFill/>
-        </p:spPr>
-        <p:txBody>
-          <a:bodyPr wrap="square" lIns="45720" rIns="45720" tIns="18288" bIns="18288" anchor="t">
-            <a:spAutoFit/>
-          </a:bodyPr>
-          <a:lstStyle/>
-          <a:p>
-            <a:pPr algn="l"/>
-            <a:r>
-              <a:rPr sz="4200" b="1" i="0">
-                <a:solidFill>
-                  <a:srgbClr val="0F2D52"/>
-                </a:solidFill>
-                <a:latin typeface="Calibri"/>
-              </a:rPr>
-              <a:t>Attacco 1: Login Bypass</a:t>
-            </a:r>
-          </a:p>
-        </p:txBody>
-      </p:sp>
-      <p:sp>
-        <p:nvSpPr>
-          <p:cNvPr id="5" name="TextBox 4"/>
-          <p:cNvSpPr txBox="1"/>
-          <p:nvPr/>
-        </p:nvSpPr>
-        <p:spPr>
-          <a:xfrm>
-            <a:off x="2743200" y="3931920"/>
-            <a:ext cx="8961120" cy="1828800"/>
-          </a:xfrm>
-          <a:prstGeom prst="rect">
-            <a:avLst/>
-          </a:prstGeom>
-          <a:noFill/>
-        </p:spPr>
-        <p:txBody>
-          <a:bodyPr wrap="square" lIns="45720" rIns="45720" tIns="18288" bIns="18288" anchor="t">
-            <a:spAutoFit/>
-          </a:bodyPr>
-          <a:lstStyle/>
-          <a:p>
-            <a:pPr algn="l"/>
-            <a:r>
-              <a:rPr sz="1800" b="0" i="1">
+              <a:rPr sz="1300" b="0" i="1">
                 <a:solidFill>
                   <a:srgbClr val="6B7280"/>
                 </a:solidFill>
                 <a:latin typeface="Calibri"/>
               </a:rPr>
-              <a:t>Entrare senza conoscere la password — in 5 secondi</a:t>
+              <a:t>Una richiesta HTTP, una sessione admin. Senza credenziali.</a:t>
             </a:r>
           </a:p>
         </p:txBody>
@@ -7776,7 +8292,7 @@
         <p:spPr>
           <a:xfrm>
             <a:off x="457200" y="6473952"/>
-            <a:ext cx="7315200" cy="320040"/>
+            <a:ext cx="7315200" cy="292608"/>
           </a:xfrm>
           <a:prstGeom prst="rect">
             <a:avLst/>
@@ -7797,7 +8313,7 @@
                 </a:solidFill>
                 <a:latin typeface="Calibri"/>
               </a:rPr>
-              <a:t>Secure Coding · Corso IFTS STEM · A. Manneschi</a:t>
+              <a:t>Secure Coding · Corso IFTS STEM · A. Manneschi · 2024/2025</a:t>
             </a:r>
           </a:p>
         </p:txBody>
@@ -7811,7 +8327,7 @@
         <p:spPr>
           <a:xfrm>
             <a:off x="10515600" y="6473952"/>
-            <a:ext cx="1188720" cy="320040"/>
+            <a:ext cx="1188720" cy="292608"/>
           </a:xfrm>
           <a:prstGeom prst="rect">
             <a:avLst/>
@@ -7864,13 +8380,13 @@
         <p:spPr>
           <a:xfrm>
             <a:off x="0" y="0"/>
-            <a:ext cx="12191695" cy="777240"/>
+            <a:ext cx="4114800" cy="6858000"/>
           </a:xfrm>
           <a:prstGeom prst="rect">
             <a:avLst/>
           </a:prstGeom>
           <a:solidFill>
-            <a:srgbClr val="0F2D52"/>
+            <a:srgbClr val="081B33"/>
           </a:solidFill>
           <a:ln>
             <a:noFill/>
@@ -7900,55 +8416,20 @@
       </p:sp>
       <p:sp>
         <p:nvSpPr>
-          <p:cNvPr id="3" name="TextBox 2"/>
-          <p:cNvSpPr txBox="1"/>
-          <p:nvPr/>
-        </p:nvSpPr>
-        <p:spPr>
-          <a:xfrm>
-            <a:off x="457200" y="164592"/>
-            <a:ext cx="10058400" cy="502920"/>
-          </a:xfrm>
-          <a:prstGeom prst="rect">
-            <a:avLst/>
-          </a:prstGeom>
-          <a:noFill/>
-        </p:spPr>
-        <p:txBody>
-          <a:bodyPr wrap="square" lIns="45720" rIns="45720" tIns="18288" bIns="18288" anchor="ctr">
-            <a:spAutoFit/>
-          </a:bodyPr>
-          <a:lstStyle/>
-          <a:p>
-            <a:pPr algn="l"/>
-            <a:r>
-              <a:rPr sz="2400" b="1" i="0">
-                <a:solidFill>
-                  <a:srgbClr val="FFFFFF"/>
-                </a:solidFill>
-                <a:latin typeface="Calibri"/>
-              </a:rPr>
-              <a:t>Login bypass con ' OR '1'='1' --</a:t>
-            </a:r>
-          </a:p>
-        </p:txBody>
-      </p:sp>
-      <p:sp>
-        <p:nvSpPr>
-          <p:cNvPr id="4" name="Rectangle 3"/>
+          <p:cNvPr id="3" name="Rectangle 2"/>
           <p:cNvSpPr/>
           <p:nvPr/>
         </p:nvSpPr>
         <p:spPr>
           <a:xfrm>
-            <a:off x="9875520" y="164592"/>
-            <a:ext cx="2103120" cy="457200"/>
+            <a:off x="4114800" y="0"/>
+            <a:ext cx="8046720" cy="6858000"/>
           </a:xfrm>
           <a:prstGeom prst="rect">
             <a:avLst/>
           </a:prstGeom>
           <a:solidFill>
-            <a:srgbClr val="E63946"/>
+            <a:srgbClr val="F1F4F8"/>
           </a:solidFill>
           <a:ln>
             <a:noFill/>
@@ -7978,60 +8459,23 @@
       </p:sp>
       <p:sp>
         <p:nvSpPr>
-          <p:cNvPr id="5" name="TextBox 4"/>
-          <p:cNvSpPr txBox="1"/>
-          <p:nvPr/>
-        </p:nvSpPr>
-        <p:spPr>
-          <a:xfrm>
-            <a:off x="9875520" y="182880"/>
-            <a:ext cx="2103120" cy="457200"/>
-          </a:xfrm>
-          <a:prstGeom prst="rect">
-            <a:avLst/>
-          </a:prstGeom>
-          <a:noFill/>
-        </p:spPr>
-        <p:txBody>
-          <a:bodyPr wrap="square" lIns="45720" rIns="45720" tIns="18288" bIns="18288" anchor="ctr">
-            <a:spAutoFit/>
-          </a:bodyPr>
-          <a:lstStyle/>
-          <a:p>
-            <a:pPr algn="ctr"/>
-            <a:r>
-              <a:rPr sz="1200" b="1" i="0">
-                <a:solidFill>
-                  <a:srgbClr val="FFFFFF"/>
-                </a:solidFill>
-                <a:latin typeface="Calibri"/>
-              </a:rPr>
-              <a:t>🚩 ANTI-PATTERN</a:t>
-            </a:r>
-          </a:p>
-        </p:txBody>
-      </p:sp>
-      <p:sp>
-        <p:nvSpPr>
-          <p:cNvPr id="6" name="Rectangle 5"/>
+          <p:cNvPr id="4" name="Rectangle 3"/>
           <p:cNvSpPr/>
           <p:nvPr/>
         </p:nvSpPr>
         <p:spPr>
           <a:xfrm>
-            <a:off x="457200" y="1097280"/>
-            <a:ext cx="11247120" cy="4572000"/>
+            <a:off x="4114800" y="0"/>
+            <a:ext cx="137160" cy="6858000"/>
           </a:xfrm>
           <a:prstGeom prst="rect">
             <a:avLst/>
           </a:prstGeom>
           <a:solidFill>
-            <a:srgbClr val="F1F4F8"/>
+            <a:srgbClr val="00A0B0"/>
           </a:solidFill>
           <a:ln>
-            <a:solidFill>
-              <a:srgbClr val="E63946"/>
-            </a:solidFill>
+            <a:noFill/>
           </a:ln>
         </p:spPr>
         <p:style>
@@ -8058,14 +8502,14 @@
       </p:sp>
       <p:sp>
         <p:nvSpPr>
-          <p:cNvPr id="7" name="TextBox 6"/>
+          <p:cNvPr id="5" name="TextBox 4"/>
           <p:cNvSpPr txBox="1"/>
           <p:nvPr/>
         </p:nvSpPr>
         <p:spPr>
           <a:xfrm>
-            <a:off x="640080" y="1280160"/>
-            <a:ext cx="10972800" cy="4206240"/>
+            <a:off x="274320" y="2103120"/>
+            <a:ext cx="3657600" cy="2286000"/>
           </a:xfrm>
           <a:prstGeom prst="rect">
             <a:avLst/>
@@ -8078,149 +8522,29 @@
           </a:bodyPr>
           <a:lstStyle/>
           <a:p>
-            <a:pPr algn="l"/>
-            <a:r>
-              <a:rPr sz="1400" b="0" i="0">
-                <a:solidFill>
-                  <a:srgbClr val="1A1A2E"/>
-                </a:solidFill>
-                <a:latin typeface="Consolas"/>
-              </a:rPr>
-              <a:t>Email:    ' OR '1'='1' --</a:t>
-            </a:r>
-          </a:p>
-          <a:p>
-            <a:pPr algn="l"/>
-            <a:r>
-              <a:rPr sz="1400" b="0" i="0">
-                <a:solidFill>
-                  <a:srgbClr val="1A1A2E"/>
-                </a:solidFill>
-                <a:latin typeface="Consolas"/>
-              </a:rPr>
-              <a:t>Password: qualunque</a:t>
-            </a:r>
-          </a:p>
-          <a:p>
-            <a:pPr algn="l"/>
-            <a:r>
-              <a:rPr sz="1400" b="0" i="0">
-                <a:solidFill>
-                  <a:srgbClr val="1A1A2E"/>
-                </a:solidFill>
-                <a:latin typeface="Consolas"/>
-              </a:rPr>
-              <a:t/>
-            </a:r>
-          </a:p>
-          <a:p>
-            <a:pPr algn="l"/>
-            <a:r>
-              <a:rPr sz="1400" b="0" i="0">
-                <a:solidFill>
-                  <a:srgbClr val="1A1A2E"/>
-                </a:solidFill>
-                <a:latin typeface="Consolas"/>
-              </a:rPr>
-              <a:t>Query risultante:</a:t>
-            </a:r>
-          </a:p>
-          <a:p>
-            <a:pPr algn="l"/>
-            <a:r>
-              <a:rPr sz="1400" b="0" i="0">
-                <a:solidFill>
-                  <a:srgbClr val="1A1A2E"/>
-                </a:solidFill>
-                <a:latin typeface="Consolas"/>
-              </a:rPr>
-              <a:t>SELECT id FROM users WHERE email = '' OR '1'='1' --' AND password = 'qualunque'</a:t>
-            </a:r>
-          </a:p>
-          <a:p>
-            <a:pPr algn="l"/>
-            <a:r>
-              <a:rPr sz="1400" b="0" i="0">
-                <a:solidFill>
-                  <a:srgbClr val="1A1A2E"/>
-                </a:solidFill>
-                <a:latin typeface="Consolas"/>
-              </a:rPr>
-              <a:t/>
-            </a:r>
-          </a:p>
-          <a:p>
-            <a:pPr algn="l"/>
-            <a:r>
-              <a:rPr sz="1400" b="0" i="0">
-                <a:solidFill>
-                  <a:srgbClr val="1A1A2E"/>
-                </a:solidFill>
-                <a:latin typeface="Consolas"/>
-              </a:rPr>
-              <a:t>In SQL, -- commenta il resto. Quindi diventa:</a:t>
-            </a:r>
-          </a:p>
-          <a:p>
-            <a:pPr algn="l"/>
-            <a:r>
-              <a:rPr sz="1400" b="0" i="0">
-                <a:solidFill>
-                  <a:srgbClr val="1A1A2E"/>
-                </a:solidFill>
-                <a:latin typeface="Consolas"/>
-              </a:rPr>
-              <a:t>SELECT id FROM users WHERE email = '' OR '1'='1'</a:t>
-            </a:r>
-          </a:p>
-          <a:p>
-            <a:pPr algn="l"/>
-            <a:r>
-              <a:rPr sz="1400" b="0" i="0">
-                <a:solidFill>
-                  <a:srgbClr val="1A1A2E"/>
-                </a:solidFill>
-                <a:latin typeface="Consolas"/>
-              </a:rPr>
-              <a:t/>
-            </a:r>
-          </a:p>
-          <a:p>
-            <a:pPr algn="l"/>
-            <a:r>
-              <a:rPr sz="1400" b="0" i="0">
-                <a:solidFill>
-                  <a:srgbClr val="1A1A2E"/>
-                </a:solidFill>
-                <a:latin typeface="Consolas"/>
-              </a:rPr>
-              <a:t>'1'='1' è sempre vero → restituisce TUTTI gli utenti</a:t>
-            </a:r>
-          </a:p>
-          <a:p>
-            <a:pPr algn="l"/>
-            <a:r>
-              <a:rPr sz="1400" b="0" i="0">
-                <a:solidFill>
-                  <a:srgbClr val="1A1A2E"/>
-                </a:solidFill>
-                <a:latin typeface="Consolas"/>
-              </a:rPr>
-              <a:t>L'app prende il primo → LOGIN RIUSCITO senza conoscere alcuna password</a:t>
-            </a:r>
-          </a:p>
-        </p:txBody>
-      </p:sp>
-      <p:sp>
-        <p:nvSpPr>
-          <p:cNvPr id="8" name="TextBox 7"/>
+            <a:pPr algn="ctr"/>
+            <a:r>
+              <a:rPr sz="17000" b="1" i="0">
+                <a:solidFill>
+                  <a:srgbClr val="00A0B0"/>
+                </a:solidFill>
+                <a:latin typeface="Calibri"/>
+              </a:rPr>
+              <a:t>02</a:t>
+            </a:r>
+          </a:p>
+        </p:txBody>
+      </p:sp>
+      <p:sp>
+        <p:nvSpPr>
+          <p:cNvPr id="6" name="TextBox 5"/>
           <p:cNvSpPr txBox="1"/>
           <p:nvPr/>
         </p:nvSpPr>
         <p:spPr>
           <a:xfrm>
-            <a:off x="457200" y="5852160"/>
-            <a:ext cx="11247120" cy="457200"/>
+            <a:off x="274320" y="4572000"/>
+            <a:ext cx="3657600" cy="457200"/>
           </a:xfrm>
           <a:prstGeom prst="rect">
             <a:avLst/>
@@ -8233,15 +8557,85 @@
           </a:bodyPr>
           <a:lstStyle/>
           <a:p>
+            <a:pPr algn="ctr"/>
+            <a:r>
+              <a:rPr sz="2000" b="1" i="0">
+                <a:solidFill>
+                  <a:srgbClr val="6FD8E0"/>
+                </a:solidFill>
+                <a:latin typeface="Calibri"/>
+              </a:rPr>
+              <a:t>PARTE</a:t>
+            </a:r>
+          </a:p>
+        </p:txBody>
+      </p:sp>
+      <p:sp>
+        <p:nvSpPr>
+          <p:cNvPr id="7" name="TextBox 6"/>
+          <p:cNvSpPr txBox="1"/>
+          <p:nvPr/>
+        </p:nvSpPr>
+        <p:spPr>
+          <a:xfrm>
+            <a:off x="4572000" y="2286000"/>
+            <a:ext cx="7315200" cy="1645920"/>
+          </a:xfrm>
+          <a:prstGeom prst="rect">
+            <a:avLst/>
+          </a:prstGeom>
+          <a:noFill/>
+        </p:spPr>
+        <p:txBody>
+          <a:bodyPr wrap="square" lIns="45720" rIns="45720" tIns="18288" bIns="18288" anchor="t">
+            <a:spAutoFit/>
+          </a:bodyPr>
+          <a:lstStyle/>
+          <a:p>
             <a:pPr algn="l"/>
             <a:r>
-              <a:rPr sz="1400" b="1" i="1">
-                <a:solidFill>
-                  <a:srgbClr val="E63946"/>
-                </a:solidFill>
-                <a:latin typeface="Calibri"/>
-              </a:rPr>
-              <a:t>⚠  Variante: admin@bank.it' --  → entri direttamente come admin</a:t>
+              <a:rPr sz="4400" b="1" i="0">
+                <a:solidFill>
+                  <a:srgbClr val="0F2D52"/>
+                </a:solidFill>
+                <a:latin typeface="Calibri"/>
+              </a:rPr>
+              <a:t>La correzione</a:t>
+            </a:r>
+          </a:p>
+        </p:txBody>
+      </p:sp>
+      <p:sp>
+        <p:nvSpPr>
+          <p:cNvPr id="8" name="TextBox 7"/>
+          <p:cNvSpPr txBox="1"/>
+          <p:nvPr/>
+        </p:nvSpPr>
+        <p:spPr>
+          <a:xfrm>
+            <a:off x="4572000" y="3931920"/>
+            <a:ext cx="7315200" cy="1828800"/>
+          </a:xfrm>
+          <a:prstGeom prst="rect">
+            <a:avLst/>
+          </a:prstGeom>
+          <a:noFill/>
+        </p:spPr>
+        <p:txBody>
+          <a:bodyPr wrap="square" lIns="45720" rIns="45720" tIns="18288" bIns="18288" anchor="t">
+            <a:spAutoFit/>
+          </a:bodyPr>
+          <a:lstStyle/>
+          <a:p>
+            <a:pPr algn="l"/>
+            <a:r>
+              <a:rPr sz="1800" b="0" i="1">
+                <a:solidFill>
+                  <a:srgbClr val="6B7280"/>
+                </a:solidFill>
+                <a:latin typeface="Calibri"/>
+              </a:rPr>
+              <a:t>Separare struttura SQL da dati. Sempre.</a:t>
             </a:r>
           </a:p>
         </p:txBody>
@@ -8290,7 +8684,7 @@
         <p:spPr>
           <a:xfrm>
             <a:off x="457200" y="6473952"/>
-            <a:ext cx="7315200" cy="320040"/>
+            <a:ext cx="7315200" cy="292608"/>
           </a:xfrm>
           <a:prstGeom prst="rect">
             <a:avLst/>
@@ -8311,7 +8705,7 @@
                 </a:solidFill>
                 <a:latin typeface="Calibri"/>
               </a:rPr>
-              <a:t>Secure Coding · Corso IFTS STEM · A. Manneschi</a:t>
+              <a:t>Secure Coding · Corso IFTS STEM · A. Manneschi · 2024/2025</a:t>
             </a:r>
           </a:p>
         </p:txBody>
@@ -8325,7 +8719,7 @@
         <p:spPr>
           <a:xfrm>
             <a:off x="10515600" y="6473952"/>
-            <a:ext cx="1188720" cy="320040"/>
+            <a:ext cx="1188720" cy="292608"/>
           </a:xfrm>
           <a:prstGeom prst="rect">
             <a:avLst/>
@@ -8378,7 +8772,7 @@
         <p:spPr>
           <a:xfrm>
             <a:off x="0" y="0"/>
-            <a:ext cx="2286000" cy="6858000"/>
+            <a:ext cx="12191695" cy="777240"/>
           </a:xfrm>
           <a:prstGeom prst="rect">
             <a:avLst/>
@@ -8420,8 +8814,67 @@
         </p:nvSpPr>
         <p:spPr>
           <a:xfrm>
-            <a:off x="274320" y="2286000"/>
-            <a:ext cx="1828800" cy="1828800"/>
+            <a:off x="457200" y="164592"/>
+            <a:ext cx="10972800" cy="502920"/>
+          </a:xfrm>
+          <a:prstGeom prst="rect">
+            <a:avLst/>
+          </a:prstGeom>
+          <a:noFill/>
+        </p:spPr>
+        <p:txBody>
+          <a:bodyPr wrap="square" lIns="45720" rIns="45720" tIns="18288" bIns="18288" anchor="ctr">
+            <a:spAutoFit/>
+          </a:bodyPr>
+          <a:lstStyle/>
+          <a:p>
+            <a:pPr algn="l"/>
+            <a:r>
+              <a:rPr sz="2400" b="1" i="0">
+                <a:solidFill>
+                  <a:srgbClr val="FFFFFF"/>
+                </a:solidFill>
+                <a:latin typeface="Calibri"/>
+              </a:rPr>
+              <a:t>Versione corretta</a:t>
+            </a:r>
+          </a:p>
+        </p:txBody>
+      </p:sp>
+      <p:pic>
+        <p:nvPicPr>
+          <p:cNvPr id="4" name="Picture 3" descr="cap3_sqli_safe.png"/>
+          <p:cNvPicPr>
+            <a:picLocks noChangeAspect="1"/>
+          </p:cNvPicPr>
+          <p:nvPr/>
+        </p:nvPicPr>
+        <p:blipFill>
+          <a:blip r:embed="rId2"/>
+          <a:stretch>
+            <a:fillRect/>
+          </a:stretch>
+        </p:blipFill>
+        <p:spPr>
+          <a:xfrm>
+            <a:off x="640080" y="1097280"/>
+            <a:ext cx="10881360" cy="4572000"/>
+          </a:xfrm>
+          <a:prstGeom prst="rect">
+            <a:avLst/>
+          </a:prstGeom>
+        </p:spPr>
+      </p:pic>
+      <p:sp>
+        <p:nvSpPr>
+          <p:cNvPr id="5" name="TextBox 4"/>
+          <p:cNvSpPr txBox="1"/>
+          <p:nvPr/>
+        </p:nvSpPr>
+        <p:spPr>
+          <a:xfrm>
+            <a:off x="457200" y="5852160"/>
+            <a:ext cx="11247120" cy="365760"/>
           </a:xfrm>
           <a:prstGeom prst="rect">
             <a:avLst/>
@@ -8436,83 +8889,13 @@
           <a:p>
             <a:pPr algn="ctr"/>
             <a:r>
-              <a:rPr sz="12000" b="1" i="0">
-                <a:solidFill>
-                  <a:srgbClr val="00A0B0"/>
-                </a:solidFill>
-                <a:latin typeface="Calibri"/>
-              </a:rPr>
-              <a:t>02</a:t>
-            </a:r>
-          </a:p>
-        </p:txBody>
-      </p:sp>
-      <p:sp>
-        <p:nvSpPr>
-          <p:cNvPr id="4" name="TextBox 3"/>
-          <p:cNvSpPr txBox="1"/>
-          <p:nvPr/>
-        </p:nvSpPr>
-        <p:spPr>
-          <a:xfrm>
-            <a:off x="2743200" y="2560320"/>
-            <a:ext cx="8961120" cy="1371600"/>
-          </a:xfrm>
-          <a:prstGeom prst="rect">
-            <a:avLst/>
-          </a:prstGeom>
-          <a:noFill/>
-        </p:spPr>
-        <p:txBody>
-          <a:bodyPr wrap="square" lIns="45720" rIns="45720" tIns="18288" bIns="18288" anchor="t">
-            <a:spAutoFit/>
-          </a:bodyPr>
-          <a:lstStyle/>
-          <a:p>
-            <a:pPr algn="l"/>
-            <a:r>
-              <a:rPr sz="4200" b="1" i="0">
-                <a:solidFill>
-                  <a:srgbClr val="0F2D52"/>
-                </a:solidFill>
-                <a:latin typeface="Calibri"/>
-              </a:rPr>
-              <a:t>Attacco 2: UNION SELECT</a:t>
-            </a:r>
-          </a:p>
-        </p:txBody>
-      </p:sp>
-      <p:sp>
-        <p:nvSpPr>
-          <p:cNvPr id="5" name="TextBox 4"/>
-          <p:cNvSpPr txBox="1"/>
-          <p:nvPr/>
-        </p:nvSpPr>
-        <p:spPr>
-          <a:xfrm>
-            <a:off x="2743200" y="3931920"/>
-            <a:ext cx="8961120" cy="1828800"/>
-          </a:xfrm>
-          <a:prstGeom prst="rect">
-            <a:avLst/>
-          </a:prstGeom>
-          <a:noFill/>
-        </p:spPr>
-        <p:txBody>
-          <a:bodyPr wrap="square" lIns="45720" rIns="45720" tIns="18288" bIns="18288" anchor="t">
-            <a:spAutoFit/>
-          </a:bodyPr>
-          <a:lstStyle/>
-          <a:p>
-            <a:pPr algn="l"/>
-            <a:r>
-              <a:rPr sz="1800" b="0" i="1">
+              <a:rPr sz="1300" b="0" i="1">
                 <a:solidFill>
                   <a:srgbClr val="6B7280"/>
                 </a:solidFill>
                 <a:latin typeface="Calibri"/>
               </a:rPr>
-              <a:t>Leggere password di tutti gli utenti da un endpoint di ricerca</a:t>
+              <a:t>Query parametrizzata: il driver tratta i dati come VALORI, mai come SQL</a:t>
             </a:r>
           </a:p>
         </p:txBody>
@@ -8561,7 +8944,7 @@
         <p:spPr>
           <a:xfrm>
             <a:off x="457200" y="6473952"/>
-            <a:ext cx="7315200" cy="320040"/>
+            <a:ext cx="7315200" cy="292608"/>
           </a:xfrm>
           <a:prstGeom prst="rect">
             <a:avLst/>
@@ -8582,7 +8965,7 @@
                 </a:solidFill>
                 <a:latin typeface="Calibri"/>
               </a:rPr>
-              <a:t>Secure Coding · Corso IFTS STEM · A. Manneschi</a:t>
+              <a:t>Secure Coding · Corso IFTS STEM · A. Manneschi · 2024/2025</a:t>
             </a:r>
           </a:p>
         </p:txBody>
@@ -8596,7 +8979,7 @@
         <p:spPr>
           <a:xfrm>
             <a:off x="10515600" y="6473952"/>
-            <a:ext cx="1188720" cy="320040"/>
+            <a:ext cx="1188720" cy="292608"/>
           </a:xfrm>
           <a:prstGeom prst="rect">
             <a:avLst/>
@@ -8692,7 +9075,7 @@
         <p:spPr>
           <a:xfrm>
             <a:off x="457200" y="164592"/>
-            <a:ext cx="10058400" cy="502920"/>
+            <a:ext cx="10972800" cy="502920"/>
           </a:xfrm>
           <a:prstGeom prst="rect">
             <a:avLst/>
@@ -8713,24 +9096,26 @@
                 </a:solidFill>
                 <a:latin typeface="Calibri"/>
               </a:rPr>
-              <a:t>UNION SELECT — estrazione dati</a:t>
-            </a:r>
-          </a:p>
-        </p:txBody>
-      </p:sp>
-      <p:sp>
-        <p:nvSpPr>
-          <p:cNvPr id="4" name="Rectangle 3"/>
+              <a:t>Filtrare gli apici NON funziona</a:t>
+            </a:r>
+          </a:p>
+        </p:txBody>
+      </p:sp>
+      <p:sp>
+        <p:nvSpPr>
+          <p:cNvPr id="4" name="Rounded Rectangle 3"/>
           <p:cNvSpPr/>
           <p:nvPr/>
         </p:nvSpPr>
         <p:spPr>
           <a:xfrm>
-            <a:off x="9875520" y="164592"/>
-            <a:ext cx="2103120" cy="457200"/>
-          </a:xfrm>
-          <a:prstGeom prst="rect">
-            <a:avLst/>
+            <a:off x="457200" y="1051560"/>
+            <a:ext cx="5486400" cy="640080"/>
+          </a:xfrm>
+          <a:prstGeom prst="roundRect">
+            <a:avLst>
+              <a:gd name="adj" fmla="val 8000"/>
+            </a:avLst>
           </a:prstGeom>
           <a:solidFill>
             <a:srgbClr val="E63946"/>
@@ -8769,8 +9154,8 @@
         </p:nvSpPr>
         <p:spPr>
           <a:xfrm>
-            <a:off x="9875520" y="182880"/>
-            <a:ext cx="2103120" cy="457200"/>
+            <a:off x="457200" y="1051560"/>
+            <a:ext cx="5486400" cy="640080"/>
           </a:xfrm>
           <a:prstGeom prst="rect">
             <a:avLst/>
@@ -8785,35 +9170,37 @@
           <a:p>
             <a:pPr algn="ctr"/>
             <a:r>
-              <a:rPr sz="1200" b="1" i="0">
+              <a:rPr sz="1800" b="1" i="0">
                 <a:solidFill>
                   <a:srgbClr val="FFFFFF"/>
                 </a:solidFill>
                 <a:latin typeface="Calibri"/>
               </a:rPr>
-              <a:t>🚩 ANTI-PATTERN</a:t>
-            </a:r>
-          </a:p>
-        </p:txBody>
-      </p:sp>
-      <p:sp>
-        <p:nvSpPr>
-          <p:cNvPr id="6" name="Rectangle 5"/>
+              <a:t>Tentativo ingenuo</a:t>
+            </a:r>
+          </a:p>
+        </p:txBody>
+      </p:sp>
+      <p:sp>
+        <p:nvSpPr>
+          <p:cNvPr id="6" name="Rounded Rectangle 5"/>
           <p:cNvSpPr/>
           <p:nvPr/>
         </p:nvSpPr>
         <p:spPr>
           <a:xfrm>
-            <a:off x="457200" y="1097280"/>
-            <a:ext cx="11247120" cy="4572000"/>
-          </a:xfrm>
-          <a:prstGeom prst="rect">
-            <a:avLst/>
+            <a:off x="457200" y="1737360"/>
+            <a:ext cx="5486400" cy="4572000"/>
+          </a:xfrm>
+          <a:prstGeom prst="roundRect">
+            <a:avLst>
+              <a:gd name="adj" fmla="val 8000"/>
+            </a:avLst>
           </a:prstGeom>
           <a:solidFill>
-            <a:srgbClr val="F1F4F8"/>
+            <a:srgbClr val="FBFBFD"/>
           </a:solidFill>
-          <a:ln>
+          <a:ln w="25400">
             <a:solidFill>
               <a:srgbClr val="E63946"/>
             </a:solidFill>
@@ -8849,8 +9236,8 @@
         </p:nvSpPr>
         <p:spPr>
           <a:xfrm>
-            <a:off x="640080" y="1280160"/>
-            <a:ext cx="10972800" cy="4206240"/>
+            <a:off x="640080" y="1874519"/>
+            <a:ext cx="5120640" cy="4572000"/>
           </a:xfrm>
           <a:prstGeom prst="rect">
             <a:avLst/>
@@ -8858,166 +9245,319 @@
           <a:noFill/>
         </p:spPr>
         <p:txBody>
-          <a:bodyPr wrap="square" lIns="45720" rIns="45720" tIns="18288" bIns="18288" anchor="t">
+          <a:bodyPr wrap="square">
             <a:spAutoFit/>
           </a:bodyPr>
           <a:lstStyle/>
           <a:p>
-            <a:pPr algn="l"/>
-            <a:r>
-              <a:rPr sz="1400" b="0" i="0">
+            <a:pPr>
+              <a:lnSpc>
+                <a:spcPct val="150000"/>
+              </a:lnSpc>
+              <a:spcAft>
+                <a:spcPts val="400"/>
+              </a:spcAft>
+            </a:pPr>
+            <a:r>
+              <a:rPr sz="1500" b="1">
+                <a:solidFill>
+                  <a:srgbClr val="E63946"/>
+                </a:solidFill>
+                <a:latin typeface="Calibri"/>
+              </a:rPr>
+              <a:t>▸  </a:t>
+            </a:r>
+            <a:r>
+              <a:rPr sz="1500">
                 <a:solidFill>
                   <a:srgbClr val="1A1A2E"/>
                 </a:solidFill>
-                <a:latin typeface="Consolas"/>
-              </a:rPr>
-              <a:t>Cerca:  xyz' UNION SELECT email || ':' || password FROM users --</a:t>
-            </a:r>
-          </a:p>
-          <a:p>
-            <a:pPr algn="l"/>
-            <a:r>
-              <a:rPr sz="1400" b="0" i="0">
+                <a:latin typeface="Calibri"/>
+              </a:rPr>
+              <a:t>s = s.replace("'", "")</a:t>
+            </a:r>
+          </a:p>
+          <a:p>
+            <a:pPr>
+              <a:lnSpc>
+                <a:spcPct val="150000"/>
+              </a:lnSpc>
+              <a:spcAft>
+                <a:spcPts val="400"/>
+              </a:spcAft>
+            </a:pPr>
+            <a:r>
+              <a:rPr sz="1500" b="1">
+                <a:solidFill>
+                  <a:srgbClr val="E63946"/>
+                </a:solidFill>
+                <a:latin typeface="Calibri"/>
+              </a:rPr>
+              <a:t>▸  </a:t>
+            </a:r>
+            <a:r>
+              <a:rPr sz="1500">
                 <a:solidFill>
                   <a:srgbClr val="1A1A2E"/>
                 </a:solidFill>
-                <a:latin typeface="Consolas"/>
+                <a:latin typeface="Calibri"/>
+              </a:rPr>
+              <a:t>Sembra di essere protetti...</a:t>
+            </a:r>
+          </a:p>
+          <a:p>
+            <a:pPr>
+              <a:lnSpc>
+                <a:spcPct val="150000"/>
+              </a:lnSpc>
+              <a:spcAft>
+                <a:spcPts val="400"/>
+              </a:spcAft>
+            </a:pPr>
+            <a:r>
+              <a:rPr sz="1500" b="1">
+                <a:solidFill>
+                  <a:srgbClr val="E63946"/>
+                </a:solidFill>
+                <a:latin typeface="Calibri"/>
+              </a:rPr>
+              <a:t>▸  </a:t>
+            </a:r>
+            <a:r>
+              <a:rPr sz="1500">
+                <a:solidFill>
+                  <a:srgbClr val="1A1A2E"/>
+                </a:solidFill>
+                <a:latin typeface="Calibri"/>
               </a:rPr>
               <a:t/>
             </a:r>
           </a:p>
           <a:p>
-            <a:pPr algn="l"/>
-            <a:r>
-              <a:rPr sz="1400" b="0" i="0">
+            <a:pPr>
+              <a:lnSpc>
+                <a:spcPct val="150000"/>
+              </a:lnSpc>
+              <a:spcAft>
+                <a:spcPts val="400"/>
+              </a:spcAft>
+            </a:pPr>
+            <a:r>
+              <a:rPr sz="1500" b="1">
+                <a:solidFill>
+                  <a:srgbClr val="E63946"/>
+                </a:solidFill>
+                <a:latin typeface="Calibri"/>
+              </a:rPr>
+              <a:t>▸  </a:t>
+            </a:r>
+            <a:r>
+              <a:rPr sz="1500">
                 <a:solidFill>
                   <a:srgbClr val="1A1A2E"/>
                 </a:solidFill>
-                <a:latin typeface="Consolas"/>
-              </a:rPr>
-              <a:t>Query risultante:</a:t>
-            </a:r>
-          </a:p>
-          <a:p>
-            <a:pPr algn="l"/>
-            <a:r>
-              <a:rPr sz="1400" b="0" i="0">
+                <a:latin typeface="Calibri"/>
+              </a:rPr>
+              <a:t>Bypass:</a:t>
+            </a:r>
+          </a:p>
+          <a:p>
+            <a:pPr>
+              <a:lnSpc>
+                <a:spcPct val="150000"/>
+              </a:lnSpc>
+              <a:spcAft>
+                <a:spcPts val="400"/>
+              </a:spcAft>
+            </a:pPr>
+            <a:r>
+              <a:rPr sz="1500" b="1">
+                <a:solidFill>
+                  <a:srgbClr val="E63946"/>
+                </a:solidFill>
+                <a:latin typeface="Calibri"/>
+              </a:rPr>
+              <a:t>▸  </a:t>
+            </a:r>
+            <a:r>
+              <a:rPr sz="1500">
                 <a:solidFill>
                   <a:srgbClr val="1A1A2E"/>
                 </a:solidFill>
-                <a:latin typeface="Consolas"/>
-              </a:rPr>
-              <a:t>SELECT contenuto FROM messaggi WHERE contenuto LIKE</a:t>
-            </a:r>
-          </a:p>
-          <a:p>
-            <a:pPr algn="l"/>
-            <a:r>
-              <a:rPr sz="1400" b="0" i="0">
+                <a:latin typeface="Calibri"/>
+              </a:rPr>
+              <a:t>  %27 (URL encoded)</a:t>
+            </a:r>
+          </a:p>
+          <a:p>
+            <a:pPr>
+              <a:lnSpc>
+                <a:spcPct val="150000"/>
+              </a:lnSpc>
+              <a:spcAft>
+                <a:spcPts val="400"/>
+              </a:spcAft>
+            </a:pPr>
+            <a:r>
+              <a:rPr sz="1500" b="1">
+                <a:solidFill>
+                  <a:srgbClr val="E63946"/>
+                </a:solidFill>
+                <a:latin typeface="Calibri"/>
+              </a:rPr>
+              <a:t>▸  </a:t>
+            </a:r>
+            <a:r>
+              <a:rPr sz="1500">
                 <a:solidFill>
                   <a:srgbClr val="1A1A2E"/>
                 </a:solidFill>
-                <a:latin typeface="Consolas"/>
-              </a:rPr>
-              <a:t>    '%xyz' UNION SELECT email || ':' || password FROM users --%'</a:t>
-            </a:r>
-          </a:p>
-          <a:p>
-            <a:pPr algn="l"/>
-            <a:r>
-              <a:rPr sz="1400" b="0" i="0">
+                <a:latin typeface="Calibri"/>
+              </a:rPr>
+              <a:t>  \\' (escape)</a:t>
+            </a:r>
+          </a:p>
+          <a:p>
+            <a:pPr>
+              <a:lnSpc>
+                <a:spcPct val="150000"/>
+              </a:lnSpc>
+              <a:spcAft>
+                <a:spcPts val="400"/>
+              </a:spcAft>
+            </a:pPr>
+            <a:r>
+              <a:rPr sz="1500" b="1">
+                <a:solidFill>
+                  <a:srgbClr val="E63946"/>
+                </a:solidFill>
+                <a:latin typeface="Calibri"/>
+              </a:rPr>
+              <a:t>▸  </a:t>
+            </a:r>
+            <a:r>
+              <a:rPr sz="1500">
                 <a:solidFill>
                   <a:srgbClr val="1A1A2E"/>
                 </a:solidFill>
-                <a:latin typeface="Consolas"/>
-              </a:rPr>
-              <a:t/>
-            </a:r>
-          </a:p>
-          <a:p>
-            <a:pPr algn="l"/>
-            <a:r>
-              <a:rPr sz="1400" b="0" i="0">
+                <a:latin typeface="Calibri"/>
+              </a:rPr>
+              <a:t>  " (doppi apici)</a:t>
+            </a:r>
+          </a:p>
+          <a:p>
+            <a:pPr>
+              <a:lnSpc>
+                <a:spcPct val="150000"/>
+              </a:lnSpc>
+              <a:spcAft>
+                <a:spcPts val="400"/>
+              </a:spcAft>
+            </a:pPr>
+            <a:r>
+              <a:rPr sz="1500" b="1">
+                <a:solidFill>
+                  <a:srgbClr val="E63946"/>
+                </a:solidFill>
+                <a:latin typeface="Calibri"/>
+              </a:rPr>
+              <a:t>▸  </a:t>
+            </a:r>
+            <a:r>
+              <a:rPr sz="1500">
                 <a:solidFill>
                   <a:srgbClr val="1A1A2E"/>
                 </a:solidFill>
-                <a:latin typeface="Consolas"/>
-              </a:rPr>
-              <a:t>L'app mostra "messaggi"... ma in realtà mostra:</a:t>
-            </a:r>
-          </a:p>
-          <a:p>
-            <a:pPr algn="l"/>
-            <a:r>
-              <a:rPr sz="1400" b="0" i="0">
+                <a:latin typeface="Calibri"/>
+              </a:rPr>
+              <a:t>  ʼ (Unicode lookalike)</a:t>
+            </a:r>
+          </a:p>
+          <a:p>
+            <a:pPr>
+              <a:lnSpc>
+                <a:spcPct val="150000"/>
+              </a:lnSpc>
+              <a:spcAft>
+                <a:spcPts val="400"/>
+              </a:spcAft>
+            </a:pPr>
+            <a:r>
+              <a:rPr sz="1500" b="1">
+                <a:solidFill>
+                  <a:srgbClr val="E63946"/>
+                </a:solidFill>
+                <a:latin typeface="Calibri"/>
+              </a:rPr>
+              <a:t>▸  </a:t>
+            </a:r>
+            <a:r>
+              <a:rPr sz="1500">
                 <a:solidFill>
                   <a:srgbClr val="1A1A2E"/>
                 </a:solidFill>
-                <a:latin typeface="Consolas"/>
-              </a:rPr>
-              <a:t>  alice@bank.it:alice_pass</a:t>
-            </a:r>
-          </a:p>
-          <a:p>
-            <a:pPr algn="l"/>
-            <a:r>
-              <a:rPr sz="1400" b="0" i="0">
-                <a:solidFill>
-                  <a:srgbClr val="1A1A2E"/>
-                </a:solidFill>
-                <a:latin typeface="Consolas"/>
-              </a:rPr>
-              <a:t>  bob@bank.it:bob_pass</a:t>
-            </a:r>
-          </a:p>
-          <a:p>
-            <a:pPr algn="l"/>
-            <a:r>
-              <a:rPr sz="1400" b="0" i="0">
-                <a:solidFill>
-                  <a:srgbClr val="1A1A2E"/>
-                </a:solidFill>
-                <a:latin typeface="Consolas"/>
-              </a:rPr>
-              <a:t>  admin@bank.it:Sup3rS3gr3t0!</a:t>
-            </a:r>
-          </a:p>
-          <a:p>
-            <a:pPr algn="l"/>
-            <a:r>
-              <a:rPr sz="1400" b="0" i="0">
-                <a:solidFill>
-                  <a:srgbClr val="1A1A2E"/>
-                </a:solidFill>
-                <a:latin typeface="Consolas"/>
-              </a:rPr>
-              <a:t/>
-            </a:r>
-          </a:p>
-          <a:p>
-            <a:pPr algn="l"/>
-            <a:r>
-              <a:rPr sz="1400" b="0" i="0">
-                <a:solidFill>
-                  <a:srgbClr val="1A1A2E"/>
-                </a:solidFill>
-                <a:latin typeface="Consolas"/>
-              </a:rPr>
-              <a:t>In una sola richiesta, l'attaccante ha rubato TUTTE le password.</a:t>
-            </a:r>
-          </a:p>
-        </p:txBody>
-      </p:sp>
-      <p:sp>
-        <p:nvSpPr>
-          <p:cNvPr id="8" name="TextBox 7"/>
+                <a:latin typeface="Calibri"/>
+              </a:rPr>
+              <a:t>  1 OR 1=1 (numerica)</a:t>
+            </a:r>
+          </a:p>
+        </p:txBody>
+      </p:sp>
+      <p:sp>
+        <p:nvSpPr>
+          <p:cNvPr id="8" name="Rounded Rectangle 7"/>
+          <p:cNvSpPr/>
+          <p:nvPr/>
+        </p:nvSpPr>
+        <p:spPr>
+          <a:xfrm>
+            <a:off x="6217920" y="1051560"/>
+            <a:ext cx="5486400" cy="640080"/>
+          </a:xfrm>
+          <a:prstGeom prst="roundRect">
+            <a:avLst>
+              <a:gd name="adj" fmla="val 8000"/>
+            </a:avLst>
+          </a:prstGeom>
+          <a:solidFill>
+            <a:srgbClr val="06A77D"/>
+          </a:solidFill>
+          <a:ln>
+            <a:noFill/>
+          </a:ln>
+        </p:spPr>
+        <p:style>
+          <a:lnRef idx="1">
+            <a:schemeClr val="accent1"/>
+          </a:lnRef>
+          <a:fillRef idx="3">
+            <a:schemeClr val="accent1"/>
+          </a:fillRef>
+          <a:effectRef idx="2">
+            <a:schemeClr val="accent1"/>
+          </a:effectRef>
+          <a:fontRef idx="minor">
+            <a:schemeClr val="lt1"/>
+          </a:fontRef>
+        </p:style>
+        <p:txBody>
+          <a:bodyPr rtlCol="0" anchor="ctr"/>
+          <a:lstStyle/>
+          <a:p>
+            <a:pPr algn="ctr"/>
+          </a:p>
+        </p:txBody>
+      </p:sp>
+      <p:sp>
+        <p:nvSpPr>
+          <p:cNvPr id="9" name="TextBox 8"/>
           <p:cNvSpPr txBox="1"/>
           <p:nvPr/>
         </p:nvSpPr>
         <p:spPr>
           <a:xfrm>
-            <a:off x="457200" y="5852160"/>
-            <a:ext cx="11247120" cy="457200"/>
+            <a:off x="6217920" y="1051560"/>
+            <a:ext cx="5486400" cy="640080"/>
           </a:xfrm>
           <a:prstGeom prst="rect">
             <a:avLst/>
@@ -9025,27 +9565,377 @@
           <a:noFill/>
         </p:spPr>
         <p:txBody>
-          <a:bodyPr wrap="square" lIns="45720" rIns="45720" tIns="18288" bIns="18288" anchor="t">
+          <a:bodyPr wrap="square" lIns="45720" rIns="45720" tIns="18288" bIns="18288" anchor="ctr">
             <a:spAutoFit/>
           </a:bodyPr>
           <a:lstStyle/>
           <a:p>
-            <a:pPr algn="l"/>
-            <a:r>
-              <a:rPr sz="1400" b="1" i="1">
-                <a:solidFill>
-                  <a:srgbClr val="E63946"/>
-                </a:solidFill>
-                <a:latin typeface="Calibri"/>
-              </a:rPr>
-              <a:t>⚠  Combinato col bypass: takeover di TUTTI gli account in 30 secondi</a:t>
+            <a:pPr algn="ctr"/>
+            <a:r>
+              <a:rPr sz="1800" b="1" i="0">
+                <a:solidFill>
+                  <a:srgbClr val="FFFFFF"/>
+                </a:solidFill>
+                <a:latin typeface="Calibri"/>
+              </a:rPr>
+              <a:t>Soluzione corretta</a:t>
+            </a:r>
+          </a:p>
+        </p:txBody>
+      </p:sp>
+      <p:sp>
+        <p:nvSpPr>
+          <p:cNvPr id="10" name="Rounded Rectangle 9"/>
+          <p:cNvSpPr/>
+          <p:nvPr/>
+        </p:nvSpPr>
+        <p:spPr>
+          <a:xfrm>
+            <a:off x="6217920" y="1737360"/>
+            <a:ext cx="5486400" cy="4572000"/>
+          </a:xfrm>
+          <a:prstGeom prst="roundRect">
+            <a:avLst>
+              <a:gd name="adj" fmla="val 8000"/>
+            </a:avLst>
+          </a:prstGeom>
+          <a:solidFill>
+            <a:srgbClr val="FBFBFD"/>
+          </a:solidFill>
+          <a:ln w="25400">
+            <a:solidFill>
+              <a:srgbClr val="06A77D"/>
+            </a:solidFill>
+          </a:ln>
+        </p:spPr>
+        <p:style>
+          <a:lnRef idx="1">
+            <a:schemeClr val="accent1"/>
+          </a:lnRef>
+          <a:fillRef idx="3">
+            <a:schemeClr val="accent1"/>
+          </a:fillRef>
+          <a:effectRef idx="2">
+            <a:schemeClr val="accent1"/>
+          </a:effectRef>
+          <a:fontRef idx="minor">
+            <a:schemeClr val="lt1"/>
+          </a:fontRef>
+        </p:style>
+        <p:txBody>
+          <a:bodyPr rtlCol="0" anchor="ctr"/>
+          <a:lstStyle/>
+          <a:p>
+            <a:pPr algn="ctr"/>
+          </a:p>
+        </p:txBody>
+      </p:sp>
+      <p:sp>
+        <p:nvSpPr>
+          <p:cNvPr id="11" name="TextBox 10"/>
+          <p:cNvSpPr txBox="1"/>
+          <p:nvPr/>
+        </p:nvSpPr>
+        <p:spPr>
+          <a:xfrm>
+            <a:off x="6400800" y="1874519"/>
+            <a:ext cx="5120640" cy="4572000"/>
+          </a:xfrm>
+          <a:prstGeom prst="rect">
+            <a:avLst/>
+          </a:prstGeom>
+          <a:noFill/>
+        </p:spPr>
+        <p:txBody>
+          <a:bodyPr wrap="square">
+            <a:spAutoFit/>
+          </a:bodyPr>
+          <a:lstStyle/>
+          <a:p>
+            <a:pPr>
+              <a:lnSpc>
+                <a:spcPct val="150000"/>
+              </a:lnSpc>
+              <a:spcAft>
+                <a:spcPts val="400"/>
+              </a:spcAft>
+            </a:pPr>
+            <a:r>
+              <a:rPr sz="1500" b="1">
+                <a:solidFill>
+                  <a:srgbClr val="06A77D"/>
+                </a:solidFill>
+                <a:latin typeface="Calibri"/>
+              </a:rPr>
+              <a:t>▸  </a:t>
+            </a:r>
+            <a:r>
+              <a:rPr sz="1500">
+                <a:solidFill>
+                  <a:srgbClr val="1A1A2E"/>
+                </a:solidFill>
+                <a:latin typeface="Calibri"/>
+              </a:rPr>
+              <a:t>Query parametrizzate</a:t>
+            </a:r>
+          </a:p>
+          <a:p>
+            <a:pPr>
+              <a:lnSpc>
+                <a:spcPct val="150000"/>
+              </a:lnSpc>
+              <a:spcAft>
+                <a:spcPts val="400"/>
+              </a:spcAft>
+            </a:pPr>
+            <a:r>
+              <a:rPr sz="1500" b="1">
+                <a:solidFill>
+                  <a:srgbClr val="06A77D"/>
+                </a:solidFill>
+                <a:latin typeface="Calibri"/>
+              </a:rPr>
+              <a:t>▸  </a:t>
+            </a:r>
+            <a:r>
+              <a:rPr sz="1500">
+                <a:solidFill>
+                  <a:srgbClr val="1A1A2E"/>
+                </a:solidFill>
+                <a:latin typeface="Calibri"/>
+              </a:rPr>
+              <a:t>Separi STRUTTURA da DATI</a:t>
+            </a:r>
+          </a:p>
+          <a:p>
+            <a:pPr>
+              <a:lnSpc>
+                <a:spcPct val="150000"/>
+              </a:lnSpc>
+              <a:spcAft>
+                <a:spcPts val="400"/>
+              </a:spcAft>
+            </a:pPr>
+            <a:r>
+              <a:rPr sz="1500" b="1">
+                <a:solidFill>
+                  <a:srgbClr val="06A77D"/>
+                </a:solidFill>
+                <a:latin typeface="Calibri"/>
+              </a:rPr>
+              <a:t>▸  </a:t>
+            </a:r>
+            <a:r>
+              <a:rPr sz="1500">
+                <a:solidFill>
+                  <a:srgbClr val="1A1A2E"/>
+                </a:solidFill>
+                <a:latin typeface="Calibri"/>
+              </a:rPr>
+              <a:t/>
+            </a:r>
+          </a:p>
+          <a:p>
+            <a:pPr>
+              <a:lnSpc>
+                <a:spcPct val="150000"/>
+              </a:lnSpc>
+              <a:spcAft>
+                <a:spcPts val="400"/>
+              </a:spcAft>
+            </a:pPr>
+            <a:r>
+              <a:rPr sz="1500" b="1">
+                <a:solidFill>
+                  <a:srgbClr val="06A77D"/>
+                </a:solidFill>
+                <a:latin typeface="Calibri"/>
+              </a:rPr>
+              <a:t>▸  </a:t>
+            </a:r>
+            <a:r>
+              <a:rPr sz="1500">
+                <a:solidFill>
+                  <a:srgbClr val="1A1A2E"/>
+                </a:solidFill>
+                <a:latin typeface="Calibri"/>
+              </a:rPr>
+              <a:t>Il driver tratta i dati</a:t>
+            </a:r>
+          </a:p>
+          <a:p>
+            <a:pPr>
+              <a:lnSpc>
+                <a:spcPct val="150000"/>
+              </a:lnSpc>
+              <a:spcAft>
+                <a:spcPts val="400"/>
+              </a:spcAft>
+            </a:pPr>
+            <a:r>
+              <a:rPr sz="1500" b="1">
+                <a:solidFill>
+                  <a:srgbClr val="06A77D"/>
+                </a:solidFill>
+                <a:latin typeface="Calibri"/>
+              </a:rPr>
+              <a:t>▸  </a:t>
+            </a:r>
+            <a:r>
+              <a:rPr sz="1500">
+                <a:solidFill>
+                  <a:srgbClr val="1A1A2E"/>
+                </a:solidFill>
+                <a:latin typeface="Calibri"/>
+              </a:rPr>
+              <a:t>come VALORI, mai come SQL</a:t>
+            </a:r>
+          </a:p>
+          <a:p>
+            <a:pPr>
+              <a:lnSpc>
+                <a:spcPct val="150000"/>
+              </a:lnSpc>
+              <a:spcAft>
+                <a:spcPts val="400"/>
+              </a:spcAft>
+            </a:pPr>
+            <a:r>
+              <a:rPr sz="1500" b="1">
+                <a:solidFill>
+                  <a:srgbClr val="06A77D"/>
+                </a:solidFill>
+                <a:latin typeface="Calibri"/>
+              </a:rPr>
+              <a:t>▸  </a:t>
+            </a:r>
+            <a:r>
+              <a:rPr sz="1500">
+                <a:solidFill>
+                  <a:srgbClr val="1A1A2E"/>
+                </a:solidFill>
+                <a:latin typeface="Calibri"/>
+              </a:rPr>
+              <a:t/>
+            </a:r>
+          </a:p>
+          <a:p>
+            <a:pPr>
+              <a:lnSpc>
+                <a:spcPct val="150000"/>
+              </a:lnSpc>
+              <a:spcAft>
+                <a:spcPts val="400"/>
+              </a:spcAft>
+            </a:pPr>
+            <a:r>
+              <a:rPr sz="1500" b="1">
+                <a:solidFill>
+                  <a:srgbClr val="06A77D"/>
+                </a:solidFill>
+                <a:latin typeface="Calibri"/>
+              </a:rPr>
+              <a:t>▸  </a:t>
+            </a:r>
+            <a:r>
+              <a:rPr sz="1500">
+                <a:solidFill>
+                  <a:srgbClr val="1A1A2E"/>
+                </a:solidFill>
+                <a:latin typeface="Calibri"/>
+              </a:rPr>
+              <a:t>Anche con QUALUNQUE input,</a:t>
+            </a:r>
+          </a:p>
+          <a:p>
+            <a:pPr>
+              <a:lnSpc>
+                <a:spcPct val="150000"/>
+              </a:lnSpc>
+              <a:spcAft>
+                <a:spcPts val="400"/>
+              </a:spcAft>
+            </a:pPr>
+            <a:r>
+              <a:rPr sz="1500" b="1">
+                <a:solidFill>
+                  <a:srgbClr val="06A77D"/>
+                </a:solidFill>
+                <a:latin typeface="Calibri"/>
+              </a:rPr>
+              <a:t>▸  </a:t>
+            </a:r>
+            <a:r>
+              <a:rPr sz="1500">
+                <a:solidFill>
+                  <a:srgbClr val="1A1A2E"/>
+                </a:solidFill>
+                <a:latin typeface="Calibri"/>
+              </a:rPr>
+              <a:t>non viene interpretato</a:t>
+            </a:r>
+          </a:p>
+          <a:p>
+            <a:pPr>
+              <a:lnSpc>
+                <a:spcPct val="150000"/>
+              </a:lnSpc>
+              <a:spcAft>
+                <a:spcPts val="400"/>
+              </a:spcAft>
+            </a:pPr>
+            <a:r>
+              <a:rPr sz="1500" b="1">
+                <a:solidFill>
+                  <a:srgbClr val="06A77D"/>
+                </a:solidFill>
+                <a:latin typeface="Calibri"/>
+              </a:rPr>
+              <a:t>▸  </a:t>
+            </a:r>
+            <a:r>
+              <a:rPr sz="1500">
+                <a:solidFill>
+                  <a:srgbClr val="1A1A2E"/>
+                </a:solidFill>
+                <a:latin typeface="Calibri"/>
+              </a:rPr>
+              <a:t/>
+            </a:r>
+          </a:p>
+          <a:p>
+            <a:pPr>
+              <a:lnSpc>
+                <a:spcPct val="150000"/>
+              </a:lnSpc>
+              <a:spcAft>
+                <a:spcPts val="400"/>
+              </a:spcAft>
+            </a:pPr>
+            <a:r>
+              <a:rPr sz="1500" b="1">
+                <a:solidFill>
+                  <a:srgbClr val="06A77D"/>
+                </a:solidFill>
+                <a:latin typeface="Calibri"/>
+              </a:rPr>
+              <a:t>▸  </a:t>
+            </a:r>
+            <a:r>
+              <a:rPr sz="1500">
+                <a:solidFill>
+                  <a:srgbClr val="1A1A2E"/>
+                </a:solidFill>
+                <a:latin typeface="Calibri"/>
+              </a:rPr>
+              <a:t>Whitelist &gt; Blacklist (sempre)</a:t>
             </a:r>
           </a:p>
         </p:txBody>
       </p:sp>
       <p:cxnSp>
         <p:nvCxnSpPr>
-          <p:cNvPr id="9" name="Connector 8"/>
+          <p:cNvPr id="12" name="Connector 11"/>
           <p:cNvCxnSpPr/>
           <p:nvPr/>
         </p:nvCxnSpPr>
@@ -9080,14 +9970,14 @@
       </p:cxnSp>
       <p:sp>
         <p:nvSpPr>
-          <p:cNvPr id="10" name="TextBox 9"/>
+          <p:cNvPr id="13" name="TextBox 12"/>
           <p:cNvSpPr txBox="1"/>
           <p:nvPr/>
         </p:nvSpPr>
         <p:spPr>
           <a:xfrm>
             <a:off x="457200" y="6473952"/>
-            <a:ext cx="7315200" cy="320040"/>
+            <a:ext cx="7315200" cy="292608"/>
           </a:xfrm>
           <a:prstGeom prst="rect">
             <a:avLst/>
@@ -9108,21 +9998,21 @@
                 </a:solidFill>
                 <a:latin typeface="Calibri"/>
               </a:rPr>
-              <a:t>Secure Coding · Corso IFTS STEM · A. Manneschi</a:t>
-            </a:r>
-          </a:p>
-        </p:txBody>
-      </p:sp>
-      <p:sp>
-        <p:nvSpPr>
-          <p:cNvPr id="11" name="TextBox 10"/>
+              <a:t>Secure Coding · Corso IFTS STEM · A. Manneschi · 2024/2025</a:t>
+            </a:r>
+          </a:p>
+        </p:txBody>
+      </p:sp>
+      <p:sp>
+        <p:nvSpPr>
+          <p:cNvPr id="14" name="TextBox 13"/>
           <p:cNvSpPr txBox="1"/>
           <p:nvPr/>
         </p:nvSpPr>
         <p:spPr>
           <a:xfrm>
             <a:off x="10515600" y="6473952"/>
-            <a:ext cx="1188720" cy="320040"/>
+            <a:ext cx="1188720" cy="292608"/>
           </a:xfrm>
           <a:prstGeom prst="rect">
             <a:avLst/>

--- a/slide/L3_sql_injection.pptx
+++ b/slide/L3_sql_injection.pptx
@@ -19,6 +19,7 @@
     <p:sldId id="267" r:id="rId18"/>
     <p:sldId id="268" r:id="rId19"/>
     <p:sldId id="269" r:id="rId20"/>
+    <p:sldId id="270" r:id="rId21"/>
   </p:sldIdLst>
   <p:sldSz cx="12191695" cy="6858000" type="screen4x3"/>
   <p:notesSz cx="6858000" cy="9144000"/>
@@ -3588,6 +3589,1039 @@
 </file>
 
 <file path=ppt/slides/slide10.xml><?xml version="1.0" encoding="utf-8"?>
+<p:sld xmlns:a="http://schemas.openxmlformats.org/drawingml/2006/main" xmlns:p="http://schemas.openxmlformats.org/presentationml/2006/main" xmlns:r="http://schemas.openxmlformats.org/officeDocument/2006/relationships">
+  <p:cSld>
+    <p:spTree>
+      <p:nvGrpSpPr>
+        <p:cNvPr id="1" name=""/>
+        <p:cNvGrpSpPr/>
+        <p:nvPr/>
+      </p:nvGrpSpPr>
+      <p:grpSpPr/>
+      <p:sp>
+        <p:nvSpPr>
+          <p:cNvPr id="2" name="Rectangle 1"/>
+          <p:cNvSpPr/>
+          <p:nvPr/>
+        </p:nvSpPr>
+        <p:spPr>
+          <a:xfrm>
+            <a:off x="0" y="0"/>
+            <a:ext cx="12191695" cy="777240"/>
+          </a:xfrm>
+          <a:prstGeom prst="rect">
+            <a:avLst/>
+          </a:prstGeom>
+          <a:solidFill>
+            <a:srgbClr val="0F2D52"/>
+          </a:solidFill>
+          <a:ln>
+            <a:noFill/>
+          </a:ln>
+        </p:spPr>
+        <p:style>
+          <a:lnRef idx="1">
+            <a:schemeClr val="accent1"/>
+          </a:lnRef>
+          <a:fillRef idx="3">
+            <a:schemeClr val="accent1"/>
+          </a:fillRef>
+          <a:effectRef idx="2">
+            <a:schemeClr val="accent1"/>
+          </a:effectRef>
+          <a:fontRef idx="minor">
+            <a:schemeClr val="lt1"/>
+          </a:fontRef>
+        </p:style>
+        <p:txBody>
+          <a:bodyPr rtlCol="0" anchor="ctr"/>
+          <a:lstStyle/>
+          <a:p>
+            <a:pPr algn="ctr"/>
+          </a:p>
+        </p:txBody>
+      </p:sp>
+      <p:sp>
+        <p:nvSpPr>
+          <p:cNvPr id="3" name="TextBox 2"/>
+          <p:cNvSpPr txBox="1"/>
+          <p:nvPr/>
+        </p:nvSpPr>
+        <p:spPr>
+          <a:xfrm>
+            <a:off x="457200" y="164592"/>
+            <a:ext cx="10972800" cy="502920"/>
+          </a:xfrm>
+          <a:prstGeom prst="rect">
+            <a:avLst/>
+          </a:prstGeom>
+          <a:noFill/>
+        </p:spPr>
+        <p:txBody>
+          <a:bodyPr wrap="square" lIns="45720" rIns="45720" tIns="18288" bIns="18288" anchor="ctr">
+            <a:spAutoFit/>
+          </a:bodyPr>
+          <a:lstStyle/>
+          <a:p>
+            <a:pPr algn="l"/>
+            <a:r>
+              <a:rPr sz="2400" b="1" i="0">
+                <a:solidFill>
+                  <a:srgbClr val="FFFFFF"/>
+                </a:solidFill>
+                <a:latin typeface="Calibri"/>
+              </a:rPr>
+              <a:t>Filtrare gli apici NON funziona</a:t>
+            </a:r>
+          </a:p>
+        </p:txBody>
+      </p:sp>
+      <p:sp>
+        <p:nvSpPr>
+          <p:cNvPr id="4" name="Rounded Rectangle 3"/>
+          <p:cNvSpPr/>
+          <p:nvPr/>
+        </p:nvSpPr>
+        <p:spPr>
+          <a:xfrm>
+            <a:off x="457200" y="1051560"/>
+            <a:ext cx="5486400" cy="640080"/>
+          </a:xfrm>
+          <a:prstGeom prst="roundRect">
+            <a:avLst>
+              <a:gd name="adj" fmla="val 8000"/>
+            </a:avLst>
+          </a:prstGeom>
+          <a:solidFill>
+            <a:srgbClr val="E63946"/>
+          </a:solidFill>
+          <a:ln>
+            <a:noFill/>
+          </a:ln>
+        </p:spPr>
+        <p:style>
+          <a:lnRef idx="1">
+            <a:schemeClr val="accent1"/>
+          </a:lnRef>
+          <a:fillRef idx="3">
+            <a:schemeClr val="accent1"/>
+          </a:fillRef>
+          <a:effectRef idx="2">
+            <a:schemeClr val="accent1"/>
+          </a:effectRef>
+          <a:fontRef idx="minor">
+            <a:schemeClr val="lt1"/>
+          </a:fontRef>
+        </p:style>
+        <p:txBody>
+          <a:bodyPr rtlCol="0" anchor="ctr"/>
+          <a:lstStyle/>
+          <a:p>
+            <a:pPr algn="ctr"/>
+          </a:p>
+        </p:txBody>
+      </p:sp>
+      <p:sp>
+        <p:nvSpPr>
+          <p:cNvPr id="5" name="TextBox 4"/>
+          <p:cNvSpPr txBox="1"/>
+          <p:nvPr/>
+        </p:nvSpPr>
+        <p:spPr>
+          <a:xfrm>
+            <a:off x="457200" y="1051560"/>
+            <a:ext cx="5486400" cy="640080"/>
+          </a:xfrm>
+          <a:prstGeom prst="rect">
+            <a:avLst/>
+          </a:prstGeom>
+          <a:noFill/>
+        </p:spPr>
+        <p:txBody>
+          <a:bodyPr wrap="square" lIns="45720" rIns="45720" tIns="18288" bIns="18288" anchor="ctr">
+            <a:spAutoFit/>
+          </a:bodyPr>
+          <a:lstStyle/>
+          <a:p>
+            <a:pPr algn="ctr"/>
+            <a:r>
+              <a:rPr sz="1800" b="1" i="0">
+                <a:solidFill>
+                  <a:srgbClr val="FFFFFF"/>
+                </a:solidFill>
+                <a:latin typeface="Calibri"/>
+              </a:rPr>
+              <a:t>Tentativo ingenuo</a:t>
+            </a:r>
+          </a:p>
+        </p:txBody>
+      </p:sp>
+      <p:sp>
+        <p:nvSpPr>
+          <p:cNvPr id="6" name="Rounded Rectangle 5"/>
+          <p:cNvSpPr/>
+          <p:nvPr/>
+        </p:nvSpPr>
+        <p:spPr>
+          <a:xfrm>
+            <a:off x="457200" y="1737360"/>
+            <a:ext cx="5486400" cy="4572000"/>
+          </a:xfrm>
+          <a:prstGeom prst="roundRect">
+            <a:avLst>
+              <a:gd name="adj" fmla="val 8000"/>
+            </a:avLst>
+          </a:prstGeom>
+          <a:solidFill>
+            <a:srgbClr val="FBFBFD"/>
+          </a:solidFill>
+          <a:ln w="25400">
+            <a:solidFill>
+              <a:srgbClr val="E63946"/>
+            </a:solidFill>
+          </a:ln>
+        </p:spPr>
+        <p:style>
+          <a:lnRef idx="1">
+            <a:schemeClr val="accent1"/>
+          </a:lnRef>
+          <a:fillRef idx="3">
+            <a:schemeClr val="accent1"/>
+          </a:fillRef>
+          <a:effectRef idx="2">
+            <a:schemeClr val="accent1"/>
+          </a:effectRef>
+          <a:fontRef idx="minor">
+            <a:schemeClr val="lt1"/>
+          </a:fontRef>
+        </p:style>
+        <p:txBody>
+          <a:bodyPr rtlCol="0" anchor="ctr"/>
+          <a:lstStyle/>
+          <a:p>
+            <a:pPr algn="ctr"/>
+          </a:p>
+        </p:txBody>
+      </p:sp>
+      <p:sp>
+        <p:nvSpPr>
+          <p:cNvPr id="7" name="TextBox 6"/>
+          <p:cNvSpPr txBox="1"/>
+          <p:nvPr/>
+        </p:nvSpPr>
+        <p:spPr>
+          <a:xfrm>
+            <a:off x="640080" y="1874519"/>
+            <a:ext cx="5120640" cy="4572000"/>
+          </a:xfrm>
+          <a:prstGeom prst="rect">
+            <a:avLst/>
+          </a:prstGeom>
+          <a:noFill/>
+        </p:spPr>
+        <p:txBody>
+          <a:bodyPr wrap="square">
+            <a:spAutoFit/>
+          </a:bodyPr>
+          <a:lstStyle/>
+          <a:p>
+            <a:pPr>
+              <a:lnSpc>
+                <a:spcPct val="150000"/>
+              </a:lnSpc>
+              <a:spcAft>
+                <a:spcPts val="400"/>
+              </a:spcAft>
+            </a:pPr>
+            <a:r>
+              <a:rPr sz="1500" b="1">
+                <a:solidFill>
+                  <a:srgbClr val="E63946"/>
+                </a:solidFill>
+                <a:latin typeface="Calibri"/>
+              </a:rPr>
+              <a:t>▸  </a:t>
+            </a:r>
+            <a:r>
+              <a:rPr sz="1500">
+                <a:solidFill>
+                  <a:srgbClr val="1A1A2E"/>
+                </a:solidFill>
+                <a:latin typeface="Calibri"/>
+              </a:rPr>
+              <a:t>s = s.replace("'", "")</a:t>
+            </a:r>
+          </a:p>
+          <a:p>
+            <a:pPr>
+              <a:lnSpc>
+                <a:spcPct val="150000"/>
+              </a:lnSpc>
+              <a:spcAft>
+                <a:spcPts val="400"/>
+              </a:spcAft>
+            </a:pPr>
+            <a:r>
+              <a:rPr sz="1500" b="1">
+                <a:solidFill>
+                  <a:srgbClr val="E63946"/>
+                </a:solidFill>
+                <a:latin typeface="Calibri"/>
+              </a:rPr>
+              <a:t>▸  </a:t>
+            </a:r>
+            <a:r>
+              <a:rPr sz="1500">
+                <a:solidFill>
+                  <a:srgbClr val="1A1A2E"/>
+                </a:solidFill>
+                <a:latin typeface="Calibri"/>
+              </a:rPr>
+              <a:t>Sembra di essere protetti...</a:t>
+            </a:r>
+          </a:p>
+          <a:p>
+            <a:pPr>
+              <a:lnSpc>
+                <a:spcPct val="150000"/>
+              </a:lnSpc>
+              <a:spcAft>
+                <a:spcPts val="400"/>
+              </a:spcAft>
+            </a:pPr>
+            <a:r>
+              <a:rPr sz="1500" b="1">
+                <a:solidFill>
+                  <a:srgbClr val="E63946"/>
+                </a:solidFill>
+                <a:latin typeface="Calibri"/>
+              </a:rPr>
+              <a:t>▸  </a:t>
+            </a:r>
+            <a:r>
+              <a:rPr sz="1500">
+                <a:solidFill>
+                  <a:srgbClr val="1A1A2E"/>
+                </a:solidFill>
+                <a:latin typeface="Calibri"/>
+              </a:rPr>
+              <a:t/>
+            </a:r>
+          </a:p>
+          <a:p>
+            <a:pPr>
+              <a:lnSpc>
+                <a:spcPct val="150000"/>
+              </a:lnSpc>
+              <a:spcAft>
+                <a:spcPts val="400"/>
+              </a:spcAft>
+            </a:pPr>
+            <a:r>
+              <a:rPr sz="1500" b="1">
+                <a:solidFill>
+                  <a:srgbClr val="E63946"/>
+                </a:solidFill>
+                <a:latin typeface="Calibri"/>
+              </a:rPr>
+              <a:t>▸  </a:t>
+            </a:r>
+            <a:r>
+              <a:rPr sz="1500">
+                <a:solidFill>
+                  <a:srgbClr val="1A1A2E"/>
+                </a:solidFill>
+                <a:latin typeface="Calibri"/>
+              </a:rPr>
+              <a:t>Bypass:</a:t>
+            </a:r>
+          </a:p>
+          <a:p>
+            <a:pPr>
+              <a:lnSpc>
+                <a:spcPct val="150000"/>
+              </a:lnSpc>
+              <a:spcAft>
+                <a:spcPts val="400"/>
+              </a:spcAft>
+            </a:pPr>
+            <a:r>
+              <a:rPr sz="1500" b="1">
+                <a:solidFill>
+                  <a:srgbClr val="E63946"/>
+                </a:solidFill>
+                <a:latin typeface="Calibri"/>
+              </a:rPr>
+              <a:t>▸  </a:t>
+            </a:r>
+            <a:r>
+              <a:rPr sz="1500">
+                <a:solidFill>
+                  <a:srgbClr val="1A1A2E"/>
+                </a:solidFill>
+                <a:latin typeface="Calibri"/>
+              </a:rPr>
+              <a:t>  %27 (URL encoded)</a:t>
+            </a:r>
+          </a:p>
+          <a:p>
+            <a:pPr>
+              <a:lnSpc>
+                <a:spcPct val="150000"/>
+              </a:lnSpc>
+              <a:spcAft>
+                <a:spcPts val="400"/>
+              </a:spcAft>
+            </a:pPr>
+            <a:r>
+              <a:rPr sz="1500" b="1">
+                <a:solidFill>
+                  <a:srgbClr val="E63946"/>
+                </a:solidFill>
+                <a:latin typeface="Calibri"/>
+              </a:rPr>
+              <a:t>▸  </a:t>
+            </a:r>
+            <a:r>
+              <a:rPr sz="1500">
+                <a:solidFill>
+                  <a:srgbClr val="1A1A2E"/>
+                </a:solidFill>
+                <a:latin typeface="Calibri"/>
+              </a:rPr>
+              <a:t>  \\' (escape)</a:t>
+            </a:r>
+          </a:p>
+          <a:p>
+            <a:pPr>
+              <a:lnSpc>
+                <a:spcPct val="150000"/>
+              </a:lnSpc>
+              <a:spcAft>
+                <a:spcPts val="400"/>
+              </a:spcAft>
+            </a:pPr>
+            <a:r>
+              <a:rPr sz="1500" b="1">
+                <a:solidFill>
+                  <a:srgbClr val="E63946"/>
+                </a:solidFill>
+                <a:latin typeface="Calibri"/>
+              </a:rPr>
+              <a:t>▸  </a:t>
+            </a:r>
+            <a:r>
+              <a:rPr sz="1500">
+                <a:solidFill>
+                  <a:srgbClr val="1A1A2E"/>
+                </a:solidFill>
+                <a:latin typeface="Calibri"/>
+              </a:rPr>
+              <a:t>  " (doppi apici)</a:t>
+            </a:r>
+          </a:p>
+          <a:p>
+            <a:pPr>
+              <a:lnSpc>
+                <a:spcPct val="150000"/>
+              </a:lnSpc>
+              <a:spcAft>
+                <a:spcPts val="400"/>
+              </a:spcAft>
+            </a:pPr>
+            <a:r>
+              <a:rPr sz="1500" b="1">
+                <a:solidFill>
+                  <a:srgbClr val="E63946"/>
+                </a:solidFill>
+                <a:latin typeface="Calibri"/>
+              </a:rPr>
+              <a:t>▸  </a:t>
+            </a:r>
+            <a:r>
+              <a:rPr sz="1500">
+                <a:solidFill>
+                  <a:srgbClr val="1A1A2E"/>
+                </a:solidFill>
+                <a:latin typeface="Calibri"/>
+              </a:rPr>
+              <a:t>  ʼ (Unicode lookalike)</a:t>
+            </a:r>
+          </a:p>
+          <a:p>
+            <a:pPr>
+              <a:lnSpc>
+                <a:spcPct val="150000"/>
+              </a:lnSpc>
+              <a:spcAft>
+                <a:spcPts val="400"/>
+              </a:spcAft>
+            </a:pPr>
+            <a:r>
+              <a:rPr sz="1500" b="1">
+                <a:solidFill>
+                  <a:srgbClr val="E63946"/>
+                </a:solidFill>
+                <a:latin typeface="Calibri"/>
+              </a:rPr>
+              <a:t>▸  </a:t>
+            </a:r>
+            <a:r>
+              <a:rPr sz="1500">
+                <a:solidFill>
+                  <a:srgbClr val="1A1A2E"/>
+                </a:solidFill>
+                <a:latin typeface="Calibri"/>
+              </a:rPr>
+              <a:t>  1 OR 1=1 (numerica)</a:t>
+            </a:r>
+          </a:p>
+        </p:txBody>
+      </p:sp>
+      <p:sp>
+        <p:nvSpPr>
+          <p:cNvPr id="8" name="Rounded Rectangle 7"/>
+          <p:cNvSpPr/>
+          <p:nvPr/>
+        </p:nvSpPr>
+        <p:spPr>
+          <a:xfrm>
+            <a:off x="6217920" y="1051560"/>
+            <a:ext cx="5486400" cy="640080"/>
+          </a:xfrm>
+          <a:prstGeom prst="roundRect">
+            <a:avLst>
+              <a:gd name="adj" fmla="val 8000"/>
+            </a:avLst>
+          </a:prstGeom>
+          <a:solidFill>
+            <a:srgbClr val="06A77D"/>
+          </a:solidFill>
+          <a:ln>
+            <a:noFill/>
+          </a:ln>
+        </p:spPr>
+        <p:style>
+          <a:lnRef idx="1">
+            <a:schemeClr val="accent1"/>
+          </a:lnRef>
+          <a:fillRef idx="3">
+            <a:schemeClr val="accent1"/>
+          </a:fillRef>
+          <a:effectRef idx="2">
+            <a:schemeClr val="accent1"/>
+          </a:effectRef>
+          <a:fontRef idx="minor">
+            <a:schemeClr val="lt1"/>
+          </a:fontRef>
+        </p:style>
+        <p:txBody>
+          <a:bodyPr rtlCol="0" anchor="ctr"/>
+          <a:lstStyle/>
+          <a:p>
+            <a:pPr algn="ctr"/>
+          </a:p>
+        </p:txBody>
+      </p:sp>
+      <p:sp>
+        <p:nvSpPr>
+          <p:cNvPr id="9" name="TextBox 8"/>
+          <p:cNvSpPr txBox="1"/>
+          <p:nvPr/>
+        </p:nvSpPr>
+        <p:spPr>
+          <a:xfrm>
+            <a:off x="6217920" y="1051560"/>
+            <a:ext cx="5486400" cy="640080"/>
+          </a:xfrm>
+          <a:prstGeom prst="rect">
+            <a:avLst/>
+          </a:prstGeom>
+          <a:noFill/>
+        </p:spPr>
+        <p:txBody>
+          <a:bodyPr wrap="square" lIns="45720" rIns="45720" tIns="18288" bIns="18288" anchor="ctr">
+            <a:spAutoFit/>
+          </a:bodyPr>
+          <a:lstStyle/>
+          <a:p>
+            <a:pPr algn="ctr"/>
+            <a:r>
+              <a:rPr sz="1800" b="1" i="0">
+                <a:solidFill>
+                  <a:srgbClr val="FFFFFF"/>
+                </a:solidFill>
+                <a:latin typeface="Calibri"/>
+              </a:rPr>
+              <a:t>Soluzione corretta</a:t>
+            </a:r>
+          </a:p>
+        </p:txBody>
+      </p:sp>
+      <p:sp>
+        <p:nvSpPr>
+          <p:cNvPr id="10" name="Rounded Rectangle 9"/>
+          <p:cNvSpPr/>
+          <p:nvPr/>
+        </p:nvSpPr>
+        <p:spPr>
+          <a:xfrm>
+            <a:off x="6217920" y="1737360"/>
+            <a:ext cx="5486400" cy="4572000"/>
+          </a:xfrm>
+          <a:prstGeom prst="roundRect">
+            <a:avLst>
+              <a:gd name="adj" fmla="val 8000"/>
+            </a:avLst>
+          </a:prstGeom>
+          <a:solidFill>
+            <a:srgbClr val="FBFBFD"/>
+          </a:solidFill>
+          <a:ln w="25400">
+            <a:solidFill>
+              <a:srgbClr val="06A77D"/>
+            </a:solidFill>
+          </a:ln>
+        </p:spPr>
+        <p:style>
+          <a:lnRef idx="1">
+            <a:schemeClr val="accent1"/>
+          </a:lnRef>
+          <a:fillRef idx="3">
+            <a:schemeClr val="accent1"/>
+          </a:fillRef>
+          <a:effectRef idx="2">
+            <a:schemeClr val="accent1"/>
+          </a:effectRef>
+          <a:fontRef idx="minor">
+            <a:schemeClr val="lt1"/>
+          </a:fontRef>
+        </p:style>
+        <p:txBody>
+          <a:bodyPr rtlCol="0" anchor="ctr"/>
+          <a:lstStyle/>
+          <a:p>
+            <a:pPr algn="ctr"/>
+          </a:p>
+        </p:txBody>
+      </p:sp>
+      <p:sp>
+        <p:nvSpPr>
+          <p:cNvPr id="11" name="TextBox 10"/>
+          <p:cNvSpPr txBox="1"/>
+          <p:nvPr/>
+        </p:nvSpPr>
+        <p:spPr>
+          <a:xfrm>
+            <a:off x="6400800" y="1874519"/>
+            <a:ext cx="5120640" cy="4572000"/>
+          </a:xfrm>
+          <a:prstGeom prst="rect">
+            <a:avLst/>
+          </a:prstGeom>
+          <a:noFill/>
+        </p:spPr>
+        <p:txBody>
+          <a:bodyPr wrap="square">
+            <a:spAutoFit/>
+          </a:bodyPr>
+          <a:lstStyle/>
+          <a:p>
+            <a:pPr>
+              <a:lnSpc>
+                <a:spcPct val="150000"/>
+              </a:lnSpc>
+              <a:spcAft>
+                <a:spcPts val="400"/>
+              </a:spcAft>
+            </a:pPr>
+            <a:r>
+              <a:rPr sz="1500" b="1">
+                <a:solidFill>
+                  <a:srgbClr val="06A77D"/>
+                </a:solidFill>
+                <a:latin typeface="Calibri"/>
+              </a:rPr>
+              <a:t>▸  </a:t>
+            </a:r>
+            <a:r>
+              <a:rPr sz="1500">
+                <a:solidFill>
+                  <a:srgbClr val="1A1A2E"/>
+                </a:solidFill>
+                <a:latin typeface="Calibri"/>
+              </a:rPr>
+              <a:t>Query parametrizzate</a:t>
+            </a:r>
+          </a:p>
+          <a:p>
+            <a:pPr>
+              <a:lnSpc>
+                <a:spcPct val="150000"/>
+              </a:lnSpc>
+              <a:spcAft>
+                <a:spcPts val="400"/>
+              </a:spcAft>
+            </a:pPr>
+            <a:r>
+              <a:rPr sz="1500" b="1">
+                <a:solidFill>
+                  <a:srgbClr val="06A77D"/>
+                </a:solidFill>
+                <a:latin typeface="Calibri"/>
+              </a:rPr>
+              <a:t>▸  </a:t>
+            </a:r>
+            <a:r>
+              <a:rPr sz="1500">
+                <a:solidFill>
+                  <a:srgbClr val="1A1A2E"/>
+                </a:solidFill>
+                <a:latin typeface="Calibri"/>
+              </a:rPr>
+              <a:t>Separi STRUTTURA da DATI</a:t>
+            </a:r>
+          </a:p>
+          <a:p>
+            <a:pPr>
+              <a:lnSpc>
+                <a:spcPct val="150000"/>
+              </a:lnSpc>
+              <a:spcAft>
+                <a:spcPts val="400"/>
+              </a:spcAft>
+            </a:pPr>
+            <a:r>
+              <a:rPr sz="1500" b="1">
+                <a:solidFill>
+                  <a:srgbClr val="06A77D"/>
+                </a:solidFill>
+                <a:latin typeface="Calibri"/>
+              </a:rPr>
+              <a:t>▸  </a:t>
+            </a:r>
+            <a:r>
+              <a:rPr sz="1500">
+                <a:solidFill>
+                  <a:srgbClr val="1A1A2E"/>
+                </a:solidFill>
+                <a:latin typeface="Calibri"/>
+              </a:rPr>
+              <a:t/>
+            </a:r>
+          </a:p>
+          <a:p>
+            <a:pPr>
+              <a:lnSpc>
+                <a:spcPct val="150000"/>
+              </a:lnSpc>
+              <a:spcAft>
+                <a:spcPts val="400"/>
+              </a:spcAft>
+            </a:pPr>
+            <a:r>
+              <a:rPr sz="1500" b="1">
+                <a:solidFill>
+                  <a:srgbClr val="06A77D"/>
+                </a:solidFill>
+                <a:latin typeface="Calibri"/>
+              </a:rPr>
+              <a:t>▸  </a:t>
+            </a:r>
+            <a:r>
+              <a:rPr sz="1500">
+                <a:solidFill>
+                  <a:srgbClr val="1A1A2E"/>
+                </a:solidFill>
+                <a:latin typeface="Calibri"/>
+              </a:rPr>
+              <a:t>Il driver tratta i dati</a:t>
+            </a:r>
+          </a:p>
+          <a:p>
+            <a:pPr>
+              <a:lnSpc>
+                <a:spcPct val="150000"/>
+              </a:lnSpc>
+              <a:spcAft>
+                <a:spcPts val="400"/>
+              </a:spcAft>
+            </a:pPr>
+            <a:r>
+              <a:rPr sz="1500" b="1">
+                <a:solidFill>
+                  <a:srgbClr val="06A77D"/>
+                </a:solidFill>
+                <a:latin typeface="Calibri"/>
+              </a:rPr>
+              <a:t>▸  </a:t>
+            </a:r>
+            <a:r>
+              <a:rPr sz="1500">
+                <a:solidFill>
+                  <a:srgbClr val="1A1A2E"/>
+                </a:solidFill>
+                <a:latin typeface="Calibri"/>
+              </a:rPr>
+              <a:t>come VALORI, mai come SQL</a:t>
+            </a:r>
+          </a:p>
+          <a:p>
+            <a:pPr>
+              <a:lnSpc>
+                <a:spcPct val="150000"/>
+              </a:lnSpc>
+              <a:spcAft>
+                <a:spcPts val="400"/>
+              </a:spcAft>
+            </a:pPr>
+            <a:r>
+              <a:rPr sz="1500" b="1">
+                <a:solidFill>
+                  <a:srgbClr val="06A77D"/>
+                </a:solidFill>
+                <a:latin typeface="Calibri"/>
+              </a:rPr>
+              <a:t>▸  </a:t>
+            </a:r>
+            <a:r>
+              <a:rPr sz="1500">
+                <a:solidFill>
+                  <a:srgbClr val="1A1A2E"/>
+                </a:solidFill>
+                <a:latin typeface="Calibri"/>
+              </a:rPr>
+              <a:t/>
+            </a:r>
+          </a:p>
+          <a:p>
+            <a:pPr>
+              <a:lnSpc>
+                <a:spcPct val="150000"/>
+              </a:lnSpc>
+              <a:spcAft>
+                <a:spcPts val="400"/>
+              </a:spcAft>
+            </a:pPr>
+            <a:r>
+              <a:rPr sz="1500" b="1">
+                <a:solidFill>
+                  <a:srgbClr val="06A77D"/>
+                </a:solidFill>
+                <a:latin typeface="Calibri"/>
+              </a:rPr>
+              <a:t>▸  </a:t>
+            </a:r>
+            <a:r>
+              <a:rPr sz="1500">
+                <a:solidFill>
+                  <a:srgbClr val="1A1A2E"/>
+                </a:solidFill>
+                <a:latin typeface="Calibri"/>
+              </a:rPr>
+              <a:t>Anche con QUALUNQUE input,</a:t>
+            </a:r>
+          </a:p>
+          <a:p>
+            <a:pPr>
+              <a:lnSpc>
+                <a:spcPct val="150000"/>
+              </a:lnSpc>
+              <a:spcAft>
+                <a:spcPts val="400"/>
+              </a:spcAft>
+            </a:pPr>
+            <a:r>
+              <a:rPr sz="1500" b="1">
+                <a:solidFill>
+                  <a:srgbClr val="06A77D"/>
+                </a:solidFill>
+                <a:latin typeface="Calibri"/>
+              </a:rPr>
+              <a:t>▸  </a:t>
+            </a:r>
+            <a:r>
+              <a:rPr sz="1500">
+                <a:solidFill>
+                  <a:srgbClr val="1A1A2E"/>
+                </a:solidFill>
+                <a:latin typeface="Calibri"/>
+              </a:rPr>
+              <a:t>non viene interpretato</a:t>
+            </a:r>
+          </a:p>
+          <a:p>
+            <a:pPr>
+              <a:lnSpc>
+                <a:spcPct val="150000"/>
+              </a:lnSpc>
+              <a:spcAft>
+                <a:spcPts val="400"/>
+              </a:spcAft>
+            </a:pPr>
+            <a:r>
+              <a:rPr sz="1500" b="1">
+                <a:solidFill>
+                  <a:srgbClr val="06A77D"/>
+                </a:solidFill>
+                <a:latin typeface="Calibri"/>
+              </a:rPr>
+              <a:t>▸  </a:t>
+            </a:r>
+            <a:r>
+              <a:rPr sz="1500">
+                <a:solidFill>
+                  <a:srgbClr val="1A1A2E"/>
+                </a:solidFill>
+                <a:latin typeface="Calibri"/>
+              </a:rPr>
+              <a:t/>
+            </a:r>
+          </a:p>
+          <a:p>
+            <a:pPr>
+              <a:lnSpc>
+                <a:spcPct val="150000"/>
+              </a:lnSpc>
+              <a:spcAft>
+                <a:spcPts val="400"/>
+              </a:spcAft>
+            </a:pPr>
+            <a:r>
+              <a:rPr sz="1500" b="1">
+                <a:solidFill>
+                  <a:srgbClr val="06A77D"/>
+                </a:solidFill>
+                <a:latin typeface="Calibri"/>
+              </a:rPr>
+              <a:t>▸  </a:t>
+            </a:r>
+            <a:r>
+              <a:rPr sz="1500">
+                <a:solidFill>
+                  <a:srgbClr val="1A1A2E"/>
+                </a:solidFill>
+                <a:latin typeface="Calibri"/>
+              </a:rPr>
+              <a:t>Whitelist &gt; Blacklist (sempre)</a:t>
+            </a:r>
+          </a:p>
+        </p:txBody>
+      </p:sp>
+      <p:cxnSp>
+        <p:nvCxnSpPr>
+          <p:cNvPr id="12" name="Connector 11"/>
+          <p:cNvCxnSpPr/>
+          <p:nvPr/>
+        </p:nvCxnSpPr>
+        <p:spPr>
+          <a:xfrm>
+            <a:off x="457200" y="6446520"/>
+            <a:ext cx="11274552" cy="0"/>
+          </a:xfrm>
+          <a:prstGeom prst="line">
+            <a:avLst/>
+          </a:prstGeom>
+          <a:ln w="19050">
+            <a:solidFill>
+              <a:srgbClr val="00A0B0"/>
+            </a:solidFill>
+          </a:ln>
+        </p:spPr>
+        <p:style>
+          <a:lnRef idx="2">
+            <a:schemeClr val="accent1"/>
+          </a:lnRef>
+          <a:fillRef idx="0">
+            <a:schemeClr val="accent1"/>
+          </a:fillRef>
+          <a:effectRef idx="1">
+            <a:schemeClr val="accent1"/>
+          </a:effectRef>
+          <a:fontRef idx="minor">
+            <a:schemeClr val="tx1"/>
+          </a:fontRef>
+        </p:style>
+      </p:cxnSp>
+      <p:sp>
+        <p:nvSpPr>
+          <p:cNvPr id="13" name="TextBox 12"/>
+          <p:cNvSpPr txBox="1"/>
+          <p:nvPr/>
+        </p:nvSpPr>
+        <p:spPr>
+          <a:xfrm>
+            <a:off x="457200" y="6473952"/>
+            <a:ext cx="7315200" cy="292608"/>
+          </a:xfrm>
+          <a:prstGeom prst="rect">
+            <a:avLst/>
+          </a:prstGeom>
+          <a:noFill/>
+        </p:spPr>
+        <p:txBody>
+          <a:bodyPr wrap="square" lIns="45720" rIns="45720" tIns="18288" bIns="18288" anchor="t">
+            <a:spAutoFit/>
+          </a:bodyPr>
+          <a:lstStyle/>
+          <a:p>
+            <a:pPr algn="l"/>
+            <a:r>
+              <a:rPr sz="1000" b="0" i="0">
+                <a:solidFill>
+                  <a:srgbClr val="6B7280"/>
+                </a:solidFill>
+                <a:latin typeface="Calibri"/>
+              </a:rPr>
+              <a:t>Secure Coding · Corso IFTS STEM · A. Manneschi · 2024/2025</a:t>
+            </a:r>
+          </a:p>
+        </p:txBody>
+      </p:sp>
+      <p:sp>
+        <p:nvSpPr>
+          <p:cNvPr id="14" name="TextBox 13"/>
+          <p:cNvSpPr txBox="1"/>
+          <p:nvPr/>
+        </p:nvSpPr>
+        <p:spPr>
+          <a:xfrm>
+            <a:off x="10515600" y="6473952"/>
+            <a:ext cx="1188720" cy="292608"/>
+          </a:xfrm>
+          <a:prstGeom prst="rect">
+            <a:avLst/>
+          </a:prstGeom>
+          <a:noFill/>
+        </p:spPr>
+        <p:txBody>
+          <a:bodyPr wrap="square" lIns="45720" rIns="45720" tIns="18288" bIns="18288" anchor="t">
+            <a:spAutoFit/>
+          </a:bodyPr>
+          <a:lstStyle/>
+          <a:p>
+            <a:pPr algn="r"/>
+            <a:r>
+              <a:rPr sz="1000" b="1" i="0">
+                <a:solidFill>
+                  <a:srgbClr val="6B7280"/>
+                </a:solidFill>
+                <a:latin typeface="Calibri"/>
+              </a:rPr>
+              <a:t>L3  ·  10/15</a:t>
+            </a:r>
+          </a:p>
+        </p:txBody>
+      </p:sp>
+    </p:spTree>
+  </p:cSld>
+  <p:clrMapOvr>
+    <a:masterClrMapping/>
+  </p:clrMapOvr>
+</p:sld>
+</file>
+
+<file path=ppt/slides/slide11.xml><?xml version="1.0" encoding="utf-8"?>
 <p:sld xmlns:a="http://schemas.openxmlformats.org/drawingml/2006/main" xmlns:p="http://schemas.openxmlformats.org/presentationml/2006/main" xmlns:r="http://schemas.openxmlformats.org/officeDocument/2006/relationships">
   <p:cSld>
     <p:spTree>
@@ -4125,427 +5159,7 @@
                 </a:solidFill>
                 <a:latin typeface="Calibri"/>
               </a:rPr>
-              <a:t>L3  ·  10/14</a:t>
-            </a:r>
-          </a:p>
-        </p:txBody>
-      </p:sp>
-    </p:spTree>
-  </p:cSld>
-  <p:clrMapOvr>
-    <a:masterClrMapping/>
-  </p:clrMapOvr>
-</p:sld>
-</file>
-
-<file path=ppt/slides/slide11.xml><?xml version="1.0" encoding="utf-8"?>
-<p:sld xmlns:a="http://schemas.openxmlformats.org/drawingml/2006/main" xmlns:p="http://schemas.openxmlformats.org/presentationml/2006/main" xmlns:r="http://schemas.openxmlformats.org/officeDocument/2006/relationships">
-  <p:cSld>
-    <p:spTree>
-      <p:nvGrpSpPr>
-        <p:cNvPr id="1" name=""/>
-        <p:cNvGrpSpPr/>
-        <p:nvPr/>
-      </p:nvGrpSpPr>
-      <p:grpSpPr/>
-      <p:sp>
-        <p:nvSpPr>
-          <p:cNvPr id="2" name="Rectangle 1"/>
-          <p:cNvSpPr/>
-          <p:nvPr/>
-        </p:nvSpPr>
-        <p:spPr>
-          <a:xfrm>
-            <a:off x="0" y="0"/>
-            <a:ext cx="12191695" cy="777240"/>
-          </a:xfrm>
-          <a:prstGeom prst="rect">
-            <a:avLst/>
-          </a:prstGeom>
-          <a:solidFill>
-            <a:srgbClr val="0F2D52"/>
-          </a:solidFill>
-          <a:ln>
-            <a:noFill/>
-          </a:ln>
-        </p:spPr>
-        <p:style>
-          <a:lnRef idx="1">
-            <a:schemeClr val="accent1"/>
-          </a:lnRef>
-          <a:fillRef idx="3">
-            <a:schemeClr val="accent1"/>
-          </a:fillRef>
-          <a:effectRef idx="2">
-            <a:schemeClr val="accent1"/>
-          </a:effectRef>
-          <a:fontRef idx="minor">
-            <a:schemeClr val="lt1"/>
-          </a:fontRef>
-        </p:style>
-        <p:txBody>
-          <a:bodyPr rtlCol="0" anchor="ctr"/>
-          <a:lstStyle/>
-          <a:p>
-            <a:pPr algn="ctr"/>
-          </a:p>
-        </p:txBody>
-      </p:sp>
-      <p:sp>
-        <p:nvSpPr>
-          <p:cNvPr id="3" name="TextBox 2"/>
-          <p:cNvSpPr txBox="1"/>
-          <p:nvPr/>
-        </p:nvSpPr>
-        <p:spPr>
-          <a:xfrm>
-            <a:off x="457200" y="164592"/>
-            <a:ext cx="10972800" cy="502920"/>
-          </a:xfrm>
-          <a:prstGeom prst="rect">
-            <a:avLst/>
-          </a:prstGeom>
-          <a:noFill/>
-        </p:spPr>
-        <p:txBody>
-          <a:bodyPr wrap="square" lIns="45720" rIns="45720" tIns="18288" bIns="18288" anchor="ctr">
-            <a:spAutoFit/>
-          </a:bodyPr>
-          <a:lstStyle/>
-          <a:p>
-            <a:pPr algn="l"/>
-            <a:r>
-              <a:rPr sz="2400" b="1" i="0">
-                <a:solidFill>
-                  <a:srgbClr val="FFFFFF"/>
-                </a:solidFill>
-                <a:latin typeface="Calibri"/>
-              </a:rPr>
-              <a:t>🛡  Difese in profondità</a:t>
-            </a:r>
-          </a:p>
-        </p:txBody>
-      </p:sp>
-      <p:sp>
-        <p:nvSpPr>
-          <p:cNvPr id="4" name="TextBox 3"/>
-          <p:cNvSpPr txBox="1"/>
-          <p:nvPr/>
-        </p:nvSpPr>
-        <p:spPr>
-          <a:xfrm>
-            <a:off x="640080" y="1097280"/>
-            <a:ext cx="10972800" cy="5029200"/>
-          </a:xfrm>
-          <a:prstGeom prst="rect">
-            <a:avLst/>
-          </a:prstGeom>
-          <a:noFill/>
-        </p:spPr>
-        <p:txBody>
-          <a:bodyPr wrap="square">
-            <a:spAutoFit/>
-          </a:bodyPr>
-          <a:lstStyle/>
-          <a:p>
-            <a:pPr>
-              <a:lnSpc>
-                <a:spcPct val="150000"/>
-              </a:lnSpc>
-              <a:spcAft>
-                <a:spcPts val="400"/>
-              </a:spcAft>
-            </a:pPr>
-            <a:r>
-              <a:rPr sz="2000" b="1">
-                <a:solidFill>
-                  <a:srgbClr val="00A0B0"/>
-                </a:solidFill>
-                <a:latin typeface="Calibri"/>
-              </a:rPr>
-              <a:t>▸  </a:t>
-            </a:r>
-            <a:r>
-              <a:rPr sz="2000">
-                <a:solidFill>
-                  <a:srgbClr val="1A1A2E"/>
-                </a:solidFill>
-                <a:latin typeface="Calibri"/>
-              </a:rPr>
-              <a:t>1. Query parametrizzate (difesa PRIMARIA, non sostituibile)</a:t>
-            </a:r>
-          </a:p>
-          <a:p>
-            <a:pPr>
-              <a:lnSpc>
-                <a:spcPct val="150000"/>
-              </a:lnSpc>
-              <a:spcAft>
-                <a:spcPts val="400"/>
-              </a:spcAft>
-            </a:pPr>
-            <a:r>
-              <a:rPr sz="2000" b="1">
-                <a:solidFill>
-                  <a:srgbClr val="00A0B0"/>
-                </a:solidFill>
-                <a:latin typeface="Calibri"/>
-              </a:rPr>
-              <a:t>▸  </a:t>
-            </a:r>
-            <a:r>
-              <a:rPr sz="2000">
-                <a:solidFill>
-                  <a:srgbClr val="1A1A2E"/>
-                </a:solidFill>
-                <a:latin typeface="Calibri"/>
-              </a:rPr>
-              <a:t>2. ORM (forza il pattern corretto)</a:t>
-            </a:r>
-          </a:p>
-          <a:p>
-            <a:pPr>
-              <a:lnSpc>
-                <a:spcPct val="150000"/>
-              </a:lnSpc>
-              <a:spcAft>
-                <a:spcPts val="400"/>
-              </a:spcAft>
-            </a:pPr>
-            <a:r>
-              <a:rPr sz="2000" b="1">
-                <a:solidFill>
-                  <a:srgbClr val="00A0B0"/>
-                </a:solidFill>
-                <a:latin typeface="Calibri"/>
-              </a:rPr>
-              <a:t>▸  </a:t>
-            </a:r>
-            <a:r>
-              <a:rPr sz="2000">
-                <a:solidFill>
-                  <a:srgbClr val="1A1A2E"/>
-                </a:solidFill>
-                <a:latin typeface="Calibri"/>
-              </a:rPr>
-              <a:t>3. Least privilege per l'utente DB (no DROP/CREATE/GRANT)</a:t>
-            </a:r>
-          </a:p>
-          <a:p>
-            <a:pPr>
-              <a:lnSpc>
-                <a:spcPct val="150000"/>
-              </a:lnSpc>
-              <a:spcAft>
-                <a:spcPts val="400"/>
-              </a:spcAft>
-            </a:pPr>
-            <a:r>
-              <a:rPr sz="2000" b="1">
-                <a:solidFill>
-                  <a:srgbClr val="00A0B0"/>
-                </a:solidFill>
-                <a:latin typeface="Calibri"/>
-              </a:rPr>
-              <a:t>▸  </a:t>
-            </a:r>
-            <a:r>
-              <a:rPr sz="2000">
-                <a:solidFill>
-                  <a:srgbClr val="1A1A2E"/>
-                </a:solidFill>
-                <a:latin typeface="Calibri"/>
-              </a:rPr>
-              <a:t>4. Errori generici al client, dettagli nei log interni</a:t>
-            </a:r>
-          </a:p>
-          <a:p>
-            <a:pPr>
-              <a:lnSpc>
-                <a:spcPct val="150000"/>
-              </a:lnSpc>
-              <a:spcAft>
-                <a:spcPts val="400"/>
-              </a:spcAft>
-            </a:pPr>
-            <a:r>
-              <a:rPr sz="2000" b="1">
-                <a:solidFill>
-                  <a:srgbClr val="00A0B0"/>
-                </a:solidFill>
-                <a:latin typeface="Calibri"/>
-              </a:rPr>
-              <a:t>▸  </a:t>
-            </a:r>
-            <a:r>
-              <a:rPr sz="2000">
-                <a:solidFill>
-                  <a:srgbClr val="1A1A2E"/>
-                </a:solidFill>
-                <a:latin typeface="Calibri"/>
-              </a:rPr>
-              <a:t>5. WAF (Web Application Firewall) come strato aggiuntivo</a:t>
-            </a:r>
-          </a:p>
-          <a:p>
-            <a:pPr>
-              <a:lnSpc>
-                <a:spcPct val="150000"/>
-              </a:lnSpc>
-              <a:spcAft>
-                <a:spcPts val="400"/>
-              </a:spcAft>
-            </a:pPr>
-            <a:r>
-              <a:rPr sz="2000" b="1">
-                <a:solidFill>
-                  <a:srgbClr val="00A0B0"/>
-                </a:solidFill>
-                <a:latin typeface="Calibri"/>
-              </a:rPr>
-              <a:t>▸  </a:t>
-            </a:r>
-            <a:r>
-              <a:rPr sz="2000">
-                <a:solidFill>
-                  <a:srgbClr val="1A1A2E"/>
-                </a:solidFill>
-                <a:latin typeface="Calibri"/>
-              </a:rPr>
-              <a:t>6. Rate limiting sul login (anti brute force)</a:t>
-            </a:r>
-          </a:p>
-          <a:p>
-            <a:pPr>
-              <a:lnSpc>
-                <a:spcPct val="150000"/>
-              </a:lnSpc>
-              <a:spcAft>
-                <a:spcPts val="400"/>
-              </a:spcAft>
-            </a:pPr>
-            <a:r>
-              <a:rPr sz="2000" b="1">
-                <a:solidFill>
-                  <a:srgbClr val="00A0B0"/>
-                </a:solidFill>
-                <a:latin typeface="Calibri"/>
-              </a:rPr>
-              <a:t>▸  </a:t>
-            </a:r>
-            <a:r>
-              <a:rPr sz="2000">
-                <a:solidFill>
-                  <a:srgbClr val="1A1A2E"/>
-                </a:solidFill>
-                <a:latin typeface="Calibri"/>
-              </a:rPr>
-              <a:t>7. Audit log dei tentativi sospetti</a:t>
-            </a:r>
-          </a:p>
-        </p:txBody>
-      </p:sp>
-      <p:cxnSp>
-        <p:nvCxnSpPr>
-          <p:cNvPr id="5" name="Connector 4"/>
-          <p:cNvCxnSpPr/>
-          <p:nvPr/>
-        </p:nvCxnSpPr>
-        <p:spPr>
-          <a:xfrm>
-            <a:off x="457200" y="6446520"/>
-            <a:ext cx="11274552" cy="0"/>
-          </a:xfrm>
-          <a:prstGeom prst="line">
-            <a:avLst/>
-          </a:prstGeom>
-          <a:ln w="19050">
-            <a:solidFill>
-              <a:srgbClr val="00A0B0"/>
-            </a:solidFill>
-          </a:ln>
-        </p:spPr>
-        <p:style>
-          <a:lnRef idx="2">
-            <a:schemeClr val="accent1"/>
-          </a:lnRef>
-          <a:fillRef idx="0">
-            <a:schemeClr val="accent1"/>
-          </a:fillRef>
-          <a:effectRef idx="1">
-            <a:schemeClr val="accent1"/>
-          </a:effectRef>
-          <a:fontRef idx="minor">
-            <a:schemeClr val="tx1"/>
-          </a:fontRef>
-        </p:style>
-      </p:cxnSp>
-      <p:sp>
-        <p:nvSpPr>
-          <p:cNvPr id="6" name="TextBox 5"/>
-          <p:cNvSpPr txBox="1"/>
-          <p:nvPr/>
-        </p:nvSpPr>
-        <p:spPr>
-          <a:xfrm>
-            <a:off x="457200" y="6473952"/>
-            <a:ext cx="7315200" cy="292608"/>
-          </a:xfrm>
-          <a:prstGeom prst="rect">
-            <a:avLst/>
-          </a:prstGeom>
-          <a:noFill/>
-        </p:spPr>
-        <p:txBody>
-          <a:bodyPr wrap="square" lIns="45720" rIns="45720" tIns="18288" bIns="18288" anchor="t">
-            <a:spAutoFit/>
-          </a:bodyPr>
-          <a:lstStyle/>
-          <a:p>
-            <a:pPr algn="l"/>
-            <a:r>
-              <a:rPr sz="1000" b="0" i="0">
-                <a:solidFill>
-                  <a:srgbClr val="6B7280"/>
-                </a:solidFill>
-                <a:latin typeface="Calibri"/>
-              </a:rPr>
-              <a:t>Secure Coding · Corso IFTS STEM · A. Manneschi · 2024/2025</a:t>
-            </a:r>
-          </a:p>
-        </p:txBody>
-      </p:sp>
-      <p:sp>
-        <p:nvSpPr>
-          <p:cNvPr id="7" name="TextBox 6"/>
-          <p:cNvSpPr txBox="1"/>
-          <p:nvPr/>
-        </p:nvSpPr>
-        <p:spPr>
-          <a:xfrm>
-            <a:off x="10515600" y="6473952"/>
-            <a:ext cx="1188720" cy="292608"/>
-          </a:xfrm>
-          <a:prstGeom prst="rect">
-            <a:avLst/>
-          </a:prstGeom>
-          <a:noFill/>
-        </p:spPr>
-        <p:txBody>
-          <a:bodyPr wrap="square" lIns="45720" rIns="45720" tIns="18288" bIns="18288" anchor="t">
-            <a:spAutoFit/>
-          </a:bodyPr>
-          <a:lstStyle/>
-          <a:p>
-            <a:pPr algn="r"/>
-            <a:r>
-              <a:rPr sz="1000" b="1" i="0">
-                <a:solidFill>
-                  <a:srgbClr val="6B7280"/>
-                </a:solidFill>
-                <a:latin typeface="Calibri"/>
-              </a:rPr>
-              <a:t>L3  ·  11/14</a:t>
+              <a:t>L3  ·  11/15</a:t>
             </a:r>
           </a:p>
         </p:txBody>
@@ -4641,64 +5255,21 @@
                 </a:solidFill>
                 <a:latin typeface="Calibri"/>
               </a:rPr>
-              <a:t>📌  Cosa portare a casa</a:t>
-            </a:r>
-          </a:p>
-        </p:txBody>
-      </p:sp>
-      <p:sp>
-        <p:nvSpPr>
-          <p:cNvPr id="4" name="Oval 3"/>
-          <p:cNvSpPr/>
-          <p:nvPr/>
-        </p:nvSpPr>
-        <p:spPr>
-          <a:xfrm>
-            <a:off x="914400" y="1440180"/>
-            <a:ext cx="777240" cy="777240"/>
-          </a:xfrm>
-          <a:prstGeom prst="ellipse">
-            <a:avLst/>
-          </a:prstGeom>
-          <a:solidFill>
-            <a:srgbClr val="00A0B0"/>
-          </a:solidFill>
-          <a:ln>
-            <a:noFill/>
-          </a:ln>
-        </p:spPr>
-        <p:style>
-          <a:lnRef idx="1">
-            <a:schemeClr val="accent1"/>
-          </a:lnRef>
-          <a:fillRef idx="3">
-            <a:schemeClr val="accent1"/>
-          </a:fillRef>
-          <a:effectRef idx="2">
-            <a:schemeClr val="accent1"/>
-          </a:effectRef>
-          <a:fontRef idx="minor">
-            <a:schemeClr val="lt1"/>
-          </a:fontRef>
-        </p:style>
-        <p:txBody>
-          <a:bodyPr rtlCol="0" anchor="ctr"/>
-          <a:lstStyle/>
-          <a:p>
-            <a:pPr algn="ctr"/>
-          </a:p>
-        </p:txBody>
-      </p:sp>
-      <p:sp>
-        <p:nvSpPr>
-          <p:cNvPr id="5" name="TextBox 4"/>
+              <a:t>🛡  Difese in profondità</a:t>
+            </a:r>
+          </a:p>
+        </p:txBody>
+      </p:sp>
+      <p:sp>
+        <p:nvSpPr>
+          <p:cNvPr id="4" name="TextBox 3"/>
           <p:cNvSpPr txBox="1"/>
           <p:nvPr/>
         </p:nvSpPr>
         <p:spPr>
           <a:xfrm>
-            <a:off x="914400" y="1440180"/>
-            <a:ext cx="777240" cy="777240"/>
+            <a:off x="640080" y="1097280"/>
+            <a:ext cx="10972800" cy="5029200"/>
           </a:xfrm>
           <a:prstGeom prst="rect">
             <a:avLst/>
@@ -4706,749 +5277,211 @@
           <a:noFill/>
         </p:spPr>
         <p:txBody>
-          <a:bodyPr wrap="square" lIns="45720" rIns="45720" tIns="18288" bIns="18288" anchor="ctr">
+          <a:bodyPr wrap="square">
             <a:spAutoFit/>
           </a:bodyPr>
           <a:lstStyle/>
           <a:p>
-            <a:pPr algn="ctr"/>
-            <a:r>
-              <a:rPr sz="2800" b="1" i="0">
-                <a:solidFill>
-                  <a:srgbClr val="FFFFFF"/>
-                </a:solidFill>
-                <a:latin typeface="Calibri"/>
-              </a:rPr>
-              <a:t>1</a:t>
-            </a:r>
-          </a:p>
-        </p:txBody>
-      </p:sp>
-      <p:sp>
-        <p:nvSpPr>
-          <p:cNvPr id="6" name="Rounded Rectangle 5"/>
-          <p:cNvSpPr/>
-          <p:nvPr/>
-        </p:nvSpPr>
-        <p:spPr>
-          <a:xfrm>
-            <a:off x="2011680" y="1440180"/>
-            <a:ext cx="9144000" cy="777240"/>
-          </a:xfrm>
-          <a:prstGeom prst="roundRect">
-            <a:avLst>
-              <a:gd name="adj" fmla="val 8000"/>
-            </a:avLst>
-          </a:prstGeom>
-          <a:solidFill>
-            <a:srgbClr val="FBFBFD"/>
-          </a:solidFill>
-          <a:ln w="19050">
-            <a:solidFill>
-              <a:srgbClr val="00A0B0"/>
-            </a:solidFill>
-          </a:ln>
-        </p:spPr>
-        <p:style>
-          <a:lnRef idx="1">
-            <a:schemeClr val="accent1"/>
-          </a:lnRef>
-          <a:fillRef idx="3">
-            <a:schemeClr val="accent1"/>
-          </a:fillRef>
-          <a:effectRef idx="2">
-            <a:schemeClr val="accent1"/>
-          </a:effectRef>
-          <a:fontRef idx="minor">
-            <a:schemeClr val="lt1"/>
-          </a:fontRef>
-        </p:style>
-        <p:txBody>
-          <a:bodyPr rtlCol="0" anchor="ctr"/>
-          <a:lstStyle/>
-          <a:p>
-            <a:pPr algn="ctr"/>
-          </a:p>
-        </p:txBody>
-      </p:sp>
-      <p:sp>
-        <p:nvSpPr>
-          <p:cNvPr id="7" name="TextBox 6"/>
-          <p:cNvSpPr txBox="1"/>
-          <p:nvPr/>
-        </p:nvSpPr>
-        <p:spPr>
-          <a:xfrm>
-            <a:off x="2286000" y="1440180"/>
-            <a:ext cx="8686800" cy="777240"/>
-          </a:xfrm>
-          <a:prstGeom prst="rect">
-            <a:avLst/>
-          </a:prstGeom>
-          <a:noFill/>
-        </p:spPr>
-        <p:txBody>
-          <a:bodyPr wrap="square" lIns="45720" rIns="45720" tIns="18288" bIns="18288" anchor="ctr">
-            <a:spAutoFit/>
-          </a:bodyPr>
-          <a:lstStyle/>
-          <a:p>
-            <a:pPr algn="l"/>
-            <a:r>
-              <a:rPr sz="1800" b="0" i="0">
+            <a:pPr>
+              <a:lnSpc>
+                <a:spcPct val="150000"/>
+              </a:lnSpc>
+              <a:spcAft>
+                <a:spcPts val="400"/>
+              </a:spcAft>
+            </a:pPr>
+            <a:r>
+              <a:rPr sz="2000" b="1">
+                <a:solidFill>
+                  <a:srgbClr val="00A0B0"/>
+                </a:solidFill>
+                <a:latin typeface="Calibri"/>
+              </a:rPr>
+              <a:t>▸  </a:t>
+            </a:r>
+            <a:r>
+              <a:rPr sz="2000">
                 <a:solidFill>
                   <a:srgbClr val="1A1A2E"/>
                 </a:solidFill>
                 <a:latin typeface="Calibri"/>
               </a:rPr>
-              <a:t>SQLi è la #1 dal 2003: Equifax, Heartland, TalkTalk</a:t>
-            </a:r>
-          </a:p>
-        </p:txBody>
-      </p:sp>
-      <p:sp>
-        <p:nvSpPr>
-          <p:cNvPr id="8" name="Oval 7"/>
-          <p:cNvSpPr/>
-          <p:nvPr/>
-        </p:nvSpPr>
-        <p:spPr>
-          <a:xfrm>
-            <a:off x="914400" y="2354580"/>
-            <a:ext cx="777240" cy="777240"/>
-          </a:xfrm>
-          <a:prstGeom prst="ellipse">
-            <a:avLst/>
-          </a:prstGeom>
-          <a:solidFill>
-            <a:srgbClr val="00A0B0"/>
-          </a:solidFill>
-          <a:ln>
-            <a:noFill/>
-          </a:ln>
-        </p:spPr>
-        <p:style>
-          <a:lnRef idx="1">
-            <a:schemeClr val="accent1"/>
-          </a:lnRef>
-          <a:fillRef idx="3">
-            <a:schemeClr val="accent1"/>
-          </a:fillRef>
-          <a:effectRef idx="2">
-            <a:schemeClr val="accent1"/>
-          </a:effectRef>
-          <a:fontRef idx="minor">
-            <a:schemeClr val="lt1"/>
-          </a:fontRef>
-        </p:style>
-        <p:txBody>
-          <a:bodyPr rtlCol="0" anchor="ctr"/>
-          <a:lstStyle/>
-          <a:p>
-            <a:pPr algn="ctr"/>
-          </a:p>
-        </p:txBody>
-      </p:sp>
-      <p:sp>
-        <p:nvSpPr>
-          <p:cNvPr id="9" name="TextBox 8"/>
-          <p:cNvSpPr txBox="1"/>
-          <p:nvPr/>
-        </p:nvSpPr>
-        <p:spPr>
-          <a:xfrm>
-            <a:off x="914400" y="2354580"/>
-            <a:ext cx="777240" cy="777240"/>
-          </a:xfrm>
-          <a:prstGeom prst="rect">
-            <a:avLst/>
-          </a:prstGeom>
-          <a:noFill/>
-        </p:spPr>
-        <p:txBody>
-          <a:bodyPr wrap="square" lIns="45720" rIns="45720" tIns="18288" bIns="18288" anchor="ctr">
-            <a:spAutoFit/>
-          </a:bodyPr>
-          <a:lstStyle/>
-          <a:p>
-            <a:pPr algn="ctr"/>
-            <a:r>
-              <a:rPr sz="2800" b="1" i="0">
-                <a:solidFill>
-                  <a:srgbClr val="FFFFFF"/>
-                </a:solidFill>
-                <a:latin typeface="Calibri"/>
-              </a:rPr>
-              <a:t>2</a:t>
-            </a:r>
-          </a:p>
-        </p:txBody>
-      </p:sp>
-      <p:sp>
-        <p:nvSpPr>
-          <p:cNvPr id="10" name="Rounded Rectangle 9"/>
-          <p:cNvSpPr/>
-          <p:nvPr/>
-        </p:nvSpPr>
-        <p:spPr>
-          <a:xfrm>
-            <a:off x="2011680" y="2354580"/>
-            <a:ext cx="9144000" cy="777240"/>
-          </a:xfrm>
-          <a:prstGeom prst="roundRect">
-            <a:avLst>
-              <a:gd name="adj" fmla="val 8000"/>
-            </a:avLst>
-          </a:prstGeom>
-          <a:solidFill>
-            <a:srgbClr val="FBFBFD"/>
-          </a:solidFill>
-          <a:ln w="19050">
-            <a:solidFill>
-              <a:srgbClr val="00A0B0"/>
-            </a:solidFill>
-          </a:ln>
-        </p:spPr>
-        <p:style>
-          <a:lnRef idx="1">
-            <a:schemeClr val="accent1"/>
-          </a:lnRef>
-          <a:fillRef idx="3">
-            <a:schemeClr val="accent1"/>
-          </a:fillRef>
-          <a:effectRef idx="2">
-            <a:schemeClr val="accent1"/>
-          </a:effectRef>
-          <a:fontRef idx="minor">
-            <a:schemeClr val="lt1"/>
-          </a:fontRef>
-        </p:style>
-        <p:txBody>
-          <a:bodyPr rtlCol="0" anchor="ctr"/>
-          <a:lstStyle/>
-          <a:p>
-            <a:pPr algn="ctr"/>
-          </a:p>
-        </p:txBody>
-      </p:sp>
-      <p:sp>
-        <p:nvSpPr>
-          <p:cNvPr id="11" name="TextBox 10"/>
-          <p:cNvSpPr txBox="1"/>
-          <p:nvPr/>
-        </p:nvSpPr>
-        <p:spPr>
-          <a:xfrm>
-            <a:off x="2286000" y="2354580"/>
-            <a:ext cx="8686800" cy="777240"/>
-          </a:xfrm>
-          <a:prstGeom prst="rect">
-            <a:avLst/>
-          </a:prstGeom>
-          <a:noFill/>
-        </p:spPr>
-        <p:txBody>
-          <a:bodyPr wrap="square" lIns="45720" rIns="45720" tIns="18288" bIns="18288" anchor="ctr">
-            <a:spAutoFit/>
-          </a:bodyPr>
-          <a:lstStyle/>
-          <a:p>
-            <a:pPr algn="l"/>
-            <a:r>
-              <a:rPr sz="1800" b="0" i="0">
+              <a:t>1. Query parametrizzate (difesa PRIMARIA, non sostituibile)</a:t>
+            </a:r>
+          </a:p>
+          <a:p>
+            <a:pPr>
+              <a:lnSpc>
+                <a:spcPct val="150000"/>
+              </a:lnSpc>
+              <a:spcAft>
+                <a:spcPts val="400"/>
+              </a:spcAft>
+            </a:pPr>
+            <a:r>
+              <a:rPr sz="2000" b="1">
+                <a:solidFill>
+                  <a:srgbClr val="00A0B0"/>
+                </a:solidFill>
+                <a:latin typeface="Calibri"/>
+              </a:rPr>
+              <a:t>▸  </a:t>
+            </a:r>
+            <a:r>
+              <a:rPr sz="2000">
                 <a:solidFill>
                   <a:srgbClr val="1A1A2E"/>
                 </a:solidFill>
                 <a:latin typeface="Calibri"/>
               </a:rPr>
-              <a:t>Mai f-string in SQL. Mai concatenazione. Sempre placeholder ?</a:t>
-            </a:r>
-          </a:p>
-        </p:txBody>
-      </p:sp>
-      <p:sp>
-        <p:nvSpPr>
-          <p:cNvPr id="12" name="Oval 11"/>
-          <p:cNvSpPr/>
-          <p:nvPr/>
-        </p:nvSpPr>
-        <p:spPr>
-          <a:xfrm>
-            <a:off x="914400" y="3268980"/>
-            <a:ext cx="777240" cy="777240"/>
-          </a:xfrm>
-          <a:prstGeom prst="ellipse">
-            <a:avLst/>
-          </a:prstGeom>
-          <a:solidFill>
-            <a:srgbClr val="00A0B0"/>
-          </a:solidFill>
-          <a:ln>
-            <a:noFill/>
-          </a:ln>
-        </p:spPr>
-        <p:style>
-          <a:lnRef idx="1">
-            <a:schemeClr val="accent1"/>
-          </a:lnRef>
-          <a:fillRef idx="3">
-            <a:schemeClr val="accent1"/>
-          </a:fillRef>
-          <a:effectRef idx="2">
-            <a:schemeClr val="accent1"/>
-          </a:effectRef>
-          <a:fontRef idx="minor">
-            <a:schemeClr val="lt1"/>
-          </a:fontRef>
-        </p:style>
-        <p:txBody>
-          <a:bodyPr rtlCol="0" anchor="ctr"/>
-          <a:lstStyle/>
-          <a:p>
-            <a:pPr algn="ctr"/>
-          </a:p>
-        </p:txBody>
-      </p:sp>
-      <p:sp>
-        <p:nvSpPr>
-          <p:cNvPr id="13" name="TextBox 12"/>
-          <p:cNvSpPr txBox="1"/>
-          <p:nvPr/>
-        </p:nvSpPr>
-        <p:spPr>
-          <a:xfrm>
-            <a:off x="914400" y="3268980"/>
-            <a:ext cx="777240" cy="777240"/>
-          </a:xfrm>
-          <a:prstGeom prst="rect">
-            <a:avLst/>
-          </a:prstGeom>
-          <a:noFill/>
-        </p:spPr>
-        <p:txBody>
-          <a:bodyPr wrap="square" lIns="45720" rIns="45720" tIns="18288" bIns="18288" anchor="ctr">
-            <a:spAutoFit/>
-          </a:bodyPr>
-          <a:lstStyle/>
-          <a:p>
-            <a:pPr algn="ctr"/>
-            <a:r>
-              <a:rPr sz="2800" b="1" i="0">
-                <a:solidFill>
-                  <a:srgbClr val="FFFFFF"/>
-                </a:solidFill>
-                <a:latin typeface="Calibri"/>
-              </a:rPr>
-              <a:t>3</a:t>
-            </a:r>
-          </a:p>
-        </p:txBody>
-      </p:sp>
-      <p:sp>
-        <p:nvSpPr>
-          <p:cNvPr id="14" name="Rounded Rectangle 13"/>
-          <p:cNvSpPr/>
-          <p:nvPr/>
-        </p:nvSpPr>
-        <p:spPr>
-          <a:xfrm>
-            <a:off x="2011680" y="3268980"/>
-            <a:ext cx="9144000" cy="777240"/>
-          </a:xfrm>
-          <a:prstGeom prst="roundRect">
-            <a:avLst>
-              <a:gd name="adj" fmla="val 8000"/>
-            </a:avLst>
-          </a:prstGeom>
-          <a:solidFill>
-            <a:srgbClr val="FBFBFD"/>
-          </a:solidFill>
-          <a:ln w="19050">
-            <a:solidFill>
-              <a:srgbClr val="00A0B0"/>
-            </a:solidFill>
-          </a:ln>
-        </p:spPr>
-        <p:style>
-          <a:lnRef idx="1">
-            <a:schemeClr val="accent1"/>
-          </a:lnRef>
-          <a:fillRef idx="3">
-            <a:schemeClr val="accent1"/>
-          </a:fillRef>
-          <a:effectRef idx="2">
-            <a:schemeClr val="accent1"/>
-          </a:effectRef>
-          <a:fontRef idx="minor">
-            <a:schemeClr val="lt1"/>
-          </a:fontRef>
-        </p:style>
-        <p:txBody>
-          <a:bodyPr rtlCol="0" anchor="ctr"/>
-          <a:lstStyle/>
-          <a:p>
-            <a:pPr algn="ctr"/>
-          </a:p>
-        </p:txBody>
-      </p:sp>
-      <p:sp>
-        <p:nvSpPr>
-          <p:cNvPr id="15" name="TextBox 14"/>
-          <p:cNvSpPr txBox="1"/>
-          <p:nvPr/>
-        </p:nvSpPr>
-        <p:spPr>
-          <a:xfrm>
-            <a:off x="2286000" y="3268980"/>
-            <a:ext cx="8686800" cy="777240"/>
-          </a:xfrm>
-          <a:prstGeom prst="rect">
-            <a:avLst/>
-          </a:prstGeom>
-          <a:noFill/>
-        </p:spPr>
-        <p:txBody>
-          <a:bodyPr wrap="square" lIns="45720" rIns="45720" tIns="18288" bIns="18288" anchor="ctr">
-            <a:spAutoFit/>
-          </a:bodyPr>
-          <a:lstStyle/>
-          <a:p>
-            <a:pPr algn="l"/>
-            <a:r>
-              <a:rPr sz="1800" b="0" i="0">
+              <a:t>2. ORM (forza il pattern corretto)</a:t>
+            </a:r>
+          </a:p>
+          <a:p>
+            <a:pPr>
+              <a:lnSpc>
+                <a:spcPct val="150000"/>
+              </a:lnSpc>
+              <a:spcAft>
+                <a:spcPts val="400"/>
+              </a:spcAft>
+            </a:pPr>
+            <a:r>
+              <a:rPr sz="2000" b="1">
+                <a:solidFill>
+                  <a:srgbClr val="00A0B0"/>
+                </a:solidFill>
+                <a:latin typeface="Calibri"/>
+              </a:rPr>
+              <a:t>▸  </a:t>
+            </a:r>
+            <a:r>
+              <a:rPr sz="2000">
                 <a:solidFill>
                   <a:srgbClr val="1A1A2E"/>
                 </a:solidFill>
                 <a:latin typeface="Calibri"/>
               </a:rPr>
-              <a:t>Filtrare gli apici è una strategia perdente</a:t>
-            </a:r>
-          </a:p>
-        </p:txBody>
-      </p:sp>
-      <p:sp>
-        <p:nvSpPr>
-          <p:cNvPr id="16" name="Oval 15"/>
-          <p:cNvSpPr/>
-          <p:nvPr/>
-        </p:nvSpPr>
-        <p:spPr>
-          <a:xfrm>
-            <a:off x="914400" y="4183380"/>
-            <a:ext cx="777240" cy="777240"/>
-          </a:xfrm>
-          <a:prstGeom prst="ellipse">
-            <a:avLst/>
-          </a:prstGeom>
-          <a:solidFill>
-            <a:srgbClr val="00A0B0"/>
-          </a:solidFill>
-          <a:ln>
-            <a:noFill/>
-          </a:ln>
-        </p:spPr>
-        <p:style>
-          <a:lnRef idx="1">
-            <a:schemeClr val="accent1"/>
-          </a:lnRef>
-          <a:fillRef idx="3">
-            <a:schemeClr val="accent1"/>
-          </a:fillRef>
-          <a:effectRef idx="2">
-            <a:schemeClr val="accent1"/>
-          </a:effectRef>
-          <a:fontRef idx="minor">
-            <a:schemeClr val="lt1"/>
-          </a:fontRef>
-        </p:style>
-        <p:txBody>
-          <a:bodyPr rtlCol="0" anchor="ctr"/>
-          <a:lstStyle/>
-          <a:p>
-            <a:pPr algn="ctr"/>
-          </a:p>
-        </p:txBody>
-      </p:sp>
-      <p:sp>
-        <p:nvSpPr>
-          <p:cNvPr id="17" name="TextBox 16"/>
-          <p:cNvSpPr txBox="1"/>
-          <p:nvPr/>
-        </p:nvSpPr>
-        <p:spPr>
-          <a:xfrm>
-            <a:off x="914400" y="4183380"/>
-            <a:ext cx="777240" cy="777240"/>
-          </a:xfrm>
-          <a:prstGeom prst="rect">
-            <a:avLst/>
-          </a:prstGeom>
-          <a:noFill/>
-        </p:spPr>
-        <p:txBody>
-          <a:bodyPr wrap="square" lIns="45720" rIns="45720" tIns="18288" bIns="18288" anchor="ctr">
-            <a:spAutoFit/>
-          </a:bodyPr>
-          <a:lstStyle/>
-          <a:p>
-            <a:pPr algn="ctr"/>
-            <a:r>
-              <a:rPr sz="2800" b="1" i="0">
-                <a:solidFill>
-                  <a:srgbClr val="FFFFFF"/>
-                </a:solidFill>
-                <a:latin typeface="Calibri"/>
-              </a:rPr>
-              <a:t>4</a:t>
-            </a:r>
-          </a:p>
-        </p:txBody>
-      </p:sp>
-      <p:sp>
-        <p:nvSpPr>
-          <p:cNvPr id="18" name="Rounded Rectangle 17"/>
-          <p:cNvSpPr/>
-          <p:nvPr/>
-        </p:nvSpPr>
-        <p:spPr>
-          <a:xfrm>
-            <a:off x="2011680" y="4183380"/>
-            <a:ext cx="9144000" cy="777240"/>
-          </a:xfrm>
-          <a:prstGeom prst="roundRect">
-            <a:avLst>
-              <a:gd name="adj" fmla="val 8000"/>
-            </a:avLst>
-          </a:prstGeom>
-          <a:solidFill>
-            <a:srgbClr val="FBFBFD"/>
-          </a:solidFill>
-          <a:ln w="19050">
-            <a:solidFill>
-              <a:srgbClr val="00A0B0"/>
-            </a:solidFill>
-          </a:ln>
-        </p:spPr>
-        <p:style>
-          <a:lnRef idx="1">
-            <a:schemeClr val="accent1"/>
-          </a:lnRef>
-          <a:fillRef idx="3">
-            <a:schemeClr val="accent1"/>
-          </a:fillRef>
-          <a:effectRef idx="2">
-            <a:schemeClr val="accent1"/>
-          </a:effectRef>
-          <a:fontRef idx="minor">
-            <a:schemeClr val="lt1"/>
-          </a:fontRef>
-        </p:style>
-        <p:txBody>
-          <a:bodyPr rtlCol="0" anchor="ctr"/>
-          <a:lstStyle/>
-          <a:p>
-            <a:pPr algn="ctr"/>
-          </a:p>
-        </p:txBody>
-      </p:sp>
-      <p:sp>
-        <p:nvSpPr>
-          <p:cNvPr id="19" name="TextBox 18"/>
-          <p:cNvSpPr txBox="1"/>
-          <p:nvPr/>
-        </p:nvSpPr>
-        <p:spPr>
-          <a:xfrm>
-            <a:off x="2286000" y="4183380"/>
-            <a:ext cx="8686800" cy="777240"/>
-          </a:xfrm>
-          <a:prstGeom prst="rect">
-            <a:avLst/>
-          </a:prstGeom>
-          <a:noFill/>
-        </p:spPr>
-        <p:txBody>
-          <a:bodyPr wrap="square" lIns="45720" rIns="45720" tIns="18288" bIns="18288" anchor="ctr">
-            <a:spAutoFit/>
-          </a:bodyPr>
-          <a:lstStyle/>
-          <a:p>
-            <a:pPr algn="l"/>
-            <a:r>
-              <a:rPr sz="1800" b="0" i="0">
+              <a:t>3. Least privilege per l'utente DB (no DROP/CREATE/GRANT)</a:t>
+            </a:r>
+          </a:p>
+          <a:p>
+            <a:pPr>
+              <a:lnSpc>
+                <a:spcPct val="150000"/>
+              </a:lnSpc>
+              <a:spcAft>
+                <a:spcPts val="400"/>
+              </a:spcAft>
+            </a:pPr>
+            <a:r>
+              <a:rPr sz="2000" b="1">
+                <a:solidFill>
+                  <a:srgbClr val="00A0B0"/>
+                </a:solidFill>
+                <a:latin typeface="Calibri"/>
+              </a:rPr>
+              <a:t>▸  </a:t>
+            </a:r>
+            <a:r>
+              <a:rPr sz="2000">
                 <a:solidFill>
                   <a:srgbClr val="1A1A2E"/>
                 </a:solidFill>
                 <a:latin typeface="Calibri"/>
               </a:rPr>
-              <a:t>ORM è più sicuro per default</a:t>
-            </a:r>
-          </a:p>
-        </p:txBody>
-      </p:sp>
-      <p:sp>
-        <p:nvSpPr>
-          <p:cNvPr id="20" name="Oval 19"/>
-          <p:cNvSpPr/>
-          <p:nvPr/>
-        </p:nvSpPr>
-        <p:spPr>
-          <a:xfrm>
-            <a:off x="914400" y="5097780"/>
-            <a:ext cx="777240" cy="777240"/>
-          </a:xfrm>
-          <a:prstGeom prst="ellipse">
-            <a:avLst/>
-          </a:prstGeom>
-          <a:solidFill>
-            <a:srgbClr val="00A0B0"/>
-          </a:solidFill>
-          <a:ln>
-            <a:noFill/>
-          </a:ln>
-        </p:spPr>
-        <p:style>
-          <a:lnRef idx="1">
-            <a:schemeClr val="accent1"/>
-          </a:lnRef>
-          <a:fillRef idx="3">
-            <a:schemeClr val="accent1"/>
-          </a:fillRef>
-          <a:effectRef idx="2">
-            <a:schemeClr val="accent1"/>
-          </a:effectRef>
-          <a:fontRef idx="minor">
-            <a:schemeClr val="lt1"/>
-          </a:fontRef>
-        </p:style>
-        <p:txBody>
-          <a:bodyPr rtlCol="0" anchor="ctr"/>
-          <a:lstStyle/>
-          <a:p>
-            <a:pPr algn="ctr"/>
-          </a:p>
-        </p:txBody>
-      </p:sp>
-      <p:sp>
-        <p:nvSpPr>
-          <p:cNvPr id="21" name="TextBox 20"/>
-          <p:cNvSpPr txBox="1"/>
-          <p:nvPr/>
-        </p:nvSpPr>
-        <p:spPr>
-          <a:xfrm>
-            <a:off x="914400" y="5097780"/>
-            <a:ext cx="777240" cy="777240"/>
-          </a:xfrm>
-          <a:prstGeom prst="rect">
-            <a:avLst/>
-          </a:prstGeom>
-          <a:noFill/>
-        </p:spPr>
-        <p:txBody>
-          <a:bodyPr wrap="square" lIns="45720" rIns="45720" tIns="18288" bIns="18288" anchor="ctr">
-            <a:spAutoFit/>
-          </a:bodyPr>
-          <a:lstStyle/>
-          <a:p>
-            <a:pPr algn="ctr"/>
-            <a:r>
-              <a:rPr sz="2800" b="1" i="0">
-                <a:solidFill>
-                  <a:srgbClr val="FFFFFF"/>
-                </a:solidFill>
-                <a:latin typeface="Calibri"/>
-              </a:rPr>
-              <a:t>5</a:t>
-            </a:r>
-          </a:p>
-        </p:txBody>
-      </p:sp>
-      <p:sp>
-        <p:nvSpPr>
-          <p:cNvPr id="22" name="Rounded Rectangle 21"/>
-          <p:cNvSpPr/>
-          <p:nvPr/>
-        </p:nvSpPr>
-        <p:spPr>
-          <a:xfrm>
-            <a:off x="2011680" y="5097780"/>
-            <a:ext cx="9144000" cy="777240"/>
-          </a:xfrm>
-          <a:prstGeom prst="roundRect">
-            <a:avLst>
-              <a:gd name="adj" fmla="val 8000"/>
-            </a:avLst>
-          </a:prstGeom>
-          <a:solidFill>
-            <a:srgbClr val="FBFBFD"/>
-          </a:solidFill>
-          <a:ln w="19050">
-            <a:solidFill>
-              <a:srgbClr val="00A0B0"/>
-            </a:solidFill>
-          </a:ln>
-        </p:spPr>
-        <p:style>
-          <a:lnRef idx="1">
-            <a:schemeClr val="accent1"/>
-          </a:lnRef>
-          <a:fillRef idx="3">
-            <a:schemeClr val="accent1"/>
-          </a:fillRef>
-          <a:effectRef idx="2">
-            <a:schemeClr val="accent1"/>
-          </a:effectRef>
-          <a:fontRef idx="minor">
-            <a:schemeClr val="lt1"/>
-          </a:fontRef>
-        </p:style>
-        <p:txBody>
-          <a:bodyPr rtlCol="0" anchor="ctr"/>
-          <a:lstStyle/>
-          <a:p>
-            <a:pPr algn="ctr"/>
-          </a:p>
-        </p:txBody>
-      </p:sp>
-      <p:sp>
-        <p:nvSpPr>
-          <p:cNvPr id="23" name="TextBox 22"/>
-          <p:cNvSpPr txBox="1"/>
-          <p:nvPr/>
-        </p:nvSpPr>
-        <p:spPr>
-          <a:xfrm>
-            <a:off x="2286000" y="5097780"/>
-            <a:ext cx="8686800" cy="777240"/>
-          </a:xfrm>
-          <a:prstGeom prst="rect">
-            <a:avLst/>
-          </a:prstGeom>
-          <a:noFill/>
-        </p:spPr>
-        <p:txBody>
-          <a:bodyPr wrap="square" lIns="45720" rIns="45720" tIns="18288" bIns="18288" anchor="ctr">
-            <a:spAutoFit/>
-          </a:bodyPr>
-          <a:lstStyle/>
-          <a:p>
-            <a:pPr algn="l"/>
-            <a:r>
-              <a:rPr sz="1800" b="0" i="0">
+              <a:t>4. Errori generici al client, dettagli nei log interni</a:t>
+            </a:r>
+          </a:p>
+          <a:p>
+            <a:pPr>
+              <a:lnSpc>
+                <a:spcPct val="150000"/>
+              </a:lnSpc>
+              <a:spcAft>
+                <a:spcPts val="400"/>
+              </a:spcAft>
+            </a:pPr>
+            <a:r>
+              <a:rPr sz="2000" b="1">
+                <a:solidFill>
+                  <a:srgbClr val="00A0B0"/>
+                </a:solidFill>
+                <a:latin typeface="Calibri"/>
+              </a:rPr>
+              <a:t>▸  </a:t>
+            </a:r>
+            <a:r>
+              <a:rPr sz="2000">
                 <a:solidFill>
                   <a:srgbClr val="1A1A2E"/>
                 </a:solidFill>
                 <a:latin typeface="Calibri"/>
               </a:rPr>
-              <a:t>Difese stratificate: 7 livelli di protezione</a:t>
+              <a:t>5. WAF (Web Application Firewall) come strato aggiuntivo</a:t>
+            </a:r>
+          </a:p>
+          <a:p>
+            <a:pPr>
+              <a:lnSpc>
+                <a:spcPct val="150000"/>
+              </a:lnSpc>
+              <a:spcAft>
+                <a:spcPts val="400"/>
+              </a:spcAft>
+            </a:pPr>
+            <a:r>
+              <a:rPr sz="2000" b="1">
+                <a:solidFill>
+                  <a:srgbClr val="00A0B0"/>
+                </a:solidFill>
+                <a:latin typeface="Calibri"/>
+              </a:rPr>
+              <a:t>▸  </a:t>
+            </a:r>
+            <a:r>
+              <a:rPr sz="2000">
+                <a:solidFill>
+                  <a:srgbClr val="1A1A2E"/>
+                </a:solidFill>
+                <a:latin typeface="Calibri"/>
+              </a:rPr>
+              <a:t>6. Rate limiting sul login (anti brute force)</a:t>
+            </a:r>
+          </a:p>
+          <a:p>
+            <a:pPr>
+              <a:lnSpc>
+                <a:spcPct val="150000"/>
+              </a:lnSpc>
+              <a:spcAft>
+                <a:spcPts val="400"/>
+              </a:spcAft>
+            </a:pPr>
+            <a:r>
+              <a:rPr sz="2000" b="1">
+                <a:solidFill>
+                  <a:srgbClr val="00A0B0"/>
+                </a:solidFill>
+                <a:latin typeface="Calibri"/>
+              </a:rPr>
+              <a:t>▸  </a:t>
+            </a:r>
+            <a:r>
+              <a:rPr sz="2000">
+                <a:solidFill>
+                  <a:srgbClr val="1A1A2E"/>
+                </a:solidFill>
+                <a:latin typeface="Calibri"/>
+              </a:rPr>
+              <a:t>7. Audit log dei tentativi sospetti</a:t>
             </a:r>
           </a:p>
         </p:txBody>
       </p:sp>
       <p:cxnSp>
         <p:nvCxnSpPr>
-          <p:cNvPr id="24" name="Connector 23"/>
+          <p:cNvPr id="5" name="Connector 4"/>
           <p:cNvCxnSpPr/>
           <p:nvPr/>
         </p:nvCxnSpPr>
@@ -5483,7 +5516,7 @@
       </p:cxnSp>
       <p:sp>
         <p:nvSpPr>
-          <p:cNvPr id="25" name="TextBox 24"/>
+          <p:cNvPr id="6" name="TextBox 5"/>
           <p:cNvSpPr txBox="1"/>
           <p:nvPr/>
         </p:nvSpPr>
@@ -5518,7 +5551,7 @@
       </p:sp>
       <p:sp>
         <p:nvSpPr>
-          <p:cNvPr id="26" name="TextBox 25"/>
+          <p:cNvPr id="7" name="TextBox 6"/>
           <p:cNvSpPr txBox="1"/>
           <p:nvPr/>
         </p:nvSpPr>
@@ -5546,7 +5579,7 @@
                 </a:solidFill>
                 <a:latin typeface="Calibri"/>
               </a:rPr>
-              <a:t>L3  ·  12/14</a:t>
+              <a:t>L3  ·  12/15</a:t>
             </a:r>
           </a:p>
         </p:txBody>
@@ -5578,13 +5611,13 @@
         <p:spPr>
           <a:xfrm>
             <a:off x="0" y="0"/>
-            <a:ext cx="4114800" cy="6858000"/>
+            <a:ext cx="12191695" cy="777240"/>
           </a:xfrm>
           <a:prstGeom prst="rect">
             <a:avLst/>
           </a:prstGeom>
           <a:solidFill>
-            <a:srgbClr val="081B33"/>
+            <a:srgbClr val="0F2D52"/>
           </a:solidFill>
           <a:ln>
             <a:noFill/>
@@ -5614,59 +5647,51 @@
       </p:sp>
       <p:sp>
         <p:nvSpPr>
-          <p:cNvPr id="3" name="Rectangle 2"/>
+          <p:cNvPr id="3" name="TextBox 2"/>
+          <p:cNvSpPr txBox="1"/>
+          <p:nvPr/>
+        </p:nvSpPr>
+        <p:spPr>
+          <a:xfrm>
+            <a:off x="457200" y="164592"/>
+            <a:ext cx="10972800" cy="502920"/>
+          </a:xfrm>
+          <a:prstGeom prst="rect">
+            <a:avLst/>
+          </a:prstGeom>
+          <a:noFill/>
+        </p:spPr>
+        <p:txBody>
+          <a:bodyPr wrap="square" lIns="45720" rIns="45720" tIns="18288" bIns="18288" anchor="ctr">
+            <a:spAutoFit/>
+          </a:bodyPr>
+          <a:lstStyle/>
+          <a:p>
+            <a:pPr algn="l"/>
+            <a:r>
+              <a:rPr sz="2400" b="1" i="0">
+                <a:solidFill>
+                  <a:srgbClr val="FFFFFF"/>
+                </a:solidFill>
+                <a:latin typeface="Calibri"/>
+              </a:rPr>
+              <a:t>📌  Cosa portare a casa</a:t>
+            </a:r>
+          </a:p>
+        </p:txBody>
+      </p:sp>
+      <p:sp>
+        <p:nvSpPr>
+          <p:cNvPr id="4" name="Oval 3"/>
           <p:cNvSpPr/>
           <p:nvPr/>
         </p:nvSpPr>
         <p:spPr>
           <a:xfrm>
-            <a:off x="4114800" y="0"/>
-            <a:ext cx="8046720" cy="6858000"/>
-          </a:xfrm>
-          <a:prstGeom prst="rect">
-            <a:avLst/>
-          </a:prstGeom>
-          <a:solidFill>
-            <a:srgbClr val="F1F4F8"/>
-          </a:solidFill>
-          <a:ln>
-            <a:noFill/>
-          </a:ln>
-        </p:spPr>
-        <p:style>
-          <a:lnRef idx="1">
-            <a:schemeClr val="accent1"/>
-          </a:lnRef>
-          <a:fillRef idx="3">
-            <a:schemeClr val="accent1"/>
-          </a:fillRef>
-          <a:effectRef idx="2">
-            <a:schemeClr val="accent1"/>
-          </a:effectRef>
-          <a:fontRef idx="minor">
-            <a:schemeClr val="lt1"/>
-          </a:fontRef>
-        </p:style>
-        <p:txBody>
-          <a:bodyPr rtlCol="0" anchor="ctr"/>
-          <a:lstStyle/>
-          <a:p>
-            <a:pPr algn="ctr"/>
-          </a:p>
-        </p:txBody>
-      </p:sp>
-      <p:sp>
-        <p:nvSpPr>
-          <p:cNvPr id="4" name="Rectangle 3"/>
-          <p:cNvSpPr/>
-          <p:nvPr/>
-        </p:nvSpPr>
-        <p:spPr>
-          <a:xfrm>
-            <a:off x="4114800" y="0"/>
-            <a:ext cx="137160" cy="6858000"/>
-          </a:xfrm>
-          <a:prstGeom prst="rect">
+            <a:off x="914400" y="1440180"/>
+            <a:ext cx="777240" cy="777240"/>
+          </a:xfrm>
+          <a:prstGeom prst="ellipse">
             <a:avLst/>
           </a:prstGeom>
           <a:solidFill>
@@ -5706,8 +5731,8 @@
         </p:nvSpPr>
         <p:spPr>
           <a:xfrm>
-            <a:off x="274320" y="2103120"/>
-            <a:ext cx="3657600" cy="2286000"/>
+            <a:off x="914400" y="1440180"/>
+            <a:ext cx="777240" cy="777240"/>
           </a:xfrm>
           <a:prstGeom prst="rect">
             <a:avLst/>
@@ -5715,34 +5740,81 @@
           <a:noFill/>
         </p:spPr>
         <p:txBody>
-          <a:bodyPr wrap="square" lIns="45720" rIns="45720" tIns="18288" bIns="18288" anchor="t">
+          <a:bodyPr wrap="square" lIns="45720" rIns="45720" tIns="18288" bIns="18288" anchor="ctr">
             <a:spAutoFit/>
           </a:bodyPr>
           <a:lstStyle/>
           <a:p>
             <a:pPr algn="ctr"/>
             <a:r>
-              <a:rPr sz="17000" b="1" i="0">
-                <a:solidFill>
-                  <a:srgbClr val="00A0B0"/>
-                </a:solidFill>
-                <a:latin typeface="Calibri"/>
-              </a:rPr>
-              <a:t>03</a:t>
-            </a:r>
-          </a:p>
-        </p:txBody>
-      </p:sp>
-      <p:sp>
-        <p:nvSpPr>
-          <p:cNvPr id="6" name="TextBox 5"/>
+              <a:rPr sz="2800" b="1" i="0">
+                <a:solidFill>
+                  <a:srgbClr val="FFFFFF"/>
+                </a:solidFill>
+                <a:latin typeface="Calibri"/>
+              </a:rPr>
+              <a:t>1</a:t>
+            </a:r>
+          </a:p>
+        </p:txBody>
+      </p:sp>
+      <p:sp>
+        <p:nvSpPr>
+          <p:cNvPr id="6" name="Rounded Rectangle 5"/>
+          <p:cNvSpPr/>
+          <p:nvPr/>
+        </p:nvSpPr>
+        <p:spPr>
+          <a:xfrm>
+            <a:off x="2011680" y="1440180"/>
+            <a:ext cx="9144000" cy="777240"/>
+          </a:xfrm>
+          <a:prstGeom prst="roundRect">
+            <a:avLst>
+              <a:gd name="adj" fmla="val 8000"/>
+            </a:avLst>
+          </a:prstGeom>
+          <a:solidFill>
+            <a:srgbClr val="FBFBFD"/>
+          </a:solidFill>
+          <a:ln w="19050">
+            <a:solidFill>
+              <a:srgbClr val="00A0B0"/>
+            </a:solidFill>
+          </a:ln>
+        </p:spPr>
+        <p:style>
+          <a:lnRef idx="1">
+            <a:schemeClr val="accent1"/>
+          </a:lnRef>
+          <a:fillRef idx="3">
+            <a:schemeClr val="accent1"/>
+          </a:fillRef>
+          <a:effectRef idx="2">
+            <a:schemeClr val="accent1"/>
+          </a:effectRef>
+          <a:fontRef idx="minor">
+            <a:schemeClr val="lt1"/>
+          </a:fontRef>
+        </p:style>
+        <p:txBody>
+          <a:bodyPr rtlCol="0" anchor="ctr"/>
+          <a:lstStyle/>
+          <a:p>
+            <a:pPr algn="ctr"/>
+          </a:p>
+        </p:txBody>
+      </p:sp>
+      <p:sp>
+        <p:nvSpPr>
+          <p:cNvPr id="7" name="TextBox 6"/>
           <p:cNvSpPr txBox="1"/>
           <p:nvPr/>
         </p:nvSpPr>
         <p:spPr>
           <a:xfrm>
-            <a:off x="274320" y="4572000"/>
-            <a:ext cx="3657600" cy="457200"/>
+            <a:off x="2286000" y="1440180"/>
+            <a:ext cx="8686800" cy="777240"/>
           </a:xfrm>
           <a:prstGeom prst="rect">
             <a:avLst/>
@@ -5750,34 +5822,77 @@
           <a:noFill/>
         </p:spPr>
         <p:txBody>
-          <a:bodyPr wrap="square" lIns="45720" rIns="45720" tIns="18288" bIns="18288" anchor="t">
+          <a:bodyPr wrap="square" lIns="45720" rIns="45720" tIns="18288" bIns="18288" anchor="ctr">
             <a:spAutoFit/>
           </a:bodyPr>
           <a:lstStyle/>
           <a:p>
+            <a:pPr algn="l"/>
+            <a:r>
+              <a:rPr sz="1800" b="0" i="0">
+                <a:solidFill>
+                  <a:srgbClr val="1A1A2E"/>
+                </a:solidFill>
+                <a:latin typeface="Calibri"/>
+              </a:rPr>
+              <a:t>SQLi è la #1 dal 2003: Equifax, Heartland, TalkTalk</a:t>
+            </a:r>
+          </a:p>
+        </p:txBody>
+      </p:sp>
+      <p:sp>
+        <p:nvSpPr>
+          <p:cNvPr id="8" name="Oval 7"/>
+          <p:cNvSpPr/>
+          <p:nvPr/>
+        </p:nvSpPr>
+        <p:spPr>
+          <a:xfrm>
+            <a:off x="914400" y="2354580"/>
+            <a:ext cx="777240" cy="777240"/>
+          </a:xfrm>
+          <a:prstGeom prst="ellipse">
+            <a:avLst/>
+          </a:prstGeom>
+          <a:solidFill>
+            <a:srgbClr val="00A0B0"/>
+          </a:solidFill>
+          <a:ln>
+            <a:noFill/>
+          </a:ln>
+        </p:spPr>
+        <p:style>
+          <a:lnRef idx="1">
+            <a:schemeClr val="accent1"/>
+          </a:lnRef>
+          <a:fillRef idx="3">
+            <a:schemeClr val="accent1"/>
+          </a:fillRef>
+          <a:effectRef idx="2">
+            <a:schemeClr val="accent1"/>
+          </a:effectRef>
+          <a:fontRef idx="minor">
+            <a:schemeClr val="lt1"/>
+          </a:fontRef>
+        </p:style>
+        <p:txBody>
+          <a:bodyPr rtlCol="0" anchor="ctr"/>
+          <a:lstStyle/>
+          <a:p>
             <a:pPr algn="ctr"/>
-            <a:r>
-              <a:rPr sz="2000" b="1" i="0">
-                <a:solidFill>
-                  <a:srgbClr val="6FD8E0"/>
-                </a:solidFill>
-                <a:latin typeface="Calibri"/>
-              </a:rPr>
-              <a:t>PARTE</a:t>
-            </a:r>
-          </a:p>
-        </p:txBody>
-      </p:sp>
-      <p:sp>
-        <p:nvSpPr>
-          <p:cNvPr id="7" name="TextBox 6"/>
+          </a:p>
+        </p:txBody>
+      </p:sp>
+      <p:sp>
+        <p:nvSpPr>
+          <p:cNvPr id="9" name="TextBox 8"/>
           <p:cNvSpPr txBox="1"/>
           <p:nvPr/>
         </p:nvSpPr>
         <p:spPr>
           <a:xfrm>
-            <a:off x="4572000" y="2286000"/>
-            <a:ext cx="7315200" cy="1645920"/>
+            <a:off x="914400" y="2354580"/>
+            <a:ext cx="777240" cy="777240"/>
           </a:xfrm>
           <a:prstGeom prst="rect">
             <a:avLst/>
@@ -5785,34 +5900,81 @@
           <a:noFill/>
         </p:spPr>
         <p:txBody>
-          <a:bodyPr wrap="square" lIns="45720" rIns="45720" tIns="18288" bIns="18288" anchor="t">
+          <a:bodyPr wrap="square" lIns="45720" rIns="45720" tIns="18288" bIns="18288" anchor="ctr">
             <a:spAutoFit/>
           </a:bodyPr>
           <a:lstStyle/>
           <a:p>
-            <a:pPr algn="l"/>
-            <a:r>
-              <a:rPr sz="4400" b="1" i="0">
-                <a:solidFill>
-                  <a:srgbClr val="0F2D52"/>
-                </a:solidFill>
-                <a:latin typeface="Calibri"/>
-              </a:rPr>
-              <a:t>Laboratorio</a:t>
-            </a:r>
-          </a:p>
-        </p:txBody>
-      </p:sp>
-      <p:sp>
-        <p:nvSpPr>
-          <p:cNvPr id="8" name="TextBox 7"/>
+            <a:pPr algn="ctr"/>
+            <a:r>
+              <a:rPr sz="2800" b="1" i="0">
+                <a:solidFill>
+                  <a:srgbClr val="FFFFFF"/>
+                </a:solidFill>
+                <a:latin typeface="Calibri"/>
+              </a:rPr>
+              <a:t>2</a:t>
+            </a:r>
+          </a:p>
+        </p:txBody>
+      </p:sp>
+      <p:sp>
+        <p:nvSpPr>
+          <p:cNvPr id="10" name="Rounded Rectangle 9"/>
+          <p:cNvSpPr/>
+          <p:nvPr/>
+        </p:nvSpPr>
+        <p:spPr>
+          <a:xfrm>
+            <a:off x="2011680" y="2354580"/>
+            <a:ext cx="9144000" cy="777240"/>
+          </a:xfrm>
+          <a:prstGeom prst="roundRect">
+            <a:avLst>
+              <a:gd name="adj" fmla="val 8000"/>
+            </a:avLst>
+          </a:prstGeom>
+          <a:solidFill>
+            <a:srgbClr val="FBFBFD"/>
+          </a:solidFill>
+          <a:ln w="19050">
+            <a:solidFill>
+              <a:srgbClr val="00A0B0"/>
+            </a:solidFill>
+          </a:ln>
+        </p:spPr>
+        <p:style>
+          <a:lnRef idx="1">
+            <a:schemeClr val="accent1"/>
+          </a:lnRef>
+          <a:fillRef idx="3">
+            <a:schemeClr val="accent1"/>
+          </a:fillRef>
+          <a:effectRef idx="2">
+            <a:schemeClr val="accent1"/>
+          </a:effectRef>
+          <a:fontRef idx="minor">
+            <a:schemeClr val="lt1"/>
+          </a:fontRef>
+        </p:style>
+        <p:txBody>
+          <a:bodyPr rtlCol="0" anchor="ctr"/>
+          <a:lstStyle/>
+          <a:p>
+            <a:pPr algn="ctr"/>
+          </a:p>
+        </p:txBody>
+      </p:sp>
+      <p:sp>
+        <p:nvSpPr>
+          <p:cNvPr id="11" name="TextBox 10"/>
           <p:cNvSpPr txBox="1"/>
           <p:nvPr/>
         </p:nvSpPr>
         <p:spPr>
           <a:xfrm>
-            <a:off x="4572000" y="3931920"/>
-            <a:ext cx="7315200" cy="1828800"/>
+            <a:off x="2286000" y="2354580"/>
+            <a:ext cx="8686800" cy="777240"/>
           </a:xfrm>
           <a:prstGeom prst="rect">
             <a:avLst/>
@@ -5820,27 +5982,507 @@
           <a:noFill/>
         </p:spPr>
         <p:txBody>
-          <a:bodyPr wrap="square" lIns="45720" rIns="45720" tIns="18288" bIns="18288" anchor="t">
+          <a:bodyPr wrap="square" lIns="45720" rIns="45720" tIns="18288" bIns="18288" anchor="ctr">
             <a:spAutoFit/>
           </a:bodyPr>
           <a:lstStyle/>
           <a:p>
             <a:pPr algn="l"/>
             <a:r>
-              <a:rPr sz="1800" b="0" i="1">
-                <a:solidFill>
-                  <a:srgbClr val="6B7280"/>
-                </a:solidFill>
-                <a:latin typeface="Calibri"/>
-              </a:rPr>
-              <a:t>Mini-banca: app vulnerabile → la sfrutti → la correggi</a:t>
+              <a:rPr sz="1800" b="0" i="0">
+                <a:solidFill>
+                  <a:srgbClr val="1A1A2E"/>
+                </a:solidFill>
+                <a:latin typeface="Calibri"/>
+              </a:rPr>
+              <a:t>Mai f-string in SQL. Mai concatenazione. Sempre placeholder ?</a:t>
+            </a:r>
+          </a:p>
+        </p:txBody>
+      </p:sp>
+      <p:sp>
+        <p:nvSpPr>
+          <p:cNvPr id="12" name="Oval 11"/>
+          <p:cNvSpPr/>
+          <p:nvPr/>
+        </p:nvSpPr>
+        <p:spPr>
+          <a:xfrm>
+            <a:off x="914400" y="3268980"/>
+            <a:ext cx="777240" cy="777240"/>
+          </a:xfrm>
+          <a:prstGeom prst="ellipse">
+            <a:avLst/>
+          </a:prstGeom>
+          <a:solidFill>
+            <a:srgbClr val="00A0B0"/>
+          </a:solidFill>
+          <a:ln>
+            <a:noFill/>
+          </a:ln>
+        </p:spPr>
+        <p:style>
+          <a:lnRef idx="1">
+            <a:schemeClr val="accent1"/>
+          </a:lnRef>
+          <a:fillRef idx="3">
+            <a:schemeClr val="accent1"/>
+          </a:fillRef>
+          <a:effectRef idx="2">
+            <a:schemeClr val="accent1"/>
+          </a:effectRef>
+          <a:fontRef idx="minor">
+            <a:schemeClr val="lt1"/>
+          </a:fontRef>
+        </p:style>
+        <p:txBody>
+          <a:bodyPr rtlCol="0" anchor="ctr"/>
+          <a:lstStyle/>
+          <a:p>
+            <a:pPr algn="ctr"/>
+          </a:p>
+        </p:txBody>
+      </p:sp>
+      <p:sp>
+        <p:nvSpPr>
+          <p:cNvPr id="13" name="TextBox 12"/>
+          <p:cNvSpPr txBox="1"/>
+          <p:nvPr/>
+        </p:nvSpPr>
+        <p:spPr>
+          <a:xfrm>
+            <a:off x="914400" y="3268980"/>
+            <a:ext cx="777240" cy="777240"/>
+          </a:xfrm>
+          <a:prstGeom prst="rect">
+            <a:avLst/>
+          </a:prstGeom>
+          <a:noFill/>
+        </p:spPr>
+        <p:txBody>
+          <a:bodyPr wrap="square" lIns="45720" rIns="45720" tIns="18288" bIns="18288" anchor="ctr">
+            <a:spAutoFit/>
+          </a:bodyPr>
+          <a:lstStyle/>
+          <a:p>
+            <a:pPr algn="ctr"/>
+            <a:r>
+              <a:rPr sz="2800" b="1" i="0">
+                <a:solidFill>
+                  <a:srgbClr val="FFFFFF"/>
+                </a:solidFill>
+                <a:latin typeface="Calibri"/>
+              </a:rPr>
+              <a:t>3</a:t>
+            </a:r>
+          </a:p>
+        </p:txBody>
+      </p:sp>
+      <p:sp>
+        <p:nvSpPr>
+          <p:cNvPr id="14" name="Rounded Rectangle 13"/>
+          <p:cNvSpPr/>
+          <p:nvPr/>
+        </p:nvSpPr>
+        <p:spPr>
+          <a:xfrm>
+            <a:off x="2011680" y="3268980"/>
+            <a:ext cx="9144000" cy="777240"/>
+          </a:xfrm>
+          <a:prstGeom prst="roundRect">
+            <a:avLst>
+              <a:gd name="adj" fmla="val 8000"/>
+            </a:avLst>
+          </a:prstGeom>
+          <a:solidFill>
+            <a:srgbClr val="FBFBFD"/>
+          </a:solidFill>
+          <a:ln w="19050">
+            <a:solidFill>
+              <a:srgbClr val="00A0B0"/>
+            </a:solidFill>
+          </a:ln>
+        </p:spPr>
+        <p:style>
+          <a:lnRef idx="1">
+            <a:schemeClr val="accent1"/>
+          </a:lnRef>
+          <a:fillRef idx="3">
+            <a:schemeClr val="accent1"/>
+          </a:fillRef>
+          <a:effectRef idx="2">
+            <a:schemeClr val="accent1"/>
+          </a:effectRef>
+          <a:fontRef idx="minor">
+            <a:schemeClr val="lt1"/>
+          </a:fontRef>
+        </p:style>
+        <p:txBody>
+          <a:bodyPr rtlCol="0" anchor="ctr"/>
+          <a:lstStyle/>
+          <a:p>
+            <a:pPr algn="ctr"/>
+          </a:p>
+        </p:txBody>
+      </p:sp>
+      <p:sp>
+        <p:nvSpPr>
+          <p:cNvPr id="15" name="TextBox 14"/>
+          <p:cNvSpPr txBox="1"/>
+          <p:nvPr/>
+        </p:nvSpPr>
+        <p:spPr>
+          <a:xfrm>
+            <a:off x="2286000" y="3268980"/>
+            <a:ext cx="8686800" cy="777240"/>
+          </a:xfrm>
+          <a:prstGeom prst="rect">
+            <a:avLst/>
+          </a:prstGeom>
+          <a:noFill/>
+        </p:spPr>
+        <p:txBody>
+          <a:bodyPr wrap="square" lIns="45720" rIns="45720" tIns="18288" bIns="18288" anchor="ctr">
+            <a:spAutoFit/>
+          </a:bodyPr>
+          <a:lstStyle/>
+          <a:p>
+            <a:pPr algn="l"/>
+            <a:r>
+              <a:rPr sz="1800" b="0" i="0">
+                <a:solidFill>
+                  <a:srgbClr val="1A1A2E"/>
+                </a:solidFill>
+                <a:latin typeface="Calibri"/>
+              </a:rPr>
+              <a:t>Filtrare gli apici è una strategia perdente</a:t>
+            </a:r>
+          </a:p>
+        </p:txBody>
+      </p:sp>
+      <p:sp>
+        <p:nvSpPr>
+          <p:cNvPr id="16" name="Oval 15"/>
+          <p:cNvSpPr/>
+          <p:nvPr/>
+        </p:nvSpPr>
+        <p:spPr>
+          <a:xfrm>
+            <a:off x="914400" y="4183380"/>
+            <a:ext cx="777240" cy="777240"/>
+          </a:xfrm>
+          <a:prstGeom prst="ellipse">
+            <a:avLst/>
+          </a:prstGeom>
+          <a:solidFill>
+            <a:srgbClr val="00A0B0"/>
+          </a:solidFill>
+          <a:ln>
+            <a:noFill/>
+          </a:ln>
+        </p:spPr>
+        <p:style>
+          <a:lnRef idx="1">
+            <a:schemeClr val="accent1"/>
+          </a:lnRef>
+          <a:fillRef idx="3">
+            <a:schemeClr val="accent1"/>
+          </a:fillRef>
+          <a:effectRef idx="2">
+            <a:schemeClr val="accent1"/>
+          </a:effectRef>
+          <a:fontRef idx="minor">
+            <a:schemeClr val="lt1"/>
+          </a:fontRef>
+        </p:style>
+        <p:txBody>
+          <a:bodyPr rtlCol="0" anchor="ctr"/>
+          <a:lstStyle/>
+          <a:p>
+            <a:pPr algn="ctr"/>
+          </a:p>
+        </p:txBody>
+      </p:sp>
+      <p:sp>
+        <p:nvSpPr>
+          <p:cNvPr id="17" name="TextBox 16"/>
+          <p:cNvSpPr txBox="1"/>
+          <p:nvPr/>
+        </p:nvSpPr>
+        <p:spPr>
+          <a:xfrm>
+            <a:off x="914400" y="4183380"/>
+            <a:ext cx="777240" cy="777240"/>
+          </a:xfrm>
+          <a:prstGeom prst="rect">
+            <a:avLst/>
+          </a:prstGeom>
+          <a:noFill/>
+        </p:spPr>
+        <p:txBody>
+          <a:bodyPr wrap="square" lIns="45720" rIns="45720" tIns="18288" bIns="18288" anchor="ctr">
+            <a:spAutoFit/>
+          </a:bodyPr>
+          <a:lstStyle/>
+          <a:p>
+            <a:pPr algn="ctr"/>
+            <a:r>
+              <a:rPr sz="2800" b="1" i="0">
+                <a:solidFill>
+                  <a:srgbClr val="FFFFFF"/>
+                </a:solidFill>
+                <a:latin typeface="Calibri"/>
+              </a:rPr>
+              <a:t>4</a:t>
+            </a:r>
+          </a:p>
+        </p:txBody>
+      </p:sp>
+      <p:sp>
+        <p:nvSpPr>
+          <p:cNvPr id="18" name="Rounded Rectangle 17"/>
+          <p:cNvSpPr/>
+          <p:nvPr/>
+        </p:nvSpPr>
+        <p:spPr>
+          <a:xfrm>
+            <a:off x="2011680" y="4183380"/>
+            <a:ext cx="9144000" cy="777240"/>
+          </a:xfrm>
+          <a:prstGeom prst="roundRect">
+            <a:avLst>
+              <a:gd name="adj" fmla="val 8000"/>
+            </a:avLst>
+          </a:prstGeom>
+          <a:solidFill>
+            <a:srgbClr val="FBFBFD"/>
+          </a:solidFill>
+          <a:ln w="19050">
+            <a:solidFill>
+              <a:srgbClr val="00A0B0"/>
+            </a:solidFill>
+          </a:ln>
+        </p:spPr>
+        <p:style>
+          <a:lnRef idx="1">
+            <a:schemeClr val="accent1"/>
+          </a:lnRef>
+          <a:fillRef idx="3">
+            <a:schemeClr val="accent1"/>
+          </a:fillRef>
+          <a:effectRef idx="2">
+            <a:schemeClr val="accent1"/>
+          </a:effectRef>
+          <a:fontRef idx="minor">
+            <a:schemeClr val="lt1"/>
+          </a:fontRef>
+        </p:style>
+        <p:txBody>
+          <a:bodyPr rtlCol="0" anchor="ctr"/>
+          <a:lstStyle/>
+          <a:p>
+            <a:pPr algn="ctr"/>
+          </a:p>
+        </p:txBody>
+      </p:sp>
+      <p:sp>
+        <p:nvSpPr>
+          <p:cNvPr id="19" name="TextBox 18"/>
+          <p:cNvSpPr txBox="1"/>
+          <p:nvPr/>
+        </p:nvSpPr>
+        <p:spPr>
+          <a:xfrm>
+            <a:off x="2286000" y="4183380"/>
+            <a:ext cx="8686800" cy="777240"/>
+          </a:xfrm>
+          <a:prstGeom prst="rect">
+            <a:avLst/>
+          </a:prstGeom>
+          <a:noFill/>
+        </p:spPr>
+        <p:txBody>
+          <a:bodyPr wrap="square" lIns="45720" rIns="45720" tIns="18288" bIns="18288" anchor="ctr">
+            <a:spAutoFit/>
+          </a:bodyPr>
+          <a:lstStyle/>
+          <a:p>
+            <a:pPr algn="l"/>
+            <a:r>
+              <a:rPr sz="1800" b="0" i="0">
+                <a:solidFill>
+                  <a:srgbClr val="1A1A2E"/>
+                </a:solidFill>
+                <a:latin typeface="Calibri"/>
+              </a:rPr>
+              <a:t>ORM è più sicuro per default</a:t>
+            </a:r>
+          </a:p>
+        </p:txBody>
+      </p:sp>
+      <p:sp>
+        <p:nvSpPr>
+          <p:cNvPr id="20" name="Oval 19"/>
+          <p:cNvSpPr/>
+          <p:nvPr/>
+        </p:nvSpPr>
+        <p:spPr>
+          <a:xfrm>
+            <a:off x="914400" y="5097780"/>
+            <a:ext cx="777240" cy="777240"/>
+          </a:xfrm>
+          <a:prstGeom prst="ellipse">
+            <a:avLst/>
+          </a:prstGeom>
+          <a:solidFill>
+            <a:srgbClr val="00A0B0"/>
+          </a:solidFill>
+          <a:ln>
+            <a:noFill/>
+          </a:ln>
+        </p:spPr>
+        <p:style>
+          <a:lnRef idx="1">
+            <a:schemeClr val="accent1"/>
+          </a:lnRef>
+          <a:fillRef idx="3">
+            <a:schemeClr val="accent1"/>
+          </a:fillRef>
+          <a:effectRef idx="2">
+            <a:schemeClr val="accent1"/>
+          </a:effectRef>
+          <a:fontRef idx="minor">
+            <a:schemeClr val="lt1"/>
+          </a:fontRef>
+        </p:style>
+        <p:txBody>
+          <a:bodyPr rtlCol="0" anchor="ctr"/>
+          <a:lstStyle/>
+          <a:p>
+            <a:pPr algn="ctr"/>
+          </a:p>
+        </p:txBody>
+      </p:sp>
+      <p:sp>
+        <p:nvSpPr>
+          <p:cNvPr id="21" name="TextBox 20"/>
+          <p:cNvSpPr txBox="1"/>
+          <p:nvPr/>
+        </p:nvSpPr>
+        <p:spPr>
+          <a:xfrm>
+            <a:off x="914400" y="5097780"/>
+            <a:ext cx="777240" cy="777240"/>
+          </a:xfrm>
+          <a:prstGeom prst="rect">
+            <a:avLst/>
+          </a:prstGeom>
+          <a:noFill/>
+        </p:spPr>
+        <p:txBody>
+          <a:bodyPr wrap="square" lIns="45720" rIns="45720" tIns="18288" bIns="18288" anchor="ctr">
+            <a:spAutoFit/>
+          </a:bodyPr>
+          <a:lstStyle/>
+          <a:p>
+            <a:pPr algn="ctr"/>
+            <a:r>
+              <a:rPr sz="2800" b="1" i="0">
+                <a:solidFill>
+                  <a:srgbClr val="FFFFFF"/>
+                </a:solidFill>
+                <a:latin typeface="Calibri"/>
+              </a:rPr>
+              <a:t>5</a:t>
+            </a:r>
+          </a:p>
+        </p:txBody>
+      </p:sp>
+      <p:sp>
+        <p:nvSpPr>
+          <p:cNvPr id="22" name="Rounded Rectangle 21"/>
+          <p:cNvSpPr/>
+          <p:nvPr/>
+        </p:nvSpPr>
+        <p:spPr>
+          <a:xfrm>
+            <a:off x="2011680" y="5097780"/>
+            <a:ext cx="9144000" cy="777240"/>
+          </a:xfrm>
+          <a:prstGeom prst="roundRect">
+            <a:avLst>
+              <a:gd name="adj" fmla="val 8000"/>
+            </a:avLst>
+          </a:prstGeom>
+          <a:solidFill>
+            <a:srgbClr val="FBFBFD"/>
+          </a:solidFill>
+          <a:ln w="19050">
+            <a:solidFill>
+              <a:srgbClr val="00A0B0"/>
+            </a:solidFill>
+          </a:ln>
+        </p:spPr>
+        <p:style>
+          <a:lnRef idx="1">
+            <a:schemeClr val="accent1"/>
+          </a:lnRef>
+          <a:fillRef idx="3">
+            <a:schemeClr val="accent1"/>
+          </a:fillRef>
+          <a:effectRef idx="2">
+            <a:schemeClr val="accent1"/>
+          </a:effectRef>
+          <a:fontRef idx="minor">
+            <a:schemeClr val="lt1"/>
+          </a:fontRef>
+        </p:style>
+        <p:txBody>
+          <a:bodyPr rtlCol="0" anchor="ctr"/>
+          <a:lstStyle/>
+          <a:p>
+            <a:pPr algn="ctr"/>
+          </a:p>
+        </p:txBody>
+      </p:sp>
+      <p:sp>
+        <p:nvSpPr>
+          <p:cNvPr id="23" name="TextBox 22"/>
+          <p:cNvSpPr txBox="1"/>
+          <p:nvPr/>
+        </p:nvSpPr>
+        <p:spPr>
+          <a:xfrm>
+            <a:off x="2286000" y="5097780"/>
+            <a:ext cx="8686800" cy="777240"/>
+          </a:xfrm>
+          <a:prstGeom prst="rect">
+            <a:avLst/>
+          </a:prstGeom>
+          <a:noFill/>
+        </p:spPr>
+        <p:txBody>
+          <a:bodyPr wrap="square" lIns="45720" rIns="45720" tIns="18288" bIns="18288" anchor="ctr">
+            <a:spAutoFit/>
+          </a:bodyPr>
+          <a:lstStyle/>
+          <a:p>
+            <a:pPr algn="l"/>
+            <a:r>
+              <a:rPr sz="1800" b="0" i="0">
+                <a:solidFill>
+                  <a:srgbClr val="1A1A2E"/>
+                </a:solidFill>
+                <a:latin typeface="Calibri"/>
+              </a:rPr>
+              <a:t>Difese stratificate: 7 livelli di protezione</a:t>
             </a:r>
           </a:p>
         </p:txBody>
       </p:sp>
       <p:cxnSp>
         <p:nvCxnSpPr>
-          <p:cNvPr id="9" name="Connector 8"/>
+          <p:cNvPr id="24" name="Connector 23"/>
           <p:cNvCxnSpPr/>
           <p:nvPr/>
         </p:nvCxnSpPr>
@@ -5875,7 +6517,7 @@
       </p:cxnSp>
       <p:sp>
         <p:nvSpPr>
-          <p:cNvPr id="10" name="TextBox 9"/>
+          <p:cNvPr id="25" name="TextBox 24"/>
           <p:cNvSpPr txBox="1"/>
           <p:nvPr/>
         </p:nvSpPr>
@@ -5910,7 +6552,7 @@
       </p:sp>
       <p:sp>
         <p:nvSpPr>
-          <p:cNvPr id="11" name="TextBox 10"/>
+          <p:cNvPr id="26" name="TextBox 25"/>
           <p:cNvSpPr txBox="1"/>
           <p:nvPr/>
         </p:nvSpPr>
@@ -5938,7 +6580,7 @@
                 </a:solidFill>
                 <a:latin typeface="Calibri"/>
               </a:rPr>
-              <a:t>L3  ·  13/14</a:t>
+              <a:t>L3  ·  13/15</a:t>
             </a:r>
           </a:p>
         </p:txBody>
@@ -5970,7 +6612,7 @@
         <p:spPr>
           <a:xfrm>
             <a:off x="0" y="0"/>
-            <a:ext cx="12191695" cy="6858000"/>
+            <a:ext cx="4114800" cy="6858000"/>
           </a:xfrm>
           <a:prstGeom prst="rect">
             <a:avLst/>
@@ -6006,6 +6648,398 @@
       </p:sp>
       <p:sp>
         <p:nvSpPr>
+          <p:cNvPr id="3" name="Rectangle 2"/>
+          <p:cNvSpPr/>
+          <p:nvPr/>
+        </p:nvSpPr>
+        <p:spPr>
+          <a:xfrm>
+            <a:off x="4114800" y="0"/>
+            <a:ext cx="8046720" cy="6858000"/>
+          </a:xfrm>
+          <a:prstGeom prst="rect">
+            <a:avLst/>
+          </a:prstGeom>
+          <a:solidFill>
+            <a:srgbClr val="F1F4F8"/>
+          </a:solidFill>
+          <a:ln>
+            <a:noFill/>
+          </a:ln>
+        </p:spPr>
+        <p:style>
+          <a:lnRef idx="1">
+            <a:schemeClr val="accent1"/>
+          </a:lnRef>
+          <a:fillRef idx="3">
+            <a:schemeClr val="accent1"/>
+          </a:fillRef>
+          <a:effectRef idx="2">
+            <a:schemeClr val="accent1"/>
+          </a:effectRef>
+          <a:fontRef idx="minor">
+            <a:schemeClr val="lt1"/>
+          </a:fontRef>
+        </p:style>
+        <p:txBody>
+          <a:bodyPr rtlCol="0" anchor="ctr"/>
+          <a:lstStyle/>
+          <a:p>
+            <a:pPr algn="ctr"/>
+          </a:p>
+        </p:txBody>
+      </p:sp>
+      <p:sp>
+        <p:nvSpPr>
+          <p:cNvPr id="4" name="Rectangle 3"/>
+          <p:cNvSpPr/>
+          <p:nvPr/>
+        </p:nvSpPr>
+        <p:spPr>
+          <a:xfrm>
+            <a:off x="4114800" y="0"/>
+            <a:ext cx="137160" cy="6858000"/>
+          </a:xfrm>
+          <a:prstGeom prst="rect">
+            <a:avLst/>
+          </a:prstGeom>
+          <a:solidFill>
+            <a:srgbClr val="00A0B0"/>
+          </a:solidFill>
+          <a:ln>
+            <a:noFill/>
+          </a:ln>
+        </p:spPr>
+        <p:style>
+          <a:lnRef idx="1">
+            <a:schemeClr val="accent1"/>
+          </a:lnRef>
+          <a:fillRef idx="3">
+            <a:schemeClr val="accent1"/>
+          </a:fillRef>
+          <a:effectRef idx="2">
+            <a:schemeClr val="accent1"/>
+          </a:effectRef>
+          <a:fontRef idx="minor">
+            <a:schemeClr val="lt1"/>
+          </a:fontRef>
+        </p:style>
+        <p:txBody>
+          <a:bodyPr rtlCol="0" anchor="ctr"/>
+          <a:lstStyle/>
+          <a:p>
+            <a:pPr algn="ctr"/>
+          </a:p>
+        </p:txBody>
+      </p:sp>
+      <p:sp>
+        <p:nvSpPr>
+          <p:cNvPr id="5" name="TextBox 4"/>
+          <p:cNvSpPr txBox="1"/>
+          <p:nvPr/>
+        </p:nvSpPr>
+        <p:spPr>
+          <a:xfrm>
+            <a:off x="274320" y="2103120"/>
+            <a:ext cx="3657600" cy="2286000"/>
+          </a:xfrm>
+          <a:prstGeom prst="rect">
+            <a:avLst/>
+          </a:prstGeom>
+          <a:noFill/>
+        </p:spPr>
+        <p:txBody>
+          <a:bodyPr wrap="square" lIns="45720" rIns="45720" tIns="18288" bIns="18288" anchor="t">
+            <a:spAutoFit/>
+          </a:bodyPr>
+          <a:lstStyle/>
+          <a:p>
+            <a:pPr algn="ctr"/>
+            <a:r>
+              <a:rPr sz="17000" b="1" i="0">
+                <a:solidFill>
+                  <a:srgbClr val="00A0B0"/>
+                </a:solidFill>
+                <a:latin typeface="Calibri"/>
+              </a:rPr>
+              <a:t>03</a:t>
+            </a:r>
+          </a:p>
+        </p:txBody>
+      </p:sp>
+      <p:sp>
+        <p:nvSpPr>
+          <p:cNvPr id="6" name="TextBox 5"/>
+          <p:cNvSpPr txBox="1"/>
+          <p:nvPr/>
+        </p:nvSpPr>
+        <p:spPr>
+          <a:xfrm>
+            <a:off x="274320" y="4572000"/>
+            <a:ext cx="3657600" cy="457200"/>
+          </a:xfrm>
+          <a:prstGeom prst="rect">
+            <a:avLst/>
+          </a:prstGeom>
+          <a:noFill/>
+        </p:spPr>
+        <p:txBody>
+          <a:bodyPr wrap="square" lIns="45720" rIns="45720" tIns="18288" bIns="18288" anchor="t">
+            <a:spAutoFit/>
+          </a:bodyPr>
+          <a:lstStyle/>
+          <a:p>
+            <a:pPr algn="ctr"/>
+            <a:r>
+              <a:rPr sz="2000" b="1" i="0">
+                <a:solidFill>
+                  <a:srgbClr val="6FD8E0"/>
+                </a:solidFill>
+                <a:latin typeface="Calibri"/>
+              </a:rPr>
+              <a:t>PARTE</a:t>
+            </a:r>
+          </a:p>
+        </p:txBody>
+      </p:sp>
+      <p:sp>
+        <p:nvSpPr>
+          <p:cNvPr id="7" name="TextBox 6"/>
+          <p:cNvSpPr txBox="1"/>
+          <p:nvPr/>
+        </p:nvSpPr>
+        <p:spPr>
+          <a:xfrm>
+            <a:off x="4572000" y="2286000"/>
+            <a:ext cx="7315200" cy="1645920"/>
+          </a:xfrm>
+          <a:prstGeom prst="rect">
+            <a:avLst/>
+          </a:prstGeom>
+          <a:noFill/>
+        </p:spPr>
+        <p:txBody>
+          <a:bodyPr wrap="square" lIns="45720" rIns="45720" tIns="18288" bIns="18288" anchor="t">
+            <a:spAutoFit/>
+          </a:bodyPr>
+          <a:lstStyle/>
+          <a:p>
+            <a:pPr algn="l"/>
+            <a:r>
+              <a:rPr sz="4400" b="1" i="0">
+                <a:solidFill>
+                  <a:srgbClr val="0F2D52"/>
+                </a:solidFill>
+                <a:latin typeface="Calibri"/>
+              </a:rPr>
+              <a:t>Laboratorio</a:t>
+            </a:r>
+          </a:p>
+        </p:txBody>
+      </p:sp>
+      <p:sp>
+        <p:nvSpPr>
+          <p:cNvPr id="8" name="TextBox 7"/>
+          <p:cNvSpPr txBox="1"/>
+          <p:nvPr/>
+        </p:nvSpPr>
+        <p:spPr>
+          <a:xfrm>
+            <a:off x="4572000" y="3931920"/>
+            <a:ext cx="7315200" cy="1828800"/>
+          </a:xfrm>
+          <a:prstGeom prst="rect">
+            <a:avLst/>
+          </a:prstGeom>
+          <a:noFill/>
+        </p:spPr>
+        <p:txBody>
+          <a:bodyPr wrap="square" lIns="45720" rIns="45720" tIns="18288" bIns="18288" anchor="t">
+            <a:spAutoFit/>
+          </a:bodyPr>
+          <a:lstStyle/>
+          <a:p>
+            <a:pPr algn="l"/>
+            <a:r>
+              <a:rPr sz="1800" b="0" i="1">
+                <a:solidFill>
+                  <a:srgbClr val="6B7280"/>
+                </a:solidFill>
+                <a:latin typeface="Calibri"/>
+              </a:rPr>
+              <a:t>Mini-banca: app vulnerabile → la sfrutti → la correggi</a:t>
+            </a:r>
+          </a:p>
+        </p:txBody>
+      </p:sp>
+      <p:cxnSp>
+        <p:nvCxnSpPr>
+          <p:cNvPr id="9" name="Connector 8"/>
+          <p:cNvCxnSpPr/>
+          <p:nvPr/>
+        </p:nvCxnSpPr>
+        <p:spPr>
+          <a:xfrm>
+            <a:off x="457200" y="6446520"/>
+            <a:ext cx="11274552" cy="0"/>
+          </a:xfrm>
+          <a:prstGeom prst="line">
+            <a:avLst/>
+          </a:prstGeom>
+          <a:ln w="19050">
+            <a:solidFill>
+              <a:srgbClr val="00A0B0"/>
+            </a:solidFill>
+          </a:ln>
+        </p:spPr>
+        <p:style>
+          <a:lnRef idx="2">
+            <a:schemeClr val="accent1"/>
+          </a:lnRef>
+          <a:fillRef idx="0">
+            <a:schemeClr val="accent1"/>
+          </a:fillRef>
+          <a:effectRef idx="1">
+            <a:schemeClr val="accent1"/>
+          </a:effectRef>
+          <a:fontRef idx="minor">
+            <a:schemeClr val="tx1"/>
+          </a:fontRef>
+        </p:style>
+      </p:cxnSp>
+      <p:sp>
+        <p:nvSpPr>
+          <p:cNvPr id="10" name="TextBox 9"/>
+          <p:cNvSpPr txBox="1"/>
+          <p:nvPr/>
+        </p:nvSpPr>
+        <p:spPr>
+          <a:xfrm>
+            <a:off x="457200" y="6473952"/>
+            <a:ext cx="7315200" cy="292608"/>
+          </a:xfrm>
+          <a:prstGeom prst="rect">
+            <a:avLst/>
+          </a:prstGeom>
+          <a:noFill/>
+        </p:spPr>
+        <p:txBody>
+          <a:bodyPr wrap="square" lIns="45720" rIns="45720" tIns="18288" bIns="18288" anchor="t">
+            <a:spAutoFit/>
+          </a:bodyPr>
+          <a:lstStyle/>
+          <a:p>
+            <a:pPr algn="l"/>
+            <a:r>
+              <a:rPr sz="1000" b="0" i="0">
+                <a:solidFill>
+                  <a:srgbClr val="6B7280"/>
+                </a:solidFill>
+                <a:latin typeface="Calibri"/>
+              </a:rPr>
+              <a:t>Secure Coding · Corso IFTS STEM · A. Manneschi · 2024/2025</a:t>
+            </a:r>
+          </a:p>
+        </p:txBody>
+      </p:sp>
+      <p:sp>
+        <p:nvSpPr>
+          <p:cNvPr id="11" name="TextBox 10"/>
+          <p:cNvSpPr txBox="1"/>
+          <p:nvPr/>
+        </p:nvSpPr>
+        <p:spPr>
+          <a:xfrm>
+            <a:off x="10515600" y="6473952"/>
+            <a:ext cx="1188720" cy="292608"/>
+          </a:xfrm>
+          <a:prstGeom prst="rect">
+            <a:avLst/>
+          </a:prstGeom>
+          <a:noFill/>
+        </p:spPr>
+        <p:txBody>
+          <a:bodyPr wrap="square" lIns="45720" rIns="45720" tIns="18288" bIns="18288" anchor="t">
+            <a:spAutoFit/>
+          </a:bodyPr>
+          <a:lstStyle/>
+          <a:p>
+            <a:pPr algn="r"/>
+            <a:r>
+              <a:rPr sz="1000" b="1" i="0">
+                <a:solidFill>
+                  <a:srgbClr val="6B7280"/>
+                </a:solidFill>
+                <a:latin typeface="Calibri"/>
+              </a:rPr>
+              <a:t>L3  ·  14/15</a:t>
+            </a:r>
+          </a:p>
+        </p:txBody>
+      </p:sp>
+    </p:spTree>
+  </p:cSld>
+  <p:clrMapOvr>
+    <a:masterClrMapping/>
+  </p:clrMapOvr>
+</p:sld>
+</file>
+
+<file path=ppt/slides/slide15.xml><?xml version="1.0" encoding="utf-8"?>
+<p:sld xmlns:a="http://schemas.openxmlformats.org/drawingml/2006/main" xmlns:p="http://schemas.openxmlformats.org/presentationml/2006/main" xmlns:r="http://schemas.openxmlformats.org/officeDocument/2006/relationships">
+  <p:cSld>
+    <p:spTree>
+      <p:nvGrpSpPr>
+        <p:cNvPr id="1" name=""/>
+        <p:cNvGrpSpPr/>
+        <p:nvPr/>
+      </p:nvGrpSpPr>
+      <p:grpSpPr/>
+      <p:sp>
+        <p:nvSpPr>
+          <p:cNvPr id="2" name="Rectangle 1"/>
+          <p:cNvSpPr/>
+          <p:nvPr/>
+        </p:nvSpPr>
+        <p:spPr>
+          <a:xfrm>
+            <a:off x="0" y="0"/>
+            <a:ext cx="12191695" cy="6858000"/>
+          </a:xfrm>
+          <a:prstGeom prst="rect">
+            <a:avLst/>
+          </a:prstGeom>
+          <a:solidFill>
+            <a:srgbClr val="081B33"/>
+          </a:solidFill>
+          <a:ln>
+            <a:noFill/>
+          </a:ln>
+        </p:spPr>
+        <p:style>
+          <a:lnRef idx="1">
+            <a:schemeClr val="accent1"/>
+          </a:lnRef>
+          <a:fillRef idx="3">
+            <a:schemeClr val="accent1"/>
+          </a:fillRef>
+          <a:effectRef idx="2">
+            <a:schemeClr val="accent1"/>
+          </a:effectRef>
+          <a:fontRef idx="minor">
+            <a:schemeClr val="lt1"/>
+          </a:fontRef>
+        </p:style>
+        <p:txBody>
+          <a:bodyPr rtlCol="0" anchor="ctr"/>
+          <a:lstStyle/>
+          <a:p>
+            <a:pPr algn="ctr"/>
+          </a:p>
+        </p:txBody>
+      </p:sp>
+      <p:sp>
+        <p:nvSpPr>
           <p:cNvPr id="3" name="Oval 2"/>
           <p:cNvSpPr/>
           <p:nvPr/>
@@ -6418,7 +7452,7 @@
                 </a:solidFill>
                 <a:latin typeface="Calibri"/>
               </a:rPr>
-              <a:t>L3  ·  14/14</a:t>
+              <a:t>L3  ·  15/15</a:t>
             </a:r>
           </a:p>
         </p:txBody>
@@ -7254,7 +8288,7 @@
                 </a:solidFill>
                 <a:latin typeface="Calibri"/>
               </a:rPr>
-              <a:t>L3  ·  2/14</a:t>
+              <a:t>L3  ·  2/15</a:t>
             </a:r>
           </a:p>
         </p:txBody>
@@ -7568,7 +8602,7 @@
                 </a:solidFill>
                 <a:latin typeface="Calibri"/>
               </a:rPr>
-              <a:t>L3  ·  3/14</a:t>
+              <a:t>L3  ·  3/15</a:t>
             </a:r>
           </a:p>
         </p:txBody>
@@ -7828,7 +8862,7 @@
                 </a:solidFill>
                 <a:latin typeface="Calibri"/>
               </a:rPr>
-              <a:t>L3  ·  4/14</a:t>
+              <a:t>L3  ·  4/15</a:t>
             </a:r>
           </a:p>
         </p:txBody>
@@ -8088,7 +9122,7 @@
                 </a:solidFill>
                 <a:latin typeface="Calibri"/>
               </a:rPr>
-              <a:t>L3  ·  5/14</a:t>
+              <a:t>L3  ·  5/15</a:t>
             </a:r>
           </a:p>
         </p:txBody>
@@ -8348,7 +9382,7 @@
                 </a:solidFill>
                 <a:latin typeface="Calibri"/>
               </a:rPr>
-              <a:t>L3  ·  6/14</a:t>
+              <a:t>L3  ·  6/15</a:t>
             </a:r>
           </a:p>
         </p:txBody>
@@ -8380,13 +9414,13 @@
         <p:spPr>
           <a:xfrm>
             <a:off x="0" y="0"/>
-            <a:ext cx="4114800" cy="6858000"/>
+            <a:ext cx="12191695" cy="777240"/>
           </a:xfrm>
           <a:prstGeom prst="rect">
             <a:avLst/>
           </a:prstGeom>
           <a:solidFill>
-            <a:srgbClr val="081B33"/>
+            <a:srgbClr val="0F2D52"/>
           </a:solidFill>
           <a:ln>
             <a:noFill/>
@@ -8416,20 +9450,57 @@
       </p:sp>
       <p:sp>
         <p:nvSpPr>
-          <p:cNvPr id="3" name="Rectangle 2"/>
+          <p:cNvPr id="3" name="TextBox 2"/>
+          <p:cNvSpPr txBox="1"/>
+          <p:nvPr/>
+        </p:nvSpPr>
+        <p:spPr>
+          <a:xfrm>
+            <a:off x="457200" y="164592"/>
+            <a:ext cx="9144000" cy="502920"/>
+          </a:xfrm>
+          <a:prstGeom prst="rect">
+            <a:avLst/>
+          </a:prstGeom>
+          <a:noFill/>
+        </p:spPr>
+        <p:txBody>
+          <a:bodyPr wrap="square" lIns="45720" rIns="45720" tIns="18288" bIns="18288" anchor="ctr">
+            <a:spAutoFit/>
+          </a:bodyPr>
+          <a:lstStyle/>
+          <a:p>
+            <a:pPr algn="l"/>
+            <a:r>
+              <a:rPr sz="2200" b="1" i="0">
+                <a:solidFill>
+                  <a:srgbClr val="FFFFFF"/>
+                </a:solidFill>
+                <a:latin typeface="Calibri"/>
+              </a:rPr>
+              <a:t>UNION SELECT — estrazione dati (peggio del bypass)</a:t>
+            </a:r>
+          </a:p>
+        </p:txBody>
+      </p:sp>
+      <p:sp>
+        <p:nvSpPr>
+          <p:cNvPr id="4" name="Rounded Rectangle 3"/>
           <p:cNvSpPr/>
           <p:nvPr/>
         </p:nvSpPr>
         <p:spPr>
           <a:xfrm>
-            <a:off x="4114800" y="0"/>
-            <a:ext cx="8046720" cy="6858000"/>
-          </a:xfrm>
-          <a:prstGeom prst="rect">
-            <a:avLst/>
+            <a:off x="9784080" y="164592"/>
+            <a:ext cx="2194560" cy="457200"/>
+          </a:xfrm>
+          <a:prstGeom prst="roundRect">
+            <a:avLst>
+              <a:gd name="adj" fmla="val 8000"/>
+            </a:avLst>
           </a:prstGeom>
           <a:solidFill>
-            <a:srgbClr val="F1F4F8"/>
+            <a:srgbClr val="E63946"/>
           </a:solidFill>
           <a:ln>
             <a:noFill/>
@@ -8459,20 +9530,55 @@
       </p:sp>
       <p:sp>
         <p:nvSpPr>
-          <p:cNvPr id="4" name="Rectangle 3"/>
+          <p:cNvPr id="5" name="TextBox 4"/>
+          <p:cNvSpPr txBox="1"/>
+          <p:nvPr/>
+        </p:nvSpPr>
+        <p:spPr>
+          <a:xfrm>
+            <a:off x="9784080" y="164592"/>
+            <a:ext cx="2194560" cy="457200"/>
+          </a:xfrm>
+          <a:prstGeom prst="rect">
+            <a:avLst/>
+          </a:prstGeom>
+          <a:noFill/>
+        </p:spPr>
+        <p:txBody>
+          <a:bodyPr wrap="square" lIns="45720" rIns="45720" tIns="18288" bIns="18288" anchor="ctr">
+            <a:spAutoFit/>
+          </a:bodyPr>
+          <a:lstStyle/>
+          <a:p>
+            <a:pPr algn="ctr"/>
+            <a:r>
+              <a:rPr sz="1200" b="1" i="0">
+                <a:solidFill>
+                  <a:srgbClr val="FFFFFF"/>
+                </a:solidFill>
+                <a:latin typeface="Calibri"/>
+              </a:rPr>
+              <a:t>🚩 ANTI-PATTERN</a:t>
+            </a:r>
+          </a:p>
+        </p:txBody>
+      </p:sp>
+      <p:sp>
+        <p:nvSpPr>
+          <p:cNvPr id="6" name="Rectangle 5"/>
           <p:cNvSpPr/>
           <p:nvPr/>
         </p:nvSpPr>
         <p:spPr>
           <a:xfrm>
-            <a:off x="4114800" y="0"/>
-            <a:ext cx="137160" cy="6858000"/>
+            <a:off x="457200" y="1097280"/>
+            <a:ext cx="11247120" cy="365760"/>
           </a:xfrm>
           <a:prstGeom prst="rect">
             <a:avLst/>
           </a:prstGeom>
           <a:solidFill>
-            <a:srgbClr val="00A0B0"/>
+            <a:srgbClr val="2D2D37"/>
           </a:solidFill>
           <a:ln>
             <a:noFill/>
@@ -8502,14 +9608,920 @@
       </p:sp>
       <p:sp>
         <p:nvSpPr>
-          <p:cNvPr id="5" name="TextBox 4"/>
+          <p:cNvPr id="7" name="Oval 6"/>
+          <p:cNvSpPr/>
+          <p:nvPr/>
+        </p:nvSpPr>
+        <p:spPr>
+          <a:xfrm>
+            <a:off x="594360" y="1216152"/>
+            <a:ext cx="118872" cy="118872"/>
+          </a:xfrm>
+          <a:prstGeom prst="ellipse">
+            <a:avLst/>
+          </a:prstGeom>
+          <a:solidFill>
+            <a:srgbClr val="FF5F56"/>
+          </a:solidFill>
+          <a:ln>
+            <a:noFill/>
+          </a:ln>
+        </p:spPr>
+        <p:style>
+          <a:lnRef idx="1">
+            <a:schemeClr val="accent1"/>
+          </a:lnRef>
+          <a:fillRef idx="3">
+            <a:schemeClr val="accent1"/>
+          </a:fillRef>
+          <a:effectRef idx="2">
+            <a:schemeClr val="accent1"/>
+          </a:effectRef>
+          <a:fontRef idx="minor">
+            <a:schemeClr val="lt1"/>
+          </a:fontRef>
+        </p:style>
+        <p:txBody>
+          <a:bodyPr rtlCol="0" anchor="ctr"/>
+          <a:lstStyle/>
+          <a:p>
+            <a:pPr algn="ctr"/>
+          </a:p>
+        </p:txBody>
+      </p:sp>
+      <p:sp>
+        <p:nvSpPr>
+          <p:cNvPr id="8" name="Oval 7"/>
+          <p:cNvSpPr/>
+          <p:nvPr/>
+        </p:nvSpPr>
+        <p:spPr>
+          <a:xfrm>
+            <a:off x="777240" y="1216152"/>
+            <a:ext cx="118872" cy="118872"/>
+          </a:xfrm>
+          <a:prstGeom prst="ellipse">
+            <a:avLst/>
+          </a:prstGeom>
+          <a:solidFill>
+            <a:srgbClr val="FFBD2E"/>
+          </a:solidFill>
+          <a:ln>
+            <a:noFill/>
+          </a:ln>
+        </p:spPr>
+        <p:style>
+          <a:lnRef idx="1">
+            <a:schemeClr val="accent1"/>
+          </a:lnRef>
+          <a:fillRef idx="3">
+            <a:schemeClr val="accent1"/>
+          </a:fillRef>
+          <a:effectRef idx="2">
+            <a:schemeClr val="accent1"/>
+          </a:effectRef>
+          <a:fontRef idx="minor">
+            <a:schemeClr val="lt1"/>
+          </a:fontRef>
+        </p:style>
+        <p:txBody>
+          <a:bodyPr rtlCol="0" anchor="ctr"/>
+          <a:lstStyle/>
+          <a:p>
+            <a:pPr algn="ctr"/>
+          </a:p>
+        </p:txBody>
+      </p:sp>
+      <p:sp>
+        <p:nvSpPr>
+          <p:cNvPr id="9" name="Oval 8"/>
+          <p:cNvSpPr/>
+          <p:nvPr/>
+        </p:nvSpPr>
+        <p:spPr>
+          <a:xfrm>
+            <a:off x="960120" y="1216152"/>
+            <a:ext cx="118872" cy="118872"/>
+          </a:xfrm>
+          <a:prstGeom prst="ellipse">
+            <a:avLst/>
+          </a:prstGeom>
+          <a:solidFill>
+            <a:srgbClr val="27C93F"/>
+          </a:solidFill>
+          <a:ln>
+            <a:noFill/>
+          </a:ln>
+        </p:spPr>
+        <p:style>
+          <a:lnRef idx="1">
+            <a:schemeClr val="accent1"/>
+          </a:lnRef>
+          <a:fillRef idx="3">
+            <a:schemeClr val="accent1"/>
+          </a:fillRef>
+          <a:effectRef idx="2">
+            <a:schemeClr val="accent1"/>
+          </a:effectRef>
+          <a:fontRef idx="minor">
+            <a:schemeClr val="lt1"/>
+          </a:fontRef>
+        </p:style>
+        <p:txBody>
+          <a:bodyPr rtlCol="0" anchor="ctr"/>
+          <a:lstStyle/>
+          <a:p>
+            <a:pPr algn="ctr"/>
+          </a:p>
+        </p:txBody>
+      </p:sp>
+      <p:sp>
+        <p:nvSpPr>
+          <p:cNvPr id="10" name="TextBox 9"/>
           <p:cNvSpPr txBox="1"/>
           <p:nvPr/>
         </p:nvSpPr>
         <p:spPr>
           <a:xfrm>
-            <a:off x="274320" y="2103120"/>
-            <a:ext cx="3657600" cy="2286000"/>
+            <a:off x="1371600" y="1161288"/>
+            <a:ext cx="5486400" cy="274320"/>
+          </a:xfrm>
+          <a:prstGeom prst="rect">
+            <a:avLst/>
+          </a:prstGeom>
+          <a:noFill/>
+        </p:spPr>
+        <p:txBody>
+          <a:bodyPr wrap="square" lIns="45720" rIns="45720" tIns="18288" bIns="18288" anchor="ctr">
+            <a:spAutoFit/>
+          </a:bodyPr>
+          <a:lstStyle/>
+          <a:p>
+            <a:pPr algn="l"/>
+            <a:r>
+              <a:rPr sz="1000" b="0" i="0">
+                <a:solidFill>
+                  <a:srgbClr val="CBD0D8"/>
+                </a:solidFill>
+                <a:latin typeface="Calibri"/>
+              </a:rPr>
+              <a:t>  app.py  —  sql</a:t>
+            </a:r>
+          </a:p>
+        </p:txBody>
+      </p:sp>
+      <p:sp>
+        <p:nvSpPr>
+          <p:cNvPr id="11" name="Rectangle 10"/>
+          <p:cNvSpPr/>
+          <p:nvPr/>
+        </p:nvSpPr>
+        <p:spPr>
+          <a:xfrm>
+            <a:off x="457200" y="1463040"/>
+            <a:ext cx="11247120" cy="4206240"/>
+          </a:xfrm>
+          <a:prstGeom prst="rect">
+            <a:avLst/>
+          </a:prstGeom>
+          <a:solidFill>
+            <a:srgbClr val="1E1E28"/>
+          </a:solidFill>
+          <a:ln w="19050">
+            <a:solidFill>
+              <a:srgbClr val="E63946"/>
+            </a:solidFill>
+          </a:ln>
+        </p:spPr>
+        <p:style>
+          <a:lnRef idx="1">
+            <a:schemeClr val="accent1"/>
+          </a:lnRef>
+          <a:fillRef idx="3">
+            <a:schemeClr val="accent1"/>
+          </a:fillRef>
+          <a:effectRef idx="2">
+            <a:schemeClr val="accent1"/>
+          </a:effectRef>
+          <a:fontRef idx="minor">
+            <a:schemeClr val="lt1"/>
+          </a:fontRef>
+        </p:style>
+        <p:txBody>
+          <a:bodyPr rtlCol="0" anchor="ctr"/>
+          <a:lstStyle/>
+          <a:p>
+            <a:pPr algn="ctr"/>
+          </a:p>
+        </p:txBody>
+      </p:sp>
+      <p:sp>
+        <p:nvSpPr>
+          <p:cNvPr id="12" name="Rectangle 11"/>
+          <p:cNvSpPr/>
+          <p:nvPr/>
+        </p:nvSpPr>
+        <p:spPr>
+          <a:xfrm>
+            <a:off x="457200" y="1463040"/>
+            <a:ext cx="457200" cy="4206240"/>
+          </a:xfrm>
+          <a:prstGeom prst="rect">
+            <a:avLst/>
+          </a:prstGeom>
+          <a:solidFill>
+            <a:srgbClr val="24242E"/>
+          </a:solidFill>
+          <a:ln>
+            <a:noFill/>
+          </a:ln>
+        </p:spPr>
+        <p:style>
+          <a:lnRef idx="1">
+            <a:schemeClr val="accent1"/>
+          </a:lnRef>
+          <a:fillRef idx="3">
+            <a:schemeClr val="accent1"/>
+          </a:fillRef>
+          <a:effectRef idx="2">
+            <a:schemeClr val="accent1"/>
+          </a:effectRef>
+          <a:fontRef idx="minor">
+            <a:schemeClr val="lt1"/>
+          </a:fontRef>
+        </p:style>
+        <p:txBody>
+          <a:bodyPr rtlCol="0" anchor="ctr"/>
+          <a:lstStyle/>
+          <a:p>
+            <a:pPr algn="ctr"/>
+          </a:p>
+        </p:txBody>
+      </p:sp>
+      <p:sp>
+        <p:nvSpPr>
+          <p:cNvPr id="13" name="TextBox 12"/>
+          <p:cNvSpPr txBox="1"/>
+          <p:nvPr/>
+        </p:nvSpPr>
+        <p:spPr>
+          <a:xfrm>
+            <a:off x="1051560" y="1600200"/>
+            <a:ext cx="10607040" cy="4114800"/>
+          </a:xfrm>
+          <a:prstGeom prst="rect">
+            <a:avLst/>
+          </a:prstGeom>
+          <a:noFill/>
+        </p:spPr>
+        <p:txBody>
+          <a:bodyPr wrap="none">
+            <a:spAutoFit/>
+          </a:bodyPr>
+          <a:lstStyle/>
+          <a:p>
+            <a:pPr>
+              <a:lnSpc>
+                <a:spcPct val="115000"/>
+              </a:lnSpc>
+              <a:spcAft>
+                <a:spcPts val="0"/>
+              </a:spcAft>
+            </a:pPr>
+            <a:r>
+              <a:rPr sz="1300">
+                <a:solidFill>
+                  <a:srgbClr val="E5E5EC"/>
+                </a:solidFill>
+                <a:latin typeface="Consolas"/>
+              </a:rPr>
+              <a:t># La pagina /cerca è vulnerabile a SQLi:</a:t>
+            </a:r>
+          </a:p>
+          <a:p>
+            <a:pPr>
+              <a:lnSpc>
+                <a:spcPct val="115000"/>
+              </a:lnSpc>
+              <a:spcAft>
+                <a:spcPts val="0"/>
+              </a:spcAft>
+            </a:pPr>
+            <a:r>
+              <a:rPr sz="1300">
+                <a:solidFill>
+                  <a:srgbClr val="E5E5EC"/>
+                </a:solidFill>
+                <a:latin typeface="Consolas"/>
+              </a:rPr>
+              <a:t># sql = f"SELECT contenuto FROM messaggi WHERE contenuto LIKE '%{q}%'"</a:t>
+            </a:r>
+          </a:p>
+          <a:p>
+            <a:pPr>
+              <a:lnSpc>
+                <a:spcPct val="115000"/>
+              </a:lnSpc>
+              <a:spcAft>
+                <a:spcPts val="0"/>
+              </a:spcAft>
+            </a:pPr>
+            <a:r>
+              <a:rPr sz="1300">
+                <a:solidFill>
+                  <a:srgbClr val="E5E5EC"/>
+                </a:solidFill>
+                <a:latin typeface="Consolas"/>
+              </a:rPr>
+              <a:t> </a:t>
+            </a:r>
+          </a:p>
+          <a:p>
+            <a:pPr>
+              <a:lnSpc>
+                <a:spcPct val="115000"/>
+              </a:lnSpc>
+              <a:spcAft>
+                <a:spcPts val="0"/>
+              </a:spcAft>
+            </a:pPr>
+            <a:r>
+              <a:rPr sz="1300">
+                <a:solidFill>
+                  <a:srgbClr val="E5E5EC"/>
+                </a:solidFill>
+                <a:latin typeface="Consolas"/>
+              </a:rPr>
+              <a:t># L'attaccante cerca:</a:t>
+            </a:r>
+          </a:p>
+          <a:p>
+            <a:pPr>
+              <a:lnSpc>
+                <a:spcPct val="115000"/>
+              </a:lnSpc>
+              <a:spcAft>
+                <a:spcPts val="0"/>
+              </a:spcAft>
+            </a:pPr>
+            <a:r>
+              <a:rPr sz="1300">
+                <a:solidFill>
+                  <a:srgbClr val="E5E5EC"/>
+                </a:solidFill>
+                <a:latin typeface="Consolas"/>
+              </a:rPr>
+              <a:t>xyz' UNION SELECT email || ':' || password FROM users --</a:t>
+            </a:r>
+          </a:p>
+          <a:p>
+            <a:pPr>
+              <a:lnSpc>
+                <a:spcPct val="115000"/>
+              </a:lnSpc>
+              <a:spcAft>
+                <a:spcPts val="0"/>
+              </a:spcAft>
+            </a:pPr>
+            <a:r>
+              <a:rPr sz="1300">
+                <a:solidFill>
+                  <a:srgbClr val="E5E5EC"/>
+                </a:solidFill>
+                <a:latin typeface="Consolas"/>
+              </a:rPr>
+              <a:t> </a:t>
+            </a:r>
+          </a:p>
+          <a:p>
+            <a:pPr>
+              <a:lnSpc>
+                <a:spcPct val="115000"/>
+              </a:lnSpc>
+              <a:spcAft>
+                <a:spcPts val="0"/>
+              </a:spcAft>
+            </a:pPr>
+            <a:r>
+              <a:rPr sz="1300">
+                <a:solidFill>
+                  <a:srgbClr val="E5E5EC"/>
+                </a:solidFill>
+                <a:latin typeface="Consolas"/>
+              </a:rPr>
+              <a:t># La query diventa:</a:t>
+            </a:r>
+          </a:p>
+          <a:p>
+            <a:pPr>
+              <a:lnSpc>
+                <a:spcPct val="115000"/>
+              </a:lnSpc>
+              <a:spcAft>
+                <a:spcPts val="0"/>
+              </a:spcAft>
+            </a:pPr>
+            <a:r>
+              <a:rPr sz="1300">
+                <a:solidFill>
+                  <a:srgbClr val="E5E5EC"/>
+                </a:solidFill>
+                <a:latin typeface="Consolas"/>
+              </a:rPr>
+              <a:t># SELECT contenuto FROM messaggi WHERE contenuto LIKE</a:t>
+            </a:r>
+          </a:p>
+          <a:p>
+            <a:pPr>
+              <a:lnSpc>
+                <a:spcPct val="115000"/>
+              </a:lnSpc>
+              <a:spcAft>
+                <a:spcPts val="0"/>
+              </a:spcAft>
+            </a:pPr>
+            <a:r>
+              <a:rPr sz="1300">
+                <a:solidFill>
+                  <a:srgbClr val="E5E5EC"/>
+                </a:solidFill>
+                <a:latin typeface="Consolas"/>
+              </a:rPr>
+              <a:t>#     '%xyz' UNION SELECT email || ':' || password FROM users --%'</a:t>
+            </a:r>
+          </a:p>
+          <a:p>
+            <a:pPr>
+              <a:lnSpc>
+                <a:spcPct val="115000"/>
+              </a:lnSpc>
+              <a:spcAft>
+                <a:spcPts val="0"/>
+              </a:spcAft>
+            </a:pPr>
+            <a:r>
+              <a:rPr sz="1300">
+                <a:solidFill>
+                  <a:srgbClr val="E5E5EC"/>
+                </a:solidFill>
+                <a:latin typeface="Consolas"/>
+              </a:rPr>
+              <a:t> </a:t>
+            </a:r>
+          </a:p>
+          <a:p>
+            <a:pPr>
+              <a:lnSpc>
+                <a:spcPct val="115000"/>
+              </a:lnSpc>
+              <a:spcAft>
+                <a:spcPts val="0"/>
+              </a:spcAft>
+            </a:pPr>
+            <a:r>
+              <a:rPr sz="1300">
+                <a:solidFill>
+                  <a:srgbClr val="E5E5EC"/>
+                </a:solidFill>
+                <a:latin typeface="Consolas"/>
+              </a:rPr>
+              <a:t># L'app mostra "messaggi"... ma in realtà mostra TUTTE le password:</a:t>
+            </a:r>
+          </a:p>
+          <a:p>
+            <a:pPr>
+              <a:lnSpc>
+                <a:spcPct val="115000"/>
+              </a:lnSpc>
+              <a:spcAft>
+                <a:spcPts val="0"/>
+              </a:spcAft>
+            </a:pPr>
+            <a:r>
+              <a:rPr sz="1300">
+                <a:solidFill>
+                  <a:srgbClr val="E5E5EC"/>
+                </a:solidFill>
+                <a:latin typeface="Consolas"/>
+              </a:rPr>
+              <a:t>#   alice@bank.it:alice_pass</a:t>
+            </a:r>
+          </a:p>
+          <a:p>
+            <a:pPr>
+              <a:lnSpc>
+                <a:spcPct val="115000"/>
+              </a:lnSpc>
+              <a:spcAft>
+                <a:spcPts val="0"/>
+              </a:spcAft>
+            </a:pPr>
+            <a:r>
+              <a:rPr sz="1300">
+                <a:solidFill>
+                  <a:srgbClr val="E5E5EC"/>
+                </a:solidFill>
+                <a:latin typeface="Consolas"/>
+              </a:rPr>
+              <a:t>#   bob@bank.it:bob_pass</a:t>
+            </a:r>
+          </a:p>
+          <a:p>
+            <a:pPr>
+              <a:lnSpc>
+                <a:spcPct val="115000"/>
+              </a:lnSpc>
+              <a:spcAft>
+                <a:spcPts val="0"/>
+              </a:spcAft>
+            </a:pPr>
+            <a:r>
+              <a:rPr sz="1300">
+                <a:solidFill>
+                  <a:srgbClr val="E5E5EC"/>
+                </a:solidFill>
+                <a:latin typeface="Consolas"/>
+              </a:rPr>
+              <a:t>#   admin@bank.it:Sup3rS3gr3t0!</a:t>
+            </a:r>
+          </a:p>
+          <a:p>
+            <a:pPr>
+              <a:lnSpc>
+                <a:spcPct val="115000"/>
+              </a:lnSpc>
+              <a:spcAft>
+                <a:spcPts val="0"/>
+              </a:spcAft>
+            </a:pPr>
+            <a:r>
+              <a:rPr sz="1300">
+                <a:solidFill>
+                  <a:srgbClr val="E5E5EC"/>
+                </a:solidFill>
+                <a:latin typeface="Consolas"/>
+              </a:rPr>
+              <a:t> </a:t>
+            </a:r>
+          </a:p>
+          <a:p>
+            <a:pPr>
+              <a:lnSpc>
+                <a:spcPct val="115000"/>
+              </a:lnSpc>
+              <a:spcAft>
+                <a:spcPts val="0"/>
+              </a:spcAft>
+            </a:pPr>
+            <a:r>
+              <a:rPr sz="1300">
+                <a:solidFill>
+                  <a:srgbClr val="E5E5EC"/>
+                </a:solidFill>
+                <a:latin typeface="Consolas"/>
+              </a:rPr>
+              <a:t># In UNA richiesta: TUTTO il database password rubato.</a:t>
+            </a:r>
+          </a:p>
+        </p:txBody>
+      </p:sp>
+      <p:sp>
+        <p:nvSpPr>
+          <p:cNvPr id="14" name="TextBox 13"/>
+          <p:cNvSpPr txBox="1"/>
+          <p:nvPr/>
+        </p:nvSpPr>
+        <p:spPr>
+          <a:xfrm>
+            <a:off x="502920" y="1600200"/>
+            <a:ext cx="365760" cy="4114800"/>
+          </a:xfrm>
+          <a:prstGeom prst="rect">
+            <a:avLst/>
+          </a:prstGeom>
+          <a:noFill/>
+        </p:spPr>
+        <p:txBody>
+          <a:bodyPr wrap="none">
+            <a:spAutoFit/>
+          </a:bodyPr>
+          <a:lstStyle/>
+          <a:p>
+            <a:pPr algn="r">
+              <a:lnSpc>
+                <a:spcPct val="115000"/>
+              </a:lnSpc>
+              <a:spcAft>
+                <a:spcPts val="0"/>
+              </a:spcAft>
+            </a:pPr>
+            <a:r>
+              <a:rPr sz="1100">
+                <a:solidFill>
+                  <a:srgbClr val="6B7280"/>
+                </a:solidFill>
+                <a:latin typeface="Consolas"/>
+              </a:rPr>
+              <a:t>1</a:t>
+            </a:r>
+          </a:p>
+          <a:p>
+            <a:pPr algn="r">
+              <a:lnSpc>
+                <a:spcPct val="115000"/>
+              </a:lnSpc>
+              <a:spcAft>
+                <a:spcPts val="0"/>
+              </a:spcAft>
+            </a:pPr>
+            <a:r>
+              <a:rPr sz="1100">
+                <a:solidFill>
+                  <a:srgbClr val="6B7280"/>
+                </a:solidFill>
+                <a:latin typeface="Consolas"/>
+              </a:rPr>
+              <a:t>2</a:t>
+            </a:r>
+          </a:p>
+          <a:p>
+            <a:pPr algn="r">
+              <a:lnSpc>
+                <a:spcPct val="115000"/>
+              </a:lnSpc>
+              <a:spcAft>
+                <a:spcPts val="0"/>
+              </a:spcAft>
+            </a:pPr>
+            <a:r>
+              <a:rPr sz="1100">
+                <a:solidFill>
+                  <a:srgbClr val="6B7280"/>
+                </a:solidFill>
+                <a:latin typeface="Consolas"/>
+              </a:rPr>
+              <a:t>3</a:t>
+            </a:r>
+          </a:p>
+          <a:p>
+            <a:pPr algn="r">
+              <a:lnSpc>
+                <a:spcPct val="115000"/>
+              </a:lnSpc>
+              <a:spcAft>
+                <a:spcPts val="0"/>
+              </a:spcAft>
+            </a:pPr>
+            <a:r>
+              <a:rPr sz="1100">
+                <a:solidFill>
+                  <a:srgbClr val="6B7280"/>
+                </a:solidFill>
+                <a:latin typeface="Consolas"/>
+              </a:rPr>
+              <a:t>4</a:t>
+            </a:r>
+          </a:p>
+          <a:p>
+            <a:pPr algn="r">
+              <a:lnSpc>
+                <a:spcPct val="115000"/>
+              </a:lnSpc>
+              <a:spcAft>
+                <a:spcPts val="0"/>
+              </a:spcAft>
+            </a:pPr>
+            <a:r>
+              <a:rPr sz="1100">
+                <a:solidFill>
+                  <a:srgbClr val="6B7280"/>
+                </a:solidFill>
+                <a:latin typeface="Consolas"/>
+              </a:rPr>
+              <a:t>5</a:t>
+            </a:r>
+          </a:p>
+          <a:p>
+            <a:pPr algn="r">
+              <a:lnSpc>
+                <a:spcPct val="115000"/>
+              </a:lnSpc>
+              <a:spcAft>
+                <a:spcPts val="0"/>
+              </a:spcAft>
+            </a:pPr>
+            <a:r>
+              <a:rPr sz="1100">
+                <a:solidFill>
+                  <a:srgbClr val="6B7280"/>
+                </a:solidFill>
+                <a:latin typeface="Consolas"/>
+              </a:rPr>
+              <a:t>6</a:t>
+            </a:r>
+          </a:p>
+          <a:p>
+            <a:pPr algn="r">
+              <a:lnSpc>
+                <a:spcPct val="115000"/>
+              </a:lnSpc>
+              <a:spcAft>
+                <a:spcPts val="0"/>
+              </a:spcAft>
+            </a:pPr>
+            <a:r>
+              <a:rPr sz="1100">
+                <a:solidFill>
+                  <a:srgbClr val="6B7280"/>
+                </a:solidFill>
+                <a:latin typeface="Consolas"/>
+              </a:rPr>
+              <a:t>7</a:t>
+            </a:r>
+          </a:p>
+          <a:p>
+            <a:pPr algn="r">
+              <a:lnSpc>
+                <a:spcPct val="115000"/>
+              </a:lnSpc>
+              <a:spcAft>
+                <a:spcPts val="0"/>
+              </a:spcAft>
+            </a:pPr>
+            <a:r>
+              <a:rPr sz="1100">
+                <a:solidFill>
+                  <a:srgbClr val="6B7280"/>
+                </a:solidFill>
+                <a:latin typeface="Consolas"/>
+              </a:rPr>
+              <a:t>8</a:t>
+            </a:r>
+          </a:p>
+          <a:p>
+            <a:pPr algn="r">
+              <a:lnSpc>
+                <a:spcPct val="115000"/>
+              </a:lnSpc>
+              <a:spcAft>
+                <a:spcPts val="0"/>
+              </a:spcAft>
+            </a:pPr>
+            <a:r>
+              <a:rPr sz="1100">
+                <a:solidFill>
+                  <a:srgbClr val="6B7280"/>
+                </a:solidFill>
+                <a:latin typeface="Consolas"/>
+              </a:rPr>
+              <a:t>9</a:t>
+            </a:r>
+          </a:p>
+          <a:p>
+            <a:pPr algn="r">
+              <a:lnSpc>
+                <a:spcPct val="115000"/>
+              </a:lnSpc>
+              <a:spcAft>
+                <a:spcPts val="0"/>
+              </a:spcAft>
+            </a:pPr>
+            <a:r>
+              <a:rPr sz="1100">
+                <a:solidFill>
+                  <a:srgbClr val="6B7280"/>
+                </a:solidFill>
+                <a:latin typeface="Consolas"/>
+              </a:rPr>
+              <a:t>10</a:t>
+            </a:r>
+          </a:p>
+          <a:p>
+            <a:pPr algn="r">
+              <a:lnSpc>
+                <a:spcPct val="115000"/>
+              </a:lnSpc>
+              <a:spcAft>
+                <a:spcPts val="0"/>
+              </a:spcAft>
+            </a:pPr>
+            <a:r>
+              <a:rPr sz="1100">
+                <a:solidFill>
+                  <a:srgbClr val="6B7280"/>
+                </a:solidFill>
+                <a:latin typeface="Consolas"/>
+              </a:rPr>
+              <a:t>11</a:t>
+            </a:r>
+          </a:p>
+          <a:p>
+            <a:pPr algn="r">
+              <a:lnSpc>
+                <a:spcPct val="115000"/>
+              </a:lnSpc>
+              <a:spcAft>
+                <a:spcPts val="0"/>
+              </a:spcAft>
+            </a:pPr>
+            <a:r>
+              <a:rPr sz="1100">
+                <a:solidFill>
+                  <a:srgbClr val="6B7280"/>
+                </a:solidFill>
+                <a:latin typeface="Consolas"/>
+              </a:rPr>
+              <a:t>12</a:t>
+            </a:r>
+          </a:p>
+          <a:p>
+            <a:pPr algn="r">
+              <a:lnSpc>
+                <a:spcPct val="115000"/>
+              </a:lnSpc>
+              <a:spcAft>
+                <a:spcPts val="0"/>
+              </a:spcAft>
+            </a:pPr>
+            <a:r>
+              <a:rPr sz="1100">
+                <a:solidFill>
+                  <a:srgbClr val="6B7280"/>
+                </a:solidFill>
+                <a:latin typeface="Consolas"/>
+              </a:rPr>
+              <a:t>13</a:t>
+            </a:r>
+          </a:p>
+          <a:p>
+            <a:pPr algn="r">
+              <a:lnSpc>
+                <a:spcPct val="115000"/>
+              </a:lnSpc>
+              <a:spcAft>
+                <a:spcPts val="0"/>
+              </a:spcAft>
+            </a:pPr>
+            <a:r>
+              <a:rPr sz="1100">
+                <a:solidFill>
+                  <a:srgbClr val="6B7280"/>
+                </a:solidFill>
+                <a:latin typeface="Consolas"/>
+              </a:rPr>
+              <a:t>14</a:t>
+            </a:r>
+          </a:p>
+          <a:p>
+            <a:pPr algn="r">
+              <a:lnSpc>
+                <a:spcPct val="115000"/>
+              </a:lnSpc>
+              <a:spcAft>
+                <a:spcPts val="0"/>
+              </a:spcAft>
+            </a:pPr>
+            <a:r>
+              <a:rPr sz="1100">
+                <a:solidFill>
+                  <a:srgbClr val="6B7280"/>
+                </a:solidFill>
+                <a:latin typeface="Consolas"/>
+              </a:rPr>
+              <a:t>15</a:t>
+            </a:r>
+          </a:p>
+          <a:p>
+            <a:pPr algn="r">
+              <a:lnSpc>
+                <a:spcPct val="115000"/>
+              </a:lnSpc>
+              <a:spcAft>
+                <a:spcPts val="0"/>
+              </a:spcAft>
+            </a:pPr>
+            <a:r>
+              <a:rPr sz="1100">
+                <a:solidFill>
+                  <a:srgbClr val="6B7280"/>
+                </a:solidFill>
+                <a:latin typeface="Consolas"/>
+              </a:rPr>
+              <a:t>16</a:t>
+            </a:r>
+          </a:p>
+        </p:txBody>
+      </p:sp>
+      <p:sp>
+        <p:nvSpPr>
+          <p:cNvPr id="15" name="TextBox 14"/>
+          <p:cNvSpPr txBox="1"/>
+          <p:nvPr/>
+        </p:nvSpPr>
+        <p:spPr>
+          <a:xfrm>
+            <a:off x="457200" y="5852160"/>
+            <a:ext cx="11247120" cy="502920"/>
           </a:xfrm>
           <a:prstGeom prst="rect">
             <a:avLst/>
@@ -8522,127 +10534,22 @@
           </a:bodyPr>
           <a:lstStyle/>
           <a:p>
-            <a:pPr algn="ctr"/>
-            <a:r>
-              <a:rPr sz="17000" b="1" i="0">
-                <a:solidFill>
-                  <a:srgbClr val="00A0B0"/>
-                </a:solidFill>
-                <a:latin typeface="Calibri"/>
-              </a:rPr>
-              <a:t>02</a:t>
-            </a:r>
-          </a:p>
-        </p:txBody>
-      </p:sp>
-      <p:sp>
-        <p:nvSpPr>
-          <p:cNvPr id="6" name="TextBox 5"/>
-          <p:cNvSpPr txBox="1"/>
-          <p:nvPr/>
-        </p:nvSpPr>
-        <p:spPr>
-          <a:xfrm>
-            <a:off x="274320" y="4572000"/>
-            <a:ext cx="3657600" cy="457200"/>
-          </a:xfrm>
-          <a:prstGeom prst="rect">
-            <a:avLst/>
-          </a:prstGeom>
-          <a:noFill/>
-        </p:spPr>
-        <p:txBody>
-          <a:bodyPr wrap="square" lIns="45720" rIns="45720" tIns="18288" bIns="18288" anchor="t">
-            <a:spAutoFit/>
-          </a:bodyPr>
-          <a:lstStyle/>
-          <a:p>
-            <a:pPr algn="ctr"/>
-            <a:r>
-              <a:rPr sz="2000" b="1" i="0">
-                <a:solidFill>
-                  <a:srgbClr val="6FD8E0"/>
-                </a:solidFill>
-                <a:latin typeface="Calibri"/>
-              </a:rPr>
-              <a:t>PARTE</a:t>
-            </a:r>
-          </a:p>
-        </p:txBody>
-      </p:sp>
-      <p:sp>
-        <p:nvSpPr>
-          <p:cNvPr id="7" name="TextBox 6"/>
-          <p:cNvSpPr txBox="1"/>
-          <p:nvPr/>
-        </p:nvSpPr>
-        <p:spPr>
-          <a:xfrm>
-            <a:off x="4572000" y="2286000"/>
-            <a:ext cx="7315200" cy="1645920"/>
-          </a:xfrm>
-          <a:prstGeom prst="rect">
-            <a:avLst/>
-          </a:prstGeom>
-          <a:noFill/>
-        </p:spPr>
-        <p:txBody>
-          <a:bodyPr wrap="square" lIns="45720" rIns="45720" tIns="18288" bIns="18288" anchor="t">
-            <a:spAutoFit/>
-          </a:bodyPr>
-          <a:lstStyle/>
-          <a:p>
             <a:pPr algn="l"/>
             <a:r>
-              <a:rPr sz="4400" b="1" i="0">
-                <a:solidFill>
-                  <a:srgbClr val="0F2D52"/>
-                </a:solidFill>
-                <a:latin typeface="Calibri"/>
-              </a:rPr>
-              <a:t>La correzione</a:t>
-            </a:r>
-          </a:p>
-        </p:txBody>
-      </p:sp>
-      <p:sp>
-        <p:nvSpPr>
-          <p:cNvPr id="8" name="TextBox 7"/>
-          <p:cNvSpPr txBox="1"/>
-          <p:nvPr/>
-        </p:nvSpPr>
-        <p:spPr>
-          <a:xfrm>
-            <a:off x="4572000" y="3931920"/>
-            <a:ext cx="7315200" cy="1828800"/>
-          </a:xfrm>
-          <a:prstGeom prst="rect">
-            <a:avLst/>
-          </a:prstGeom>
-          <a:noFill/>
-        </p:spPr>
-        <p:txBody>
-          <a:bodyPr wrap="square" lIns="45720" rIns="45720" tIns="18288" bIns="18288" anchor="t">
-            <a:spAutoFit/>
-          </a:bodyPr>
-          <a:lstStyle/>
-          <a:p>
-            <a:pPr algn="l"/>
-            <a:r>
-              <a:rPr sz="1800" b="0" i="1">
-                <a:solidFill>
-                  <a:srgbClr val="6B7280"/>
-                </a:solidFill>
-                <a:latin typeface="Calibri"/>
-              </a:rPr>
-              <a:t>Separare struttura SQL da dati. Sempre.</a:t>
+              <a:rPr sz="1400" b="1" i="1">
+                <a:solidFill>
+                  <a:srgbClr val="E63946"/>
+                </a:solidFill>
+                <a:latin typeface="Calibri"/>
+              </a:rPr>
+              <a:t>⚠  Login bypass + UNION SELECT = takeover di ogni account in &lt;30 secondi</a:t>
             </a:r>
           </a:p>
         </p:txBody>
       </p:sp>
       <p:cxnSp>
         <p:nvCxnSpPr>
-          <p:cNvPr id="9" name="Connector 8"/>
+          <p:cNvPr id="16" name="Connector 15"/>
           <p:cNvCxnSpPr/>
           <p:nvPr/>
         </p:nvCxnSpPr>
@@ -8677,7 +10584,7 @@
       </p:cxnSp>
       <p:sp>
         <p:nvSpPr>
-          <p:cNvPr id="10" name="TextBox 9"/>
+          <p:cNvPr id="17" name="TextBox 16"/>
           <p:cNvSpPr txBox="1"/>
           <p:nvPr/>
         </p:nvSpPr>
@@ -8712,7 +10619,7 @@
       </p:sp>
       <p:sp>
         <p:nvSpPr>
-          <p:cNvPr id="11" name="TextBox 10"/>
+          <p:cNvPr id="18" name="TextBox 17"/>
           <p:cNvSpPr txBox="1"/>
           <p:nvPr/>
         </p:nvSpPr>
@@ -8740,7 +10647,7 @@
                 </a:solidFill>
                 <a:latin typeface="Calibri"/>
               </a:rPr>
-              <a:t>L3  ·  7/14</a:t>
+              <a:t>L3  ·  7/15</a:t>
             </a:r>
           </a:p>
         </p:txBody>
@@ -8772,13 +10679,13 @@
         <p:spPr>
           <a:xfrm>
             <a:off x="0" y="0"/>
-            <a:ext cx="12191695" cy="777240"/>
+            <a:ext cx="4114800" cy="6858000"/>
           </a:xfrm>
           <a:prstGeom prst="rect">
             <a:avLst/>
           </a:prstGeom>
           <a:solidFill>
-            <a:srgbClr val="0F2D52"/>
+            <a:srgbClr val="081B33"/>
           </a:solidFill>
           <a:ln>
             <a:noFill/>
@@ -8808,63 +10715,90 @@
       </p:sp>
       <p:sp>
         <p:nvSpPr>
-          <p:cNvPr id="3" name="TextBox 2"/>
-          <p:cNvSpPr txBox="1"/>
-          <p:nvPr/>
-        </p:nvSpPr>
-        <p:spPr>
-          <a:xfrm>
-            <a:off x="457200" y="164592"/>
-            <a:ext cx="10972800" cy="502920"/>
-          </a:xfrm>
-          <a:prstGeom prst="rect">
-            <a:avLst/>
-          </a:prstGeom>
-          <a:noFill/>
-        </p:spPr>
-        <p:txBody>
-          <a:bodyPr wrap="square" lIns="45720" rIns="45720" tIns="18288" bIns="18288" anchor="ctr">
-            <a:spAutoFit/>
-          </a:bodyPr>
-          <a:lstStyle/>
-          <a:p>
-            <a:pPr algn="l"/>
-            <a:r>
-              <a:rPr sz="2400" b="1" i="0">
-                <a:solidFill>
-                  <a:srgbClr val="FFFFFF"/>
-                </a:solidFill>
-                <a:latin typeface="Calibri"/>
-              </a:rPr>
-              <a:t>Versione corretta</a:t>
-            </a:r>
-          </a:p>
-        </p:txBody>
-      </p:sp>
-      <p:pic>
-        <p:nvPicPr>
-          <p:cNvPr id="4" name="Picture 3" descr="cap3_sqli_safe.png"/>
-          <p:cNvPicPr>
-            <a:picLocks noChangeAspect="1"/>
-          </p:cNvPicPr>
-          <p:nvPr/>
-        </p:nvPicPr>
-        <p:blipFill>
-          <a:blip r:embed="rId2"/>
-          <a:stretch>
-            <a:fillRect/>
-          </a:stretch>
-        </p:blipFill>
-        <p:spPr>
-          <a:xfrm>
-            <a:off x="640080" y="1097280"/>
-            <a:ext cx="10881360" cy="4572000"/>
-          </a:xfrm>
-          <a:prstGeom prst="rect">
-            <a:avLst/>
-          </a:prstGeom>
-        </p:spPr>
-      </p:pic>
+          <p:cNvPr id="3" name="Rectangle 2"/>
+          <p:cNvSpPr/>
+          <p:nvPr/>
+        </p:nvSpPr>
+        <p:spPr>
+          <a:xfrm>
+            <a:off x="4114800" y="0"/>
+            <a:ext cx="8046720" cy="6858000"/>
+          </a:xfrm>
+          <a:prstGeom prst="rect">
+            <a:avLst/>
+          </a:prstGeom>
+          <a:solidFill>
+            <a:srgbClr val="F1F4F8"/>
+          </a:solidFill>
+          <a:ln>
+            <a:noFill/>
+          </a:ln>
+        </p:spPr>
+        <p:style>
+          <a:lnRef idx="1">
+            <a:schemeClr val="accent1"/>
+          </a:lnRef>
+          <a:fillRef idx="3">
+            <a:schemeClr val="accent1"/>
+          </a:fillRef>
+          <a:effectRef idx="2">
+            <a:schemeClr val="accent1"/>
+          </a:effectRef>
+          <a:fontRef idx="minor">
+            <a:schemeClr val="lt1"/>
+          </a:fontRef>
+        </p:style>
+        <p:txBody>
+          <a:bodyPr rtlCol="0" anchor="ctr"/>
+          <a:lstStyle/>
+          <a:p>
+            <a:pPr algn="ctr"/>
+          </a:p>
+        </p:txBody>
+      </p:sp>
+      <p:sp>
+        <p:nvSpPr>
+          <p:cNvPr id="4" name="Rectangle 3"/>
+          <p:cNvSpPr/>
+          <p:nvPr/>
+        </p:nvSpPr>
+        <p:spPr>
+          <a:xfrm>
+            <a:off x="4114800" y="0"/>
+            <a:ext cx="137160" cy="6858000"/>
+          </a:xfrm>
+          <a:prstGeom prst="rect">
+            <a:avLst/>
+          </a:prstGeom>
+          <a:solidFill>
+            <a:srgbClr val="00A0B0"/>
+          </a:solidFill>
+          <a:ln>
+            <a:noFill/>
+          </a:ln>
+        </p:spPr>
+        <p:style>
+          <a:lnRef idx="1">
+            <a:schemeClr val="accent1"/>
+          </a:lnRef>
+          <a:fillRef idx="3">
+            <a:schemeClr val="accent1"/>
+          </a:fillRef>
+          <a:effectRef idx="2">
+            <a:schemeClr val="accent1"/>
+          </a:effectRef>
+          <a:fontRef idx="minor">
+            <a:schemeClr val="lt1"/>
+          </a:fontRef>
+        </p:style>
+        <p:txBody>
+          <a:bodyPr rtlCol="0" anchor="ctr"/>
+          <a:lstStyle/>
+          <a:p>
+            <a:pPr algn="ctr"/>
+          </a:p>
+        </p:txBody>
+      </p:sp>
       <p:sp>
         <p:nvSpPr>
           <p:cNvPr id="5" name="TextBox 4"/>
@@ -8873,8 +10807,8 @@
         </p:nvSpPr>
         <p:spPr>
           <a:xfrm>
-            <a:off x="457200" y="5852160"/>
-            <a:ext cx="11247120" cy="365760"/>
+            <a:off x="274320" y="2103120"/>
+            <a:ext cx="3657600" cy="2286000"/>
           </a:xfrm>
           <a:prstGeom prst="rect">
             <a:avLst/>
@@ -8889,20 +10823,125 @@
           <a:p>
             <a:pPr algn="ctr"/>
             <a:r>
-              <a:rPr sz="1300" b="0" i="1">
+              <a:rPr sz="17000" b="1" i="0">
+                <a:solidFill>
+                  <a:srgbClr val="00A0B0"/>
+                </a:solidFill>
+                <a:latin typeface="Calibri"/>
+              </a:rPr>
+              <a:t>02</a:t>
+            </a:r>
+          </a:p>
+        </p:txBody>
+      </p:sp>
+      <p:sp>
+        <p:nvSpPr>
+          <p:cNvPr id="6" name="TextBox 5"/>
+          <p:cNvSpPr txBox="1"/>
+          <p:nvPr/>
+        </p:nvSpPr>
+        <p:spPr>
+          <a:xfrm>
+            <a:off x="274320" y="4572000"/>
+            <a:ext cx="3657600" cy="457200"/>
+          </a:xfrm>
+          <a:prstGeom prst="rect">
+            <a:avLst/>
+          </a:prstGeom>
+          <a:noFill/>
+        </p:spPr>
+        <p:txBody>
+          <a:bodyPr wrap="square" lIns="45720" rIns="45720" tIns="18288" bIns="18288" anchor="t">
+            <a:spAutoFit/>
+          </a:bodyPr>
+          <a:lstStyle/>
+          <a:p>
+            <a:pPr algn="ctr"/>
+            <a:r>
+              <a:rPr sz="2000" b="1" i="0">
+                <a:solidFill>
+                  <a:srgbClr val="6FD8E0"/>
+                </a:solidFill>
+                <a:latin typeface="Calibri"/>
+              </a:rPr>
+              <a:t>PARTE</a:t>
+            </a:r>
+          </a:p>
+        </p:txBody>
+      </p:sp>
+      <p:sp>
+        <p:nvSpPr>
+          <p:cNvPr id="7" name="TextBox 6"/>
+          <p:cNvSpPr txBox="1"/>
+          <p:nvPr/>
+        </p:nvSpPr>
+        <p:spPr>
+          <a:xfrm>
+            <a:off x="4572000" y="2286000"/>
+            <a:ext cx="7315200" cy="1645920"/>
+          </a:xfrm>
+          <a:prstGeom prst="rect">
+            <a:avLst/>
+          </a:prstGeom>
+          <a:noFill/>
+        </p:spPr>
+        <p:txBody>
+          <a:bodyPr wrap="square" lIns="45720" rIns="45720" tIns="18288" bIns="18288" anchor="t">
+            <a:spAutoFit/>
+          </a:bodyPr>
+          <a:lstStyle/>
+          <a:p>
+            <a:pPr algn="l"/>
+            <a:r>
+              <a:rPr sz="4400" b="1" i="0">
+                <a:solidFill>
+                  <a:srgbClr val="0F2D52"/>
+                </a:solidFill>
+                <a:latin typeface="Calibri"/>
+              </a:rPr>
+              <a:t>La correzione</a:t>
+            </a:r>
+          </a:p>
+        </p:txBody>
+      </p:sp>
+      <p:sp>
+        <p:nvSpPr>
+          <p:cNvPr id="8" name="TextBox 7"/>
+          <p:cNvSpPr txBox="1"/>
+          <p:nvPr/>
+        </p:nvSpPr>
+        <p:spPr>
+          <a:xfrm>
+            <a:off x="4572000" y="3931920"/>
+            <a:ext cx="7315200" cy="1828800"/>
+          </a:xfrm>
+          <a:prstGeom prst="rect">
+            <a:avLst/>
+          </a:prstGeom>
+          <a:noFill/>
+        </p:spPr>
+        <p:txBody>
+          <a:bodyPr wrap="square" lIns="45720" rIns="45720" tIns="18288" bIns="18288" anchor="t">
+            <a:spAutoFit/>
+          </a:bodyPr>
+          <a:lstStyle/>
+          <a:p>
+            <a:pPr algn="l"/>
+            <a:r>
+              <a:rPr sz="1800" b="0" i="1">
                 <a:solidFill>
                   <a:srgbClr val="6B7280"/>
                 </a:solidFill>
                 <a:latin typeface="Calibri"/>
               </a:rPr>
-              <a:t>Query parametrizzata: il driver tratta i dati come VALORI, mai come SQL</a:t>
+              <a:t>Separare struttura SQL da dati. Sempre.</a:t>
             </a:r>
           </a:p>
         </p:txBody>
       </p:sp>
       <p:cxnSp>
         <p:nvCxnSpPr>
-          <p:cNvPr id="6" name="Connector 5"/>
+          <p:cNvPr id="9" name="Connector 8"/>
           <p:cNvCxnSpPr/>
           <p:nvPr/>
         </p:nvCxnSpPr>
@@ -8937,7 +10976,7 @@
       </p:cxnSp>
       <p:sp>
         <p:nvSpPr>
-          <p:cNvPr id="7" name="TextBox 6"/>
+          <p:cNvPr id="10" name="TextBox 9"/>
           <p:cNvSpPr txBox="1"/>
           <p:nvPr/>
         </p:nvSpPr>
@@ -8972,7 +11011,7 @@
       </p:sp>
       <p:sp>
         <p:nvSpPr>
-          <p:cNvPr id="8" name="TextBox 7"/>
+          <p:cNvPr id="11" name="TextBox 10"/>
           <p:cNvSpPr txBox="1"/>
           <p:nvPr/>
         </p:nvSpPr>
@@ -9000,7 +11039,7 @@
                 </a:solidFill>
                 <a:latin typeface="Calibri"/>
               </a:rPr>
-              <a:t>L3  ·  8/14</a:t>
+              <a:t>L3  ·  8/15</a:t>
             </a:r>
           </a:p>
         </p:txBody>
@@ -9096,56 +11135,35 @@
                 </a:solidFill>
                 <a:latin typeface="Calibri"/>
               </a:rPr>
-              <a:t>Filtrare gli apici NON funziona</a:t>
-            </a:r>
-          </a:p>
-        </p:txBody>
-      </p:sp>
-      <p:sp>
-        <p:nvSpPr>
-          <p:cNvPr id="4" name="Rounded Rectangle 3"/>
-          <p:cNvSpPr/>
-          <p:nvPr/>
-        </p:nvSpPr>
-        <p:spPr>
-          <a:xfrm>
-            <a:off x="457200" y="1051560"/>
-            <a:ext cx="5486400" cy="640080"/>
-          </a:xfrm>
-          <a:prstGeom prst="roundRect">
-            <a:avLst>
-              <a:gd name="adj" fmla="val 8000"/>
-            </a:avLst>
-          </a:prstGeom>
-          <a:solidFill>
-            <a:srgbClr val="E63946"/>
-          </a:solidFill>
-          <a:ln>
-            <a:noFill/>
-          </a:ln>
-        </p:spPr>
-        <p:style>
-          <a:lnRef idx="1">
-            <a:schemeClr val="accent1"/>
-          </a:lnRef>
-          <a:fillRef idx="3">
-            <a:schemeClr val="accent1"/>
-          </a:fillRef>
-          <a:effectRef idx="2">
-            <a:schemeClr val="accent1"/>
-          </a:effectRef>
-          <a:fontRef idx="minor">
-            <a:schemeClr val="lt1"/>
-          </a:fontRef>
-        </p:style>
-        <p:txBody>
-          <a:bodyPr rtlCol="0" anchor="ctr"/>
-          <a:lstStyle/>
-          <a:p>
-            <a:pPr algn="ctr"/>
-          </a:p>
-        </p:txBody>
-      </p:sp>
+              <a:t>Versione corretta</a:t>
+            </a:r>
+          </a:p>
+        </p:txBody>
+      </p:sp>
+      <p:pic>
+        <p:nvPicPr>
+          <p:cNvPr id="4" name="Picture 3" descr="cap3_sqli_safe.png"/>
+          <p:cNvPicPr>
+            <a:picLocks noChangeAspect="1"/>
+          </p:cNvPicPr>
+          <p:nvPr/>
+        </p:nvPicPr>
+        <p:blipFill>
+          <a:blip r:embed="rId2"/>
+          <a:stretch>
+            <a:fillRect/>
+          </a:stretch>
+        </p:blipFill>
+        <p:spPr>
+          <a:xfrm>
+            <a:off x="640080" y="1097280"/>
+            <a:ext cx="10881360" cy="4572000"/>
+          </a:xfrm>
+          <a:prstGeom prst="rect">
+            <a:avLst/>
+          </a:prstGeom>
+        </p:spPr>
+      </p:pic>
       <p:sp>
         <p:nvSpPr>
           <p:cNvPr id="5" name="TextBox 4"/>
@@ -9154,8 +11172,8 @@
         </p:nvSpPr>
         <p:spPr>
           <a:xfrm>
-            <a:off x="457200" y="1051560"/>
-            <a:ext cx="5486400" cy="640080"/>
+            <a:off x="457200" y="5852160"/>
+            <a:ext cx="11247120" cy="365760"/>
           </a:xfrm>
           <a:prstGeom prst="rect">
             <a:avLst/>
@@ -9163,779 +11181,27 @@
           <a:noFill/>
         </p:spPr>
         <p:txBody>
-          <a:bodyPr wrap="square" lIns="45720" rIns="45720" tIns="18288" bIns="18288" anchor="ctr">
+          <a:bodyPr wrap="square" lIns="45720" rIns="45720" tIns="18288" bIns="18288" anchor="t">
             <a:spAutoFit/>
           </a:bodyPr>
           <a:lstStyle/>
           <a:p>
             <a:pPr algn="ctr"/>
             <a:r>
-              <a:rPr sz="1800" b="1" i="0">
-                <a:solidFill>
-                  <a:srgbClr val="FFFFFF"/>
-                </a:solidFill>
-                <a:latin typeface="Calibri"/>
-              </a:rPr>
-              <a:t>Tentativo ingenuo</a:t>
-            </a:r>
-          </a:p>
-        </p:txBody>
-      </p:sp>
-      <p:sp>
-        <p:nvSpPr>
-          <p:cNvPr id="6" name="Rounded Rectangle 5"/>
-          <p:cNvSpPr/>
-          <p:nvPr/>
-        </p:nvSpPr>
-        <p:spPr>
-          <a:xfrm>
-            <a:off x="457200" y="1737360"/>
-            <a:ext cx="5486400" cy="4572000"/>
-          </a:xfrm>
-          <a:prstGeom prst="roundRect">
-            <a:avLst>
-              <a:gd name="adj" fmla="val 8000"/>
-            </a:avLst>
-          </a:prstGeom>
-          <a:solidFill>
-            <a:srgbClr val="FBFBFD"/>
-          </a:solidFill>
-          <a:ln w="25400">
-            <a:solidFill>
-              <a:srgbClr val="E63946"/>
-            </a:solidFill>
-          </a:ln>
-        </p:spPr>
-        <p:style>
-          <a:lnRef idx="1">
-            <a:schemeClr val="accent1"/>
-          </a:lnRef>
-          <a:fillRef idx="3">
-            <a:schemeClr val="accent1"/>
-          </a:fillRef>
-          <a:effectRef idx="2">
-            <a:schemeClr val="accent1"/>
-          </a:effectRef>
-          <a:fontRef idx="minor">
-            <a:schemeClr val="lt1"/>
-          </a:fontRef>
-        </p:style>
-        <p:txBody>
-          <a:bodyPr rtlCol="0" anchor="ctr"/>
-          <a:lstStyle/>
-          <a:p>
-            <a:pPr algn="ctr"/>
-          </a:p>
-        </p:txBody>
-      </p:sp>
-      <p:sp>
-        <p:nvSpPr>
-          <p:cNvPr id="7" name="TextBox 6"/>
-          <p:cNvSpPr txBox="1"/>
-          <p:nvPr/>
-        </p:nvSpPr>
-        <p:spPr>
-          <a:xfrm>
-            <a:off x="640080" y="1874519"/>
-            <a:ext cx="5120640" cy="4572000"/>
-          </a:xfrm>
-          <a:prstGeom prst="rect">
-            <a:avLst/>
-          </a:prstGeom>
-          <a:noFill/>
-        </p:spPr>
-        <p:txBody>
-          <a:bodyPr wrap="square">
-            <a:spAutoFit/>
-          </a:bodyPr>
-          <a:lstStyle/>
-          <a:p>
-            <a:pPr>
-              <a:lnSpc>
-                <a:spcPct val="150000"/>
-              </a:lnSpc>
-              <a:spcAft>
-                <a:spcPts val="400"/>
-              </a:spcAft>
-            </a:pPr>
-            <a:r>
-              <a:rPr sz="1500" b="1">
-                <a:solidFill>
-                  <a:srgbClr val="E63946"/>
-                </a:solidFill>
-                <a:latin typeface="Calibri"/>
-              </a:rPr>
-              <a:t>▸  </a:t>
-            </a:r>
-            <a:r>
-              <a:rPr sz="1500">
-                <a:solidFill>
-                  <a:srgbClr val="1A1A2E"/>
-                </a:solidFill>
-                <a:latin typeface="Calibri"/>
-              </a:rPr>
-              <a:t>s = s.replace("'", "")</a:t>
-            </a:r>
-          </a:p>
-          <a:p>
-            <a:pPr>
-              <a:lnSpc>
-                <a:spcPct val="150000"/>
-              </a:lnSpc>
-              <a:spcAft>
-                <a:spcPts val="400"/>
-              </a:spcAft>
-            </a:pPr>
-            <a:r>
-              <a:rPr sz="1500" b="1">
-                <a:solidFill>
-                  <a:srgbClr val="E63946"/>
-                </a:solidFill>
-                <a:latin typeface="Calibri"/>
-              </a:rPr>
-              <a:t>▸  </a:t>
-            </a:r>
-            <a:r>
-              <a:rPr sz="1500">
-                <a:solidFill>
-                  <a:srgbClr val="1A1A2E"/>
-                </a:solidFill>
-                <a:latin typeface="Calibri"/>
-              </a:rPr>
-              <a:t>Sembra di essere protetti...</a:t>
-            </a:r>
-          </a:p>
-          <a:p>
-            <a:pPr>
-              <a:lnSpc>
-                <a:spcPct val="150000"/>
-              </a:lnSpc>
-              <a:spcAft>
-                <a:spcPts val="400"/>
-              </a:spcAft>
-            </a:pPr>
-            <a:r>
-              <a:rPr sz="1500" b="1">
-                <a:solidFill>
-                  <a:srgbClr val="E63946"/>
-                </a:solidFill>
-                <a:latin typeface="Calibri"/>
-              </a:rPr>
-              <a:t>▸  </a:t>
-            </a:r>
-            <a:r>
-              <a:rPr sz="1500">
-                <a:solidFill>
-                  <a:srgbClr val="1A1A2E"/>
-                </a:solidFill>
-                <a:latin typeface="Calibri"/>
-              </a:rPr>
-              <a:t/>
-            </a:r>
-          </a:p>
-          <a:p>
-            <a:pPr>
-              <a:lnSpc>
-                <a:spcPct val="150000"/>
-              </a:lnSpc>
-              <a:spcAft>
-                <a:spcPts val="400"/>
-              </a:spcAft>
-            </a:pPr>
-            <a:r>
-              <a:rPr sz="1500" b="1">
-                <a:solidFill>
-                  <a:srgbClr val="E63946"/>
-                </a:solidFill>
-                <a:latin typeface="Calibri"/>
-              </a:rPr>
-              <a:t>▸  </a:t>
-            </a:r>
-            <a:r>
-              <a:rPr sz="1500">
-                <a:solidFill>
-                  <a:srgbClr val="1A1A2E"/>
-                </a:solidFill>
-                <a:latin typeface="Calibri"/>
-              </a:rPr>
-              <a:t>Bypass:</a:t>
-            </a:r>
-          </a:p>
-          <a:p>
-            <a:pPr>
-              <a:lnSpc>
-                <a:spcPct val="150000"/>
-              </a:lnSpc>
-              <a:spcAft>
-                <a:spcPts val="400"/>
-              </a:spcAft>
-            </a:pPr>
-            <a:r>
-              <a:rPr sz="1500" b="1">
-                <a:solidFill>
-                  <a:srgbClr val="E63946"/>
-                </a:solidFill>
-                <a:latin typeface="Calibri"/>
-              </a:rPr>
-              <a:t>▸  </a:t>
-            </a:r>
-            <a:r>
-              <a:rPr sz="1500">
-                <a:solidFill>
-                  <a:srgbClr val="1A1A2E"/>
-                </a:solidFill>
-                <a:latin typeface="Calibri"/>
-              </a:rPr>
-              <a:t>  %27 (URL encoded)</a:t>
-            </a:r>
-          </a:p>
-          <a:p>
-            <a:pPr>
-              <a:lnSpc>
-                <a:spcPct val="150000"/>
-              </a:lnSpc>
-              <a:spcAft>
-                <a:spcPts val="400"/>
-              </a:spcAft>
-            </a:pPr>
-            <a:r>
-              <a:rPr sz="1500" b="1">
-                <a:solidFill>
-                  <a:srgbClr val="E63946"/>
-                </a:solidFill>
-                <a:latin typeface="Calibri"/>
-              </a:rPr>
-              <a:t>▸  </a:t>
-            </a:r>
-            <a:r>
-              <a:rPr sz="1500">
-                <a:solidFill>
-                  <a:srgbClr val="1A1A2E"/>
-                </a:solidFill>
-                <a:latin typeface="Calibri"/>
-              </a:rPr>
-              <a:t>  \\' (escape)</a:t>
-            </a:r>
-          </a:p>
-          <a:p>
-            <a:pPr>
-              <a:lnSpc>
-                <a:spcPct val="150000"/>
-              </a:lnSpc>
-              <a:spcAft>
-                <a:spcPts val="400"/>
-              </a:spcAft>
-            </a:pPr>
-            <a:r>
-              <a:rPr sz="1500" b="1">
-                <a:solidFill>
-                  <a:srgbClr val="E63946"/>
-                </a:solidFill>
-                <a:latin typeface="Calibri"/>
-              </a:rPr>
-              <a:t>▸  </a:t>
-            </a:r>
-            <a:r>
-              <a:rPr sz="1500">
-                <a:solidFill>
-                  <a:srgbClr val="1A1A2E"/>
-                </a:solidFill>
-                <a:latin typeface="Calibri"/>
-              </a:rPr>
-              <a:t>  " (doppi apici)</a:t>
-            </a:r>
-          </a:p>
-          <a:p>
-            <a:pPr>
-              <a:lnSpc>
-                <a:spcPct val="150000"/>
-              </a:lnSpc>
-              <a:spcAft>
-                <a:spcPts val="400"/>
-              </a:spcAft>
-            </a:pPr>
-            <a:r>
-              <a:rPr sz="1500" b="1">
-                <a:solidFill>
-                  <a:srgbClr val="E63946"/>
-                </a:solidFill>
-                <a:latin typeface="Calibri"/>
-              </a:rPr>
-              <a:t>▸  </a:t>
-            </a:r>
-            <a:r>
-              <a:rPr sz="1500">
-                <a:solidFill>
-                  <a:srgbClr val="1A1A2E"/>
-                </a:solidFill>
-                <a:latin typeface="Calibri"/>
-              </a:rPr>
-              <a:t>  ʼ (Unicode lookalike)</a:t>
-            </a:r>
-          </a:p>
-          <a:p>
-            <a:pPr>
-              <a:lnSpc>
-                <a:spcPct val="150000"/>
-              </a:lnSpc>
-              <a:spcAft>
-                <a:spcPts val="400"/>
-              </a:spcAft>
-            </a:pPr>
-            <a:r>
-              <a:rPr sz="1500" b="1">
-                <a:solidFill>
-                  <a:srgbClr val="E63946"/>
-                </a:solidFill>
-                <a:latin typeface="Calibri"/>
-              </a:rPr>
-              <a:t>▸  </a:t>
-            </a:r>
-            <a:r>
-              <a:rPr sz="1500">
-                <a:solidFill>
-                  <a:srgbClr val="1A1A2E"/>
-                </a:solidFill>
-                <a:latin typeface="Calibri"/>
-              </a:rPr>
-              <a:t>  1 OR 1=1 (numerica)</a:t>
-            </a:r>
-          </a:p>
-        </p:txBody>
-      </p:sp>
-      <p:sp>
-        <p:nvSpPr>
-          <p:cNvPr id="8" name="Rounded Rectangle 7"/>
-          <p:cNvSpPr/>
-          <p:nvPr/>
-        </p:nvSpPr>
-        <p:spPr>
-          <a:xfrm>
-            <a:off x="6217920" y="1051560"/>
-            <a:ext cx="5486400" cy="640080"/>
-          </a:xfrm>
-          <a:prstGeom prst="roundRect">
-            <a:avLst>
-              <a:gd name="adj" fmla="val 8000"/>
-            </a:avLst>
-          </a:prstGeom>
-          <a:solidFill>
-            <a:srgbClr val="06A77D"/>
-          </a:solidFill>
-          <a:ln>
-            <a:noFill/>
-          </a:ln>
-        </p:spPr>
-        <p:style>
-          <a:lnRef idx="1">
-            <a:schemeClr val="accent1"/>
-          </a:lnRef>
-          <a:fillRef idx="3">
-            <a:schemeClr val="accent1"/>
-          </a:fillRef>
-          <a:effectRef idx="2">
-            <a:schemeClr val="accent1"/>
-          </a:effectRef>
-          <a:fontRef idx="minor">
-            <a:schemeClr val="lt1"/>
-          </a:fontRef>
-        </p:style>
-        <p:txBody>
-          <a:bodyPr rtlCol="0" anchor="ctr"/>
-          <a:lstStyle/>
-          <a:p>
-            <a:pPr algn="ctr"/>
-          </a:p>
-        </p:txBody>
-      </p:sp>
-      <p:sp>
-        <p:nvSpPr>
-          <p:cNvPr id="9" name="TextBox 8"/>
-          <p:cNvSpPr txBox="1"/>
-          <p:nvPr/>
-        </p:nvSpPr>
-        <p:spPr>
-          <a:xfrm>
-            <a:off x="6217920" y="1051560"/>
-            <a:ext cx="5486400" cy="640080"/>
-          </a:xfrm>
-          <a:prstGeom prst="rect">
-            <a:avLst/>
-          </a:prstGeom>
-          <a:noFill/>
-        </p:spPr>
-        <p:txBody>
-          <a:bodyPr wrap="square" lIns="45720" rIns="45720" tIns="18288" bIns="18288" anchor="ctr">
-            <a:spAutoFit/>
-          </a:bodyPr>
-          <a:lstStyle/>
-          <a:p>
-            <a:pPr algn="ctr"/>
-            <a:r>
-              <a:rPr sz="1800" b="1" i="0">
-                <a:solidFill>
-                  <a:srgbClr val="FFFFFF"/>
-                </a:solidFill>
-                <a:latin typeface="Calibri"/>
-              </a:rPr>
-              <a:t>Soluzione corretta</a:t>
-            </a:r>
-          </a:p>
-        </p:txBody>
-      </p:sp>
-      <p:sp>
-        <p:nvSpPr>
-          <p:cNvPr id="10" name="Rounded Rectangle 9"/>
-          <p:cNvSpPr/>
-          <p:nvPr/>
-        </p:nvSpPr>
-        <p:spPr>
-          <a:xfrm>
-            <a:off x="6217920" y="1737360"/>
-            <a:ext cx="5486400" cy="4572000"/>
-          </a:xfrm>
-          <a:prstGeom prst="roundRect">
-            <a:avLst>
-              <a:gd name="adj" fmla="val 8000"/>
-            </a:avLst>
-          </a:prstGeom>
-          <a:solidFill>
-            <a:srgbClr val="FBFBFD"/>
-          </a:solidFill>
-          <a:ln w="25400">
-            <a:solidFill>
-              <a:srgbClr val="06A77D"/>
-            </a:solidFill>
-          </a:ln>
-        </p:spPr>
-        <p:style>
-          <a:lnRef idx="1">
-            <a:schemeClr val="accent1"/>
-          </a:lnRef>
-          <a:fillRef idx="3">
-            <a:schemeClr val="accent1"/>
-          </a:fillRef>
-          <a:effectRef idx="2">
-            <a:schemeClr val="accent1"/>
-          </a:effectRef>
-          <a:fontRef idx="minor">
-            <a:schemeClr val="lt1"/>
-          </a:fontRef>
-        </p:style>
-        <p:txBody>
-          <a:bodyPr rtlCol="0" anchor="ctr"/>
-          <a:lstStyle/>
-          <a:p>
-            <a:pPr algn="ctr"/>
-          </a:p>
-        </p:txBody>
-      </p:sp>
-      <p:sp>
-        <p:nvSpPr>
-          <p:cNvPr id="11" name="TextBox 10"/>
-          <p:cNvSpPr txBox="1"/>
-          <p:nvPr/>
-        </p:nvSpPr>
-        <p:spPr>
-          <a:xfrm>
-            <a:off x="6400800" y="1874519"/>
-            <a:ext cx="5120640" cy="4572000"/>
-          </a:xfrm>
-          <a:prstGeom prst="rect">
-            <a:avLst/>
-          </a:prstGeom>
-          <a:noFill/>
-        </p:spPr>
-        <p:txBody>
-          <a:bodyPr wrap="square">
-            <a:spAutoFit/>
-          </a:bodyPr>
-          <a:lstStyle/>
-          <a:p>
-            <a:pPr>
-              <a:lnSpc>
-                <a:spcPct val="150000"/>
-              </a:lnSpc>
-              <a:spcAft>
-                <a:spcPts val="400"/>
-              </a:spcAft>
-            </a:pPr>
-            <a:r>
-              <a:rPr sz="1500" b="1">
-                <a:solidFill>
-                  <a:srgbClr val="06A77D"/>
-                </a:solidFill>
-                <a:latin typeface="Calibri"/>
-              </a:rPr>
-              <a:t>▸  </a:t>
-            </a:r>
-            <a:r>
-              <a:rPr sz="1500">
-                <a:solidFill>
-                  <a:srgbClr val="1A1A2E"/>
-                </a:solidFill>
-                <a:latin typeface="Calibri"/>
-              </a:rPr>
-              <a:t>Query parametrizzate</a:t>
-            </a:r>
-          </a:p>
-          <a:p>
-            <a:pPr>
-              <a:lnSpc>
-                <a:spcPct val="150000"/>
-              </a:lnSpc>
-              <a:spcAft>
-                <a:spcPts val="400"/>
-              </a:spcAft>
-            </a:pPr>
-            <a:r>
-              <a:rPr sz="1500" b="1">
-                <a:solidFill>
-                  <a:srgbClr val="06A77D"/>
-                </a:solidFill>
-                <a:latin typeface="Calibri"/>
-              </a:rPr>
-              <a:t>▸  </a:t>
-            </a:r>
-            <a:r>
-              <a:rPr sz="1500">
-                <a:solidFill>
-                  <a:srgbClr val="1A1A2E"/>
-                </a:solidFill>
-                <a:latin typeface="Calibri"/>
-              </a:rPr>
-              <a:t>Separi STRUTTURA da DATI</a:t>
-            </a:r>
-          </a:p>
-          <a:p>
-            <a:pPr>
-              <a:lnSpc>
-                <a:spcPct val="150000"/>
-              </a:lnSpc>
-              <a:spcAft>
-                <a:spcPts val="400"/>
-              </a:spcAft>
-            </a:pPr>
-            <a:r>
-              <a:rPr sz="1500" b="1">
-                <a:solidFill>
-                  <a:srgbClr val="06A77D"/>
-                </a:solidFill>
-                <a:latin typeface="Calibri"/>
-              </a:rPr>
-              <a:t>▸  </a:t>
-            </a:r>
-            <a:r>
-              <a:rPr sz="1500">
-                <a:solidFill>
-                  <a:srgbClr val="1A1A2E"/>
-                </a:solidFill>
-                <a:latin typeface="Calibri"/>
-              </a:rPr>
-              <a:t/>
-            </a:r>
-          </a:p>
-          <a:p>
-            <a:pPr>
-              <a:lnSpc>
-                <a:spcPct val="150000"/>
-              </a:lnSpc>
-              <a:spcAft>
-                <a:spcPts val="400"/>
-              </a:spcAft>
-            </a:pPr>
-            <a:r>
-              <a:rPr sz="1500" b="1">
-                <a:solidFill>
-                  <a:srgbClr val="06A77D"/>
-                </a:solidFill>
-                <a:latin typeface="Calibri"/>
-              </a:rPr>
-              <a:t>▸  </a:t>
-            </a:r>
-            <a:r>
-              <a:rPr sz="1500">
-                <a:solidFill>
-                  <a:srgbClr val="1A1A2E"/>
-                </a:solidFill>
-                <a:latin typeface="Calibri"/>
-              </a:rPr>
-              <a:t>Il driver tratta i dati</a:t>
-            </a:r>
-          </a:p>
-          <a:p>
-            <a:pPr>
-              <a:lnSpc>
-                <a:spcPct val="150000"/>
-              </a:lnSpc>
-              <a:spcAft>
-                <a:spcPts val="400"/>
-              </a:spcAft>
-            </a:pPr>
-            <a:r>
-              <a:rPr sz="1500" b="1">
-                <a:solidFill>
-                  <a:srgbClr val="06A77D"/>
-                </a:solidFill>
-                <a:latin typeface="Calibri"/>
-              </a:rPr>
-              <a:t>▸  </a:t>
-            </a:r>
-            <a:r>
-              <a:rPr sz="1500">
-                <a:solidFill>
-                  <a:srgbClr val="1A1A2E"/>
-                </a:solidFill>
-                <a:latin typeface="Calibri"/>
-              </a:rPr>
-              <a:t>come VALORI, mai come SQL</a:t>
-            </a:r>
-          </a:p>
-          <a:p>
-            <a:pPr>
-              <a:lnSpc>
-                <a:spcPct val="150000"/>
-              </a:lnSpc>
-              <a:spcAft>
-                <a:spcPts val="400"/>
-              </a:spcAft>
-            </a:pPr>
-            <a:r>
-              <a:rPr sz="1500" b="1">
-                <a:solidFill>
-                  <a:srgbClr val="06A77D"/>
-                </a:solidFill>
-                <a:latin typeface="Calibri"/>
-              </a:rPr>
-              <a:t>▸  </a:t>
-            </a:r>
-            <a:r>
-              <a:rPr sz="1500">
-                <a:solidFill>
-                  <a:srgbClr val="1A1A2E"/>
-                </a:solidFill>
-                <a:latin typeface="Calibri"/>
-              </a:rPr>
-              <a:t/>
-            </a:r>
-          </a:p>
-          <a:p>
-            <a:pPr>
-              <a:lnSpc>
-                <a:spcPct val="150000"/>
-              </a:lnSpc>
-              <a:spcAft>
-                <a:spcPts val="400"/>
-              </a:spcAft>
-            </a:pPr>
-            <a:r>
-              <a:rPr sz="1500" b="1">
-                <a:solidFill>
-                  <a:srgbClr val="06A77D"/>
-                </a:solidFill>
-                <a:latin typeface="Calibri"/>
-              </a:rPr>
-              <a:t>▸  </a:t>
-            </a:r>
-            <a:r>
-              <a:rPr sz="1500">
-                <a:solidFill>
-                  <a:srgbClr val="1A1A2E"/>
-                </a:solidFill>
-                <a:latin typeface="Calibri"/>
-              </a:rPr>
-              <a:t>Anche con QUALUNQUE input,</a:t>
-            </a:r>
-          </a:p>
-          <a:p>
-            <a:pPr>
-              <a:lnSpc>
-                <a:spcPct val="150000"/>
-              </a:lnSpc>
-              <a:spcAft>
-                <a:spcPts val="400"/>
-              </a:spcAft>
-            </a:pPr>
-            <a:r>
-              <a:rPr sz="1500" b="1">
-                <a:solidFill>
-                  <a:srgbClr val="06A77D"/>
-                </a:solidFill>
-                <a:latin typeface="Calibri"/>
-              </a:rPr>
-              <a:t>▸  </a:t>
-            </a:r>
-            <a:r>
-              <a:rPr sz="1500">
-                <a:solidFill>
-                  <a:srgbClr val="1A1A2E"/>
-                </a:solidFill>
-                <a:latin typeface="Calibri"/>
-              </a:rPr>
-              <a:t>non viene interpretato</a:t>
-            </a:r>
-          </a:p>
-          <a:p>
-            <a:pPr>
-              <a:lnSpc>
-                <a:spcPct val="150000"/>
-              </a:lnSpc>
-              <a:spcAft>
-                <a:spcPts val="400"/>
-              </a:spcAft>
-            </a:pPr>
-            <a:r>
-              <a:rPr sz="1500" b="1">
-                <a:solidFill>
-                  <a:srgbClr val="06A77D"/>
-                </a:solidFill>
-                <a:latin typeface="Calibri"/>
-              </a:rPr>
-              <a:t>▸  </a:t>
-            </a:r>
-            <a:r>
-              <a:rPr sz="1500">
-                <a:solidFill>
-                  <a:srgbClr val="1A1A2E"/>
-                </a:solidFill>
-                <a:latin typeface="Calibri"/>
-              </a:rPr>
-              <a:t/>
-            </a:r>
-          </a:p>
-          <a:p>
-            <a:pPr>
-              <a:lnSpc>
-                <a:spcPct val="150000"/>
-              </a:lnSpc>
-              <a:spcAft>
-                <a:spcPts val="400"/>
-              </a:spcAft>
-            </a:pPr>
-            <a:r>
-              <a:rPr sz="1500" b="1">
-                <a:solidFill>
-                  <a:srgbClr val="06A77D"/>
-                </a:solidFill>
-                <a:latin typeface="Calibri"/>
-              </a:rPr>
-              <a:t>▸  </a:t>
-            </a:r>
-            <a:r>
-              <a:rPr sz="1500">
-                <a:solidFill>
-                  <a:srgbClr val="1A1A2E"/>
-                </a:solidFill>
-                <a:latin typeface="Calibri"/>
-              </a:rPr>
-              <a:t>Whitelist &gt; Blacklist (sempre)</a:t>
+              <a:rPr sz="1300" b="0" i="1">
+                <a:solidFill>
+                  <a:srgbClr val="6B7280"/>
+                </a:solidFill>
+                <a:latin typeface="Calibri"/>
+              </a:rPr>
+              <a:t>Query parametrizzata: il driver tratta i dati come VALORI, mai come SQL</a:t>
             </a:r>
           </a:p>
         </p:txBody>
       </p:sp>
       <p:cxnSp>
         <p:nvCxnSpPr>
-          <p:cNvPr id="12" name="Connector 11"/>
+          <p:cNvPr id="6" name="Connector 5"/>
           <p:cNvCxnSpPr/>
           <p:nvPr/>
         </p:nvCxnSpPr>
@@ -9970,7 +11236,7 @@
       </p:cxnSp>
       <p:sp>
         <p:nvSpPr>
-          <p:cNvPr id="13" name="TextBox 12"/>
+          <p:cNvPr id="7" name="TextBox 6"/>
           <p:cNvSpPr txBox="1"/>
           <p:nvPr/>
         </p:nvSpPr>
@@ -10005,7 +11271,7 @@
       </p:sp>
       <p:sp>
         <p:nvSpPr>
-          <p:cNvPr id="14" name="TextBox 13"/>
+          <p:cNvPr id="8" name="TextBox 7"/>
           <p:cNvSpPr txBox="1"/>
           <p:nvPr/>
         </p:nvSpPr>
@@ -10033,7 +11299,7 @@
                 </a:solidFill>
                 <a:latin typeface="Calibri"/>
               </a:rPr>
-              <a:t>L3  ·  9/14</a:t>
+              <a:t>L3  ·  9/15</a:t>
             </a:r>
           </a:p>
         </p:txBody>
